--- a/1.3 JD+ and R.pptx
+++ b/1.3 JD+ and R.pptx
@@ -277,7 +277,7 @@
       <p15:notesGuideLst xmlns:p15="http://schemas.microsoft.com/office/powerpoint/2012/main"/>
     </p:ext>
     <p:ext uri="http://customooxmlschemas.google.com/">
-      <go:slidesCustomData xmlns:mc="http://schemas.openxmlformats.org/markup-compatibility/2006" xmlns:mv="urn:schemas-microsoft-com:mac:vml" xmlns:c="http://schemas.openxmlformats.org/drawingml/2006/chart" xmlns:dgm="http://schemas.openxmlformats.org/drawingml/2006/diagram" xmlns:o="urn:schemas-microsoft-com:office:office" xmlns:v="urn:schemas-microsoft-com:vml" xmlns:pvml="urn:schemas-microsoft-com:office:powerpoint" xmlns:com="http://schemas.openxmlformats.org/drawingml/2006/compatibility" xmlns:p14="http://schemas.microsoft.com/office/powerpoint/2010/main" xmlns:p15="http://schemas.microsoft.com/office/powerpoint/2012/main" xmlns:ahyp="http://schemas.microsoft.com/office/drawing/2018/hyperlinkcolor" xmlns:go="http://customooxmlschemas.google.com/" xmlns="" r:id="rId59" roundtripDataSignature="AMtx7mh3YP3xexYcFoahXa2ehi0H5V4Zaw=="/>
+      <go:slidesCustomData xmlns="" xmlns:go="http://customooxmlschemas.google.com/" xmlns:ahyp="http://schemas.microsoft.com/office/drawing/2018/hyperlinkcolor" xmlns:p15="http://schemas.microsoft.com/office/powerpoint/2012/main" xmlns:p14="http://schemas.microsoft.com/office/powerpoint/2010/main" xmlns:com="http://schemas.openxmlformats.org/drawingml/2006/compatibility" xmlns:pvml="urn:schemas-microsoft-com:office:powerpoint" xmlns:v="urn:schemas-microsoft-com:vml" xmlns:o="urn:schemas-microsoft-com:office:office" xmlns:dgm="http://schemas.openxmlformats.org/drawingml/2006/diagram" xmlns:c="http://schemas.openxmlformats.org/drawingml/2006/chart" xmlns:mv="urn:schemas-microsoft-com:mac:vml" xmlns:mc="http://schemas.openxmlformats.org/markup-compatibility/2006" r:id="rId59" roundtripDataSignature="AMtx7mh3YP3xexYcFoahXa2ehi0H5V4Zaw=="/>
     </p:ext>
   </p:extLst>
 </p:presentation>
@@ -385,7 +385,7 @@
           <a:p>
             <a:fld id="{0CBFB8CE-488C-4A7E-87F2-3AF6127C51C1}" type="datetimeFigureOut">
               <a:rPr lang="en-IE" smtClean="0"/>
-              <a:t>27/08/2026</a:t>
+              <a:t>22/09/2026</a:t>
             </a:fld>
             <a:endParaRPr lang="en-IE"/>
           </a:p>
@@ -12581,7 +12581,7 @@
             </a:r>
             <a:r>
               <a:rPr lang="fr-BE" dirty="0"/>
-              <a:t> the correct java runtime (&gt;= 17.0)</a:t>
+              <a:t> the correct java runtime (&gt;= 21.0)</a:t>
             </a:r>
           </a:p>
           <a:p>
@@ -12770,7 +12770,7 @@
         </p:blipFill>
         <p:spPr>
           <a:xfrm>
-            <a:off x="882584" y="3591629"/>
+            <a:off x="624773" y="3407841"/>
             <a:ext cx="5397631" cy="915888"/>
           </a:xfrm>
           <a:prstGeom prst="rect">
@@ -12800,7 +12800,7 @@
         </p:blipFill>
         <p:spPr>
           <a:xfrm>
-            <a:off x="8398542" y="3591629"/>
+            <a:off x="7973789" y="3429000"/>
             <a:ext cx="3168685" cy="739077"/>
           </a:xfrm>
           <a:prstGeom prst="rect">
@@ -14211,15 +14211,6 @@
 </file>
 
 <file path=customXml/item2.xml><?xml version="1.0" encoding="utf-8"?>
-<?mso-contentType ?>
-<FormTemplates xmlns="http://schemas.microsoft.com/sharepoint/v3/contenttype/forms">
-  <Display>DocumentLibraryForm</Display>
-  <Edit>DocumentLibraryForm</Edit>
-  <New>DocumentLibraryForm</New>
-</FormTemplates>
-</file>
-
-<file path=customXml/item3.xml><?xml version="1.0" encoding="utf-8"?>
 <p:properties xmlns:p="http://schemas.microsoft.com/office/2006/metadata/properties" xmlns:xsi="http://www.w3.org/2001/XMLSchema-instance" xmlns:pc="http://schemas.microsoft.com/office/infopath/2007/PartnerControls">
   <documentManagement>
     <lcf76f155ced4ddcb4097134ff3c332f xmlns="0e422b70-e85d-4377-8ee0-b6227433d381">
@@ -14228,6 +14219,15 @@
     <TaxCatchAll xmlns="199f642e-5af9-486c-ac06-f366742ef41a"/>
   </documentManagement>
 </p:properties>
+</file>
+
+<file path=customXml/item3.xml><?xml version="1.0" encoding="utf-8"?>
+<?mso-contentType ?>
+<FormTemplates xmlns="http://schemas.microsoft.com/sharepoint/v3/contenttype/forms">
+  <Display>DocumentLibraryForm</Display>
+  <Edit>DocumentLibraryForm</Edit>
+  <New>DocumentLibraryForm</New>
+</FormTemplates>
 </file>
 
 <file path=customXml/itemProps1.xml><?xml version="1.0" encoding="utf-8"?>
@@ -14250,14 +14250,6 @@
 </file>
 
 <file path=customXml/itemProps2.xml><?xml version="1.0" encoding="utf-8"?>
-<ds:datastoreItem xmlns:ds="http://schemas.openxmlformats.org/officeDocument/2006/customXml" ds:itemID="{67DD9E9F-9EEB-4105-B29B-819486C2855A}">
-  <ds:schemaRefs>
-    <ds:schemaRef ds:uri="http://schemas.microsoft.com/sharepoint/v3/contenttype/forms"/>
-  </ds:schemaRefs>
-</ds:datastoreItem>
-</file>
-
-<file path=customXml/itemProps3.xml><?xml version="1.0" encoding="utf-8"?>
 <ds:datastoreItem xmlns:ds="http://schemas.openxmlformats.org/officeDocument/2006/customXml" ds:itemID="{2D6C293B-B8B4-4284-A17E-9F9E4C32B25A}">
   <ds:schemaRefs>
     <ds:schemaRef ds:uri="http://schemas.microsoft.com/office/2006/documentManagement/types"/>
@@ -14272,4 +14264,12 @@
     <ds:schemaRef ds:uri="http://www.w3.org/XML/1998/namespace"/>
   </ds:schemaRefs>
 </ds:datastoreItem>
+</file>
+
+<file path=customXml/itemProps3.xml><?xml version="1.0" encoding="utf-8"?>
+<ds:datastoreItem xmlns:ds="http://schemas.openxmlformats.org/officeDocument/2006/customXml" ds:itemID="{67DD9E9F-9EEB-4105-B29B-819486C2855A}">
+  <ds:schemaRefs>
+    <ds:schemaRef ds:uri="http://schemas.microsoft.com/sharepoint/v3/contenttype/forms"/>
+  </ds:schemaRefs>
+</ds:datastoreItem>
 </file>
--- a/1.3 JD+ and R.pptx
+++ b/1.3 JD+ and R.pptx
@@ -5,10 +5,10 @@
     <p:sldMasterId id="2147483648" r:id="rId4"/>
   </p:sldMasterIdLst>
   <p:notesMasterIdLst>
-    <p:notesMasterId r:id="rId17"/>
+    <p:notesMasterId r:id="rId19"/>
   </p:notesMasterIdLst>
   <p:handoutMasterIdLst>
-    <p:handoutMasterId r:id="rId18"/>
+    <p:handoutMasterId r:id="rId20"/>
   </p:handoutMasterIdLst>
   <p:sldIdLst>
     <p:sldId id="256" r:id="rId5"/>
@@ -16,18 +16,20 @@
     <p:sldId id="276" r:id="rId7"/>
     <p:sldId id="277" r:id="rId8"/>
     <p:sldId id="279" r:id="rId9"/>
-    <p:sldId id="259" r:id="rId10"/>
-    <p:sldId id="280" r:id="rId11"/>
-    <p:sldId id="281" r:id="rId12"/>
-    <p:sldId id="284" r:id="rId13"/>
-    <p:sldId id="282" r:id="rId14"/>
-    <p:sldId id="283" r:id="rId15"/>
-    <p:sldId id="261" r:id="rId16"/>
+    <p:sldId id="285" r:id="rId10"/>
+    <p:sldId id="286" r:id="rId11"/>
+    <p:sldId id="259" r:id="rId12"/>
+    <p:sldId id="280" r:id="rId13"/>
+    <p:sldId id="281" r:id="rId14"/>
+    <p:sldId id="284" r:id="rId15"/>
+    <p:sldId id="282" r:id="rId16"/>
+    <p:sldId id="283" r:id="rId17"/>
+    <p:sldId id="261" r:id="rId18"/>
   </p:sldIdLst>
   <p:sldSz cx="12192000" cy="6858000"/>
   <p:notesSz cx="6858000" cy="9144000"/>
   <p:custDataLst>
-    <p:tags r:id="rId19"/>
+    <p:tags r:id="rId21"/>
   </p:custDataLst>
   <p:defaultTextStyle>
     <a:defPPr marR="0" lvl="0" algn="l" rtl="0">
@@ -277,7 +279,7 @@
       <p15:notesGuideLst xmlns:p15="http://schemas.microsoft.com/office/powerpoint/2012/main"/>
     </p:ext>
     <p:ext uri="http://customooxmlschemas.google.com/">
-      <go:slidesCustomData xmlns="" xmlns:go="http://customooxmlschemas.google.com/" xmlns:ahyp="http://schemas.microsoft.com/office/drawing/2018/hyperlinkcolor" xmlns:p15="http://schemas.microsoft.com/office/powerpoint/2012/main" xmlns:p14="http://schemas.microsoft.com/office/powerpoint/2010/main" xmlns:com="http://schemas.openxmlformats.org/drawingml/2006/compatibility" xmlns:pvml="urn:schemas-microsoft-com:office:powerpoint" xmlns:v="urn:schemas-microsoft-com:vml" xmlns:o="urn:schemas-microsoft-com:office:office" xmlns:dgm="http://schemas.openxmlformats.org/drawingml/2006/diagram" xmlns:c="http://schemas.openxmlformats.org/drawingml/2006/chart" xmlns:mv="urn:schemas-microsoft-com:mac:vml" xmlns:mc="http://schemas.openxmlformats.org/markup-compatibility/2006" r:id="rId59" roundtripDataSignature="AMtx7mh3YP3xexYcFoahXa2ehi0H5V4Zaw=="/>
+      <go:slidesCustomData xmlns:mc="http://schemas.openxmlformats.org/markup-compatibility/2006" xmlns:mv="urn:schemas-microsoft-com:mac:vml" xmlns:c="http://schemas.openxmlformats.org/drawingml/2006/chart" xmlns:dgm="http://schemas.openxmlformats.org/drawingml/2006/diagram" xmlns:o="urn:schemas-microsoft-com:office:office" xmlns:v="urn:schemas-microsoft-com:vml" xmlns:pvml="urn:schemas-microsoft-com:office:powerpoint" xmlns:com="http://schemas.openxmlformats.org/drawingml/2006/compatibility" xmlns:p14="http://schemas.microsoft.com/office/powerpoint/2010/main" xmlns:p15="http://schemas.microsoft.com/office/powerpoint/2012/main" xmlns:ahyp="http://schemas.microsoft.com/office/drawing/2018/hyperlinkcolor" xmlns:go="http://customooxmlschemas.google.com/" xmlns="" r:id="rId59" roundtripDataSignature="AMtx7mh3YP3xexYcFoahXa2ehi0H5V4Zaw=="/>
     </p:ext>
   </p:extLst>
 </p:presentation>
@@ -385,7 +387,7 @@
           <a:p>
             <a:fld id="{0CBFB8CE-488C-4A7E-87F2-3AF6127C51C1}" type="datetimeFigureOut">
               <a:rPr lang="en-IE" smtClean="0"/>
-              <a:t>22/09/2026</a:t>
+              <a:t>28/09/2026</a:t>
             </a:fld>
             <a:endParaRPr lang="en-IE"/>
           </a:p>
@@ -2490,8 +2492,8 @@
         </p:nvSpPr>
         <p:spPr>
           <a:xfrm>
-            <a:off x="970722" y="1901951"/>
-            <a:ext cx="10515597" cy="4194176"/>
+            <a:off x="970722" y="1397480"/>
+            <a:ext cx="10515597" cy="4698647"/>
           </a:xfrm>
         </p:spPr>
         <p:txBody>
@@ -6306,7 +6308,7 @@
           <p:cNvPr id="2" name="Title 1">
             <a:extLst>
               <a:ext uri="{FF2B5EF4-FFF2-40B4-BE49-F238E27FC236}">
-                <a16:creationId xmlns:a16="http://schemas.microsoft.com/office/drawing/2014/main" id="{6E54EFB3-CBD2-3E08-5B44-B206908A8B19}"/>
+                <a16:creationId xmlns:a16="http://schemas.microsoft.com/office/drawing/2014/main" id="{E71655A1-78C9-352D-8AC1-F6987AE95425}"/>
               </a:ext>
             </a:extLst>
           </p:cNvPr>
@@ -6324,13 +6326,16 @@
           <a:p>
             <a:r>
               <a:rPr lang="fr-BE" dirty="0"/>
-              <a:t>7. </a:t>
+              <a:t>6. </a:t>
             </a:r>
             <a:r>
               <a:rPr lang="fr-BE" dirty="0" err="1"/>
-              <a:t>Examples</a:t>
-            </a:r>
-            <a:endParaRPr lang="fr-BE" dirty="0"/>
+              <a:t>Installing</a:t>
+            </a:r>
+            <a:r>
+              <a:rPr lang="fr-BE" dirty="0"/>
+              <a:t> the packages</a:t>
+            </a:r>
           </a:p>
         </p:txBody>
       </p:sp>
@@ -6339,7 +6344,7 @@
           <p:cNvPr id="3" name="Content Placeholder 2">
             <a:extLst>
               <a:ext uri="{FF2B5EF4-FFF2-40B4-BE49-F238E27FC236}">
-                <a16:creationId xmlns:a16="http://schemas.microsoft.com/office/drawing/2014/main" id="{DABA9E25-9CF1-EF6E-A054-FE4682B8A8E9}"/>
+                <a16:creationId xmlns:a16="http://schemas.microsoft.com/office/drawing/2014/main" id="{927406D7-6535-6D75-9551-7A6E63F7CBB6}"/>
               </a:ext>
             </a:extLst>
           </p:cNvPr>
@@ -6347,26 +6352,21 @@
             <a:spLocks noGrp="1"/>
           </p:cNvSpPr>
           <p:nvPr>
-            <p:ph idx="1"/>
+            <p:ph sz="half" idx="2"/>
           </p:nvPr>
         </p:nvSpPr>
-        <p:spPr>
-          <a:xfrm>
-            <a:off x="838200" y="1447800"/>
-            <a:ext cx="10515600" cy="4729163"/>
-          </a:xfrm>
-        </p:spPr>
+        <p:spPr/>
         <p:txBody>
           <a:bodyPr/>
           <a:lstStyle/>
           <a:p>
             <a:r>
               <a:rPr lang="fr-BE" sz="2400" dirty="0"/>
-              <a:t>Reading Excel files (JD+-like) and </a:t>
+              <a:t>If </a:t>
             </a:r>
             <a:r>
               <a:rPr lang="fr-BE" sz="2400" dirty="0" err="1"/>
-              <a:t>detecting</a:t>
+              <a:t>need</a:t>
             </a:r>
             <a:r>
               <a:rPr lang="fr-BE" sz="2400" dirty="0"/>
@@ -6374,45 +6374,212 @@
             </a:r>
             <a:r>
               <a:rPr lang="fr-BE" sz="2400" dirty="0" err="1"/>
-              <a:t>errors</a:t>
-            </a:r>
+              <a:t>be</a:t>
+            </a:r>
+            <a:r>
+              <a:rPr lang="fr-BE" sz="2400" dirty="0"/>
+              <a:t>, </a:t>
+            </a:r>
+            <a:r>
+              <a:rPr lang="fr-BE" sz="2400" dirty="0" err="1"/>
+              <a:t>referencing</a:t>
+            </a:r>
+            <a:r>
+              <a:rPr lang="fr-BE" sz="2400" dirty="0"/>
+              <a:t> the correct java runtime (&gt;= 21.0)</a:t>
+            </a:r>
+          </a:p>
+          <a:p>
             <a:endParaRPr lang="fr-BE" sz="2400" dirty="0"/>
           </a:p>
           <a:p>
             <a:endParaRPr lang="fr-BE" sz="2400" dirty="0"/>
           </a:p>
           <a:p>
-            <a:endParaRPr lang="fr-BE" dirty="0"/>
-          </a:p>
-          <a:p>
-            <a:endParaRPr lang="fr-BE" dirty="0"/>
-          </a:p>
-          <a:p>
+            <a:pPr lvl="1"/>
+            <a:r>
+              <a:rPr lang="fr-BE" sz="2000" dirty="0"/>
+              <a:t>Set </a:t>
+            </a:r>
+            <a:r>
+              <a:rPr lang="fr-BE" sz="2000" dirty="0" err="1"/>
+              <a:t>your</a:t>
+            </a:r>
+            <a:r>
+              <a:rPr lang="fr-BE" sz="2000" dirty="0"/>
+              <a:t> JAVA_HOME variable (tip: use the </a:t>
+            </a:r>
+            <a:r>
+              <a:rPr lang="fr-BE" sz="2000" dirty="0" err="1"/>
+              <a:t>jre</a:t>
+            </a:r>
+            <a:r>
+              <a:rPr lang="fr-BE" sz="2000" dirty="0"/>
+              <a:t> </a:t>
+            </a:r>
+            <a:r>
+              <a:rPr lang="fr-BE" sz="2000" dirty="0" err="1"/>
+              <a:t>provided</a:t>
+            </a:r>
+            <a:r>
+              <a:rPr lang="fr-BE" sz="2000" dirty="0"/>
+              <a:t> </a:t>
+            </a:r>
+            <a:r>
+              <a:rPr lang="fr-BE" sz="2000" dirty="0" err="1"/>
+              <a:t>with</a:t>
+            </a:r>
+            <a:r>
+              <a:rPr lang="fr-BE" sz="2000" dirty="0"/>
+              <a:t> JD+)</a:t>
+            </a:r>
+          </a:p>
+          <a:p>
+            <a:endParaRPr lang="fr-BE" sz="2400" dirty="0"/>
+          </a:p>
+          <a:p>
+            <a:pPr lvl="1"/>
+            <a:endParaRPr lang="fr-BE" sz="2000" dirty="0"/>
+          </a:p>
+          <a:p>
+            <a:endParaRPr lang="fr-BE" sz="2400" dirty="0"/>
+          </a:p>
+          <a:p>
+            <a:r>
+              <a:rPr lang="fr-BE" sz="2400" dirty="0"/>
+              <a:t>Install the </a:t>
+            </a:r>
             <a:r>
               <a:rPr lang="fr-BE" sz="2400" dirty="0" err="1"/>
-              <a:t>Refreshing</a:t>
+              <a:t>various</a:t>
             </a:r>
             <a:r>
               <a:rPr lang="fr-BE" sz="2400" dirty="0"/>
-              <a:t> a </a:t>
+              <a:t> packages (internet </a:t>
             </a:r>
             <a:r>
               <a:rPr lang="fr-BE" sz="2400" dirty="0" err="1"/>
-              <a:t>workspace</a:t>
-            </a:r>
-            <a:endParaRPr lang="fr-BE" sz="2400" dirty="0"/>
-          </a:p>
-          <a:p>
-            <a:endParaRPr lang="fr-BE" dirty="0"/>
+              <a:t>access</a:t>
+            </a:r>
+            <a:r>
+              <a:rPr lang="fr-BE" sz="2400" dirty="0"/>
+              <a:t> </a:t>
+            </a:r>
+            <a:r>
+              <a:rPr lang="fr-BE" sz="2400" dirty="0" err="1"/>
+              <a:t>needed</a:t>
+            </a:r>
+            <a:r>
+              <a:rPr lang="fr-BE" sz="2400" dirty="0"/>
+              <a:t>)</a:t>
+            </a:r>
+          </a:p>
+          <a:p>
+            <a:pPr lvl="1"/>
+            <a:r>
+              <a:rPr lang="fr-BE" sz="2000" dirty="0"/>
+              <a:t>Install </a:t>
+            </a:r>
+            <a:r>
+              <a:rPr lang="fr-BE" sz="2000" dirty="0" err="1"/>
+              <a:t>from</a:t>
+            </a:r>
+            <a:r>
+              <a:rPr lang="fr-BE" sz="2000" dirty="0"/>
+              <a:t> CRAN for the main packages</a:t>
+            </a:r>
+          </a:p>
+          <a:p>
+            <a:pPr lvl="1"/>
+            <a:r>
+              <a:rPr lang="fr-BE" sz="2000" dirty="0"/>
+              <a:t># </a:t>
+            </a:r>
+            <a:r>
+              <a:rPr lang="fr-BE" sz="2000" dirty="0" err="1"/>
+              <a:t>install.packages</a:t>
+            </a:r>
+            <a:r>
+              <a:rPr lang="fr-BE" sz="2000" dirty="0"/>
+              <a:t>("</a:t>
+            </a:r>
+            <a:r>
+              <a:rPr lang="fr-BE" sz="2000" dirty="0" err="1"/>
+              <a:t>remotes</a:t>
+            </a:r>
+            <a:r>
+              <a:rPr lang="fr-BE" sz="2000" dirty="0"/>
+              <a:t>")</a:t>
+            </a:r>
+          </a:p>
+          <a:p>
+            <a:pPr lvl="1"/>
+            <a:r>
+              <a:rPr lang="fr-BE" sz="2000" dirty="0" err="1"/>
+              <a:t>remotes</a:t>
+            </a:r>
+            <a:r>
+              <a:rPr lang="fr-BE" sz="2000" dirty="0"/>
+              <a:t>::</a:t>
+            </a:r>
+            <a:r>
+              <a:rPr lang="fr-BE" sz="2000" dirty="0" err="1"/>
+              <a:t>install_github</a:t>
+            </a:r>
+            <a:r>
+              <a:rPr lang="fr-BE" sz="2000" dirty="0"/>
+              <a:t>("</a:t>
+            </a:r>
+            <a:r>
+              <a:rPr lang="fr-BE" sz="2000" dirty="0" err="1"/>
+              <a:t>rjdverse</a:t>
+            </a:r>
+            <a:r>
+              <a:rPr lang="fr-BE" sz="2000" dirty="0"/>
+              <a:t>/rjd3workspace@*release") </a:t>
+            </a:r>
+          </a:p>
+        </p:txBody>
+      </p:sp>
+      <p:sp>
+        <p:nvSpPr>
+          <p:cNvPr id="9" name="Espace réservé du pied de page 8">
+            <a:extLst>
+              <a:ext uri="{FF2B5EF4-FFF2-40B4-BE49-F238E27FC236}">
+                <a16:creationId xmlns:a16="http://schemas.microsoft.com/office/drawing/2014/main" id="{5B2EE932-E4D9-A85A-101C-91873C326AE2}"/>
+              </a:ext>
+            </a:extLst>
+          </p:cNvPr>
+          <p:cNvSpPr>
+            <a:spLocks noGrp="1"/>
+          </p:cNvSpPr>
+          <p:nvPr>
+            <p:ph type="ftr" sz="quarter" idx="4294967295"/>
+          </p:nvPr>
+        </p:nvSpPr>
+        <p:spPr>
+          <a:xfrm>
+            <a:off x="0" y="0"/>
+            <a:ext cx="0" cy="0"/>
+          </a:xfrm>
+        </p:spPr>
+        <p:txBody>
+          <a:bodyPr/>
+          <a:lstStyle/>
+          <a:p>
+            <a:r>
+              <a:rPr lang="en-GB"/>
+              <a:t>JD+ and R</a:t>
+            </a:r>
           </a:p>
         </p:txBody>
       </p:sp>
       <p:pic>
         <p:nvPicPr>
-          <p:cNvPr id="7" name="Picture 6">
-            <a:extLst>
-              <a:ext uri="{FF2B5EF4-FFF2-40B4-BE49-F238E27FC236}">
-                <a16:creationId xmlns:a16="http://schemas.microsoft.com/office/drawing/2014/main" id="{D0D90FC0-93EB-14C5-77CB-FC990AA5B6BE}"/>
+          <p:cNvPr id="13" name="Image 12">
+            <a:extLst>
+              <a:ext uri="{FF2B5EF4-FFF2-40B4-BE49-F238E27FC236}">
+                <a16:creationId xmlns:a16="http://schemas.microsoft.com/office/drawing/2014/main" id="{81DAD5C2-2D33-1185-4020-86A5C6F426A3}"/>
               </a:ext>
             </a:extLst>
           </p:cNvPr>
@@ -6429,25 +6596,20 @@
         </p:blipFill>
         <p:spPr>
           <a:xfrm>
-            <a:off x="1196927" y="1870074"/>
-            <a:ext cx="8181135" cy="1558925"/>
+            <a:off x="2571307" y="1942311"/>
+            <a:ext cx="3970399" cy="719167"/>
           </a:xfrm>
           <a:prstGeom prst="rect">
             <a:avLst/>
           </a:prstGeom>
-          <a:ln>
-            <a:solidFill>
-              <a:schemeClr val="tx1"/>
-            </a:solidFill>
-          </a:ln>
         </p:spPr>
       </p:pic>
       <p:pic>
         <p:nvPicPr>
-          <p:cNvPr id="13" name="Picture 12">
-            <a:extLst>
-              <a:ext uri="{FF2B5EF4-FFF2-40B4-BE49-F238E27FC236}">
-                <a16:creationId xmlns:a16="http://schemas.microsoft.com/office/drawing/2014/main" id="{CAECC140-1613-1821-0CC9-CB2AA63D6CA1}"/>
+          <p:cNvPr id="15" name="Image 14">
+            <a:extLst>
+              <a:ext uri="{FF2B5EF4-FFF2-40B4-BE49-F238E27FC236}">
+                <a16:creationId xmlns:a16="http://schemas.microsoft.com/office/drawing/2014/main" id="{E6873EC0-00B5-B604-BA85-4C57CB35062F}"/>
               </a:ext>
             </a:extLst>
           </p:cNvPr>
@@ -6464,51 +6626,48 @@
         </p:blipFill>
         <p:spPr>
           <a:xfrm>
-            <a:off x="1196927" y="3812381"/>
-            <a:ext cx="8186918" cy="2364582"/>
+            <a:off x="1049526" y="3340594"/>
+            <a:ext cx="5397631" cy="915888"/>
           </a:xfrm>
           <a:prstGeom prst="rect">
             <a:avLst/>
           </a:prstGeom>
-          <a:ln>
-            <a:solidFill>
-              <a:schemeClr val="tx1"/>
-            </a:solidFill>
-          </a:ln>
         </p:spPr>
       </p:pic>
-      <p:sp>
-        <p:nvSpPr>
-          <p:cNvPr id="10" name="Espace réservé du pied de page 9">
-            <a:extLst>
-              <a:ext uri="{FF2B5EF4-FFF2-40B4-BE49-F238E27FC236}">
-                <a16:creationId xmlns:a16="http://schemas.microsoft.com/office/drawing/2014/main" id="{05D869BE-6E6B-348D-D378-6CC37610C424}"/>
-              </a:ext>
-            </a:extLst>
-          </p:cNvPr>
-          <p:cNvSpPr>
-            <a:spLocks noGrp="1"/>
-          </p:cNvSpPr>
-          <p:nvPr>
-            <p:ph type="ftr" sz="quarter" idx="11"/>
-          </p:nvPr>
-        </p:nvSpPr>
-        <p:spPr/>
-        <p:txBody>
-          <a:bodyPr/>
-          <a:lstStyle/>
-          <a:p>
-            <a:r>
-              <a:rPr lang="en-GB"/>
-              <a:t>JD+ and R</a:t>
-            </a:r>
-          </a:p>
-        </p:txBody>
-      </p:sp>
+      <p:pic>
+        <p:nvPicPr>
+          <p:cNvPr id="17" name="Image 16">
+            <a:extLst>
+              <a:ext uri="{FF2B5EF4-FFF2-40B4-BE49-F238E27FC236}">
+                <a16:creationId xmlns:a16="http://schemas.microsoft.com/office/drawing/2014/main" id="{18639300-52E3-F85D-CA72-4F072E184057}"/>
+              </a:ext>
+            </a:extLst>
+          </p:cNvPr>
+          <p:cNvPicPr>
+            <a:picLocks noChangeAspect="1"/>
+          </p:cNvPicPr>
+          <p:nvPr/>
+        </p:nvPicPr>
+        <p:blipFill>
+          <a:blip r:embed="rId4"/>
+          <a:stretch>
+            <a:fillRect/>
+          </a:stretch>
+        </p:blipFill>
+        <p:spPr>
+          <a:xfrm>
+            <a:off x="7294546" y="3340595"/>
+            <a:ext cx="3926732" cy="915887"/>
+          </a:xfrm>
+          <a:prstGeom prst="rect">
+            <a:avLst/>
+          </a:prstGeom>
+        </p:spPr>
+      </p:pic>
     </p:spTree>
     <p:extLst>
       <p:ext uri="{BB962C8B-B14F-4D97-AF65-F5344CB8AC3E}">
-        <p14:creationId xmlns:p14="http://schemas.microsoft.com/office/powerpoint/2010/main" val="3127807312"/>
+        <p14:creationId xmlns:p14="http://schemas.microsoft.com/office/powerpoint/2010/main" val="933773129"/>
       </p:ext>
     </p:extLst>
   </p:cSld>
@@ -6537,6 +6696,497 @@
       </p:grpSpPr>
       <p:sp>
         <p:nvSpPr>
+          <p:cNvPr id="2" name="Titre 1">
+            <a:extLst>
+              <a:ext uri="{FF2B5EF4-FFF2-40B4-BE49-F238E27FC236}">
+                <a16:creationId xmlns:a16="http://schemas.microsoft.com/office/drawing/2014/main" id="{3255C743-A837-68FB-BEB2-A0B3CC81FA06}"/>
+              </a:ext>
+            </a:extLst>
+          </p:cNvPr>
+          <p:cNvSpPr>
+            <a:spLocks noGrp="1"/>
+          </p:cNvSpPr>
+          <p:nvPr>
+            <p:ph type="title"/>
+          </p:nvPr>
+        </p:nvSpPr>
+        <p:spPr/>
+        <p:txBody>
+          <a:bodyPr/>
+          <a:lstStyle/>
+          <a:p>
+            <a:r>
+              <a:rPr lang="fr-BE" dirty="0"/>
+              <a:t>6. </a:t>
+            </a:r>
+            <a:r>
+              <a:rPr lang="fr-BE" dirty="0" err="1"/>
+              <a:t>Installing</a:t>
+            </a:r>
+            <a:r>
+              <a:rPr lang="fr-BE" dirty="0"/>
+              <a:t> the packages (</a:t>
+            </a:r>
+            <a:r>
+              <a:rPr lang="fr-BE" dirty="0" err="1"/>
+              <a:t>cont</a:t>
+            </a:r>
+            <a:r>
+              <a:rPr lang="fr-BE" dirty="0"/>
+              <a:t>)</a:t>
+            </a:r>
+            <a:endParaRPr lang="en-GB" dirty="0"/>
+          </a:p>
+        </p:txBody>
+      </p:sp>
+      <p:sp>
+        <p:nvSpPr>
+          <p:cNvPr id="3" name="Espace réservé du contenu 2">
+            <a:extLst>
+              <a:ext uri="{FF2B5EF4-FFF2-40B4-BE49-F238E27FC236}">
+                <a16:creationId xmlns:a16="http://schemas.microsoft.com/office/drawing/2014/main" id="{C0FEE72D-C9D0-21BD-05D9-74FFAC7C7934}"/>
+              </a:ext>
+            </a:extLst>
+          </p:cNvPr>
+          <p:cNvSpPr>
+            <a:spLocks noGrp="1"/>
+          </p:cNvSpPr>
+          <p:nvPr>
+            <p:ph sz="half" idx="2"/>
+          </p:nvPr>
+        </p:nvSpPr>
+        <p:spPr/>
+        <p:txBody>
+          <a:bodyPr>
+            <a:normAutofit/>
+          </a:bodyPr>
+          <a:lstStyle/>
+          <a:p>
+            <a:r>
+              <a:rPr lang="fr-BE" sz="2800" i="1" dirty="0" err="1"/>
+              <a:t>remotes</a:t>
+            </a:r>
+            <a:r>
+              <a:rPr lang="fr-BE" sz="2800" i="1" dirty="0"/>
+              <a:t>::</a:t>
+            </a:r>
+            <a:r>
+              <a:rPr lang="fr-BE" sz="2800" i="1" dirty="0" err="1"/>
+              <a:t>install_github</a:t>
+            </a:r>
+            <a:r>
+              <a:rPr lang="fr-BE" sz="2800" i="1" dirty="0"/>
+              <a:t>("</a:t>
+            </a:r>
+            <a:r>
+              <a:rPr lang="fr-BE" sz="2800" i="1" dirty="0" err="1"/>
+              <a:t>rjdverse</a:t>
+            </a:r>
+            <a:r>
+              <a:rPr lang="fr-BE" sz="2800" i="1" dirty="0"/>
+              <a:t>/rjd3filters@*release")</a:t>
+            </a:r>
+          </a:p>
+          <a:p>
+            <a:r>
+              <a:rPr lang="fr-BE" sz="2800" i="1" dirty="0" err="1"/>
+              <a:t>remotes</a:t>
+            </a:r>
+            <a:r>
+              <a:rPr lang="fr-BE" sz="2800" i="1" dirty="0"/>
+              <a:t>::</a:t>
+            </a:r>
+            <a:r>
+              <a:rPr lang="fr-BE" sz="2800" i="1" dirty="0" err="1"/>
+              <a:t>install_github</a:t>
+            </a:r>
+            <a:r>
+              <a:rPr lang="fr-BE" sz="2800" i="1" dirty="0"/>
+              <a:t>("</a:t>
+            </a:r>
+            <a:r>
+              <a:rPr lang="fr-BE" sz="2800" i="1" dirty="0" err="1"/>
+              <a:t>rjdverse</a:t>
+            </a:r>
+            <a:r>
+              <a:rPr lang="fr-BE" sz="2800" i="1" dirty="0"/>
+              <a:t>/rjd3sts@*release")</a:t>
+            </a:r>
+          </a:p>
+          <a:p>
+            <a:r>
+              <a:rPr lang="fr-BE" sz="2800" i="1" dirty="0" err="1"/>
+              <a:t>remotes</a:t>
+            </a:r>
+            <a:r>
+              <a:rPr lang="fr-BE" sz="2800" i="1" dirty="0"/>
+              <a:t>::</a:t>
+            </a:r>
+            <a:r>
+              <a:rPr lang="fr-BE" sz="2800" i="1" dirty="0" err="1"/>
+              <a:t>install_github</a:t>
+            </a:r>
+            <a:r>
+              <a:rPr lang="fr-BE" sz="2800" i="1" dirty="0"/>
+              <a:t>("</a:t>
+            </a:r>
+            <a:r>
+              <a:rPr lang="fr-BE" sz="2800" i="1" dirty="0" err="1"/>
+              <a:t>rjdverse</a:t>
+            </a:r>
+            <a:r>
+              <a:rPr lang="fr-BE" sz="2800" i="1" dirty="0"/>
+              <a:t>/rjd3highfreq@*release")</a:t>
+            </a:r>
+          </a:p>
+          <a:p>
+            <a:r>
+              <a:rPr lang="fr-BE" sz="2800" i="1" dirty="0" err="1"/>
+              <a:t>remotes</a:t>
+            </a:r>
+            <a:r>
+              <a:rPr lang="fr-BE" sz="2800" i="1" dirty="0"/>
+              <a:t>::</a:t>
+            </a:r>
+            <a:r>
+              <a:rPr lang="fr-BE" sz="2800" i="1" dirty="0" err="1"/>
+              <a:t>install_github</a:t>
+            </a:r>
+            <a:r>
+              <a:rPr lang="fr-BE" sz="2800" i="1" dirty="0"/>
+              <a:t>("</a:t>
+            </a:r>
+            <a:r>
+              <a:rPr lang="fr-BE" sz="2800" i="1" dirty="0" err="1"/>
+              <a:t>rjdverse</a:t>
+            </a:r>
+            <a:r>
+              <a:rPr lang="fr-BE" sz="2800" i="1" dirty="0"/>
+              <a:t>/rjd3x11plus@*release")</a:t>
+            </a:r>
+          </a:p>
+          <a:p>
+            <a:endParaRPr lang="fr-BE" sz="2800" dirty="0"/>
+          </a:p>
+          <a:p>
+            <a:endParaRPr lang="fr-BE" dirty="0"/>
+          </a:p>
+          <a:p>
+            <a:endParaRPr lang="fr-BE" dirty="0"/>
+          </a:p>
+          <a:p>
+            <a:endParaRPr lang="fr-BE" dirty="0"/>
+          </a:p>
+          <a:p>
+            <a:endParaRPr lang="fr-BE" dirty="0"/>
+          </a:p>
+          <a:p>
+            <a:endParaRPr lang="en-GB" dirty="0"/>
+          </a:p>
+        </p:txBody>
+      </p:sp>
+      <p:sp>
+        <p:nvSpPr>
+          <p:cNvPr id="9" name="Espace réservé du pied de page 8">
+            <a:extLst>
+              <a:ext uri="{FF2B5EF4-FFF2-40B4-BE49-F238E27FC236}">
+                <a16:creationId xmlns:a16="http://schemas.microsoft.com/office/drawing/2014/main" id="{715EEF82-C545-CA98-1A57-72D1A07D1971}"/>
+              </a:ext>
+            </a:extLst>
+          </p:cNvPr>
+          <p:cNvSpPr>
+            <a:spLocks noGrp="1"/>
+          </p:cNvSpPr>
+          <p:nvPr>
+            <p:ph type="ftr" sz="quarter" idx="4294967295"/>
+          </p:nvPr>
+        </p:nvSpPr>
+        <p:spPr>
+          <a:xfrm>
+            <a:off x="0" y="0"/>
+            <a:ext cx="0" cy="0"/>
+          </a:xfrm>
+        </p:spPr>
+        <p:txBody>
+          <a:bodyPr/>
+          <a:lstStyle/>
+          <a:p>
+            <a:r>
+              <a:rPr lang="en-GB"/>
+              <a:t>JD+ and R</a:t>
+            </a:r>
+          </a:p>
+        </p:txBody>
+      </p:sp>
+    </p:spTree>
+    <p:extLst>
+      <p:ext uri="{BB962C8B-B14F-4D97-AF65-F5344CB8AC3E}">
+        <p14:creationId xmlns:p14="http://schemas.microsoft.com/office/powerpoint/2010/main" val="3368389567"/>
+      </p:ext>
+    </p:extLst>
+  </p:cSld>
+  <p:clrMapOvr>
+    <a:masterClrMapping/>
+  </p:clrMapOvr>
+</p:sld>
+</file>
+
+<file path=ppt/slides/slide12.xml><?xml version="1.0" encoding="utf-8"?>
+<p:sld xmlns:a="http://schemas.openxmlformats.org/drawingml/2006/main" xmlns:r="http://schemas.openxmlformats.org/officeDocument/2006/relationships" xmlns:p="http://schemas.openxmlformats.org/presentationml/2006/main">
+  <p:cSld>
+    <p:spTree>
+      <p:nvGrpSpPr>
+        <p:cNvPr id="1" name=""/>
+        <p:cNvGrpSpPr/>
+        <p:nvPr/>
+      </p:nvGrpSpPr>
+      <p:grpSpPr>
+        <a:xfrm>
+          <a:off x="0" y="0"/>
+          <a:ext cx="0" cy="0"/>
+          <a:chOff x="0" y="0"/>
+          <a:chExt cx="0" cy="0"/>
+        </a:xfrm>
+      </p:grpSpPr>
+      <p:sp>
+        <p:nvSpPr>
+          <p:cNvPr id="2" name="Title 1">
+            <a:extLst>
+              <a:ext uri="{FF2B5EF4-FFF2-40B4-BE49-F238E27FC236}">
+                <a16:creationId xmlns:a16="http://schemas.microsoft.com/office/drawing/2014/main" id="{6E54EFB3-CBD2-3E08-5B44-B206908A8B19}"/>
+              </a:ext>
+            </a:extLst>
+          </p:cNvPr>
+          <p:cNvSpPr>
+            <a:spLocks noGrp="1"/>
+          </p:cNvSpPr>
+          <p:nvPr>
+            <p:ph type="title"/>
+          </p:nvPr>
+        </p:nvSpPr>
+        <p:spPr/>
+        <p:txBody>
+          <a:bodyPr/>
+          <a:lstStyle/>
+          <a:p>
+            <a:r>
+              <a:rPr lang="fr-BE" dirty="0"/>
+              <a:t>7. </a:t>
+            </a:r>
+            <a:r>
+              <a:rPr lang="fr-BE" dirty="0" err="1"/>
+              <a:t>Examples</a:t>
+            </a:r>
+            <a:endParaRPr lang="fr-BE" dirty="0"/>
+          </a:p>
+        </p:txBody>
+      </p:sp>
+      <p:sp>
+        <p:nvSpPr>
+          <p:cNvPr id="3" name="Content Placeholder 2">
+            <a:extLst>
+              <a:ext uri="{FF2B5EF4-FFF2-40B4-BE49-F238E27FC236}">
+                <a16:creationId xmlns:a16="http://schemas.microsoft.com/office/drawing/2014/main" id="{DABA9E25-9CF1-EF6E-A054-FE4682B8A8E9}"/>
+              </a:ext>
+            </a:extLst>
+          </p:cNvPr>
+          <p:cNvSpPr>
+            <a:spLocks noGrp="1"/>
+          </p:cNvSpPr>
+          <p:nvPr>
+            <p:ph sz="half" idx="2"/>
+          </p:nvPr>
+        </p:nvSpPr>
+        <p:spPr/>
+        <p:txBody>
+          <a:bodyPr/>
+          <a:lstStyle/>
+          <a:p>
+            <a:r>
+              <a:rPr lang="fr-BE" sz="2400" dirty="0"/>
+              <a:t>Reading Excel files (JD+-like) and </a:t>
+            </a:r>
+            <a:r>
+              <a:rPr lang="fr-BE" sz="2400" dirty="0" err="1"/>
+              <a:t>detecting</a:t>
+            </a:r>
+            <a:r>
+              <a:rPr lang="fr-BE" sz="2400" dirty="0"/>
+              <a:t> </a:t>
+            </a:r>
+            <a:r>
+              <a:rPr lang="fr-BE" sz="2400" dirty="0" err="1"/>
+              <a:t>errors</a:t>
+            </a:r>
+            <a:endParaRPr lang="fr-BE" sz="2400" dirty="0"/>
+          </a:p>
+          <a:p>
+            <a:endParaRPr lang="fr-BE" sz="2400" dirty="0"/>
+          </a:p>
+          <a:p>
+            <a:endParaRPr lang="fr-BE" dirty="0"/>
+          </a:p>
+          <a:p>
+            <a:endParaRPr lang="fr-BE" dirty="0"/>
+          </a:p>
+          <a:p>
+            <a:endParaRPr lang="fr-BE" sz="2400" dirty="0"/>
+          </a:p>
+          <a:p>
+            <a:r>
+              <a:rPr lang="fr-BE" sz="2400" dirty="0" err="1"/>
+              <a:t>Refreshing</a:t>
+            </a:r>
+            <a:r>
+              <a:rPr lang="fr-BE" sz="2400" dirty="0"/>
+              <a:t> a </a:t>
+            </a:r>
+            <a:r>
+              <a:rPr lang="fr-BE" sz="2400" dirty="0" err="1"/>
+              <a:t>workspace</a:t>
+            </a:r>
+            <a:endParaRPr lang="fr-BE" sz="2400" dirty="0"/>
+          </a:p>
+          <a:p>
+            <a:endParaRPr lang="fr-BE" dirty="0"/>
+          </a:p>
+        </p:txBody>
+      </p:sp>
+      <p:sp>
+        <p:nvSpPr>
+          <p:cNvPr id="10" name="Espace réservé du pied de page 9">
+            <a:extLst>
+              <a:ext uri="{FF2B5EF4-FFF2-40B4-BE49-F238E27FC236}">
+                <a16:creationId xmlns:a16="http://schemas.microsoft.com/office/drawing/2014/main" id="{05D869BE-6E6B-348D-D378-6CC37610C424}"/>
+              </a:ext>
+            </a:extLst>
+          </p:cNvPr>
+          <p:cNvSpPr>
+            <a:spLocks noGrp="1"/>
+          </p:cNvSpPr>
+          <p:nvPr>
+            <p:ph type="ftr" sz="quarter" idx="4294967295"/>
+          </p:nvPr>
+        </p:nvSpPr>
+        <p:spPr>
+          <a:xfrm>
+            <a:off x="0" y="0"/>
+            <a:ext cx="0" cy="0"/>
+          </a:xfrm>
+        </p:spPr>
+        <p:txBody>
+          <a:bodyPr/>
+          <a:lstStyle/>
+          <a:p>
+            <a:r>
+              <a:rPr lang="en-GB"/>
+              <a:t>JD+ and R</a:t>
+            </a:r>
+          </a:p>
+        </p:txBody>
+      </p:sp>
+      <p:pic>
+        <p:nvPicPr>
+          <p:cNvPr id="7" name="Picture 6">
+            <a:extLst>
+              <a:ext uri="{FF2B5EF4-FFF2-40B4-BE49-F238E27FC236}">
+                <a16:creationId xmlns:a16="http://schemas.microsoft.com/office/drawing/2014/main" id="{D0D90FC0-93EB-14C5-77CB-FC990AA5B6BE}"/>
+              </a:ext>
+            </a:extLst>
+          </p:cNvPr>
+          <p:cNvPicPr>
+            <a:picLocks noChangeAspect="1"/>
+          </p:cNvPicPr>
+          <p:nvPr/>
+        </p:nvPicPr>
+        <p:blipFill>
+          <a:blip r:embed="rId2"/>
+          <a:stretch>
+            <a:fillRect/>
+          </a:stretch>
+        </p:blipFill>
+        <p:spPr>
+          <a:xfrm>
+            <a:off x="1117650" y="1870075"/>
+            <a:ext cx="8181135" cy="1558925"/>
+          </a:xfrm>
+          <a:prstGeom prst="rect">
+            <a:avLst/>
+          </a:prstGeom>
+          <a:ln>
+            <a:solidFill>
+              <a:schemeClr val="tx1"/>
+            </a:solidFill>
+          </a:ln>
+        </p:spPr>
+      </p:pic>
+      <p:pic>
+        <p:nvPicPr>
+          <p:cNvPr id="13" name="Picture 12">
+            <a:extLst>
+              <a:ext uri="{FF2B5EF4-FFF2-40B4-BE49-F238E27FC236}">
+                <a16:creationId xmlns:a16="http://schemas.microsoft.com/office/drawing/2014/main" id="{CAECC140-1613-1821-0CC9-CB2AA63D6CA1}"/>
+              </a:ext>
+            </a:extLst>
+          </p:cNvPr>
+          <p:cNvPicPr>
+            <a:picLocks noChangeAspect="1"/>
+          </p:cNvPicPr>
+          <p:nvPr/>
+        </p:nvPicPr>
+        <p:blipFill>
+          <a:blip r:embed="rId3"/>
+          <a:stretch>
+            <a:fillRect/>
+          </a:stretch>
+        </p:blipFill>
+        <p:spPr>
+          <a:xfrm>
+            <a:off x="1111867" y="4021958"/>
+            <a:ext cx="8186918" cy="2364582"/>
+          </a:xfrm>
+          <a:prstGeom prst="rect">
+            <a:avLst/>
+          </a:prstGeom>
+          <a:ln>
+            <a:solidFill>
+              <a:schemeClr val="tx1"/>
+            </a:solidFill>
+          </a:ln>
+        </p:spPr>
+      </p:pic>
+    </p:spTree>
+    <p:extLst>
+      <p:ext uri="{BB962C8B-B14F-4D97-AF65-F5344CB8AC3E}">
+        <p14:creationId xmlns:p14="http://schemas.microsoft.com/office/powerpoint/2010/main" val="3127807312"/>
+      </p:ext>
+    </p:extLst>
+  </p:cSld>
+  <p:clrMapOvr>
+    <a:masterClrMapping/>
+  </p:clrMapOvr>
+</p:sld>
+</file>
+
+<file path=ppt/slides/slide13.xml><?xml version="1.0" encoding="utf-8"?>
+<p:sld xmlns:a="http://schemas.openxmlformats.org/drawingml/2006/main" xmlns:r="http://schemas.openxmlformats.org/officeDocument/2006/relationships" xmlns:p="http://schemas.openxmlformats.org/presentationml/2006/main">
+  <p:cSld>
+    <p:spTree>
+      <p:nvGrpSpPr>
+        <p:cNvPr id="1" name=""/>
+        <p:cNvGrpSpPr/>
+        <p:nvPr/>
+      </p:nvGrpSpPr>
+      <p:grpSpPr>
+        <a:xfrm>
+          <a:off x="0" y="0"/>
+          <a:ext cx="0" cy="0"/>
+          <a:chOff x="0" y="0"/>
+          <a:chExt cx="0" cy="0"/>
+        </a:xfrm>
+      </p:grpSpPr>
+      <p:sp>
+        <p:nvSpPr>
           <p:cNvPr id="2" name="Title 1">
             <a:extLst>
               <a:ext uri="{FF2B5EF4-FFF2-40B4-BE49-F238E27FC236}">
@@ -6765,7 +7415,7 @@
 </p:sld>
 </file>
 
-<file path=ppt/slides/slide12.xml><?xml version="1.0" encoding="utf-8"?>
+<file path=ppt/slides/slide14.xml><?xml version="1.0" encoding="utf-8"?>
 <p:sld xmlns:a="http://schemas.openxmlformats.org/drawingml/2006/main" xmlns:r="http://schemas.openxmlformats.org/officeDocument/2006/relationships" xmlns:p="http://schemas.openxmlformats.org/presentationml/2006/main">
   <p:cSld>
     <p:spTree>
@@ -6903,10 +7553,15 @@
             <a:spLocks noGrp="1"/>
           </p:cNvSpPr>
           <p:nvPr>
-            <p:ph idx="1"/>
+            <p:ph sz="half" idx="2"/>
           </p:nvPr>
         </p:nvSpPr>
-        <p:spPr/>
+        <p:spPr>
+          <a:xfrm>
+            <a:off x="970722" y="1195947"/>
+            <a:ext cx="10515597" cy="4900180"/>
+          </a:xfrm>
+        </p:spPr>
         <p:txBody>
           <a:bodyPr/>
           <a:lstStyle/>
@@ -7009,10 +7664,15 @@
             <a:spLocks noGrp="1"/>
           </p:cNvSpPr>
           <p:nvPr>
-            <p:ph type="ftr" sz="quarter" idx="11"/>
+            <p:ph type="ftr" sz="quarter" idx="4294967295"/>
           </p:nvPr>
         </p:nvSpPr>
-        <p:spPr/>
+        <p:spPr>
+          <a:xfrm>
+            <a:off x="0" y="0"/>
+            <a:ext cx="0" cy="0"/>
+          </a:xfrm>
+        </p:spPr>
         <p:txBody>
           <a:bodyPr/>
           <a:lstStyle/>
@@ -7087,6 +7747,64 @@
       </p:sp>
       <p:sp>
         <p:nvSpPr>
+          <p:cNvPr id="3" name="Espace réservé du contenu 2">
+            <a:extLst>
+              <a:ext uri="{FF2B5EF4-FFF2-40B4-BE49-F238E27FC236}">
+                <a16:creationId xmlns:a16="http://schemas.microsoft.com/office/drawing/2014/main" id="{47E4A301-7B06-C223-5ED9-A90E3FCEFA69}"/>
+              </a:ext>
+            </a:extLst>
+          </p:cNvPr>
+          <p:cNvSpPr>
+            <a:spLocks noGrp="1"/>
+          </p:cNvSpPr>
+          <p:nvPr>
+            <p:ph sz="half" idx="2"/>
+          </p:nvPr>
+        </p:nvSpPr>
+        <p:spPr/>
+        <p:txBody>
+          <a:bodyPr/>
+          <a:lstStyle/>
+          <a:p>
+            <a:endParaRPr lang="en-GB" dirty="0"/>
+          </a:p>
+        </p:txBody>
+      </p:sp>
+      <p:sp>
+        <p:nvSpPr>
+          <p:cNvPr id="11" name="Espace réservé du pied de page 10">
+            <a:extLst>
+              <a:ext uri="{FF2B5EF4-FFF2-40B4-BE49-F238E27FC236}">
+                <a16:creationId xmlns:a16="http://schemas.microsoft.com/office/drawing/2014/main" id="{19CF2679-0441-6E1D-9F02-9E325B72C437}"/>
+              </a:ext>
+            </a:extLst>
+          </p:cNvPr>
+          <p:cNvSpPr>
+            <a:spLocks noGrp="1"/>
+          </p:cNvSpPr>
+          <p:nvPr>
+            <p:ph type="ftr" sz="quarter" idx="4294967295"/>
+          </p:nvPr>
+        </p:nvSpPr>
+        <p:spPr>
+          <a:xfrm>
+            <a:off x="0" y="0"/>
+            <a:ext cx="0" cy="0"/>
+          </a:xfrm>
+        </p:spPr>
+        <p:txBody>
+          <a:bodyPr/>
+          <a:lstStyle/>
+          <a:p>
+            <a:r>
+              <a:rPr lang="en-GB"/>
+              <a:t>JD+ and R</a:t>
+            </a:r>
+          </a:p>
+        </p:txBody>
+      </p:sp>
+      <p:sp>
+        <p:nvSpPr>
           <p:cNvPr id="4" name="Rounded Rectangle 3"/>
           <p:cNvSpPr/>
           <p:nvPr/>
@@ -7995,34 +8713,6 @@
                 </a:effectLst>
               </a:rPr>
               <a:t>R, native</a:t>
-            </a:r>
-          </a:p>
-        </p:txBody>
-      </p:sp>
-      <p:sp>
-        <p:nvSpPr>
-          <p:cNvPr id="11" name="Espace réservé du pied de page 10">
-            <a:extLst>
-              <a:ext uri="{FF2B5EF4-FFF2-40B4-BE49-F238E27FC236}">
-                <a16:creationId xmlns:a16="http://schemas.microsoft.com/office/drawing/2014/main" id="{19CF2679-0441-6E1D-9F02-9E325B72C437}"/>
-              </a:ext>
-            </a:extLst>
-          </p:cNvPr>
-          <p:cNvSpPr>
-            <a:spLocks noGrp="1"/>
-          </p:cNvSpPr>
-          <p:nvPr>
-            <p:ph type="ftr" sz="quarter" idx="11"/>
-          </p:nvPr>
-        </p:nvSpPr>
-        <p:spPr/>
-        <p:txBody>
-          <a:bodyPr/>
-          <a:lstStyle/>
-          <a:p>
-            <a:r>
-              <a:rPr lang="en-GB"/>
-              <a:t>JD+ and R</a:t>
             </a:r>
           </a:p>
         </p:txBody>
@@ -8756,6 +9446,64 @@
       </p:sp>
       <p:sp>
         <p:nvSpPr>
+          <p:cNvPr id="3" name="Espace réservé du contenu 2">
+            <a:extLst>
+              <a:ext uri="{FF2B5EF4-FFF2-40B4-BE49-F238E27FC236}">
+                <a16:creationId xmlns:a16="http://schemas.microsoft.com/office/drawing/2014/main" id="{42E6E339-462C-AFC1-1333-C851D5FCD278}"/>
+              </a:ext>
+            </a:extLst>
+          </p:cNvPr>
+          <p:cNvSpPr>
+            <a:spLocks noGrp="1"/>
+          </p:cNvSpPr>
+          <p:nvPr>
+            <p:ph sz="half" idx="2"/>
+          </p:nvPr>
+        </p:nvSpPr>
+        <p:spPr/>
+        <p:txBody>
+          <a:bodyPr/>
+          <a:lstStyle/>
+          <a:p>
+            <a:endParaRPr lang="en-GB"/>
+          </a:p>
+        </p:txBody>
+      </p:sp>
+      <p:sp>
+        <p:nvSpPr>
+          <p:cNvPr id="8" name="Espace réservé du pied de page 7">
+            <a:extLst>
+              <a:ext uri="{FF2B5EF4-FFF2-40B4-BE49-F238E27FC236}">
+                <a16:creationId xmlns:a16="http://schemas.microsoft.com/office/drawing/2014/main" id="{C1330F8F-5CFB-9CAA-6FDE-1672CE2437A1}"/>
+              </a:ext>
+            </a:extLst>
+          </p:cNvPr>
+          <p:cNvSpPr>
+            <a:spLocks noGrp="1"/>
+          </p:cNvSpPr>
+          <p:nvPr>
+            <p:ph type="ftr" sz="quarter" idx="4294967295"/>
+          </p:nvPr>
+        </p:nvSpPr>
+        <p:spPr>
+          <a:xfrm>
+            <a:off x="0" y="0"/>
+            <a:ext cx="0" cy="0"/>
+          </a:xfrm>
+        </p:spPr>
+        <p:txBody>
+          <a:bodyPr/>
+          <a:lstStyle/>
+          <a:p>
+            <a:r>
+              <a:rPr lang="en-GB"/>
+              <a:t>JD+ and R</a:t>
+            </a:r>
+          </a:p>
+        </p:txBody>
+      </p:sp>
+      <p:sp>
+        <p:nvSpPr>
           <p:cNvPr id="4" name="Rounded Rectangle 3"/>
           <p:cNvSpPr/>
           <p:nvPr/>
@@ -9528,34 +10276,6 @@
                 </a:effectLst>
               </a:rPr>
               <a:t>R, native</a:t>
-            </a:r>
-          </a:p>
-        </p:txBody>
-      </p:sp>
-      <p:sp>
-        <p:nvSpPr>
-          <p:cNvPr id="8" name="Espace réservé du pied de page 7">
-            <a:extLst>
-              <a:ext uri="{FF2B5EF4-FFF2-40B4-BE49-F238E27FC236}">
-                <a16:creationId xmlns:a16="http://schemas.microsoft.com/office/drawing/2014/main" id="{C1330F8F-5CFB-9CAA-6FDE-1672CE2437A1}"/>
-              </a:ext>
-            </a:extLst>
-          </p:cNvPr>
-          <p:cNvSpPr>
-            <a:spLocks noGrp="1"/>
-          </p:cNvSpPr>
-          <p:nvPr>
-            <p:ph type="ftr" sz="quarter" idx="11"/>
-          </p:nvPr>
-        </p:nvSpPr>
-        <p:spPr/>
-        <p:txBody>
-          <a:bodyPr/>
-          <a:lstStyle/>
-          <a:p>
-            <a:r>
-              <a:rPr lang="en-GB"/>
-              <a:t>JD+ and R</a:t>
             </a:r>
           </a:p>
         </p:txBody>
@@ -10206,6 +10926,54 @@
               <a:rPr lang="en-GB" dirty="0"/>
               <a:t>: Overview </a:t>
             </a:r>
+            <a:r>
+              <a:rPr lang="en-GB" sz="3200" dirty="0"/>
+              <a:t>(</a:t>
+            </a:r>
+            <a:r>
+              <a:rPr lang="en-GB" sz="3200" dirty="0">
+                <a:hlinkClick r:id="rId2"/>
+              </a:rPr>
+              <a:t>https://github.com/rjdverse</a:t>
+            </a:r>
+            <a:r>
+              <a:rPr lang="en-GB" sz="3200" dirty="0"/>
+              <a:t>)</a:t>
+            </a:r>
+            <a:endParaRPr lang="en-GB" dirty="0"/>
+          </a:p>
+        </p:txBody>
+      </p:sp>
+      <p:sp>
+        <p:nvSpPr>
+          <p:cNvPr id="14" name="Espace réservé du pied de page 13">
+            <a:extLst>
+              <a:ext uri="{FF2B5EF4-FFF2-40B4-BE49-F238E27FC236}">
+                <a16:creationId xmlns:a16="http://schemas.microsoft.com/office/drawing/2014/main" id="{3F1B12BB-BACD-56B8-2523-D1E9497F5C63}"/>
+              </a:ext>
+            </a:extLst>
+          </p:cNvPr>
+          <p:cNvSpPr>
+            <a:spLocks noGrp="1"/>
+          </p:cNvSpPr>
+          <p:nvPr>
+            <p:ph type="ftr" sz="quarter" idx="4294967295"/>
+          </p:nvPr>
+        </p:nvSpPr>
+        <p:spPr>
+          <a:xfrm>
+            <a:off x="0" y="0"/>
+            <a:ext cx="0" cy="0"/>
+          </a:xfrm>
+        </p:spPr>
+        <p:txBody>
+          <a:bodyPr/>
+          <a:lstStyle/>
+          <a:p>
+            <a:r>
+              <a:rPr lang="en-GB"/>
+              <a:t>JD+ and R</a:t>
+            </a:r>
           </a:p>
         </p:txBody>
       </p:sp>
@@ -10223,8 +10991,8 @@
         </p:nvSpPr>
         <p:spPr>
           <a:xfrm>
-            <a:off x="4544357" y="2639566"/>
-            <a:ext cx="1685570" cy="983767"/>
+            <a:off x="4775941" y="2495820"/>
+            <a:ext cx="1881574" cy="983767"/>
           </a:xfrm>
           <a:prstGeom prst="roundRect">
             <a:avLst/>
@@ -10497,8 +11265,8 @@
         </p:nvCxnSpPr>
         <p:spPr>
           <a:xfrm rot="10800000">
-            <a:off x="5387142" y="3623333"/>
-            <a:ext cx="4134534" cy="1452546"/>
+            <a:off x="5716728" y="3479587"/>
+            <a:ext cx="3804948" cy="1596292"/>
           </a:xfrm>
           <a:prstGeom prst="bentConnector2">
             <a:avLst/>
@@ -10597,7 +11365,7 @@
         </p:nvSpPr>
         <p:spPr>
           <a:xfrm>
-            <a:off x="7642846" y="1682319"/>
+            <a:off x="8293193" y="2380893"/>
             <a:ext cx="2508308" cy="379602"/>
           </a:xfrm>
           <a:prstGeom prst="roundRect">
@@ -10658,8 +11426,8 @@
         </p:nvSpPr>
         <p:spPr>
           <a:xfrm>
-            <a:off x="7268716" y="3049398"/>
-            <a:ext cx="1447520" cy="379602"/>
+            <a:off x="8293193" y="3153222"/>
+            <a:ext cx="2508307" cy="379602"/>
           </a:xfrm>
           <a:prstGeom prst="roundRect">
             <a:avLst/>
@@ -10841,13 +11609,13 @@
         </p:nvSpPr>
         <p:spPr>
           <a:xfrm>
-            <a:off x="7268716" y="2473493"/>
-            <a:ext cx="1447520" cy="379602"/>
+            <a:off x="9521676" y="1409493"/>
+            <a:ext cx="1447520" cy="409242"/>
           </a:xfrm>
           <a:prstGeom prst="roundRect">
             <a:avLst/>
           </a:prstGeom>
-          <a:pattFill prst="ltUpDiag">
+          <a:pattFill prst="zigZag">
             <a:fgClr>
               <a:schemeClr val="accent2"/>
             </a:fgClr>
@@ -10900,19 +11668,18 @@
           <p:cNvCxnSpPr>
             <a:cxnSpLocks/>
             <a:stCxn id="28" idx="1"/>
-            <a:endCxn id="27" idx="0"/>
+            <a:endCxn id="4" idx="3"/>
           </p:cNvCxnSpPr>
           <p:nvPr/>
         </p:nvCxnSpPr>
         <p:spPr>
-          <a:xfrm rot="10800000" flipH="1" flipV="1">
-            <a:off x="7642846" y="1872119"/>
-            <a:ext cx="349630" cy="601373"/>
-          </a:xfrm>
-          <a:prstGeom prst="bentConnector4">
+          <a:xfrm rot="10800000" flipV="1">
+            <a:off x="6657515" y="2570694"/>
+            <a:ext cx="1635678" cy="417010"/>
+          </a:xfrm>
+          <a:prstGeom prst="bentConnector3">
             <a:avLst>
-              <a:gd name="adj1" fmla="val -65383"/>
-              <a:gd name="adj2" fmla="val 65781"/>
+              <a:gd name="adj1" fmla="val 50000"/>
             </a:avLst>
           </a:prstGeom>
           <a:ln>
@@ -10952,8 +11719,8 @@
         </p:nvCxnSpPr>
         <p:spPr>
           <a:xfrm rot="10800000">
-            <a:off x="5387142" y="3623333"/>
-            <a:ext cx="4134534" cy="891512"/>
+            <a:off x="5716728" y="3479587"/>
+            <a:ext cx="3804948" cy="1035258"/>
           </a:xfrm>
           <a:prstGeom prst="bentConnector2">
             <a:avLst/>
@@ -10991,8 +11758,8 @@
         </p:nvSpPr>
         <p:spPr>
           <a:xfrm>
-            <a:off x="1156779" y="5399798"/>
-            <a:ext cx="4773335" cy="369332"/>
+            <a:off x="1145827" y="5399668"/>
+            <a:ext cx="4773335" cy="307777"/>
           </a:xfrm>
           <a:prstGeom prst="rect">
             <a:avLst/>
@@ -11018,10 +11785,7 @@
           </a:bodyPr>
           <a:lstStyle/>
           <a:p>
-            <a:r>
-              <a:rPr lang="en-GB" dirty="0"/>
-              <a:t>https://github.com/rjdverse</a:t>
-            </a:r>
+            <a:endParaRPr lang="en-GB" dirty="0"/>
           </a:p>
         </p:txBody>
       </p:sp>
@@ -11129,19 +11893,18 @@
           <p:cNvCxnSpPr>
             <a:cxnSpLocks/>
             <a:stCxn id="45" idx="3"/>
-            <a:endCxn id="4" idx="0"/>
+            <a:endCxn id="4" idx="1"/>
           </p:cNvCxnSpPr>
           <p:nvPr/>
         </p:nvCxnSpPr>
         <p:spPr>
-          <a:xfrm flipV="1">
-            <a:off x="3581400" y="2639566"/>
-            <a:ext cx="1805742" cy="47456"/>
-          </a:xfrm>
-          <a:prstGeom prst="bentConnector4">
+          <a:xfrm>
+            <a:off x="3581400" y="2687022"/>
+            <a:ext cx="1194541" cy="300682"/>
+          </a:xfrm>
+          <a:prstGeom prst="bentConnector3">
             <a:avLst>
-              <a:gd name="adj1" fmla="val 26664"/>
-              <a:gd name="adj2" fmla="val 874871"/>
+              <a:gd name="adj1" fmla="val 50000"/>
             </a:avLst>
           </a:prstGeom>
           <a:ln>
@@ -11175,17 +11938,19 @@
           <p:cNvCxnSpPr>
             <a:cxnSpLocks/>
             <a:stCxn id="44" idx="3"/>
-            <a:endCxn id="4" idx="0"/>
+            <a:endCxn id="4" idx="1"/>
           </p:cNvCxnSpPr>
           <p:nvPr/>
         </p:nvCxnSpPr>
         <p:spPr>
           <a:xfrm>
             <a:off x="3581401" y="2061921"/>
-            <a:ext cx="1805741" cy="577645"/>
-          </a:xfrm>
-          <a:prstGeom prst="bentConnector2">
-            <a:avLst/>
+            <a:ext cx="1194540" cy="925783"/>
+          </a:xfrm>
+          <a:prstGeom prst="bentConnector3">
+            <a:avLst>
+              <a:gd name="adj1" fmla="val 50000"/>
+            </a:avLst>
           </a:prstGeom>
           <a:ln>
             <a:tailEnd type="triangle"/>
@@ -11224,8 +11989,8 @@
         </p:nvCxnSpPr>
         <p:spPr>
           <a:xfrm flipV="1">
-            <a:off x="3603570" y="3131450"/>
-            <a:ext cx="940787" cy="210164"/>
+            <a:off x="3603570" y="2987704"/>
+            <a:ext cx="1172371" cy="353910"/>
           </a:xfrm>
           <a:prstGeom prst="bentConnector3">
             <a:avLst>
@@ -11262,20 +12027,18 @@
           </p:cNvPr>
           <p:cNvCxnSpPr>
             <a:cxnSpLocks/>
-            <a:stCxn id="10" idx="0"/>
+            <a:stCxn id="10" idx="3"/>
             <a:endCxn id="4" idx="2"/>
           </p:cNvCxnSpPr>
           <p:nvPr/>
         </p:nvCxnSpPr>
         <p:spPr>
-          <a:xfrm rot="5400000" flipH="1" flipV="1">
-            <a:off x="2979133" y="2034699"/>
-            <a:ext cx="819374" cy="3996643"/>
-          </a:xfrm>
-          <a:prstGeom prst="bentConnector3">
-            <a:avLst>
-              <a:gd name="adj1" fmla="val 50000"/>
-            </a:avLst>
+          <a:xfrm flipV="1">
+            <a:off x="2211340" y="3479587"/>
+            <a:ext cx="3505388" cy="1240981"/>
+          </a:xfrm>
+          <a:prstGeom prst="bentConnector2">
+            <a:avLst/>
           </a:prstGeom>
           <a:ln>
             <a:tailEnd type="triangle"/>
@@ -11439,14 +12202,14 @@
           <p:cNvCxnSpPr>
             <a:cxnSpLocks/>
             <a:stCxn id="27" idx="1"/>
-            <a:endCxn id="4" idx="3"/>
+            <a:endCxn id="39" idx="3"/>
           </p:cNvCxnSpPr>
           <p:nvPr/>
         </p:nvCxnSpPr>
         <p:spPr>
-          <a:xfrm rot="10800000" flipV="1">
-            <a:off x="6229928" y="2663294"/>
-            <a:ext cx="1038789" cy="468156"/>
+          <a:xfrm rot="10800000">
+            <a:off x="8209874" y="1612398"/>
+            <a:ext cx="1311803" cy="1716"/>
           </a:xfrm>
           <a:prstGeom prst="bentConnector3">
             <a:avLst>
@@ -11486,7 +12249,7 @@
         </p:nvSpPr>
         <p:spPr>
           <a:xfrm>
-            <a:off x="6543980" y="3651489"/>
+            <a:off x="7814353" y="3694460"/>
             <a:ext cx="2508308" cy="379602"/>
           </a:xfrm>
           <a:prstGeom prst="roundRect">
@@ -11551,8 +12314,8 @@
         </p:nvCxnSpPr>
         <p:spPr>
           <a:xfrm rot="10800000">
-            <a:off x="5387142" y="3623334"/>
-            <a:ext cx="1156838" cy="217957"/>
+            <a:off x="5716729" y="3479587"/>
+            <a:ext cx="2097625" cy="404674"/>
           </a:xfrm>
           <a:prstGeom prst="bentConnector2">
             <a:avLst/>
@@ -11594,8 +12357,8 @@
         </p:nvCxnSpPr>
         <p:spPr>
           <a:xfrm rot="10800000">
-            <a:off x="6229928" y="3131451"/>
-            <a:ext cx="1038789" cy="107749"/>
+            <a:off x="6657515" y="2987705"/>
+            <a:ext cx="1635678" cy="355319"/>
           </a:xfrm>
           <a:prstGeom prst="bentConnector3">
             <a:avLst>
@@ -11623,68 +12386,10 @@
       </p:cxnSp>
       <p:sp>
         <p:nvSpPr>
-          <p:cNvPr id="14" name="Espace réservé du pied de page 13">
-            <a:extLst>
-              <a:ext uri="{FF2B5EF4-FFF2-40B4-BE49-F238E27FC236}">
-                <a16:creationId xmlns:a16="http://schemas.microsoft.com/office/drawing/2014/main" id="{3F1B12BB-BACD-56B8-2523-D1E9497F5C63}"/>
-              </a:ext>
-            </a:extLst>
-          </p:cNvPr>
-          <p:cNvSpPr>
-            <a:spLocks noGrp="1"/>
-          </p:cNvSpPr>
-          <p:nvPr>
-            <p:ph type="ftr" sz="quarter" idx="11"/>
-          </p:nvPr>
-        </p:nvSpPr>
-        <p:spPr/>
-        <p:txBody>
-          <a:bodyPr/>
-          <a:lstStyle/>
-          <a:p>
-            <a:r>
-              <a:rPr lang="en-GB"/>
-              <a:t>JD+ and R</a:t>
-            </a:r>
-          </a:p>
-        </p:txBody>
-      </p:sp>
-    </p:spTree>
-    <p:extLst>
-      <p:ext uri="{BB962C8B-B14F-4D97-AF65-F5344CB8AC3E}">
-        <p14:creationId xmlns:p14="http://schemas.microsoft.com/office/powerpoint/2010/main" val="218856086"/>
-      </p:ext>
-    </p:extLst>
-  </p:cSld>
-  <p:clrMapOvr>
-    <a:masterClrMapping/>
-  </p:clrMapOvr>
-</p:sld>
-</file>
-
-<file path=ppt/slides/slide6.xml><?xml version="1.0" encoding="utf-8"?>
-<p:sld xmlns:a="http://schemas.openxmlformats.org/drawingml/2006/main" xmlns:r="http://schemas.openxmlformats.org/officeDocument/2006/relationships" xmlns:p="http://schemas.openxmlformats.org/presentationml/2006/main">
-  <p:cSld>
-    <p:spTree>
-      <p:nvGrpSpPr>
-        <p:cNvPr id="1" name=""/>
-        <p:cNvGrpSpPr/>
-        <p:nvPr/>
-      </p:nvGrpSpPr>
-      <p:grpSpPr>
-        <a:xfrm>
-          <a:off x="0" y="0"/>
-          <a:ext cx="0" cy="0"/>
-          <a:chOff x="0" y="0"/>
-          <a:chExt cx="0" cy="0"/>
-        </a:xfrm>
-      </p:grpSpPr>
-      <p:sp>
-        <p:nvSpPr>
-          <p:cNvPr id="4" name="Rectangle: Rounded Corners 3">
-            <a:extLst>
-              <a:ext uri="{FF2B5EF4-FFF2-40B4-BE49-F238E27FC236}">
-                <a16:creationId xmlns:a16="http://schemas.microsoft.com/office/drawing/2014/main" id="{DC95649A-2B15-4406-BC52-3E1D58692103}"/>
+          <p:cNvPr id="18" name="Rectangle: Rounded Corners 3">
+            <a:extLst>
+              <a:ext uri="{FF2B5EF4-FFF2-40B4-BE49-F238E27FC236}">
+                <a16:creationId xmlns:a16="http://schemas.microsoft.com/office/drawing/2014/main" id="{AD193B68-363B-8319-CA88-39581CD8CC7C}"/>
               </a:ext>
             </a:extLst>
           </p:cNvPr>
@@ -11693,12 +12398,18 @@
         </p:nvSpPr>
         <p:spPr>
           <a:xfrm>
-            <a:off x="1122243" y="755780"/>
-            <a:ext cx="2508308" cy="652037"/>
+            <a:off x="5013005" y="1384096"/>
+            <a:ext cx="1412926" cy="472109"/>
           </a:xfrm>
           <a:prstGeom prst="roundRect">
             <a:avLst/>
           </a:prstGeom>
+          <a:solidFill>
+            <a:schemeClr val="accent3">
+              <a:lumMod val="60000"/>
+              <a:lumOff val="40000"/>
+            </a:schemeClr>
+          </a:solidFill>
         </p:spPr>
         <p:style>
           <a:lnRef idx="2">
@@ -11722,18 +12433,18 @@
           <a:p>
             <a:pPr algn="ctr"/>
             <a:r>
-              <a:rPr lang="en-GB" dirty="0"/>
-              <a:t>rjd3tramoseats</a:t>
+              <a:rPr lang="en-GB" sz="1600" b="1" dirty="0"/>
+              <a:t>rjd3jars</a:t>
             </a:r>
           </a:p>
         </p:txBody>
       </p:sp>
       <p:sp>
         <p:nvSpPr>
-          <p:cNvPr id="5" name="Rectangle 4">
-            <a:extLst>
-              <a:ext uri="{FF2B5EF4-FFF2-40B4-BE49-F238E27FC236}">
-                <a16:creationId xmlns:a16="http://schemas.microsoft.com/office/drawing/2014/main" id="{10B85320-608E-4822-9C6E-543C4C82FC55}"/>
+          <p:cNvPr id="39" name="Rectangle: Rounded Corners 3">
+            <a:extLst>
+              <a:ext uri="{FF2B5EF4-FFF2-40B4-BE49-F238E27FC236}">
+                <a16:creationId xmlns:a16="http://schemas.microsoft.com/office/drawing/2014/main" id="{2341796C-C6D6-CEEF-E610-0C692F7B291A}"/>
               </a:ext>
             </a:extLst>
           </p:cNvPr>
@@ -11742,24 +12453,30 @@
         </p:nvSpPr>
         <p:spPr>
           <a:xfrm>
-            <a:off x="2957804" y="2070617"/>
-            <a:ext cx="2341984" cy="583163"/>
-          </a:xfrm>
-          <a:prstGeom prst="rect">
+            <a:off x="6796947" y="1376343"/>
+            <a:ext cx="1412926" cy="472109"/>
+          </a:xfrm>
+          <a:prstGeom prst="roundRect">
             <a:avLst/>
           </a:prstGeom>
+          <a:solidFill>
+            <a:schemeClr val="accent3">
+              <a:lumMod val="60000"/>
+              <a:lumOff val="40000"/>
+            </a:schemeClr>
+          </a:solidFill>
         </p:spPr>
         <p:style>
           <a:lnRef idx="2">
-            <a:schemeClr val="accent3">
+            <a:schemeClr val="accent2">
               <a:shade val="50000"/>
             </a:schemeClr>
           </a:lnRef>
           <a:fillRef idx="1">
-            <a:schemeClr val="accent3"/>
+            <a:schemeClr val="accent2"/>
           </a:fillRef>
           <a:effectRef idx="0">
-            <a:schemeClr val="accent3"/>
+            <a:schemeClr val="accent2"/>
           </a:effectRef>
           <a:fontRef idx="minor">
             <a:schemeClr val="lt1"/>
@@ -11771,19 +12488,352 @@
           <a:p>
             <a:pPr algn="ctr"/>
             <a:r>
-              <a:rPr lang="en-GB" dirty="0" err="1"/>
-              <a:t>inst</a:t>
-            </a:r>
-            <a:endParaRPr lang="en-GB" dirty="0"/>
+              <a:rPr lang="en-GB" sz="1600" b="1" dirty="0" err="1"/>
+              <a:t>rjdxjars</a:t>
+            </a:r>
+            <a:endParaRPr lang="en-GB" sz="1600" b="1" dirty="0"/>
+          </a:p>
+        </p:txBody>
+      </p:sp>
+      <p:cxnSp>
+        <p:nvCxnSpPr>
+          <p:cNvPr id="65" name="Connector: Elbow 84">
+            <a:extLst>
+              <a:ext uri="{FF2B5EF4-FFF2-40B4-BE49-F238E27FC236}">
+                <a16:creationId xmlns:a16="http://schemas.microsoft.com/office/drawing/2014/main" id="{DF7B7100-1D93-029E-064C-82E48ED1F142}"/>
+              </a:ext>
+            </a:extLst>
+          </p:cNvPr>
+          <p:cNvCxnSpPr>
+            <a:cxnSpLocks/>
+            <a:stCxn id="28" idx="1"/>
+            <a:endCxn id="39" idx="2"/>
+          </p:cNvCxnSpPr>
+          <p:nvPr/>
+        </p:nvCxnSpPr>
+        <p:spPr>
+          <a:xfrm rot="10800000">
+            <a:off x="7503411" y="1848452"/>
+            <a:ext cx="789783" cy="722242"/>
+          </a:xfrm>
+          <a:prstGeom prst="bentConnector2">
+            <a:avLst/>
+          </a:prstGeom>
+          <a:ln>
+            <a:tailEnd type="triangle"/>
+          </a:ln>
+        </p:spPr>
+        <p:style>
+          <a:lnRef idx="3">
+            <a:schemeClr val="dk1"/>
+          </a:lnRef>
+          <a:fillRef idx="0">
+            <a:schemeClr val="dk1"/>
+          </a:fillRef>
+          <a:effectRef idx="2">
+            <a:schemeClr val="dk1"/>
+          </a:effectRef>
+          <a:fontRef idx="minor">
+            <a:schemeClr val="tx1"/>
+          </a:fontRef>
+        </p:style>
+      </p:cxnSp>
+      <p:cxnSp>
+        <p:nvCxnSpPr>
+          <p:cNvPr id="75" name="Connector: Elbow 156">
+            <a:extLst>
+              <a:ext uri="{FF2B5EF4-FFF2-40B4-BE49-F238E27FC236}">
+                <a16:creationId xmlns:a16="http://schemas.microsoft.com/office/drawing/2014/main" id="{9CA3BC64-E8EA-1D1E-DEE4-0EF796011971}"/>
+              </a:ext>
+            </a:extLst>
+          </p:cNvPr>
+          <p:cNvCxnSpPr>
+            <a:cxnSpLocks/>
+            <a:stCxn id="39" idx="1"/>
+            <a:endCxn id="18" idx="3"/>
+          </p:cNvCxnSpPr>
+          <p:nvPr/>
+        </p:nvCxnSpPr>
+        <p:spPr>
+          <a:xfrm rot="10800000" flipV="1">
+            <a:off x="6425931" y="1612397"/>
+            <a:ext cx="371016" cy="7753"/>
+          </a:xfrm>
+          <a:prstGeom prst="bentConnector3">
+            <a:avLst>
+              <a:gd name="adj1" fmla="val 50000"/>
+            </a:avLst>
+          </a:prstGeom>
+          <a:ln>
+            <a:tailEnd type="triangle"/>
+          </a:ln>
+        </p:spPr>
+        <p:style>
+          <a:lnRef idx="3">
+            <a:schemeClr val="dk1"/>
+          </a:lnRef>
+          <a:fillRef idx="0">
+            <a:schemeClr val="dk1"/>
+          </a:fillRef>
+          <a:effectRef idx="2">
+            <a:schemeClr val="dk1"/>
+          </a:effectRef>
+          <a:fontRef idx="minor">
+            <a:schemeClr val="tx1"/>
+          </a:fontRef>
+        </p:style>
+      </p:cxnSp>
+      <p:cxnSp>
+        <p:nvCxnSpPr>
+          <p:cNvPr id="80" name="Connector: Elbow 156">
+            <a:extLst>
+              <a:ext uri="{FF2B5EF4-FFF2-40B4-BE49-F238E27FC236}">
+                <a16:creationId xmlns:a16="http://schemas.microsoft.com/office/drawing/2014/main" id="{826E563D-54A7-FE49-42B9-811DEA963AE1}"/>
+              </a:ext>
+            </a:extLst>
+          </p:cNvPr>
+          <p:cNvCxnSpPr>
+            <a:cxnSpLocks/>
+            <a:stCxn id="4" idx="0"/>
+            <a:endCxn id="18" idx="2"/>
+          </p:cNvCxnSpPr>
+          <p:nvPr/>
+        </p:nvCxnSpPr>
+        <p:spPr>
+          <a:xfrm rot="5400000" flipH="1" flipV="1">
+            <a:off x="5398291" y="2174643"/>
+            <a:ext cx="639615" cy="2740"/>
+          </a:xfrm>
+          <a:prstGeom prst="bentConnector3">
+            <a:avLst>
+              <a:gd name="adj1" fmla="val 50000"/>
+            </a:avLst>
+          </a:prstGeom>
+          <a:ln>
+            <a:tailEnd type="triangle"/>
+          </a:ln>
+        </p:spPr>
+        <p:style>
+          <a:lnRef idx="3">
+            <a:schemeClr val="dk1"/>
+          </a:lnRef>
+          <a:fillRef idx="0">
+            <a:schemeClr val="dk1"/>
+          </a:fillRef>
+          <a:effectRef idx="2">
+            <a:schemeClr val="dk1"/>
+          </a:effectRef>
+          <a:fontRef idx="minor">
+            <a:schemeClr val="tx1"/>
+          </a:fontRef>
+        </p:style>
+      </p:cxnSp>
+      <p:cxnSp>
+        <p:nvCxnSpPr>
+          <p:cNvPr id="118" name="Connector: Elbow 156">
+            <a:extLst>
+              <a:ext uri="{FF2B5EF4-FFF2-40B4-BE49-F238E27FC236}">
+                <a16:creationId xmlns:a16="http://schemas.microsoft.com/office/drawing/2014/main" id="{418BE242-CDA0-BB42-BA72-1FB0EAE01A53}"/>
+              </a:ext>
+            </a:extLst>
+          </p:cNvPr>
+          <p:cNvCxnSpPr>
+            <a:cxnSpLocks/>
+            <a:stCxn id="29" idx="0"/>
+            <a:endCxn id="28" idx="2"/>
+          </p:cNvCxnSpPr>
+          <p:nvPr/>
+        </p:nvCxnSpPr>
+        <p:spPr>
+          <a:xfrm rot="5400000" flipH="1" flipV="1">
+            <a:off x="9350984" y="2956859"/>
+            <a:ext cx="392727" cy="12700"/>
+          </a:xfrm>
+          <a:prstGeom prst="bentConnector3">
+            <a:avLst>
+              <a:gd name="adj1" fmla="val 50000"/>
+            </a:avLst>
+          </a:prstGeom>
+          <a:ln>
+            <a:tailEnd type="triangle"/>
+          </a:ln>
+        </p:spPr>
+        <p:style>
+          <a:lnRef idx="3">
+            <a:schemeClr val="dk1"/>
+          </a:lnRef>
+          <a:fillRef idx="0">
+            <a:schemeClr val="dk1"/>
+          </a:fillRef>
+          <a:effectRef idx="2">
+            <a:schemeClr val="dk1"/>
+          </a:effectRef>
+          <a:fontRef idx="minor">
+            <a:schemeClr val="tx1"/>
+          </a:fontRef>
+        </p:style>
+      </p:cxnSp>
+    </p:spTree>
+    <p:extLst>
+      <p:ext uri="{BB962C8B-B14F-4D97-AF65-F5344CB8AC3E}">
+        <p14:creationId xmlns:p14="http://schemas.microsoft.com/office/powerpoint/2010/main" val="218856086"/>
+      </p:ext>
+    </p:extLst>
+  </p:cSld>
+  <p:clrMapOvr>
+    <a:masterClrMapping/>
+  </p:clrMapOvr>
+</p:sld>
+</file>
+
+<file path=ppt/slides/slide6.xml><?xml version="1.0" encoding="utf-8"?>
+<p:sld xmlns:a="http://schemas.openxmlformats.org/drawingml/2006/main" xmlns:r="http://schemas.openxmlformats.org/officeDocument/2006/relationships" xmlns:p="http://schemas.openxmlformats.org/presentationml/2006/main">
+  <p:cSld>
+    <p:spTree>
+      <p:nvGrpSpPr>
+        <p:cNvPr id="1" name="">
+          <a:extLst>
+            <a:ext uri="{FF2B5EF4-FFF2-40B4-BE49-F238E27FC236}">
+              <a16:creationId xmlns:a16="http://schemas.microsoft.com/office/drawing/2014/main" id="{5DFFF910-6B8D-30D2-7D97-F3F11415215A}"/>
+            </a:ext>
+          </a:extLst>
+        </p:cNvPr>
+        <p:cNvGrpSpPr/>
+        <p:nvPr/>
+      </p:nvGrpSpPr>
+      <p:grpSpPr>
+        <a:xfrm>
+          <a:off x="0" y="0"/>
+          <a:ext cx="0" cy="0"/>
+          <a:chOff x="0" y="0"/>
+          <a:chExt cx="0" cy="0"/>
+        </a:xfrm>
+      </p:grpSpPr>
+      <p:sp>
+        <p:nvSpPr>
+          <p:cNvPr id="5" name="Ellipse 4">
+            <a:extLst>
+              <a:ext uri="{FF2B5EF4-FFF2-40B4-BE49-F238E27FC236}">
+                <a16:creationId xmlns:a16="http://schemas.microsoft.com/office/drawing/2014/main" id="{07AAD759-6FC1-F7A9-330C-6297D65A4DAF}"/>
+              </a:ext>
+            </a:extLst>
+          </p:cNvPr>
+          <p:cNvSpPr/>
+          <p:nvPr/>
+        </p:nvSpPr>
+        <p:spPr>
+          <a:xfrm>
+            <a:off x="4582633" y="1084521"/>
+            <a:ext cx="4157330" cy="1130861"/>
+          </a:xfrm>
+          <a:prstGeom prst="ellipse">
+            <a:avLst/>
+          </a:prstGeom>
+          <a:ln w="57150"/>
+        </p:spPr>
+        <p:style>
+          <a:lnRef idx="2">
+            <a:schemeClr val="accent6"/>
+          </a:lnRef>
+          <a:fillRef idx="1">
+            <a:schemeClr val="lt1"/>
+          </a:fillRef>
+          <a:effectRef idx="0">
+            <a:schemeClr val="accent6"/>
+          </a:effectRef>
+          <a:fontRef idx="minor">
+            <a:schemeClr val="dk1"/>
+          </a:fontRef>
+        </p:style>
+        <p:txBody>
+          <a:bodyPr rtlCol="0" anchor="ctr"/>
+          <a:lstStyle/>
+          <a:p>
+            <a:pPr algn="ctr"/>
+            <a:endParaRPr lang="en-GB"/>
           </a:p>
         </p:txBody>
       </p:sp>
       <p:sp>
         <p:nvSpPr>
-          <p:cNvPr id="6" name="Rectangle 5">
-            <a:extLst>
-              <a:ext uri="{FF2B5EF4-FFF2-40B4-BE49-F238E27FC236}">
-                <a16:creationId xmlns:a16="http://schemas.microsoft.com/office/drawing/2014/main" id="{74E91856-49EC-4A97-86FA-E3693A09621C}"/>
+          <p:cNvPr id="2" name="Title 1">
+            <a:extLst>
+              <a:ext uri="{FF2B5EF4-FFF2-40B4-BE49-F238E27FC236}">
+                <a16:creationId xmlns:a16="http://schemas.microsoft.com/office/drawing/2014/main" id="{495ECEA5-6DBB-34F4-E51C-483794DB0A30}"/>
+              </a:ext>
+            </a:extLst>
+          </p:cNvPr>
+          <p:cNvSpPr>
+            <a:spLocks noGrp="1"/>
+          </p:cNvSpPr>
+          <p:nvPr>
+            <p:ph type="title"/>
+          </p:nvPr>
+        </p:nvSpPr>
+        <p:spPr/>
+        <p:txBody>
+          <a:bodyPr/>
+          <a:lstStyle/>
+          <a:p>
+            <a:r>
+              <a:rPr lang="en-GB" dirty="0"/>
+              <a:t>4. </a:t>
+            </a:r>
+            <a:r>
+              <a:rPr lang="en-GB" dirty="0" err="1"/>
+              <a:t>rjdverse</a:t>
+            </a:r>
+            <a:r>
+              <a:rPr lang="en-GB" dirty="0"/>
+              <a:t>: Overview </a:t>
+            </a:r>
+            <a:r>
+              <a:rPr lang="en-GB" sz="3200" dirty="0"/>
+              <a:t>(Java libraries)</a:t>
+            </a:r>
+            <a:endParaRPr lang="en-GB" dirty="0"/>
+          </a:p>
+        </p:txBody>
+      </p:sp>
+      <p:sp>
+        <p:nvSpPr>
+          <p:cNvPr id="14" name="Espace réservé du pied de page 13">
+            <a:extLst>
+              <a:ext uri="{FF2B5EF4-FFF2-40B4-BE49-F238E27FC236}">
+                <a16:creationId xmlns:a16="http://schemas.microsoft.com/office/drawing/2014/main" id="{439884CC-E1B4-19D5-98C1-96F862148EB7}"/>
+              </a:ext>
+            </a:extLst>
+          </p:cNvPr>
+          <p:cNvSpPr>
+            <a:spLocks noGrp="1"/>
+          </p:cNvSpPr>
+          <p:nvPr>
+            <p:ph type="ftr" sz="quarter" idx="4294967295"/>
+          </p:nvPr>
+        </p:nvSpPr>
+        <p:spPr>
+          <a:xfrm>
+            <a:off x="0" y="0"/>
+            <a:ext cx="0" cy="0"/>
+          </a:xfrm>
+        </p:spPr>
+        <p:txBody>
+          <a:bodyPr/>
+          <a:lstStyle/>
+          <a:p>
+            <a:r>
+              <a:rPr lang="en-GB"/>
+              <a:t>JD+ and R</a:t>
+            </a:r>
+          </a:p>
+        </p:txBody>
+      </p:sp>
+      <p:sp>
+        <p:nvSpPr>
+          <p:cNvPr id="4" name="Rectangle: Rounded Corners 3">
+            <a:extLst>
+              <a:ext uri="{FF2B5EF4-FFF2-40B4-BE49-F238E27FC236}">
+                <a16:creationId xmlns:a16="http://schemas.microsoft.com/office/drawing/2014/main" id="{BEAFA497-DC02-9511-CF2A-046CA985BBD1}"/>
               </a:ext>
             </a:extLst>
           </p:cNvPr>
@@ -11792,24 +12842,24 @@
         </p:nvSpPr>
         <p:spPr>
           <a:xfrm>
-            <a:off x="6214188" y="1407816"/>
-            <a:ext cx="2341984" cy="583163"/>
-          </a:xfrm>
-          <a:prstGeom prst="rect">
+            <a:off x="4775941" y="2495820"/>
+            <a:ext cx="1881574" cy="983767"/>
+          </a:xfrm>
+          <a:prstGeom prst="roundRect">
             <a:avLst/>
           </a:prstGeom>
         </p:spPr>
         <p:style>
           <a:lnRef idx="2">
-            <a:schemeClr val="accent3">
+            <a:schemeClr val="accent2">
               <a:shade val="50000"/>
             </a:schemeClr>
           </a:lnRef>
           <a:fillRef idx="1">
-            <a:schemeClr val="accent3"/>
+            <a:schemeClr val="accent2"/>
           </a:fillRef>
           <a:effectRef idx="0">
-            <a:schemeClr val="accent3"/>
+            <a:schemeClr val="accent2"/>
           </a:effectRef>
           <a:fontRef idx="minor">
             <a:schemeClr val="lt1"/>
@@ -11821,32 +12871,253 @@
           <a:p>
             <a:pPr algn="ctr"/>
             <a:r>
+              <a:rPr lang="en-GB" sz="2400" b="1" dirty="0"/>
+              <a:t>rjd3toolkit</a:t>
+            </a:r>
+          </a:p>
+        </p:txBody>
+      </p:sp>
+      <p:sp>
+        <p:nvSpPr>
+          <p:cNvPr id="10" name="Rectangle: Rounded Corners 9">
+            <a:extLst>
+              <a:ext uri="{FF2B5EF4-FFF2-40B4-BE49-F238E27FC236}">
+                <a16:creationId xmlns:a16="http://schemas.microsoft.com/office/drawing/2014/main" id="{A9E5770E-BD39-6031-7E61-BE820E1E3C43}"/>
+              </a:ext>
+            </a:extLst>
+          </p:cNvPr>
+          <p:cNvSpPr/>
+          <p:nvPr/>
+        </p:nvSpPr>
+        <p:spPr>
+          <a:xfrm>
+            <a:off x="569658" y="4442707"/>
+            <a:ext cx="1641682" cy="555721"/>
+          </a:xfrm>
+          <a:prstGeom prst="roundRect">
+            <a:avLst/>
+          </a:prstGeom>
+          <a:ln>
+            <a:solidFill>
+              <a:schemeClr val="bg1"/>
+            </a:solidFill>
+          </a:ln>
+        </p:spPr>
+        <p:style>
+          <a:lnRef idx="2">
+            <a:schemeClr val="accent4">
+              <a:shade val="50000"/>
+            </a:schemeClr>
+          </a:lnRef>
+          <a:fillRef idx="1">
+            <a:schemeClr val="accent4"/>
+          </a:fillRef>
+          <a:effectRef idx="0">
+            <a:schemeClr val="accent4"/>
+          </a:effectRef>
+          <a:fontRef idx="minor">
+            <a:schemeClr val="lt1"/>
+          </a:fontRef>
+        </p:style>
+        <p:txBody>
+          <a:bodyPr rtlCol="0" anchor="ctr"/>
+          <a:lstStyle/>
+          <a:p>
+            <a:pPr algn="ctr"/>
+            <a:r>
               <a:rPr lang="en-GB" dirty="0"/>
-              <a:t>Proto files</a:t>
+              <a:t>rjd3workspace</a:t>
+            </a:r>
+          </a:p>
+        </p:txBody>
+      </p:sp>
+      <p:sp>
+        <p:nvSpPr>
+          <p:cNvPr id="37" name="Rectangle: Rounded Corners 36">
+            <a:extLst>
+              <a:ext uri="{FF2B5EF4-FFF2-40B4-BE49-F238E27FC236}">
+                <a16:creationId xmlns:a16="http://schemas.microsoft.com/office/drawing/2014/main" id="{DEC454B7-5300-5498-B664-CE6B0ECBF61A}"/>
+              </a:ext>
+            </a:extLst>
+          </p:cNvPr>
+          <p:cNvSpPr/>
+          <p:nvPr/>
+        </p:nvSpPr>
+        <p:spPr>
+          <a:xfrm>
+            <a:off x="9521676" y="4886078"/>
+            <a:ext cx="2508308" cy="379602"/>
+          </a:xfrm>
+          <a:prstGeom prst="roundRect">
+            <a:avLst/>
+          </a:prstGeom>
+          <a:solidFill>
+            <a:schemeClr val="bg2">
+              <a:lumMod val="75000"/>
+            </a:schemeClr>
+          </a:solidFill>
+          <a:ln>
+            <a:solidFill>
+              <a:schemeClr val="bg1"/>
+            </a:solidFill>
+          </a:ln>
+        </p:spPr>
+        <p:style>
+          <a:lnRef idx="2">
+            <a:schemeClr val="accent2">
+              <a:shade val="50000"/>
+            </a:schemeClr>
+          </a:lnRef>
+          <a:fillRef idx="1">
+            <a:schemeClr val="accent2"/>
+          </a:fillRef>
+          <a:effectRef idx="0">
+            <a:schemeClr val="accent2"/>
+          </a:effectRef>
+          <a:fontRef idx="minor">
+            <a:schemeClr val="lt1"/>
+          </a:fontRef>
+        </p:style>
+        <p:txBody>
+          <a:bodyPr rtlCol="0" anchor="ctr"/>
+          <a:lstStyle/>
+          <a:p>
+            <a:pPr algn="ctr"/>
+            <a:r>
+              <a:rPr lang="en-GB" dirty="0">
+                <a:solidFill>
+                  <a:schemeClr val="bg1"/>
+                </a:solidFill>
+              </a:rPr>
+              <a:t>rjd3bench</a:t>
+            </a:r>
+          </a:p>
+        </p:txBody>
+      </p:sp>
+      <p:sp>
+        <p:nvSpPr>
+          <p:cNvPr id="44" name="Rectangle: Rounded Corners 43">
+            <a:extLst>
+              <a:ext uri="{FF2B5EF4-FFF2-40B4-BE49-F238E27FC236}">
+                <a16:creationId xmlns:a16="http://schemas.microsoft.com/office/drawing/2014/main" id="{912A380A-FB90-636C-040D-979809341CCE}"/>
+              </a:ext>
+            </a:extLst>
+          </p:cNvPr>
+          <p:cNvSpPr/>
+          <p:nvPr/>
+        </p:nvSpPr>
+        <p:spPr>
+          <a:xfrm>
+            <a:off x="1699826" y="1839012"/>
+            <a:ext cx="1881575" cy="445818"/>
+          </a:xfrm>
+          <a:prstGeom prst="roundRect">
+            <a:avLst/>
+          </a:prstGeom>
+          <a:solidFill>
+            <a:schemeClr val="accent2"/>
+          </a:solidFill>
+        </p:spPr>
+        <p:style>
+          <a:lnRef idx="2">
+            <a:schemeClr val="accent2">
+              <a:shade val="50000"/>
+            </a:schemeClr>
+          </a:lnRef>
+          <a:fillRef idx="1">
+            <a:schemeClr val="accent2"/>
+          </a:fillRef>
+          <a:effectRef idx="0">
+            <a:schemeClr val="accent2"/>
+          </a:effectRef>
+          <a:fontRef idx="minor">
+            <a:schemeClr val="lt1"/>
+          </a:fontRef>
+        </p:style>
+        <p:txBody>
+          <a:bodyPr rtlCol="0" anchor="ctr"/>
+          <a:lstStyle/>
+          <a:p>
+            <a:pPr algn="ctr"/>
+            <a:r>
+              <a:rPr lang="en-GB" dirty="0"/>
+              <a:t>rjd3tramoseats</a:t>
+            </a:r>
+          </a:p>
+        </p:txBody>
+      </p:sp>
+      <p:sp>
+        <p:nvSpPr>
+          <p:cNvPr id="45" name="Rectangle: Rounded Corners 44">
+            <a:extLst>
+              <a:ext uri="{FF2B5EF4-FFF2-40B4-BE49-F238E27FC236}">
+                <a16:creationId xmlns:a16="http://schemas.microsoft.com/office/drawing/2014/main" id="{FB64B483-1C90-5B5A-7186-EA20AA6EC231}"/>
+              </a:ext>
+            </a:extLst>
+          </p:cNvPr>
+          <p:cNvSpPr/>
+          <p:nvPr/>
+        </p:nvSpPr>
+        <p:spPr>
+          <a:xfrm>
+            <a:off x="1699826" y="2500443"/>
+            <a:ext cx="1881574" cy="373157"/>
+          </a:xfrm>
+          <a:prstGeom prst="roundRect">
+            <a:avLst/>
+          </a:prstGeom>
+          <a:solidFill>
+            <a:schemeClr val="accent2"/>
+          </a:solidFill>
+        </p:spPr>
+        <p:style>
+          <a:lnRef idx="2">
+            <a:schemeClr val="accent2">
+              <a:shade val="50000"/>
+            </a:schemeClr>
+          </a:lnRef>
+          <a:fillRef idx="1">
+            <a:schemeClr val="accent2"/>
+          </a:fillRef>
+          <a:effectRef idx="0">
+            <a:schemeClr val="accent2"/>
+          </a:effectRef>
+          <a:fontRef idx="minor">
+            <a:schemeClr val="lt1"/>
+          </a:fontRef>
+        </p:style>
+        <p:txBody>
+          <a:bodyPr rtlCol="0" anchor="ctr"/>
+          <a:lstStyle/>
+          <a:p>
+            <a:pPr algn="ctr"/>
+            <a:r>
+              <a:rPr lang="en-GB" dirty="0"/>
+              <a:t>rjd3x13</a:t>
             </a:r>
           </a:p>
         </p:txBody>
       </p:sp>
       <p:cxnSp>
         <p:nvCxnSpPr>
-          <p:cNvPr id="8" name="Connector: Elbow 7">
-            <a:extLst>
-              <a:ext uri="{FF2B5EF4-FFF2-40B4-BE49-F238E27FC236}">
-                <a16:creationId xmlns:a16="http://schemas.microsoft.com/office/drawing/2014/main" id="{D8ACB735-E3A2-40CD-ABBF-66E7282ABAF1}"/>
+          <p:cNvPr id="58" name="Connector: Elbow 57">
+            <a:extLst>
+              <a:ext uri="{FF2B5EF4-FFF2-40B4-BE49-F238E27FC236}">
+                <a16:creationId xmlns:a16="http://schemas.microsoft.com/office/drawing/2014/main" id="{5C61032E-5490-4476-7D20-6859AEBCB88C}"/>
               </a:ext>
             </a:extLst>
           </p:cNvPr>
           <p:cNvCxnSpPr>
             <a:cxnSpLocks/>
-            <a:stCxn id="4" idx="2"/>
-            <a:endCxn id="5" idx="1"/>
+            <a:stCxn id="37" idx="1"/>
+            <a:endCxn id="4" idx="2"/>
           </p:cNvCxnSpPr>
           <p:nvPr/>
         </p:nvCxnSpPr>
         <p:spPr>
-          <a:xfrm rot="16200000" flipH="1">
-            <a:off x="2189909" y="1594304"/>
-            <a:ext cx="954382" cy="581407"/>
+          <a:xfrm rot="10800000">
+            <a:off x="5716728" y="3479587"/>
+            <a:ext cx="3804948" cy="1596292"/>
           </a:xfrm>
           <a:prstGeom prst="bentConnector2">
             <a:avLst/>
@@ -11857,13 +13128,424 @@
         </p:spPr>
         <p:style>
           <a:lnRef idx="3">
-            <a:schemeClr val="accent1"/>
+            <a:schemeClr val="dk1"/>
           </a:lnRef>
           <a:fillRef idx="0">
-            <a:schemeClr val="accent1"/>
+            <a:schemeClr val="dk1"/>
           </a:fillRef>
           <a:effectRef idx="2">
-            <a:schemeClr val="accent1"/>
+            <a:schemeClr val="dk1"/>
+          </a:effectRef>
+          <a:fontRef idx="minor">
+            <a:schemeClr val="tx1"/>
+          </a:fontRef>
+        </p:style>
+      </p:cxnSp>
+      <p:sp>
+        <p:nvSpPr>
+          <p:cNvPr id="26" name="Rectangle: Rounded Corners 25">
+            <a:extLst>
+              <a:ext uri="{FF2B5EF4-FFF2-40B4-BE49-F238E27FC236}">
+                <a16:creationId xmlns:a16="http://schemas.microsoft.com/office/drawing/2014/main" id="{49DAB940-EA86-69AF-1DF5-2C893EFDB16A}"/>
+              </a:ext>
+            </a:extLst>
+          </p:cNvPr>
+          <p:cNvSpPr/>
+          <p:nvPr/>
+        </p:nvSpPr>
+        <p:spPr>
+          <a:xfrm>
+            <a:off x="9521676" y="5479226"/>
+            <a:ext cx="2508308" cy="379602"/>
+          </a:xfrm>
+          <a:prstGeom prst="roundRect">
+            <a:avLst/>
+          </a:prstGeom>
+          <a:pattFill prst="pct5">
+            <a:fgClr>
+              <a:schemeClr val="accent2"/>
+            </a:fgClr>
+            <a:bgClr>
+              <a:schemeClr val="bg1"/>
+            </a:bgClr>
+          </a:pattFill>
+        </p:spPr>
+        <p:style>
+          <a:lnRef idx="2">
+            <a:schemeClr val="accent2">
+              <a:shade val="50000"/>
+            </a:schemeClr>
+          </a:lnRef>
+          <a:fillRef idx="1">
+            <a:schemeClr val="accent2"/>
+          </a:fillRef>
+          <a:effectRef idx="0">
+            <a:schemeClr val="accent2"/>
+          </a:effectRef>
+          <a:fontRef idx="minor">
+            <a:schemeClr val="lt1"/>
+          </a:fontRef>
+        </p:style>
+        <p:txBody>
+          <a:bodyPr rtlCol="0" anchor="ctr"/>
+          <a:lstStyle/>
+          <a:p>
+            <a:pPr algn="ctr"/>
+            <a:r>
+              <a:rPr lang="en-GB" dirty="0">
+                <a:solidFill>
+                  <a:schemeClr val="tx1"/>
+                </a:solidFill>
+              </a:rPr>
+              <a:t>rjd3nowcasting</a:t>
+            </a:r>
+          </a:p>
+        </p:txBody>
+      </p:sp>
+      <p:sp>
+        <p:nvSpPr>
+          <p:cNvPr id="28" name="Rectangle: Rounded Corners 27">
+            <a:extLst>
+              <a:ext uri="{FF2B5EF4-FFF2-40B4-BE49-F238E27FC236}">
+                <a16:creationId xmlns:a16="http://schemas.microsoft.com/office/drawing/2014/main" id="{62658107-2732-8B64-29AF-669EF980000A}"/>
+              </a:ext>
+            </a:extLst>
+          </p:cNvPr>
+          <p:cNvSpPr/>
+          <p:nvPr/>
+        </p:nvSpPr>
+        <p:spPr>
+          <a:xfrm>
+            <a:off x="8293193" y="2380893"/>
+            <a:ext cx="2508308" cy="379602"/>
+          </a:xfrm>
+          <a:prstGeom prst="roundRect">
+            <a:avLst/>
+          </a:prstGeom>
+          <a:pattFill prst="ltUpDiag">
+            <a:fgClr>
+              <a:schemeClr val="accent2"/>
+            </a:fgClr>
+            <a:bgClr>
+              <a:schemeClr val="bg1"/>
+            </a:bgClr>
+          </a:pattFill>
+        </p:spPr>
+        <p:style>
+          <a:lnRef idx="2">
+            <a:schemeClr val="accent2">
+              <a:shade val="50000"/>
+            </a:schemeClr>
+          </a:lnRef>
+          <a:fillRef idx="1">
+            <a:schemeClr val="accent2"/>
+          </a:fillRef>
+          <a:effectRef idx="0">
+            <a:schemeClr val="accent2"/>
+          </a:effectRef>
+          <a:fontRef idx="minor">
+            <a:schemeClr val="lt1"/>
+          </a:fontRef>
+        </p:style>
+        <p:txBody>
+          <a:bodyPr rtlCol="0" anchor="ctr"/>
+          <a:lstStyle/>
+          <a:p>
+            <a:pPr algn="ctr"/>
+            <a:r>
+              <a:rPr lang="en-GB" dirty="0">
+                <a:solidFill>
+                  <a:schemeClr val="tx1"/>
+                </a:solidFill>
+              </a:rPr>
+              <a:t>rjd3highfreq</a:t>
+            </a:r>
+          </a:p>
+        </p:txBody>
+      </p:sp>
+      <p:sp>
+        <p:nvSpPr>
+          <p:cNvPr id="29" name="Rectangle: Rounded Corners 28">
+            <a:extLst>
+              <a:ext uri="{FF2B5EF4-FFF2-40B4-BE49-F238E27FC236}">
+                <a16:creationId xmlns:a16="http://schemas.microsoft.com/office/drawing/2014/main" id="{2D76287C-9BED-455B-21D2-AD9630AF2A13}"/>
+              </a:ext>
+            </a:extLst>
+          </p:cNvPr>
+          <p:cNvSpPr/>
+          <p:nvPr/>
+        </p:nvSpPr>
+        <p:spPr>
+          <a:xfrm>
+            <a:off x="8293193" y="3153222"/>
+            <a:ext cx="2508307" cy="379602"/>
+          </a:xfrm>
+          <a:prstGeom prst="roundRect">
+            <a:avLst/>
+          </a:prstGeom>
+          <a:pattFill prst="ltUpDiag">
+            <a:fgClr>
+              <a:schemeClr val="accent2"/>
+            </a:fgClr>
+            <a:bgClr>
+              <a:schemeClr val="bg1"/>
+            </a:bgClr>
+          </a:pattFill>
+        </p:spPr>
+        <p:style>
+          <a:lnRef idx="2">
+            <a:schemeClr val="accent2">
+              <a:shade val="50000"/>
+            </a:schemeClr>
+          </a:lnRef>
+          <a:fillRef idx="1">
+            <a:schemeClr val="accent2"/>
+          </a:fillRef>
+          <a:effectRef idx="0">
+            <a:schemeClr val="accent2"/>
+          </a:effectRef>
+          <a:fontRef idx="minor">
+            <a:schemeClr val="lt1"/>
+          </a:fontRef>
+        </p:style>
+        <p:txBody>
+          <a:bodyPr rtlCol="0" anchor="ctr"/>
+          <a:lstStyle/>
+          <a:p>
+            <a:pPr algn="ctr"/>
+            <a:r>
+              <a:rPr lang="en-GB" dirty="0">
+                <a:solidFill>
+                  <a:schemeClr val="tx1"/>
+                </a:solidFill>
+              </a:rPr>
+              <a:t>rjd3stl</a:t>
+            </a:r>
+          </a:p>
+        </p:txBody>
+      </p:sp>
+      <p:sp>
+        <p:nvSpPr>
+          <p:cNvPr id="30" name="Rectangle: Rounded Corners 29">
+            <a:extLst>
+              <a:ext uri="{FF2B5EF4-FFF2-40B4-BE49-F238E27FC236}">
+                <a16:creationId xmlns:a16="http://schemas.microsoft.com/office/drawing/2014/main" id="{8A655752-E9ED-99AD-7CD9-0B2F1494D9C2}"/>
+              </a:ext>
+            </a:extLst>
+          </p:cNvPr>
+          <p:cNvSpPr/>
+          <p:nvPr/>
+        </p:nvSpPr>
+        <p:spPr>
+          <a:xfrm>
+            <a:off x="9521676" y="5997218"/>
+            <a:ext cx="2508308" cy="379602"/>
+          </a:xfrm>
+          <a:prstGeom prst="roundRect">
+            <a:avLst/>
+          </a:prstGeom>
+          <a:pattFill prst="pct5">
+            <a:fgClr>
+              <a:schemeClr val="accent2"/>
+            </a:fgClr>
+            <a:bgClr>
+              <a:schemeClr val="bg1"/>
+            </a:bgClr>
+          </a:pattFill>
+        </p:spPr>
+        <p:style>
+          <a:lnRef idx="2">
+            <a:schemeClr val="accent2">
+              <a:shade val="50000"/>
+            </a:schemeClr>
+          </a:lnRef>
+          <a:fillRef idx="1">
+            <a:schemeClr val="accent2"/>
+          </a:fillRef>
+          <a:effectRef idx="0">
+            <a:schemeClr val="accent2"/>
+          </a:effectRef>
+          <a:fontRef idx="minor">
+            <a:schemeClr val="lt1"/>
+          </a:fontRef>
+        </p:style>
+        <p:txBody>
+          <a:bodyPr rtlCol="0" anchor="ctr"/>
+          <a:lstStyle/>
+          <a:p>
+            <a:pPr algn="ctr"/>
+            <a:r>
+              <a:rPr lang="en-GB" dirty="0">
+                <a:solidFill>
+                  <a:schemeClr val="tx1"/>
+                </a:solidFill>
+              </a:rPr>
+              <a:t>rjd3cycle</a:t>
+            </a:r>
+          </a:p>
+        </p:txBody>
+      </p:sp>
+      <p:sp>
+        <p:nvSpPr>
+          <p:cNvPr id="31" name="Rectangle: Rounded Corners 30">
+            <a:extLst>
+              <a:ext uri="{FF2B5EF4-FFF2-40B4-BE49-F238E27FC236}">
+                <a16:creationId xmlns:a16="http://schemas.microsoft.com/office/drawing/2014/main" id="{7E82D238-C307-07B3-A2C1-3C188B46A2AB}"/>
+              </a:ext>
+            </a:extLst>
+          </p:cNvPr>
+          <p:cNvSpPr/>
+          <p:nvPr/>
+        </p:nvSpPr>
+        <p:spPr>
+          <a:xfrm>
+            <a:off x="9521676" y="4325044"/>
+            <a:ext cx="2508308" cy="379602"/>
+          </a:xfrm>
+          <a:prstGeom prst="roundRect">
+            <a:avLst/>
+          </a:prstGeom>
+          <a:solidFill>
+            <a:schemeClr val="accent3"/>
+          </a:solidFill>
+          <a:ln>
+            <a:solidFill>
+              <a:schemeClr val="bg1"/>
+            </a:solidFill>
+          </a:ln>
+        </p:spPr>
+        <p:style>
+          <a:lnRef idx="2">
+            <a:schemeClr val="accent2">
+              <a:shade val="50000"/>
+            </a:schemeClr>
+          </a:lnRef>
+          <a:fillRef idx="1">
+            <a:schemeClr val="accent2"/>
+          </a:fillRef>
+          <a:effectRef idx="0">
+            <a:schemeClr val="accent2"/>
+          </a:effectRef>
+          <a:fontRef idx="minor">
+            <a:schemeClr val="lt1"/>
+          </a:fontRef>
+        </p:style>
+        <p:txBody>
+          <a:bodyPr rtlCol="0" anchor="ctr"/>
+          <a:lstStyle/>
+          <a:p>
+            <a:pPr algn="ctr"/>
+            <a:r>
+              <a:rPr lang="en-GB" dirty="0">
+                <a:solidFill>
+                  <a:schemeClr val="bg1"/>
+                </a:solidFill>
+              </a:rPr>
+              <a:t>rjd3revisions</a:t>
+            </a:r>
+          </a:p>
+        </p:txBody>
+      </p:sp>
+      <p:sp>
+        <p:nvSpPr>
+          <p:cNvPr id="27" name="Rectangle: Rounded Corners 26">
+            <a:extLst>
+              <a:ext uri="{FF2B5EF4-FFF2-40B4-BE49-F238E27FC236}">
+                <a16:creationId xmlns:a16="http://schemas.microsoft.com/office/drawing/2014/main" id="{CB6A949D-BE80-FA1A-6218-6FAAA4867726}"/>
+              </a:ext>
+            </a:extLst>
+          </p:cNvPr>
+          <p:cNvSpPr/>
+          <p:nvPr/>
+        </p:nvSpPr>
+        <p:spPr>
+          <a:xfrm>
+            <a:off x="9521676" y="1409493"/>
+            <a:ext cx="1447520" cy="409242"/>
+          </a:xfrm>
+          <a:prstGeom prst="roundRect">
+            <a:avLst/>
+          </a:prstGeom>
+          <a:pattFill prst="zigZag">
+            <a:fgClr>
+              <a:schemeClr val="accent2"/>
+            </a:fgClr>
+            <a:bgClr>
+              <a:schemeClr val="bg1"/>
+            </a:bgClr>
+          </a:pattFill>
+        </p:spPr>
+        <p:style>
+          <a:lnRef idx="2">
+            <a:schemeClr val="accent2">
+              <a:shade val="50000"/>
+            </a:schemeClr>
+          </a:lnRef>
+          <a:fillRef idx="1">
+            <a:schemeClr val="accent2"/>
+          </a:fillRef>
+          <a:effectRef idx="0">
+            <a:schemeClr val="accent2"/>
+          </a:effectRef>
+          <a:fontRef idx="minor">
+            <a:schemeClr val="lt1"/>
+          </a:fontRef>
+        </p:style>
+        <p:txBody>
+          <a:bodyPr rtlCol="0" anchor="ctr"/>
+          <a:lstStyle/>
+          <a:p>
+            <a:pPr algn="ctr"/>
+            <a:r>
+              <a:rPr lang="en-GB" dirty="0">
+                <a:solidFill>
+                  <a:schemeClr val="tx1"/>
+                </a:solidFill>
+              </a:rPr>
+              <a:t>rjd3sts</a:t>
+            </a:r>
+          </a:p>
+        </p:txBody>
+      </p:sp>
+      <p:cxnSp>
+        <p:nvCxnSpPr>
+          <p:cNvPr id="85" name="Connector: Elbow 84">
+            <a:extLst>
+              <a:ext uri="{FF2B5EF4-FFF2-40B4-BE49-F238E27FC236}">
+                <a16:creationId xmlns:a16="http://schemas.microsoft.com/office/drawing/2014/main" id="{EC0CA69E-3E96-F1B6-3FE8-077AD956402E}"/>
+              </a:ext>
+            </a:extLst>
+          </p:cNvPr>
+          <p:cNvCxnSpPr>
+            <a:cxnSpLocks/>
+            <a:stCxn id="28" idx="1"/>
+            <a:endCxn id="4" idx="3"/>
+          </p:cNvCxnSpPr>
+          <p:nvPr/>
+        </p:nvCxnSpPr>
+        <p:spPr>
+          <a:xfrm rot="10800000" flipV="1">
+            <a:off x="6657515" y="2570694"/>
+            <a:ext cx="1635678" cy="417010"/>
+          </a:xfrm>
+          <a:prstGeom prst="bentConnector3">
+            <a:avLst>
+              <a:gd name="adj1" fmla="val 50000"/>
+            </a:avLst>
+          </a:prstGeom>
+          <a:ln>
+            <a:tailEnd type="triangle"/>
+          </a:ln>
+        </p:spPr>
+        <p:style>
+          <a:lnRef idx="3">
+            <a:schemeClr val="dk1"/>
+          </a:lnRef>
+          <a:fillRef idx="0">
+            <a:schemeClr val="dk1"/>
+          </a:fillRef>
+          <a:effectRef idx="2">
+            <a:schemeClr val="dk1"/>
           </a:effectRef>
           <a:fontRef idx="minor">
             <a:schemeClr val="tx1"/>
@@ -11872,24 +13554,159 @@
       </p:cxnSp>
       <p:cxnSp>
         <p:nvCxnSpPr>
-          <p:cNvPr id="12" name="Connector: Elbow 11">
-            <a:extLst>
-              <a:ext uri="{FF2B5EF4-FFF2-40B4-BE49-F238E27FC236}">
-                <a16:creationId xmlns:a16="http://schemas.microsoft.com/office/drawing/2014/main" id="{67945822-A91A-4A2D-B5F7-9E228E582ABF}"/>
+          <p:cNvPr id="98" name="Connector: Elbow 97">
+            <a:extLst>
+              <a:ext uri="{FF2B5EF4-FFF2-40B4-BE49-F238E27FC236}">
+                <a16:creationId xmlns:a16="http://schemas.microsoft.com/office/drawing/2014/main" id="{9314514C-5E0B-7BBC-9E3D-5CF9425B771B}"/>
               </a:ext>
             </a:extLst>
           </p:cNvPr>
           <p:cNvCxnSpPr>
             <a:cxnSpLocks/>
-            <a:stCxn id="5" idx="3"/>
-            <a:endCxn id="6" idx="1"/>
+            <a:stCxn id="31" idx="1"/>
+            <a:endCxn id="4" idx="2"/>
           </p:cNvCxnSpPr>
           <p:nvPr/>
         </p:nvCxnSpPr>
         <p:spPr>
-          <a:xfrm flipV="1">
-            <a:off x="5299788" y="1699398"/>
-            <a:ext cx="914400" cy="662801"/>
+          <a:xfrm rot="10800000">
+            <a:off x="5716728" y="3479587"/>
+            <a:ext cx="3804948" cy="1035258"/>
+          </a:xfrm>
+          <a:prstGeom prst="bentConnector2">
+            <a:avLst/>
+          </a:prstGeom>
+          <a:ln>
+            <a:tailEnd type="triangle"/>
+          </a:ln>
+        </p:spPr>
+        <p:style>
+          <a:lnRef idx="3">
+            <a:schemeClr val="dk1"/>
+          </a:lnRef>
+          <a:fillRef idx="0">
+            <a:schemeClr val="dk1"/>
+          </a:fillRef>
+          <a:effectRef idx="2">
+            <a:schemeClr val="dk1"/>
+          </a:effectRef>
+          <a:fontRef idx="minor">
+            <a:schemeClr val="tx1"/>
+          </a:fontRef>
+        </p:style>
+      </p:cxnSp>
+      <p:sp>
+        <p:nvSpPr>
+          <p:cNvPr id="6" name="TextBox 5">
+            <a:extLst>
+              <a:ext uri="{FF2B5EF4-FFF2-40B4-BE49-F238E27FC236}">
+                <a16:creationId xmlns:a16="http://schemas.microsoft.com/office/drawing/2014/main" id="{46F24A35-79D4-14C2-B5E6-4BAFF189784D}"/>
+              </a:ext>
+            </a:extLst>
+          </p:cNvPr>
+          <p:cNvSpPr txBox="1"/>
+          <p:nvPr/>
+        </p:nvSpPr>
+        <p:spPr>
+          <a:xfrm>
+            <a:off x="448464" y="6123543"/>
+            <a:ext cx="3884595" cy="369332"/>
+          </a:xfrm>
+          <a:prstGeom prst="rect">
+            <a:avLst/>
+          </a:prstGeom>
+          <a:noFill/>
+        </p:spPr>
+        <p:txBody>
+          <a:bodyPr wrap="square" rtlCol="0">
+            <a:spAutoFit/>
+          </a:bodyPr>
+          <a:lstStyle/>
+          <a:p>
+            <a:r>
+              <a:rPr lang="en-GB" dirty="0"/>
+              <a:t>Design similar to the Java libraries !</a:t>
+            </a:r>
+          </a:p>
+        </p:txBody>
+      </p:sp>
+      <p:sp>
+        <p:nvSpPr>
+          <p:cNvPr id="25" name="Rectangle: Rounded Corners 24">
+            <a:extLst>
+              <a:ext uri="{FF2B5EF4-FFF2-40B4-BE49-F238E27FC236}">
+                <a16:creationId xmlns:a16="http://schemas.microsoft.com/office/drawing/2014/main" id="{DB0B36B3-549D-B732-9829-95D3032321A5}"/>
+              </a:ext>
+            </a:extLst>
+          </p:cNvPr>
+          <p:cNvSpPr/>
+          <p:nvPr/>
+        </p:nvSpPr>
+        <p:spPr>
+          <a:xfrm>
+            <a:off x="1721996" y="3107351"/>
+            <a:ext cx="1881574" cy="468525"/>
+          </a:xfrm>
+          <a:prstGeom prst="roundRect">
+            <a:avLst/>
+          </a:prstGeom>
+          <a:solidFill>
+            <a:srgbClr val="00B0F0"/>
+          </a:solidFill>
+          <a:ln>
+            <a:solidFill>
+              <a:srgbClr val="00B0F0"/>
+            </a:solidFill>
+          </a:ln>
+        </p:spPr>
+        <p:style>
+          <a:lnRef idx="2">
+            <a:schemeClr val="accent2">
+              <a:shade val="50000"/>
+            </a:schemeClr>
+          </a:lnRef>
+          <a:fillRef idx="1">
+            <a:schemeClr val="accent2"/>
+          </a:fillRef>
+          <a:effectRef idx="0">
+            <a:schemeClr val="accent2"/>
+          </a:effectRef>
+          <a:fontRef idx="minor">
+            <a:schemeClr val="lt1"/>
+          </a:fontRef>
+        </p:style>
+        <p:txBody>
+          <a:bodyPr rtlCol="0" anchor="ctr"/>
+          <a:lstStyle/>
+          <a:p>
+            <a:pPr algn="ctr"/>
+            <a:r>
+              <a:rPr lang="en-GB" dirty="0"/>
+              <a:t>rjd3providers</a:t>
+            </a:r>
+          </a:p>
+        </p:txBody>
+      </p:sp>
+      <p:cxnSp>
+        <p:nvCxnSpPr>
+          <p:cNvPr id="33" name="Connector: Elbow 32">
+            <a:extLst>
+              <a:ext uri="{FF2B5EF4-FFF2-40B4-BE49-F238E27FC236}">
+                <a16:creationId xmlns:a16="http://schemas.microsoft.com/office/drawing/2014/main" id="{3CB802CD-CF51-328A-7C81-7F0C59EF2BE0}"/>
+              </a:ext>
+            </a:extLst>
+          </p:cNvPr>
+          <p:cNvCxnSpPr>
+            <a:cxnSpLocks/>
+            <a:stCxn id="45" idx="3"/>
+            <a:endCxn id="4" idx="1"/>
+          </p:cNvCxnSpPr>
+          <p:nvPr/>
+        </p:nvCxnSpPr>
+        <p:spPr>
+          <a:xfrm>
+            <a:off x="3581400" y="2687022"/>
+            <a:ext cx="1194541" cy="300682"/>
           </a:xfrm>
           <a:prstGeom prst="bentConnector3">
             <a:avLst>
@@ -11902,13 +13719,13 @@
         </p:spPr>
         <p:style>
           <a:lnRef idx="3">
-            <a:schemeClr val="accent1"/>
+            <a:schemeClr val="dk1"/>
           </a:lnRef>
           <a:fillRef idx="0">
-            <a:schemeClr val="accent1"/>
+            <a:schemeClr val="dk1"/>
           </a:fillRef>
           <a:effectRef idx="2">
-            <a:schemeClr val="accent1"/>
+            <a:schemeClr val="dk1"/>
           </a:effectRef>
           <a:fontRef idx="minor">
             <a:schemeClr val="tx1"/>
@@ -11917,24 +13734,24 @@
       </p:cxnSp>
       <p:cxnSp>
         <p:nvCxnSpPr>
-          <p:cNvPr id="16" name="Connector: Elbow 15">
-            <a:extLst>
-              <a:ext uri="{FF2B5EF4-FFF2-40B4-BE49-F238E27FC236}">
-                <a16:creationId xmlns:a16="http://schemas.microsoft.com/office/drawing/2014/main" id="{C4A1081C-9E82-4F72-A469-B6BBFB7AB72D}"/>
+          <p:cNvPr id="36" name="Connector: Elbow 35">
+            <a:extLst>
+              <a:ext uri="{FF2B5EF4-FFF2-40B4-BE49-F238E27FC236}">
+                <a16:creationId xmlns:a16="http://schemas.microsoft.com/office/drawing/2014/main" id="{E1382678-78A7-565D-25A0-61C44F698D4D}"/>
               </a:ext>
             </a:extLst>
           </p:cNvPr>
           <p:cNvCxnSpPr>
             <a:cxnSpLocks/>
-            <a:stCxn id="5" idx="3"/>
-            <a:endCxn id="19" idx="1"/>
+            <a:stCxn id="44" idx="3"/>
+            <a:endCxn id="4" idx="1"/>
           </p:cNvCxnSpPr>
           <p:nvPr/>
         </p:nvCxnSpPr>
         <p:spPr>
           <a:xfrm>
-            <a:off x="5299788" y="2362199"/>
-            <a:ext cx="914400" cy="775220"/>
+            <a:off x="3581401" y="2061921"/>
+            <a:ext cx="1194540" cy="925783"/>
           </a:xfrm>
           <a:prstGeom prst="bentConnector3">
             <a:avLst>
@@ -11947,13 +13764,277 @@
         </p:spPr>
         <p:style>
           <a:lnRef idx="3">
-            <a:schemeClr val="accent1"/>
+            <a:schemeClr val="dk1"/>
           </a:lnRef>
           <a:fillRef idx="0">
-            <a:schemeClr val="accent1"/>
+            <a:schemeClr val="dk1"/>
           </a:fillRef>
           <a:effectRef idx="2">
-            <a:schemeClr val="accent1"/>
+            <a:schemeClr val="dk1"/>
+          </a:effectRef>
+          <a:fontRef idx="minor">
+            <a:schemeClr val="tx1"/>
+          </a:fontRef>
+        </p:style>
+      </p:cxnSp>
+      <p:cxnSp>
+        <p:nvCxnSpPr>
+          <p:cNvPr id="50" name="Connector: Elbow 49">
+            <a:extLst>
+              <a:ext uri="{FF2B5EF4-FFF2-40B4-BE49-F238E27FC236}">
+                <a16:creationId xmlns:a16="http://schemas.microsoft.com/office/drawing/2014/main" id="{A4770936-EAAC-ADE1-4C1B-7D0329BD9030}"/>
+              </a:ext>
+            </a:extLst>
+          </p:cNvPr>
+          <p:cNvCxnSpPr>
+            <a:cxnSpLocks/>
+            <a:stCxn id="25" idx="3"/>
+            <a:endCxn id="4" idx="1"/>
+          </p:cNvCxnSpPr>
+          <p:nvPr/>
+        </p:nvCxnSpPr>
+        <p:spPr>
+          <a:xfrm flipV="1">
+            <a:off x="3603570" y="2987704"/>
+            <a:ext cx="1172371" cy="353910"/>
+          </a:xfrm>
+          <a:prstGeom prst="bentConnector3">
+            <a:avLst>
+              <a:gd name="adj1" fmla="val 50000"/>
+            </a:avLst>
+          </a:prstGeom>
+          <a:ln>
+            <a:tailEnd type="triangle"/>
+          </a:ln>
+        </p:spPr>
+        <p:style>
+          <a:lnRef idx="3">
+            <a:schemeClr val="dk1"/>
+          </a:lnRef>
+          <a:fillRef idx="0">
+            <a:schemeClr val="dk1"/>
+          </a:fillRef>
+          <a:effectRef idx="2">
+            <a:schemeClr val="dk1"/>
+          </a:effectRef>
+          <a:fontRef idx="minor">
+            <a:schemeClr val="tx1"/>
+          </a:fontRef>
+        </p:style>
+      </p:cxnSp>
+      <p:cxnSp>
+        <p:nvCxnSpPr>
+          <p:cNvPr id="56" name="Connector: Elbow 55">
+            <a:extLst>
+              <a:ext uri="{FF2B5EF4-FFF2-40B4-BE49-F238E27FC236}">
+                <a16:creationId xmlns:a16="http://schemas.microsoft.com/office/drawing/2014/main" id="{BCA19D48-4F5A-074F-F69F-2BCE425799AC}"/>
+              </a:ext>
+            </a:extLst>
+          </p:cNvPr>
+          <p:cNvCxnSpPr>
+            <a:cxnSpLocks/>
+            <a:stCxn id="10" idx="3"/>
+            <a:endCxn id="4" idx="2"/>
+          </p:cNvCxnSpPr>
+          <p:nvPr/>
+        </p:nvCxnSpPr>
+        <p:spPr>
+          <a:xfrm flipV="1">
+            <a:off x="2211340" y="3479587"/>
+            <a:ext cx="3505388" cy="1240981"/>
+          </a:xfrm>
+          <a:prstGeom prst="bentConnector2">
+            <a:avLst/>
+          </a:prstGeom>
+          <a:ln>
+            <a:tailEnd type="triangle"/>
+          </a:ln>
+        </p:spPr>
+        <p:style>
+          <a:lnRef idx="3">
+            <a:schemeClr val="dk1"/>
+          </a:lnRef>
+          <a:fillRef idx="0">
+            <a:schemeClr val="dk1"/>
+          </a:fillRef>
+          <a:effectRef idx="2">
+            <a:schemeClr val="dk1"/>
+          </a:effectRef>
+          <a:fontRef idx="minor">
+            <a:schemeClr val="tx1"/>
+          </a:fontRef>
+        </p:style>
+      </p:cxnSp>
+      <p:cxnSp>
+        <p:nvCxnSpPr>
+          <p:cNvPr id="60" name="Connector: Elbow 59">
+            <a:extLst>
+              <a:ext uri="{FF2B5EF4-FFF2-40B4-BE49-F238E27FC236}">
+                <a16:creationId xmlns:a16="http://schemas.microsoft.com/office/drawing/2014/main" id="{3F230699-BE0F-6C82-4903-4CFDC9EEE925}"/>
+              </a:ext>
+            </a:extLst>
+          </p:cNvPr>
+          <p:cNvCxnSpPr>
+            <a:cxnSpLocks/>
+            <a:stCxn id="10" idx="1"/>
+            <a:endCxn id="25" idx="1"/>
+          </p:cNvCxnSpPr>
+          <p:nvPr/>
+        </p:nvCxnSpPr>
+        <p:spPr>
+          <a:xfrm rot="10800000" flipH="1">
+            <a:off x="569658" y="3341614"/>
+            <a:ext cx="1152338" cy="1378954"/>
+          </a:xfrm>
+          <a:prstGeom prst="bentConnector3">
+            <a:avLst>
+              <a:gd name="adj1" fmla="val -19838"/>
+            </a:avLst>
+          </a:prstGeom>
+          <a:ln>
+            <a:tailEnd type="triangle"/>
+          </a:ln>
+        </p:spPr>
+        <p:style>
+          <a:lnRef idx="3">
+            <a:schemeClr val="dk1"/>
+          </a:lnRef>
+          <a:fillRef idx="0">
+            <a:schemeClr val="dk1"/>
+          </a:fillRef>
+          <a:effectRef idx="2">
+            <a:schemeClr val="dk1"/>
+          </a:effectRef>
+          <a:fontRef idx="minor">
+            <a:schemeClr val="tx1"/>
+          </a:fontRef>
+        </p:style>
+      </p:cxnSp>
+      <p:cxnSp>
+        <p:nvCxnSpPr>
+          <p:cNvPr id="89" name="Connector: Elbow 88">
+            <a:extLst>
+              <a:ext uri="{FF2B5EF4-FFF2-40B4-BE49-F238E27FC236}">
+                <a16:creationId xmlns:a16="http://schemas.microsoft.com/office/drawing/2014/main" id="{E977635B-4730-1A12-4EB5-C20271941A84}"/>
+              </a:ext>
+            </a:extLst>
+          </p:cNvPr>
+          <p:cNvCxnSpPr>
+            <a:cxnSpLocks/>
+            <a:stCxn id="10" idx="0"/>
+            <a:endCxn id="44" idx="1"/>
+          </p:cNvCxnSpPr>
+          <p:nvPr/>
+        </p:nvCxnSpPr>
+        <p:spPr>
+          <a:xfrm rot="5400000" flipH="1" flipV="1">
+            <a:off x="354769" y="3097651"/>
+            <a:ext cx="2380786" cy="309327"/>
+          </a:xfrm>
+          <a:prstGeom prst="bentConnector2">
+            <a:avLst/>
+          </a:prstGeom>
+          <a:ln>
+            <a:tailEnd type="triangle"/>
+          </a:ln>
+        </p:spPr>
+        <p:style>
+          <a:lnRef idx="3">
+            <a:schemeClr val="dk1"/>
+          </a:lnRef>
+          <a:fillRef idx="0">
+            <a:schemeClr val="dk1"/>
+          </a:fillRef>
+          <a:effectRef idx="2">
+            <a:schemeClr val="dk1"/>
+          </a:effectRef>
+          <a:fontRef idx="minor">
+            <a:schemeClr val="tx1"/>
+          </a:fontRef>
+        </p:style>
+      </p:cxnSp>
+      <p:cxnSp>
+        <p:nvCxnSpPr>
+          <p:cNvPr id="100" name="Connector: Elbow 99">
+            <a:extLst>
+              <a:ext uri="{FF2B5EF4-FFF2-40B4-BE49-F238E27FC236}">
+                <a16:creationId xmlns:a16="http://schemas.microsoft.com/office/drawing/2014/main" id="{449B947F-DD0F-42E9-CC22-DF7C7C1DCEF7}"/>
+              </a:ext>
+            </a:extLst>
+          </p:cNvPr>
+          <p:cNvCxnSpPr>
+            <a:cxnSpLocks/>
+            <a:stCxn id="10" idx="0"/>
+            <a:endCxn id="45" idx="1"/>
+          </p:cNvCxnSpPr>
+          <p:nvPr/>
+        </p:nvCxnSpPr>
+        <p:spPr>
+          <a:xfrm rot="5400000" flipH="1" flipV="1">
+            <a:off x="667320" y="3410202"/>
+            <a:ext cx="1755685" cy="309327"/>
+          </a:xfrm>
+          <a:prstGeom prst="bentConnector2">
+            <a:avLst/>
+          </a:prstGeom>
+          <a:ln>
+            <a:tailEnd type="triangle"/>
+          </a:ln>
+        </p:spPr>
+        <p:style>
+          <a:lnRef idx="3">
+            <a:schemeClr val="dk1"/>
+          </a:lnRef>
+          <a:fillRef idx="0">
+            <a:schemeClr val="dk1"/>
+          </a:fillRef>
+          <a:effectRef idx="2">
+            <a:schemeClr val="dk1"/>
+          </a:effectRef>
+          <a:fontRef idx="minor">
+            <a:schemeClr val="tx1"/>
+          </a:fontRef>
+        </p:style>
+      </p:cxnSp>
+      <p:cxnSp>
+        <p:nvCxnSpPr>
+          <p:cNvPr id="157" name="Connector: Elbow 156">
+            <a:extLst>
+              <a:ext uri="{FF2B5EF4-FFF2-40B4-BE49-F238E27FC236}">
+                <a16:creationId xmlns:a16="http://schemas.microsoft.com/office/drawing/2014/main" id="{A092B240-E5C8-9CD6-70B5-3272BE35640C}"/>
+              </a:ext>
+            </a:extLst>
+          </p:cNvPr>
+          <p:cNvCxnSpPr>
+            <a:cxnSpLocks/>
+            <a:stCxn id="27" idx="1"/>
+            <a:endCxn id="39" idx="3"/>
+          </p:cNvCxnSpPr>
+          <p:nvPr/>
+        </p:nvCxnSpPr>
+        <p:spPr>
+          <a:xfrm rot="10800000">
+            <a:off x="8209874" y="1612398"/>
+            <a:ext cx="1311803" cy="1716"/>
+          </a:xfrm>
+          <a:prstGeom prst="bentConnector3">
+            <a:avLst>
+              <a:gd name="adj1" fmla="val 50000"/>
+            </a:avLst>
+          </a:prstGeom>
+          <a:ln>
+            <a:tailEnd type="triangle"/>
+          </a:ln>
+        </p:spPr>
+        <p:style>
+          <a:lnRef idx="3">
+            <a:schemeClr val="dk1"/>
+          </a:lnRef>
+          <a:fillRef idx="0">
+            <a:schemeClr val="dk1"/>
+          </a:fillRef>
+          <a:effectRef idx="2">
+            <a:schemeClr val="dk1"/>
           </a:effectRef>
           <a:fontRef idx="minor">
             <a:schemeClr val="tx1"/>
@@ -11962,10 +14043,10 @@
       </p:cxnSp>
       <p:sp>
         <p:nvSpPr>
-          <p:cNvPr id="19" name="Rectangle 18">
-            <a:extLst>
-              <a:ext uri="{FF2B5EF4-FFF2-40B4-BE49-F238E27FC236}">
-                <a16:creationId xmlns:a16="http://schemas.microsoft.com/office/drawing/2014/main" id="{403066ED-A2FD-4B45-8B77-D9F639107F55}"/>
+          <p:cNvPr id="9" name="Rectangle: Rounded Corners 30">
+            <a:extLst>
+              <a:ext uri="{FF2B5EF4-FFF2-40B4-BE49-F238E27FC236}">
+                <a16:creationId xmlns:a16="http://schemas.microsoft.com/office/drawing/2014/main" id="{36515D96-5E2B-3995-D8F8-61BC33580C87}"/>
               </a:ext>
             </a:extLst>
           </p:cNvPr>
@@ -11974,24 +14055,32 @@
         </p:nvSpPr>
         <p:spPr>
           <a:xfrm>
-            <a:off x="6214188" y="2845837"/>
-            <a:ext cx="2341984" cy="583163"/>
-          </a:xfrm>
-          <a:prstGeom prst="rect">
+            <a:off x="7814353" y="3694460"/>
+            <a:ext cx="2508308" cy="379602"/>
+          </a:xfrm>
+          <a:prstGeom prst="roundRect">
             <a:avLst/>
           </a:prstGeom>
+          <a:solidFill>
+            <a:schemeClr val="accent3"/>
+          </a:solidFill>
+          <a:ln>
+            <a:solidFill>
+              <a:schemeClr val="bg1"/>
+            </a:solidFill>
+          </a:ln>
         </p:spPr>
         <p:style>
           <a:lnRef idx="2">
-            <a:schemeClr val="accent3">
+            <a:schemeClr val="accent2">
               <a:shade val="50000"/>
             </a:schemeClr>
           </a:lnRef>
           <a:fillRef idx="1">
-            <a:schemeClr val="accent3"/>
+            <a:schemeClr val="accent2"/>
           </a:fillRef>
           <a:effectRef idx="0">
-            <a:schemeClr val="accent3"/>
+            <a:schemeClr val="accent2"/>
           </a:effectRef>
           <a:fontRef idx="minor">
             <a:schemeClr val="lt1"/>
@@ -12003,18 +14092,110 @@
           <a:p>
             <a:pPr algn="ctr"/>
             <a:r>
-              <a:rPr lang="en-GB" dirty="0"/>
-              <a:t>Java package</a:t>
+              <a:rPr lang="en-GB" dirty="0">
+                <a:solidFill>
+                  <a:schemeClr val="bg1"/>
+                </a:solidFill>
+              </a:rPr>
+              <a:t>rjd3filters</a:t>
             </a:r>
           </a:p>
         </p:txBody>
       </p:sp>
+      <p:cxnSp>
+        <p:nvCxnSpPr>
+          <p:cNvPr id="11" name="Connector: Elbow 97">
+            <a:extLst>
+              <a:ext uri="{FF2B5EF4-FFF2-40B4-BE49-F238E27FC236}">
+                <a16:creationId xmlns:a16="http://schemas.microsoft.com/office/drawing/2014/main" id="{24AB4CEC-13BA-900B-A5BC-5A19DAF3F06B}"/>
+              </a:ext>
+            </a:extLst>
+          </p:cNvPr>
+          <p:cNvCxnSpPr>
+            <a:cxnSpLocks/>
+            <a:stCxn id="9" idx="1"/>
+            <a:endCxn id="4" idx="2"/>
+          </p:cNvCxnSpPr>
+          <p:nvPr/>
+        </p:nvCxnSpPr>
+        <p:spPr>
+          <a:xfrm rot="10800000">
+            <a:off x="5716729" y="3479587"/>
+            <a:ext cx="2097625" cy="404674"/>
+          </a:xfrm>
+          <a:prstGeom prst="bentConnector2">
+            <a:avLst/>
+          </a:prstGeom>
+          <a:ln>
+            <a:tailEnd type="triangle"/>
+          </a:ln>
+        </p:spPr>
+        <p:style>
+          <a:lnRef idx="3">
+            <a:schemeClr val="dk1"/>
+          </a:lnRef>
+          <a:fillRef idx="0">
+            <a:schemeClr val="dk1"/>
+          </a:fillRef>
+          <a:effectRef idx="2">
+            <a:schemeClr val="dk1"/>
+          </a:effectRef>
+          <a:fontRef idx="minor">
+            <a:schemeClr val="tx1"/>
+          </a:fontRef>
+        </p:style>
+      </p:cxnSp>
+      <p:cxnSp>
+        <p:nvCxnSpPr>
+          <p:cNvPr id="41" name="Connector: Elbow 156">
+            <a:extLst>
+              <a:ext uri="{FF2B5EF4-FFF2-40B4-BE49-F238E27FC236}">
+                <a16:creationId xmlns:a16="http://schemas.microsoft.com/office/drawing/2014/main" id="{CBC9CD76-6F67-DA24-8E84-B36633DC6BA6}"/>
+              </a:ext>
+            </a:extLst>
+          </p:cNvPr>
+          <p:cNvCxnSpPr>
+            <a:cxnSpLocks/>
+            <a:stCxn id="29" idx="1"/>
+            <a:endCxn id="4" idx="3"/>
+          </p:cNvCxnSpPr>
+          <p:nvPr/>
+        </p:nvCxnSpPr>
+        <p:spPr>
+          <a:xfrm rot="10800000">
+            <a:off x="6657515" y="2987705"/>
+            <a:ext cx="1635678" cy="355319"/>
+          </a:xfrm>
+          <a:prstGeom prst="bentConnector3">
+            <a:avLst>
+              <a:gd name="adj1" fmla="val 50000"/>
+            </a:avLst>
+          </a:prstGeom>
+          <a:ln>
+            <a:tailEnd type="triangle"/>
+          </a:ln>
+        </p:spPr>
+        <p:style>
+          <a:lnRef idx="3">
+            <a:schemeClr val="dk1"/>
+          </a:lnRef>
+          <a:fillRef idx="0">
+            <a:schemeClr val="dk1"/>
+          </a:fillRef>
+          <a:effectRef idx="2">
+            <a:schemeClr val="dk1"/>
+          </a:effectRef>
+          <a:fontRef idx="minor">
+            <a:schemeClr val="tx1"/>
+          </a:fontRef>
+        </p:style>
+      </p:cxnSp>
       <p:sp>
         <p:nvSpPr>
-          <p:cNvPr id="20" name="Rectangle 19">
-            <a:extLst>
-              <a:ext uri="{FF2B5EF4-FFF2-40B4-BE49-F238E27FC236}">
-                <a16:creationId xmlns:a16="http://schemas.microsoft.com/office/drawing/2014/main" id="{A5866F35-687B-4E43-AB32-BF21D6300EFE}"/>
+          <p:cNvPr id="18" name="Rectangle: Rounded Corners 3">
+            <a:extLst>
+              <a:ext uri="{FF2B5EF4-FFF2-40B4-BE49-F238E27FC236}">
+                <a16:creationId xmlns:a16="http://schemas.microsoft.com/office/drawing/2014/main" id="{C6748F06-6307-E57C-0928-03D135BF36D5}"/>
               </a:ext>
             </a:extLst>
           </p:cNvPr>
@@ -12023,24 +14204,30 @@
         </p:nvSpPr>
         <p:spPr>
           <a:xfrm>
-            <a:off x="2957804" y="3429000"/>
-            <a:ext cx="2341984" cy="583163"/>
-          </a:xfrm>
-          <a:prstGeom prst="rect">
+            <a:off x="5013005" y="1384096"/>
+            <a:ext cx="1412926" cy="472109"/>
+          </a:xfrm>
+          <a:prstGeom prst="roundRect">
             <a:avLst/>
           </a:prstGeom>
+          <a:solidFill>
+            <a:schemeClr val="accent3">
+              <a:lumMod val="60000"/>
+              <a:lumOff val="40000"/>
+            </a:schemeClr>
+          </a:solidFill>
         </p:spPr>
         <p:style>
           <a:lnRef idx="2">
-            <a:schemeClr val="accent3">
+            <a:schemeClr val="accent2">
               <a:shade val="50000"/>
             </a:schemeClr>
           </a:lnRef>
           <a:fillRef idx="1">
-            <a:schemeClr val="accent3"/>
+            <a:schemeClr val="accent2"/>
           </a:fillRef>
           <a:effectRef idx="0">
-            <a:schemeClr val="accent3"/>
+            <a:schemeClr val="accent2"/>
           </a:effectRef>
           <a:fontRef idx="minor">
             <a:schemeClr val="lt1"/>
@@ -12052,69 +14239,88 @@
           <a:p>
             <a:pPr algn="ctr"/>
             <a:r>
-              <a:rPr lang="en-GB" dirty="0"/>
-              <a:t>R files</a:t>
+              <a:rPr lang="en-GB" sz="1600" b="1" dirty="0"/>
+              <a:t>rjd3jars</a:t>
             </a:r>
           </a:p>
         </p:txBody>
       </p:sp>
-      <p:pic>
-        <p:nvPicPr>
-          <p:cNvPr id="38" name="Picture 37">
-            <a:extLst>
-              <a:ext uri="{FF2B5EF4-FFF2-40B4-BE49-F238E27FC236}">
-                <a16:creationId xmlns:a16="http://schemas.microsoft.com/office/drawing/2014/main" id="{162CF78F-E0A9-489E-817D-338D0204297E}"/>
-              </a:ext>
-            </a:extLst>
-          </p:cNvPr>
-          <p:cNvPicPr>
-            <a:picLocks noChangeAspect="1"/>
-          </p:cNvPicPr>
+      <p:sp>
+        <p:nvSpPr>
+          <p:cNvPr id="39" name="Rectangle: Rounded Corners 3">
+            <a:extLst>
+              <a:ext uri="{FF2B5EF4-FFF2-40B4-BE49-F238E27FC236}">
+                <a16:creationId xmlns:a16="http://schemas.microsoft.com/office/drawing/2014/main" id="{207F7A08-9816-2106-48F2-AEB6DF41F24B}"/>
+              </a:ext>
+            </a:extLst>
+          </p:cNvPr>
+          <p:cNvSpPr/>
           <p:nvPr/>
-        </p:nvPicPr>
-        <p:blipFill>
-          <a:blip r:embed="rId2"/>
-          <a:stretch>
-            <a:fillRect/>
-          </a:stretch>
-        </p:blipFill>
+        </p:nvSpPr>
         <p:spPr>
           <a:xfrm>
-            <a:off x="8303574" y="2093564"/>
-            <a:ext cx="1714739" cy="381053"/>
-          </a:xfrm>
-          <a:prstGeom prst="rect">
+            <a:off x="6796947" y="1376343"/>
+            <a:ext cx="1412926" cy="472109"/>
+          </a:xfrm>
+          <a:prstGeom prst="roundRect">
             <a:avLst/>
           </a:prstGeom>
-          <a:ln>
-            <a:solidFill>
-              <a:schemeClr val="accent3">
-                <a:shade val="50000"/>
-              </a:schemeClr>
-            </a:solidFill>
-          </a:ln>
-        </p:spPr>
-      </p:pic>
+          <a:solidFill>
+            <a:schemeClr val="accent3">
+              <a:lumMod val="60000"/>
+              <a:lumOff val="40000"/>
+            </a:schemeClr>
+          </a:solidFill>
+        </p:spPr>
+        <p:style>
+          <a:lnRef idx="2">
+            <a:schemeClr val="accent2">
+              <a:shade val="50000"/>
+            </a:schemeClr>
+          </a:lnRef>
+          <a:fillRef idx="1">
+            <a:schemeClr val="accent2"/>
+          </a:fillRef>
+          <a:effectRef idx="0">
+            <a:schemeClr val="accent2"/>
+          </a:effectRef>
+          <a:fontRef idx="minor">
+            <a:schemeClr val="lt1"/>
+          </a:fontRef>
+        </p:style>
+        <p:txBody>
+          <a:bodyPr rtlCol="0" anchor="ctr"/>
+          <a:lstStyle/>
+          <a:p>
+            <a:pPr algn="ctr"/>
+            <a:r>
+              <a:rPr lang="en-GB" sz="1600" b="1" dirty="0" err="1"/>
+              <a:t>rjdxjars</a:t>
+            </a:r>
+            <a:endParaRPr lang="en-GB" sz="1600" b="1" dirty="0"/>
+          </a:p>
+        </p:txBody>
+      </p:sp>
       <p:cxnSp>
         <p:nvCxnSpPr>
-          <p:cNvPr id="40" name="Connector: Elbow 39">
-            <a:extLst>
-              <a:ext uri="{FF2B5EF4-FFF2-40B4-BE49-F238E27FC236}">
-                <a16:creationId xmlns:a16="http://schemas.microsoft.com/office/drawing/2014/main" id="{BD37A5AD-F8B6-42FF-B8D2-30BDB988E98A}"/>
+          <p:cNvPr id="65" name="Connector: Elbow 84">
+            <a:extLst>
+              <a:ext uri="{FF2B5EF4-FFF2-40B4-BE49-F238E27FC236}">
+                <a16:creationId xmlns:a16="http://schemas.microsoft.com/office/drawing/2014/main" id="{64FB1FA9-E8F2-5D9F-8076-BA6D4ACC49B8}"/>
               </a:ext>
             </a:extLst>
           </p:cNvPr>
           <p:cNvCxnSpPr>
             <a:cxnSpLocks/>
-            <a:stCxn id="4" idx="2"/>
-            <a:endCxn id="20" idx="1"/>
+            <a:stCxn id="28" idx="1"/>
+            <a:endCxn id="39" idx="2"/>
           </p:cNvCxnSpPr>
           <p:nvPr/>
         </p:nvCxnSpPr>
         <p:spPr>
-          <a:xfrm rot="16200000" flipH="1">
-            <a:off x="1510718" y="2273495"/>
-            <a:ext cx="2312765" cy="581407"/>
+          <a:xfrm rot="10800000">
+            <a:off x="7503411" y="1848452"/>
+            <a:ext cx="789783" cy="722242"/>
           </a:xfrm>
           <a:prstGeom prst="bentConnector2">
             <a:avLst/>
@@ -12125,123 +14331,158 @@
         </p:spPr>
         <p:style>
           <a:lnRef idx="3">
-            <a:schemeClr val="accent1"/>
+            <a:schemeClr val="dk1"/>
           </a:lnRef>
           <a:fillRef idx="0">
-            <a:schemeClr val="accent1"/>
+            <a:schemeClr val="dk1"/>
           </a:fillRef>
           <a:effectRef idx="2">
-            <a:schemeClr val="accent1"/>
+            <a:schemeClr val="dk1"/>
           </a:effectRef>
           <a:fontRef idx="minor">
             <a:schemeClr val="tx1"/>
           </a:fontRef>
         </p:style>
       </p:cxnSp>
-      <p:pic>
-        <p:nvPicPr>
-          <p:cNvPr id="47" name="Picture 46">
-            <a:extLst>
-              <a:ext uri="{FF2B5EF4-FFF2-40B4-BE49-F238E27FC236}">
-                <a16:creationId xmlns:a16="http://schemas.microsoft.com/office/drawing/2014/main" id="{177068A2-13D4-4E4E-A805-79CA0F5C4454}"/>
-              </a:ext>
-            </a:extLst>
-          </p:cNvPr>
-          <p:cNvPicPr>
-            <a:picLocks noChangeAspect="1"/>
-          </p:cNvPicPr>
+      <p:cxnSp>
+        <p:nvCxnSpPr>
+          <p:cNvPr id="75" name="Connector: Elbow 156">
+            <a:extLst>
+              <a:ext uri="{FF2B5EF4-FFF2-40B4-BE49-F238E27FC236}">
+                <a16:creationId xmlns:a16="http://schemas.microsoft.com/office/drawing/2014/main" id="{6598AB2A-C57A-9004-9D6C-AE958B275DE3}"/>
+              </a:ext>
+            </a:extLst>
+          </p:cNvPr>
+          <p:cNvCxnSpPr>
+            <a:cxnSpLocks/>
+            <a:stCxn id="39" idx="1"/>
+            <a:endCxn id="18" idx="3"/>
+          </p:cNvCxnSpPr>
           <p:nvPr/>
-        </p:nvPicPr>
-        <p:blipFill>
-          <a:blip r:embed="rId3"/>
-          <a:stretch>
-            <a:fillRect/>
-          </a:stretch>
-        </p:blipFill>
-        <p:spPr>
-          <a:xfrm>
-            <a:off x="3492028" y="4111235"/>
-            <a:ext cx="4277322" cy="971686"/>
-          </a:xfrm>
-          <a:prstGeom prst="rect">
-            <a:avLst/>
+        </p:nvCxnSpPr>
+        <p:spPr>
+          <a:xfrm rot="10800000" flipV="1">
+            <a:off x="6425931" y="1612397"/>
+            <a:ext cx="371016" cy="7753"/>
+          </a:xfrm>
+          <a:prstGeom prst="bentConnector3">
+            <a:avLst>
+              <a:gd name="adj1" fmla="val 50000"/>
+            </a:avLst>
           </a:prstGeom>
           <a:ln>
-            <a:solidFill>
-              <a:schemeClr val="accent3">
-                <a:shade val="50000"/>
-              </a:schemeClr>
-            </a:solidFill>
+            <a:tailEnd type="triangle"/>
           </a:ln>
         </p:spPr>
-      </p:pic>
-      <p:pic>
-        <p:nvPicPr>
-          <p:cNvPr id="11" name="Image 10">
-            <a:extLst>
-              <a:ext uri="{FF2B5EF4-FFF2-40B4-BE49-F238E27FC236}">
-                <a16:creationId xmlns:a16="http://schemas.microsoft.com/office/drawing/2014/main" id="{712675D2-846A-727F-6DDA-FBB241AF1E08}"/>
-              </a:ext>
-            </a:extLst>
-          </p:cNvPr>
-          <p:cNvPicPr>
-            <a:picLocks noChangeAspect="1"/>
-          </p:cNvPicPr>
+        <p:style>
+          <a:lnRef idx="3">
+            <a:schemeClr val="dk1"/>
+          </a:lnRef>
+          <a:fillRef idx="0">
+            <a:schemeClr val="dk1"/>
+          </a:fillRef>
+          <a:effectRef idx="2">
+            <a:schemeClr val="dk1"/>
+          </a:effectRef>
+          <a:fontRef idx="minor">
+            <a:schemeClr val="tx1"/>
+          </a:fontRef>
+        </p:style>
+      </p:cxnSp>
+      <p:cxnSp>
+        <p:nvCxnSpPr>
+          <p:cNvPr id="80" name="Connector: Elbow 156">
+            <a:extLst>
+              <a:ext uri="{FF2B5EF4-FFF2-40B4-BE49-F238E27FC236}">
+                <a16:creationId xmlns:a16="http://schemas.microsoft.com/office/drawing/2014/main" id="{7BFAA233-65FF-2D04-84CA-8C4478A51FCB}"/>
+              </a:ext>
+            </a:extLst>
+          </p:cNvPr>
+          <p:cNvCxnSpPr>
+            <a:cxnSpLocks/>
+            <a:stCxn id="4" idx="0"/>
+            <a:endCxn id="18" idx="2"/>
+          </p:cNvCxnSpPr>
           <p:nvPr/>
-        </p:nvPicPr>
-        <p:blipFill>
-          <a:blip r:embed="rId4"/>
-          <a:stretch>
-            <a:fillRect/>
-          </a:stretch>
-        </p:blipFill>
-        <p:spPr>
-          <a:xfrm>
-            <a:off x="8303574" y="3601355"/>
-            <a:ext cx="2619741" cy="1190791"/>
-          </a:xfrm>
-          <a:prstGeom prst="rect">
-            <a:avLst/>
+        </p:nvCxnSpPr>
+        <p:spPr>
+          <a:xfrm rot="5400000" flipH="1" flipV="1">
+            <a:off x="5398291" y="2174643"/>
+            <a:ext cx="639615" cy="2740"/>
+          </a:xfrm>
+          <a:prstGeom prst="bentConnector3">
+            <a:avLst>
+              <a:gd name="adj1" fmla="val 50000"/>
+            </a:avLst>
           </a:prstGeom>
           <a:ln>
-            <a:solidFill>
-              <a:schemeClr val="tx1"/>
-            </a:solidFill>
+            <a:tailEnd type="triangle"/>
           </a:ln>
         </p:spPr>
-      </p:pic>
-      <p:sp>
-        <p:nvSpPr>
-          <p:cNvPr id="13" name="Espace réservé du pied de page 12">
-            <a:extLst>
-              <a:ext uri="{FF2B5EF4-FFF2-40B4-BE49-F238E27FC236}">
-                <a16:creationId xmlns:a16="http://schemas.microsoft.com/office/drawing/2014/main" id="{15699A33-F00A-E744-ACCA-0AD04CC33BD5}"/>
-              </a:ext>
-            </a:extLst>
-          </p:cNvPr>
-          <p:cNvSpPr>
-            <a:spLocks noGrp="1"/>
-          </p:cNvSpPr>
-          <p:nvPr>
-            <p:ph type="ftr" sz="quarter" idx="11"/>
-          </p:nvPr>
-        </p:nvSpPr>
-        <p:spPr/>
-        <p:txBody>
-          <a:bodyPr/>
-          <a:lstStyle/>
-          <a:p>
-            <a:r>
-              <a:rPr lang="en-GB"/>
-              <a:t>JD+ and R</a:t>
-            </a:r>
-          </a:p>
-        </p:txBody>
-      </p:sp>
+        <p:style>
+          <a:lnRef idx="3">
+            <a:schemeClr val="dk1"/>
+          </a:lnRef>
+          <a:fillRef idx="0">
+            <a:schemeClr val="dk1"/>
+          </a:fillRef>
+          <a:effectRef idx="2">
+            <a:schemeClr val="dk1"/>
+          </a:effectRef>
+          <a:fontRef idx="minor">
+            <a:schemeClr val="tx1"/>
+          </a:fontRef>
+        </p:style>
+      </p:cxnSp>
+      <p:cxnSp>
+        <p:nvCxnSpPr>
+          <p:cNvPr id="118" name="Connector: Elbow 156">
+            <a:extLst>
+              <a:ext uri="{FF2B5EF4-FFF2-40B4-BE49-F238E27FC236}">
+                <a16:creationId xmlns:a16="http://schemas.microsoft.com/office/drawing/2014/main" id="{32B85149-9B44-71E6-ADB6-4880BC59C0F3}"/>
+              </a:ext>
+            </a:extLst>
+          </p:cNvPr>
+          <p:cNvCxnSpPr>
+            <a:cxnSpLocks/>
+            <a:stCxn id="29" idx="0"/>
+            <a:endCxn id="28" idx="2"/>
+          </p:cNvCxnSpPr>
+          <p:nvPr/>
+        </p:nvCxnSpPr>
+        <p:spPr>
+          <a:xfrm rot="5400000" flipH="1" flipV="1">
+            <a:off x="9350984" y="2956859"/>
+            <a:ext cx="392727" cy="12700"/>
+          </a:xfrm>
+          <a:prstGeom prst="bentConnector3">
+            <a:avLst>
+              <a:gd name="adj1" fmla="val 50000"/>
+            </a:avLst>
+          </a:prstGeom>
+          <a:ln>
+            <a:tailEnd type="triangle"/>
+          </a:ln>
+        </p:spPr>
+        <p:style>
+          <a:lnRef idx="3">
+            <a:schemeClr val="dk1"/>
+          </a:lnRef>
+          <a:fillRef idx="0">
+            <a:schemeClr val="dk1"/>
+          </a:fillRef>
+          <a:effectRef idx="2">
+            <a:schemeClr val="dk1"/>
+          </a:effectRef>
+          <a:fontRef idx="minor">
+            <a:schemeClr val="tx1"/>
+          </a:fontRef>
+        </p:style>
+      </p:cxnSp>
     </p:spTree>
     <p:extLst>
       <p:ext uri="{BB962C8B-B14F-4D97-AF65-F5344CB8AC3E}">
-        <p14:creationId xmlns:p14="http://schemas.microsoft.com/office/powerpoint/2010/main" val="519121428"/>
+        <p14:creationId xmlns:p14="http://schemas.microsoft.com/office/powerpoint/2010/main" val="266428804"/>
       </p:ext>
     </p:extLst>
   </p:cSld>
@@ -12256,7 +14497,13 @@
   <p:cSld>
     <p:spTree>
       <p:nvGrpSpPr>
-        <p:cNvPr id="1" name=""/>
+        <p:cNvPr id="1" name="">
+          <a:extLst>
+            <a:ext uri="{FF2B5EF4-FFF2-40B4-BE49-F238E27FC236}">
+              <a16:creationId xmlns:a16="http://schemas.microsoft.com/office/drawing/2014/main" id="{75BC514C-6382-AF68-D27C-0D2F518765E1}"/>
+            </a:ext>
+          </a:extLst>
+        </p:cNvPr>
         <p:cNvGrpSpPr/>
         <p:nvPr/>
       </p:nvGrpSpPr>
@@ -12270,10 +14517,55 @@
       </p:grpSpPr>
       <p:sp>
         <p:nvSpPr>
+          <p:cNvPr id="7" name="Ellipse 6">
+            <a:extLst>
+              <a:ext uri="{FF2B5EF4-FFF2-40B4-BE49-F238E27FC236}">
+                <a16:creationId xmlns:a16="http://schemas.microsoft.com/office/drawing/2014/main" id="{69260728-61F3-8FAE-07D3-DE53CD8D5A64}"/>
+              </a:ext>
+            </a:extLst>
+          </p:cNvPr>
+          <p:cNvSpPr/>
+          <p:nvPr/>
+        </p:nvSpPr>
+        <p:spPr>
+          <a:xfrm>
+            <a:off x="1" y="1382821"/>
+            <a:ext cx="6964670" cy="4401291"/>
+          </a:xfrm>
+          <a:prstGeom prst="ellipse">
+            <a:avLst/>
+          </a:prstGeom>
+          <a:ln w="57150"/>
+        </p:spPr>
+        <p:style>
+          <a:lnRef idx="2">
+            <a:schemeClr val="accent6"/>
+          </a:lnRef>
+          <a:fillRef idx="1">
+            <a:schemeClr val="lt1"/>
+          </a:fillRef>
+          <a:effectRef idx="0">
+            <a:schemeClr val="accent6"/>
+          </a:effectRef>
+          <a:fontRef idx="minor">
+            <a:schemeClr val="dk1"/>
+          </a:fontRef>
+        </p:style>
+        <p:txBody>
+          <a:bodyPr rtlCol="0" anchor="ctr"/>
+          <a:lstStyle/>
+          <a:p>
+            <a:pPr algn="ctr"/>
+            <a:endParaRPr lang="en-GB"/>
+          </a:p>
+        </p:txBody>
+      </p:sp>
+      <p:sp>
+        <p:nvSpPr>
           <p:cNvPr id="2" name="Title 1">
             <a:extLst>
               <a:ext uri="{FF2B5EF4-FFF2-40B4-BE49-F238E27FC236}">
-                <a16:creationId xmlns:a16="http://schemas.microsoft.com/office/drawing/2014/main" id="{C392E026-D238-4AF1-8F4A-C306A5A4B402}"/>
+                <a16:creationId xmlns:a16="http://schemas.microsoft.com/office/drawing/2014/main" id="{0DE1DDBD-45CE-874F-F1CD-A2CF30728BD2}"/>
               </a:ext>
             </a:extLst>
           </p:cNvPr>
@@ -12290,18 +14582,31 @@
           <a:lstStyle/>
           <a:p>
             <a:r>
-              <a:rPr lang="fr-BE" dirty="0"/>
-              <a:t>5. Objectives of R packages</a:t>
-            </a:r>
+              <a:rPr lang="en-GB" dirty="0"/>
+              <a:t>4. </a:t>
+            </a:r>
+            <a:r>
+              <a:rPr lang="en-GB" dirty="0" err="1"/>
+              <a:t>rjdverse</a:t>
+            </a:r>
+            <a:r>
+              <a:rPr lang="en-GB" dirty="0"/>
+              <a:t>: Overview </a:t>
+            </a:r>
+            <a:r>
+              <a:rPr lang="en-GB" sz="3200" dirty="0"/>
+              <a:t>(main packages for SA)</a:t>
+            </a:r>
+            <a:endParaRPr lang="en-GB" dirty="0"/>
           </a:p>
         </p:txBody>
       </p:sp>
       <p:sp>
         <p:nvSpPr>
-          <p:cNvPr id="3" name="Content Placeholder 2">
-            <a:extLst>
-              <a:ext uri="{FF2B5EF4-FFF2-40B4-BE49-F238E27FC236}">
-                <a16:creationId xmlns:a16="http://schemas.microsoft.com/office/drawing/2014/main" id="{82519A8F-D80B-4FDC-B623-698C487B820E}"/>
+          <p:cNvPr id="14" name="Espace réservé du pied de page 13">
+            <a:extLst>
+              <a:ext uri="{FF2B5EF4-FFF2-40B4-BE49-F238E27FC236}">
+                <a16:creationId xmlns:a16="http://schemas.microsoft.com/office/drawing/2014/main" id="{2207B836-C1B7-5AD6-C431-BEEE170FA13F}"/>
               </a:ext>
             </a:extLst>
           </p:cNvPr>
@@ -12309,164 +14614,1681 @@
             <a:spLocks noGrp="1"/>
           </p:cNvSpPr>
           <p:nvPr>
-            <p:ph idx="1"/>
+            <p:ph type="ftr" sz="quarter" idx="4294967295"/>
           </p:nvPr>
         </p:nvSpPr>
-        <p:spPr/>
+        <p:spPr>
+          <a:xfrm>
+            <a:off x="0" y="0"/>
+            <a:ext cx="0" cy="0"/>
+          </a:xfrm>
+        </p:spPr>
         <p:txBody>
           <a:bodyPr/>
           <a:lstStyle/>
           <a:p>
             <a:r>
-              <a:rPr lang="fr-BE" dirty="0"/>
-              <a:t>High-</a:t>
-            </a:r>
-            <a:r>
-              <a:rPr lang="fr-BE" dirty="0" err="1"/>
-              <a:t>level</a:t>
-            </a:r>
-            <a:r>
-              <a:rPr lang="fr-BE" dirty="0"/>
-              <a:t> </a:t>
-            </a:r>
-            <a:r>
-              <a:rPr lang="fr-BE" dirty="0" err="1"/>
-              <a:t>functions</a:t>
-            </a:r>
-            <a:r>
-              <a:rPr lang="fr-BE" dirty="0"/>
-              <a:t> </a:t>
-            </a:r>
-            <a:r>
-              <a:rPr lang="fr-BE" dirty="0" err="1"/>
-              <a:t>with</a:t>
-            </a:r>
-            <a:r>
-              <a:rPr lang="fr-BE" dirty="0"/>
-              <a:t> </a:t>
-            </a:r>
-            <a:r>
-              <a:rPr lang="fr-BE" dirty="0" err="1"/>
-              <a:t>most</a:t>
-            </a:r>
-            <a:r>
-              <a:rPr lang="fr-BE" dirty="0"/>
-              <a:t> </a:t>
-            </a:r>
-            <a:r>
-              <a:rPr lang="fr-BE" dirty="0" err="1"/>
-              <a:t>common</a:t>
-            </a:r>
-            <a:r>
-              <a:rPr lang="fr-BE" dirty="0"/>
-              <a:t> </a:t>
-            </a:r>
-            <a:r>
-              <a:rPr lang="fr-BE" dirty="0" err="1"/>
-              <a:t>results</a:t>
-            </a:r>
-            <a:endParaRPr lang="fr-BE" dirty="0"/>
-          </a:p>
-          <a:p>
-            <a:r>
-              <a:rPr lang="fr-BE" dirty="0" err="1"/>
-              <a:t>Many</a:t>
-            </a:r>
-            <a:r>
-              <a:rPr lang="fr-BE" dirty="0"/>
-              <a:t> </a:t>
-            </a:r>
-            <a:r>
-              <a:rPr lang="fr-BE" dirty="0" err="1"/>
-              <a:t>low-level</a:t>
-            </a:r>
-            <a:r>
-              <a:rPr lang="fr-BE" dirty="0"/>
-              <a:t> </a:t>
-            </a:r>
-            <a:r>
-              <a:rPr lang="fr-BE" dirty="0" err="1"/>
-              <a:t>functions</a:t>
-            </a:r>
-            <a:endParaRPr lang="fr-BE" dirty="0"/>
-          </a:p>
-          <a:p>
-            <a:pPr lvl="1"/>
-            <a:r>
-              <a:rPr lang="fr-BE" dirty="0"/>
-              <a:t>Advanced </a:t>
-            </a:r>
-            <a:r>
-              <a:rPr lang="fr-BE" dirty="0" err="1"/>
-              <a:t>users</a:t>
-            </a:r>
-            <a:endParaRPr lang="fr-BE" dirty="0"/>
-          </a:p>
-          <a:p>
-            <a:pPr lvl="1"/>
-            <a:r>
-              <a:rPr lang="fr-BE" dirty="0" err="1"/>
-              <a:t>Research</a:t>
-            </a:r>
-            <a:endParaRPr lang="fr-BE" dirty="0"/>
-          </a:p>
-          <a:p>
-            <a:pPr lvl="1"/>
-            <a:r>
-              <a:rPr lang="fr-BE" dirty="0"/>
-              <a:t>Training</a:t>
-            </a:r>
-          </a:p>
-          <a:p>
-            <a:pPr lvl="1"/>
-            <a:r>
-              <a:rPr lang="fr-BE" dirty="0" err="1"/>
-              <a:t>Additional</a:t>
-            </a:r>
-            <a:r>
-              <a:rPr lang="fr-BE" dirty="0"/>
-              <a:t> </a:t>
-            </a:r>
-            <a:r>
-              <a:rPr lang="fr-BE" dirty="0" err="1"/>
-              <a:t>tools</a:t>
-            </a:r>
-            <a:endParaRPr lang="fr-BE" dirty="0"/>
+              <a:rPr lang="en-GB"/>
+              <a:t>JD+ and R</a:t>
+            </a:r>
           </a:p>
         </p:txBody>
       </p:sp>
       <p:sp>
         <p:nvSpPr>
-          <p:cNvPr id="9" name="Espace réservé du pied de page 8">
-            <a:extLst>
-              <a:ext uri="{FF2B5EF4-FFF2-40B4-BE49-F238E27FC236}">
-                <a16:creationId xmlns:a16="http://schemas.microsoft.com/office/drawing/2014/main" id="{E11D6C85-A84B-E7AF-DB34-D16218EA28CC}"/>
-              </a:ext>
-            </a:extLst>
-          </p:cNvPr>
-          <p:cNvSpPr>
-            <a:spLocks noGrp="1"/>
-          </p:cNvSpPr>
-          <p:nvPr>
-            <p:ph type="ftr" sz="quarter" idx="11"/>
-          </p:nvPr>
+          <p:cNvPr id="4" name="Rectangle: Rounded Corners 3">
+            <a:extLst>
+              <a:ext uri="{FF2B5EF4-FFF2-40B4-BE49-F238E27FC236}">
+                <a16:creationId xmlns:a16="http://schemas.microsoft.com/office/drawing/2014/main" id="{A0AD0696-F4B8-1C7F-E5CD-2EBF44AA0541}"/>
+              </a:ext>
+            </a:extLst>
+          </p:cNvPr>
+          <p:cNvSpPr/>
+          <p:nvPr/>
         </p:nvSpPr>
-        <p:spPr/>
+        <p:spPr>
+          <a:xfrm>
+            <a:off x="4775941" y="2495820"/>
+            <a:ext cx="1881574" cy="983767"/>
+          </a:xfrm>
+          <a:prstGeom prst="roundRect">
+            <a:avLst/>
+          </a:prstGeom>
+        </p:spPr>
+        <p:style>
+          <a:lnRef idx="2">
+            <a:schemeClr val="accent2">
+              <a:shade val="50000"/>
+            </a:schemeClr>
+          </a:lnRef>
+          <a:fillRef idx="1">
+            <a:schemeClr val="accent2"/>
+          </a:fillRef>
+          <a:effectRef idx="0">
+            <a:schemeClr val="accent2"/>
+          </a:effectRef>
+          <a:fontRef idx="minor">
+            <a:schemeClr val="lt1"/>
+          </a:fontRef>
+        </p:style>
         <p:txBody>
-          <a:bodyPr/>
+          <a:bodyPr rtlCol="0" anchor="ctr"/>
           <a:lstStyle/>
           <a:p>
-            <a:r>
-              <a:rPr lang="en-GB"/>
-              <a:t>JD+ and R</a:t>
+            <a:pPr algn="ctr"/>
+            <a:r>
+              <a:rPr lang="en-GB" sz="2400" b="1" dirty="0"/>
+              <a:t>rjd3toolkit</a:t>
             </a:r>
           </a:p>
         </p:txBody>
       </p:sp>
+      <p:sp>
+        <p:nvSpPr>
+          <p:cNvPr id="10" name="Rectangle: Rounded Corners 9">
+            <a:extLst>
+              <a:ext uri="{FF2B5EF4-FFF2-40B4-BE49-F238E27FC236}">
+                <a16:creationId xmlns:a16="http://schemas.microsoft.com/office/drawing/2014/main" id="{4BA9FFB8-5D32-9311-A4C1-E8BAD7F9A9AD}"/>
+              </a:ext>
+            </a:extLst>
+          </p:cNvPr>
+          <p:cNvSpPr/>
+          <p:nvPr/>
+        </p:nvSpPr>
+        <p:spPr>
+          <a:xfrm>
+            <a:off x="569658" y="4442707"/>
+            <a:ext cx="1641682" cy="555721"/>
+          </a:xfrm>
+          <a:prstGeom prst="roundRect">
+            <a:avLst/>
+          </a:prstGeom>
+          <a:ln>
+            <a:solidFill>
+              <a:schemeClr val="bg1"/>
+            </a:solidFill>
+          </a:ln>
+        </p:spPr>
+        <p:style>
+          <a:lnRef idx="2">
+            <a:schemeClr val="accent4">
+              <a:shade val="50000"/>
+            </a:schemeClr>
+          </a:lnRef>
+          <a:fillRef idx="1">
+            <a:schemeClr val="accent4"/>
+          </a:fillRef>
+          <a:effectRef idx="0">
+            <a:schemeClr val="accent4"/>
+          </a:effectRef>
+          <a:fontRef idx="minor">
+            <a:schemeClr val="lt1"/>
+          </a:fontRef>
+        </p:style>
+        <p:txBody>
+          <a:bodyPr rtlCol="0" anchor="ctr"/>
+          <a:lstStyle/>
+          <a:p>
+            <a:pPr algn="ctr"/>
+            <a:r>
+              <a:rPr lang="en-GB" dirty="0"/>
+              <a:t>rjd3workspace</a:t>
+            </a:r>
+          </a:p>
+        </p:txBody>
+      </p:sp>
+      <p:sp>
+        <p:nvSpPr>
+          <p:cNvPr id="37" name="Rectangle: Rounded Corners 36">
+            <a:extLst>
+              <a:ext uri="{FF2B5EF4-FFF2-40B4-BE49-F238E27FC236}">
+                <a16:creationId xmlns:a16="http://schemas.microsoft.com/office/drawing/2014/main" id="{97F268B6-FDDA-A213-992B-E6DA7D378F32}"/>
+              </a:ext>
+            </a:extLst>
+          </p:cNvPr>
+          <p:cNvSpPr/>
+          <p:nvPr/>
+        </p:nvSpPr>
+        <p:spPr>
+          <a:xfrm>
+            <a:off x="9521676" y="4886078"/>
+            <a:ext cx="2508308" cy="379602"/>
+          </a:xfrm>
+          <a:prstGeom prst="roundRect">
+            <a:avLst/>
+          </a:prstGeom>
+          <a:solidFill>
+            <a:schemeClr val="bg2">
+              <a:lumMod val="75000"/>
+            </a:schemeClr>
+          </a:solidFill>
+          <a:ln>
+            <a:solidFill>
+              <a:schemeClr val="bg1"/>
+            </a:solidFill>
+          </a:ln>
+        </p:spPr>
+        <p:style>
+          <a:lnRef idx="2">
+            <a:schemeClr val="accent2">
+              <a:shade val="50000"/>
+            </a:schemeClr>
+          </a:lnRef>
+          <a:fillRef idx="1">
+            <a:schemeClr val="accent2"/>
+          </a:fillRef>
+          <a:effectRef idx="0">
+            <a:schemeClr val="accent2"/>
+          </a:effectRef>
+          <a:fontRef idx="minor">
+            <a:schemeClr val="lt1"/>
+          </a:fontRef>
+        </p:style>
+        <p:txBody>
+          <a:bodyPr rtlCol="0" anchor="ctr"/>
+          <a:lstStyle/>
+          <a:p>
+            <a:pPr algn="ctr"/>
+            <a:r>
+              <a:rPr lang="en-GB" dirty="0">
+                <a:solidFill>
+                  <a:schemeClr val="bg1"/>
+                </a:solidFill>
+              </a:rPr>
+              <a:t>rjd3bench</a:t>
+            </a:r>
+          </a:p>
+        </p:txBody>
+      </p:sp>
+      <p:sp>
+        <p:nvSpPr>
+          <p:cNvPr id="44" name="Rectangle: Rounded Corners 43">
+            <a:extLst>
+              <a:ext uri="{FF2B5EF4-FFF2-40B4-BE49-F238E27FC236}">
+                <a16:creationId xmlns:a16="http://schemas.microsoft.com/office/drawing/2014/main" id="{299D1D39-2A76-D7F5-047F-CBB9184455D8}"/>
+              </a:ext>
+            </a:extLst>
+          </p:cNvPr>
+          <p:cNvSpPr/>
+          <p:nvPr/>
+        </p:nvSpPr>
+        <p:spPr>
+          <a:xfrm>
+            <a:off x="1699826" y="1839012"/>
+            <a:ext cx="1881575" cy="445818"/>
+          </a:xfrm>
+          <a:prstGeom prst="roundRect">
+            <a:avLst/>
+          </a:prstGeom>
+          <a:solidFill>
+            <a:schemeClr val="accent2"/>
+          </a:solidFill>
+        </p:spPr>
+        <p:style>
+          <a:lnRef idx="2">
+            <a:schemeClr val="accent2">
+              <a:shade val="50000"/>
+            </a:schemeClr>
+          </a:lnRef>
+          <a:fillRef idx="1">
+            <a:schemeClr val="accent2"/>
+          </a:fillRef>
+          <a:effectRef idx="0">
+            <a:schemeClr val="accent2"/>
+          </a:effectRef>
+          <a:fontRef idx="minor">
+            <a:schemeClr val="lt1"/>
+          </a:fontRef>
+        </p:style>
+        <p:txBody>
+          <a:bodyPr rtlCol="0" anchor="ctr"/>
+          <a:lstStyle/>
+          <a:p>
+            <a:pPr algn="ctr"/>
+            <a:r>
+              <a:rPr lang="en-GB" dirty="0"/>
+              <a:t>rjd3tramoseats</a:t>
+            </a:r>
+          </a:p>
+        </p:txBody>
+      </p:sp>
+      <p:sp>
+        <p:nvSpPr>
+          <p:cNvPr id="45" name="Rectangle: Rounded Corners 44">
+            <a:extLst>
+              <a:ext uri="{FF2B5EF4-FFF2-40B4-BE49-F238E27FC236}">
+                <a16:creationId xmlns:a16="http://schemas.microsoft.com/office/drawing/2014/main" id="{B8E92415-898C-4AF8-BE59-109063A2BC68}"/>
+              </a:ext>
+            </a:extLst>
+          </p:cNvPr>
+          <p:cNvSpPr/>
+          <p:nvPr/>
+        </p:nvSpPr>
+        <p:spPr>
+          <a:xfrm>
+            <a:off x="1699826" y="2500443"/>
+            <a:ext cx="1881574" cy="373157"/>
+          </a:xfrm>
+          <a:prstGeom prst="roundRect">
+            <a:avLst/>
+          </a:prstGeom>
+          <a:solidFill>
+            <a:schemeClr val="accent2"/>
+          </a:solidFill>
+        </p:spPr>
+        <p:style>
+          <a:lnRef idx="2">
+            <a:schemeClr val="accent2">
+              <a:shade val="50000"/>
+            </a:schemeClr>
+          </a:lnRef>
+          <a:fillRef idx="1">
+            <a:schemeClr val="accent2"/>
+          </a:fillRef>
+          <a:effectRef idx="0">
+            <a:schemeClr val="accent2"/>
+          </a:effectRef>
+          <a:fontRef idx="minor">
+            <a:schemeClr val="lt1"/>
+          </a:fontRef>
+        </p:style>
+        <p:txBody>
+          <a:bodyPr rtlCol="0" anchor="ctr"/>
+          <a:lstStyle/>
+          <a:p>
+            <a:pPr algn="ctr"/>
+            <a:r>
+              <a:rPr lang="en-GB" dirty="0"/>
+              <a:t>rjd3x13</a:t>
+            </a:r>
+          </a:p>
+        </p:txBody>
+      </p:sp>
+      <p:cxnSp>
+        <p:nvCxnSpPr>
+          <p:cNvPr id="58" name="Connector: Elbow 57">
+            <a:extLst>
+              <a:ext uri="{FF2B5EF4-FFF2-40B4-BE49-F238E27FC236}">
+                <a16:creationId xmlns:a16="http://schemas.microsoft.com/office/drawing/2014/main" id="{B509053D-98DA-A95E-C13F-9CCDC0398AB6}"/>
+              </a:ext>
+            </a:extLst>
+          </p:cNvPr>
+          <p:cNvCxnSpPr>
+            <a:cxnSpLocks/>
+            <a:stCxn id="37" idx="1"/>
+            <a:endCxn id="4" idx="2"/>
+          </p:cNvCxnSpPr>
+          <p:nvPr/>
+        </p:nvCxnSpPr>
+        <p:spPr>
+          <a:xfrm rot="10800000">
+            <a:off x="5716728" y="3479587"/>
+            <a:ext cx="3804948" cy="1596292"/>
+          </a:xfrm>
+          <a:prstGeom prst="bentConnector2">
+            <a:avLst/>
+          </a:prstGeom>
+          <a:ln>
+            <a:tailEnd type="triangle"/>
+          </a:ln>
+        </p:spPr>
+        <p:style>
+          <a:lnRef idx="3">
+            <a:schemeClr val="dk1"/>
+          </a:lnRef>
+          <a:fillRef idx="0">
+            <a:schemeClr val="dk1"/>
+          </a:fillRef>
+          <a:effectRef idx="2">
+            <a:schemeClr val="dk1"/>
+          </a:effectRef>
+          <a:fontRef idx="minor">
+            <a:schemeClr val="tx1"/>
+          </a:fontRef>
+        </p:style>
+      </p:cxnSp>
+      <p:sp>
+        <p:nvSpPr>
+          <p:cNvPr id="26" name="Rectangle: Rounded Corners 25">
+            <a:extLst>
+              <a:ext uri="{FF2B5EF4-FFF2-40B4-BE49-F238E27FC236}">
+                <a16:creationId xmlns:a16="http://schemas.microsoft.com/office/drawing/2014/main" id="{35D9E5F4-E429-2B72-CE18-2D5FA7F6895D}"/>
+              </a:ext>
+            </a:extLst>
+          </p:cNvPr>
+          <p:cNvSpPr/>
+          <p:nvPr/>
+        </p:nvSpPr>
+        <p:spPr>
+          <a:xfrm>
+            <a:off x="9521676" y="5479226"/>
+            <a:ext cx="2508308" cy="379602"/>
+          </a:xfrm>
+          <a:prstGeom prst="roundRect">
+            <a:avLst/>
+          </a:prstGeom>
+          <a:pattFill prst="pct5">
+            <a:fgClr>
+              <a:schemeClr val="accent2"/>
+            </a:fgClr>
+            <a:bgClr>
+              <a:schemeClr val="bg1"/>
+            </a:bgClr>
+          </a:pattFill>
+        </p:spPr>
+        <p:style>
+          <a:lnRef idx="2">
+            <a:schemeClr val="accent2">
+              <a:shade val="50000"/>
+            </a:schemeClr>
+          </a:lnRef>
+          <a:fillRef idx="1">
+            <a:schemeClr val="accent2"/>
+          </a:fillRef>
+          <a:effectRef idx="0">
+            <a:schemeClr val="accent2"/>
+          </a:effectRef>
+          <a:fontRef idx="minor">
+            <a:schemeClr val="lt1"/>
+          </a:fontRef>
+        </p:style>
+        <p:txBody>
+          <a:bodyPr rtlCol="0" anchor="ctr"/>
+          <a:lstStyle/>
+          <a:p>
+            <a:pPr algn="ctr"/>
+            <a:r>
+              <a:rPr lang="en-GB" dirty="0">
+                <a:solidFill>
+                  <a:schemeClr val="tx1"/>
+                </a:solidFill>
+              </a:rPr>
+              <a:t>rjd3nowcasting</a:t>
+            </a:r>
+          </a:p>
+        </p:txBody>
+      </p:sp>
+      <p:sp>
+        <p:nvSpPr>
+          <p:cNvPr id="28" name="Rectangle: Rounded Corners 27">
+            <a:extLst>
+              <a:ext uri="{FF2B5EF4-FFF2-40B4-BE49-F238E27FC236}">
+                <a16:creationId xmlns:a16="http://schemas.microsoft.com/office/drawing/2014/main" id="{DCE3EE7D-DD98-1B40-E429-0468D67F8ABF}"/>
+              </a:ext>
+            </a:extLst>
+          </p:cNvPr>
+          <p:cNvSpPr/>
+          <p:nvPr/>
+        </p:nvSpPr>
+        <p:spPr>
+          <a:xfrm>
+            <a:off x="8293193" y="2380893"/>
+            <a:ext cx="2508308" cy="379602"/>
+          </a:xfrm>
+          <a:prstGeom prst="roundRect">
+            <a:avLst/>
+          </a:prstGeom>
+          <a:pattFill prst="ltUpDiag">
+            <a:fgClr>
+              <a:schemeClr val="accent2"/>
+            </a:fgClr>
+            <a:bgClr>
+              <a:schemeClr val="bg1"/>
+            </a:bgClr>
+          </a:pattFill>
+        </p:spPr>
+        <p:style>
+          <a:lnRef idx="2">
+            <a:schemeClr val="accent2">
+              <a:shade val="50000"/>
+            </a:schemeClr>
+          </a:lnRef>
+          <a:fillRef idx="1">
+            <a:schemeClr val="accent2"/>
+          </a:fillRef>
+          <a:effectRef idx="0">
+            <a:schemeClr val="accent2"/>
+          </a:effectRef>
+          <a:fontRef idx="minor">
+            <a:schemeClr val="lt1"/>
+          </a:fontRef>
+        </p:style>
+        <p:txBody>
+          <a:bodyPr rtlCol="0" anchor="ctr"/>
+          <a:lstStyle/>
+          <a:p>
+            <a:pPr algn="ctr"/>
+            <a:r>
+              <a:rPr lang="en-GB" dirty="0">
+                <a:solidFill>
+                  <a:schemeClr val="tx1"/>
+                </a:solidFill>
+              </a:rPr>
+              <a:t>rjd3highfreq</a:t>
+            </a:r>
+          </a:p>
+        </p:txBody>
+      </p:sp>
+      <p:sp>
+        <p:nvSpPr>
+          <p:cNvPr id="29" name="Rectangle: Rounded Corners 28">
+            <a:extLst>
+              <a:ext uri="{FF2B5EF4-FFF2-40B4-BE49-F238E27FC236}">
+                <a16:creationId xmlns:a16="http://schemas.microsoft.com/office/drawing/2014/main" id="{0B445224-22F4-7CD2-D2B0-03D6646ADEAC}"/>
+              </a:ext>
+            </a:extLst>
+          </p:cNvPr>
+          <p:cNvSpPr/>
+          <p:nvPr/>
+        </p:nvSpPr>
+        <p:spPr>
+          <a:xfrm>
+            <a:off x="8293193" y="3153222"/>
+            <a:ext cx="2508307" cy="379602"/>
+          </a:xfrm>
+          <a:prstGeom prst="roundRect">
+            <a:avLst/>
+          </a:prstGeom>
+          <a:pattFill prst="ltUpDiag">
+            <a:fgClr>
+              <a:schemeClr val="accent2"/>
+            </a:fgClr>
+            <a:bgClr>
+              <a:schemeClr val="bg1"/>
+            </a:bgClr>
+          </a:pattFill>
+        </p:spPr>
+        <p:style>
+          <a:lnRef idx="2">
+            <a:schemeClr val="accent2">
+              <a:shade val="50000"/>
+            </a:schemeClr>
+          </a:lnRef>
+          <a:fillRef idx="1">
+            <a:schemeClr val="accent2"/>
+          </a:fillRef>
+          <a:effectRef idx="0">
+            <a:schemeClr val="accent2"/>
+          </a:effectRef>
+          <a:fontRef idx="minor">
+            <a:schemeClr val="lt1"/>
+          </a:fontRef>
+        </p:style>
+        <p:txBody>
+          <a:bodyPr rtlCol="0" anchor="ctr"/>
+          <a:lstStyle/>
+          <a:p>
+            <a:pPr algn="ctr"/>
+            <a:r>
+              <a:rPr lang="en-GB" dirty="0">
+                <a:solidFill>
+                  <a:schemeClr val="tx1"/>
+                </a:solidFill>
+              </a:rPr>
+              <a:t>rjd3stl</a:t>
+            </a:r>
+          </a:p>
+        </p:txBody>
+      </p:sp>
+      <p:sp>
+        <p:nvSpPr>
+          <p:cNvPr id="30" name="Rectangle: Rounded Corners 29">
+            <a:extLst>
+              <a:ext uri="{FF2B5EF4-FFF2-40B4-BE49-F238E27FC236}">
+                <a16:creationId xmlns:a16="http://schemas.microsoft.com/office/drawing/2014/main" id="{D3ADA459-18E0-B215-FF16-BCC00F307CD2}"/>
+              </a:ext>
+            </a:extLst>
+          </p:cNvPr>
+          <p:cNvSpPr/>
+          <p:nvPr/>
+        </p:nvSpPr>
+        <p:spPr>
+          <a:xfrm>
+            <a:off x="9521676" y="5997218"/>
+            <a:ext cx="2508308" cy="379602"/>
+          </a:xfrm>
+          <a:prstGeom prst="roundRect">
+            <a:avLst/>
+          </a:prstGeom>
+          <a:pattFill prst="pct5">
+            <a:fgClr>
+              <a:schemeClr val="accent2"/>
+            </a:fgClr>
+            <a:bgClr>
+              <a:schemeClr val="bg1"/>
+            </a:bgClr>
+          </a:pattFill>
+        </p:spPr>
+        <p:style>
+          <a:lnRef idx="2">
+            <a:schemeClr val="accent2">
+              <a:shade val="50000"/>
+            </a:schemeClr>
+          </a:lnRef>
+          <a:fillRef idx="1">
+            <a:schemeClr val="accent2"/>
+          </a:fillRef>
+          <a:effectRef idx="0">
+            <a:schemeClr val="accent2"/>
+          </a:effectRef>
+          <a:fontRef idx="minor">
+            <a:schemeClr val="lt1"/>
+          </a:fontRef>
+        </p:style>
+        <p:txBody>
+          <a:bodyPr rtlCol="0" anchor="ctr"/>
+          <a:lstStyle/>
+          <a:p>
+            <a:pPr algn="ctr"/>
+            <a:r>
+              <a:rPr lang="en-GB" dirty="0">
+                <a:solidFill>
+                  <a:schemeClr val="tx1"/>
+                </a:solidFill>
+              </a:rPr>
+              <a:t>rjd3cycle</a:t>
+            </a:r>
+          </a:p>
+        </p:txBody>
+      </p:sp>
+      <p:sp>
+        <p:nvSpPr>
+          <p:cNvPr id="31" name="Rectangle: Rounded Corners 30">
+            <a:extLst>
+              <a:ext uri="{FF2B5EF4-FFF2-40B4-BE49-F238E27FC236}">
+                <a16:creationId xmlns:a16="http://schemas.microsoft.com/office/drawing/2014/main" id="{C9849A39-CAC4-BCE1-A1E2-2A28B54C940D}"/>
+              </a:ext>
+            </a:extLst>
+          </p:cNvPr>
+          <p:cNvSpPr/>
+          <p:nvPr/>
+        </p:nvSpPr>
+        <p:spPr>
+          <a:xfrm>
+            <a:off x="9521676" y="4325044"/>
+            <a:ext cx="2508308" cy="379602"/>
+          </a:xfrm>
+          <a:prstGeom prst="roundRect">
+            <a:avLst/>
+          </a:prstGeom>
+          <a:solidFill>
+            <a:schemeClr val="accent3"/>
+          </a:solidFill>
+          <a:ln>
+            <a:solidFill>
+              <a:schemeClr val="bg1"/>
+            </a:solidFill>
+          </a:ln>
+        </p:spPr>
+        <p:style>
+          <a:lnRef idx="2">
+            <a:schemeClr val="accent2">
+              <a:shade val="50000"/>
+            </a:schemeClr>
+          </a:lnRef>
+          <a:fillRef idx="1">
+            <a:schemeClr val="accent2"/>
+          </a:fillRef>
+          <a:effectRef idx="0">
+            <a:schemeClr val="accent2"/>
+          </a:effectRef>
+          <a:fontRef idx="minor">
+            <a:schemeClr val="lt1"/>
+          </a:fontRef>
+        </p:style>
+        <p:txBody>
+          <a:bodyPr rtlCol="0" anchor="ctr"/>
+          <a:lstStyle/>
+          <a:p>
+            <a:pPr algn="ctr"/>
+            <a:r>
+              <a:rPr lang="en-GB" dirty="0">
+                <a:solidFill>
+                  <a:schemeClr val="bg1"/>
+                </a:solidFill>
+              </a:rPr>
+              <a:t>rjd3revisions</a:t>
+            </a:r>
+          </a:p>
+        </p:txBody>
+      </p:sp>
+      <p:sp>
+        <p:nvSpPr>
+          <p:cNvPr id="27" name="Rectangle: Rounded Corners 26">
+            <a:extLst>
+              <a:ext uri="{FF2B5EF4-FFF2-40B4-BE49-F238E27FC236}">
+                <a16:creationId xmlns:a16="http://schemas.microsoft.com/office/drawing/2014/main" id="{9CD4ACCF-E1D0-F866-775A-BE8224D2BFBB}"/>
+              </a:ext>
+            </a:extLst>
+          </p:cNvPr>
+          <p:cNvSpPr/>
+          <p:nvPr/>
+        </p:nvSpPr>
+        <p:spPr>
+          <a:xfrm>
+            <a:off x="9521676" y="1409493"/>
+            <a:ext cx="1447520" cy="409242"/>
+          </a:xfrm>
+          <a:prstGeom prst="roundRect">
+            <a:avLst/>
+          </a:prstGeom>
+          <a:pattFill prst="zigZag">
+            <a:fgClr>
+              <a:schemeClr val="accent2"/>
+            </a:fgClr>
+            <a:bgClr>
+              <a:schemeClr val="bg1"/>
+            </a:bgClr>
+          </a:pattFill>
+        </p:spPr>
+        <p:style>
+          <a:lnRef idx="2">
+            <a:schemeClr val="accent2">
+              <a:shade val="50000"/>
+            </a:schemeClr>
+          </a:lnRef>
+          <a:fillRef idx="1">
+            <a:schemeClr val="accent2"/>
+          </a:fillRef>
+          <a:effectRef idx="0">
+            <a:schemeClr val="accent2"/>
+          </a:effectRef>
+          <a:fontRef idx="minor">
+            <a:schemeClr val="lt1"/>
+          </a:fontRef>
+        </p:style>
+        <p:txBody>
+          <a:bodyPr rtlCol="0" anchor="ctr"/>
+          <a:lstStyle/>
+          <a:p>
+            <a:pPr algn="ctr"/>
+            <a:r>
+              <a:rPr lang="en-GB" dirty="0">
+                <a:solidFill>
+                  <a:schemeClr val="tx1"/>
+                </a:solidFill>
+              </a:rPr>
+              <a:t>rjd3sts</a:t>
+            </a:r>
+          </a:p>
+        </p:txBody>
+      </p:sp>
+      <p:cxnSp>
+        <p:nvCxnSpPr>
+          <p:cNvPr id="85" name="Connector: Elbow 84">
+            <a:extLst>
+              <a:ext uri="{FF2B5EF4-FFF2-40B4-BE49-F238E27FC236}">
+                <a16:creationId xmlns:a16="http://schemas.microsoft.com/office/drawing/2014/main" id="{C6AD9A20-DD76-9C02-83DA-38DD7CF6612B}"/>
+              </a:ext>
+            </a:extLst>
+          </p:cNvPr>
+          <p:cNvCxnSpPr>
+            <a:cxnSpLocks/>
+            <a:stCxn id="28" idx="1"/>
+            <a:endCxn id="4" idx="3"/>
+          </p:cNvCxnSpPr>
+          <p:nvPr/>
+        </p:nvCxnSpPr>
+        <p:spPr>
+          <a:xfrm rot="10800000" flipV="1">
+            <a:off x="6657515" y="2570694"/>
+            <a:ext cx="1635678" cy="417010"/>
+          </a:xfrm>
+          <a:prstGeom prst="bentConnector3">
+            <a:avLst>
+              <a:gd name="adj1" fmla="val 50000"/>
+            </a:avLst>
+          </a:prstGeom>
+          <a:ln>
+            <a:tailEnd type="triangle"/>
+          </a:ln>
+        </p:spPr>
+        <p:style>
+          <a:lnRef idx="3">
+            <a:schemeClr val="dk1"/>
+          </a:lnRef>
+          <a:fillRef idx="0">
+            <a:schemeClr val="dk1"/>
+          </a:fillRef>
+          <a:effectRef idx="2">
+            <a:schemeClr val="dk1"/>
+          </a:effectRef>
+          <a:fontRef idx="minor">
+            <a:schemeClr val="tx1"/>
+          </a:fontRef>
+        </p:style>
+      </p:cxnSp>
+      <p:cxnSp>
+        <p:nvCxnSpPr>
+          <p:cNvPr id="98" name="Connector: Elbow 97">
+            <a:extLst>
+              <a:ext uri="{FF2B5EF4-FFF2-40B4-BE49-F238E27FC236}">
+                <a16:creationId xmlns:a16="http://schemas.microsoft.com/office/drawing/2014/main" id="{4DFA5489-98E3-61A7-B17F-7AC4F3238439}"/>
+              </a:ext>
+            </a:extLst>
+          </p:cNvPr>
+          <p:cNvCxnSpPr>
+            <a:cxnSpLocks/>
+            <a:stCxn id="31" idx="1"/>
+            <a:endCxn id="4" idx="2"/>
+          </p:cNvCxnSpPr>
+          <p:nvPr/>
+        </p:nvCxnSpPr>
+        <p:spPr>
+          <a:xfrm rot="10800000">
+            <a:off x="5716728" y="3479587"/>
+            <a:ext cx="3804948" cy="1035258"/>
+          </a:xfrm>
+          <a:prstGeom prst="bentConnector2">
+            <a:avLst/>
+          </a:prstGeom>
+          <a:ln>
+            <a:tailEnd type="triangle"/>
+          </a:ln>
+        </p:spPr>
+        <p:style>
+          <a:lnRef idx="3">
+            <a:schemeClr val="dk1"/>
+          </a:lnRef>
+          <a:fillRef idx="0">
+            <a:schemeClr val="dk1"/>
+          </a:fillRef>
+          <a:effectRef idx="2">
+            <a:schemeClr val="dk1"/>
+          </a:effectRef>
+          <a:fontRef idx="minor">
+            <a:schemeClr val="tx1"/>
+          </a:fontRef>
+        </p:style>
+      </p:cxnSp>
+      <p:sp>
+        <p:nvSpPr>
+          <p:cNvPr id="6" name="TextBox 5">
+            <a:extLst>
+              <a:ext uri="{FF2B5EF4-FFF2-40B4-BE49-F238E27FC236}">
+                <a16:creationId xmlns:a16="http://schemas.microsoft.com/office/drawing/2014/main" id="{39A9435B-D96F-F6C6-124F-CAFFBBF69955}"/>
+              </a:ext>
+            </a:extLst>
+          </p:cNvPr>
+          <p:cNvSpPr txBox="1"/>
+          <p:nvPr/>
+        </p:nvSpPr>
+        <p:spPr>
+          <a:xfrm>
+            <a:off x="448464" y="6123543"/>
+            <a:ext cx="3884595" cy="369332"/>
+          </a:xfrm>
+          <a:prstGeom prst="rect">
+            <a:avLst/>
+          </a:prstGeom>
+          <a:noFill/>
+        </p:spPr>
+        <p:txBody>
+          <a:bodyPr wrap="square" rtlCol="0">
+            <a:spAutoFit/>
+          </a:bodyPr>
+          <a:lstStyle/>
+          <a:p>
+            <a:r>
+              <a:rPr lang="en-GB" dirty="0"/>
+              <a:t>Design similar to the Java libraries !</a:t>
+            </a:r>
+          </a:p>
+        </p:txBody>
+      </p:sp>
+      <p:sp>
+        <p:nvSpPr>
+          <p:cNvPr id="25" name="Rectangle: Rounded Corners 24">
+            <a:extLst>
+              <a:ext uri="{FF2B5EF4-FFF2-40B4-BE49-F238E27FC236}">
+                <a16:creationId xmlns:a16="http://schemas.microsoft.com/office/drawing/2014/main" id="{3BA0624B-E482-4416-DD4B-9ACAE801411F}"/>
+              </a:ext>
+            </a:extLst>
+          </p:cNvPr>
+          <p:cNvSpPr/>
+          <p:nvPr/>
+        </p:nvSpPr>
+        <p:spPr>
+          <a:xfrm>
+            <a:off x="1721996" y="3107351"/>
+            <a:ext cx="1881574" cy="468525"/>
+          </a:xfrm>
+          <a:prstGeom prst="roundRect">
+            <a:avLst/>
+          </a:prstGeom>
+          <a:solidFill>
+            <a:srgbClr val="00B0F0"/>
+          </a:solidFill>
+          <a:ln>
+            <a:solidFill>
+              <a:srgbClr val="00B0F0"/>
+            </a:solidFill>
+          </a:ln>
+        </p:spPr>
+        <p:style>
+          <a:lnRef idx="2">
+            <a:schemeClr val="accent2">
+              <a:shade val="50000"/>
+            </a:schemeClr>
+          </a:lnRef>
+          <a:fillRef idx="1">
+            <a:schemeClr val="accent2"/>
+          </a:fillRef>
+          <a:effectRef idx="0">
+            <a:schemeClr val="accent2"/>
+          </a:effectRef>
+          <a:fontRef idx="minor">
+            <a:schemeClr val="lt1"/>
+          </a:fontRef>
+        </p:style>
+        <p:txBody>
+          <a:bodyPr rtlCol="0" anchor="ctr"/>
+          <a:lstStyle/>
+          <a:p>
+            <a:pPr algn="ctr"/>
+            <a:r>
+              <a:rPr lang="en-GB" dirty="0"/>
+              <a:t>rjd3providers</a:t>
+            </a:r>
+          </a:p>
+        </p:txBody>
+      </p:sp>
+      <p:cxnSp>
+        <p:nvCxnSpPr>
+          <p:cNvPr id="33" name="Connector: Elbow 32">
+            <a:extLst>
+              <a:ext uri="{FF2B5EF4-FFF2-40B4-BE49-F238E27FC236}">
+                <a16:creationId xmlns:a16="http://schemas.microsoft.com/office/drawing/2014/main" id="{44051F91-2DCD-E2BB-7AC1-6343C0CD0CCA}"/>
+              </a:ext>
+            </a:extLst>
+          </p:cNvPr>
+          <p:cNvCxnSpPr>
+            <a:cxnSpLocks/>
+            <a:stCxn id="45" idx="3"/>
+            <a:endCxn id="4" idx="1"/>
+          </p:cNvCxnSpPr>
+          <p:nvPr/>
+        </p:nvCxnSpPr>
+        <p:spPr>
+          <a:xfrm>
+            <a:off x="3581400" y="2687022"/>
+            <a:ext cx="1194541" cy="300682"/>
+          </a:xfrm>
+          <a:prstGeom prst="bentConnector3">
+            <a:avLst>
+              <a:gd name="adj1" fmla="val 50000"/>
+            </a:avLst>
+          </a:prstGeom>
+          <a:ln>
+            <a:tailEnd type="triangle"/>
+          </a:ln>
+        </p:spPr>
+        <p:style>
+          <a:lnRef idx="3">
+            <a:schemeClr val="dk1"/>
+          </a:lnRef>
+          <a:fillRef idx="0">
+            <a:schemeClr val="dk1"/>
+          </a:fillRef>
+          <a:effectRef idx="2">
+            <a:schemeClr val="dk1"/>
+          </a:effectRef>
+          <a:fontRef idx="minor">
+            <a:schemeClr val="tx1"/>
+          </a:fontRef>
+        </p:style>
+      </p:cxnSp>
+      <p:cxnSp>
+        <p:nvCxnSpPr>
+          <p:cNvPr id="36" name="Connector: Elbow 35">
+            <a:extLst>
+              <a:ext uri="{FF2B5EF4-FFF2-40B4-BE49-F238E27FC236}">
+                <a16:creationId xmlns:a16="http://schemas.microsoft.com/office/drawing/2014/main" id="{CF3978CE-50FF-6649-85D2-70AD4985AD3B}"/>
+              </a:ext>
+            </a:extLst>
+          </p:cNvPr>
+          <p:cNvCxnSpPr>
+            <a:cxnSpLocks/>
+            <a:stCxn id="44" idx="3"/>
+            <a:endCxn id="4" idx="1"/>
+          </p:cNvCxnSpPr>
+          <p:nvPr/>
+        </p:nvCxnSpPr>
+        <p:spPr>
+          <a:xfrm>
+            <a:off x="3581401" y="2061921"/>
+            <a:ext cx="1194540" cy="925783"/>
+          </a:xfrm>
+          <a:prstGeom prst="bentConnector3">
+            <a:avLst>
+              <a:gd name="adj1" fmla="val 50000"/>
+            </a:avLst>
+          </a:prstGeom>
+          <a:ln>
+            <a:tailEnd type="triangle"/>
+          </a:ln>
+        </p:spPr>
+        <p:style>
+          <a:lnRef idx="3">
+            <a:schemeClr val="dk1"/>
+          </a:lnRef>
+          <a:fillRef idx="0">
+            <a:schemeClr val="dk1"/>
+          </a:fillRef>
+          <a:effectRef idx="2">
+            <a:schemeClr val="dk1"/>
+          </a:effectRef>
+          <a:fontRef idx="minor">
+            <a:schemeClr val="tx1"/>
+          </a:fontRef>
+        </p:style>
+      </p:cxnSp>
+      <p:cxnSp>
+        <p:nvCxnSpPr>
+          <p:cNvPr id="50" name="Connector: Elbow 49">
+            <a:extLst>
+              <a:ext uri="{FF2B5EF4-FFF2-40B4-BE49-F238E27FC236}">
+                <a16:creationId xmlns:a16="http://schemas.microsoft.com/office/drawing/2014/main" id="{3D8423C7-867E-D156-A928-ED4EB63C3C99}"/>
+              </a:ext>
+            </a:extLst>
+          </p:cNvPr>
+          <p:cNvCxnSpPr>
+            <a:cxnSpLocks/>
+            <a:stCxn id="25" idx="3"/>
+            <a:endCxn id="4" idx="1"/>
+          </p:cNvCxnSpPr>
+          <p:nvPr/>
+        </p:nvCxnSpPr>
+        <p:spPr>
+          <a:xfrm flipV="1">
+            <a:off x="3603570" y="2987704"/>
+            <a:ext cx="1172371" cy="353910"/>
+          </a:xfrm>
+          <a:prstGeom prst="bentConnector3">
+            <a:avLst>
+              <a:gd name="adj1" fmla="val 50000"/>
+            </a:avLst>
+          </a:prstGeom>
+          <a:ln>
+            <a:tailEnd type="triangle"/>
+          </a:ln>
+        </p:spPr>
+        <p:style>
+          <a:lnRef idx="3">
+            <a:schemeClr val="dk1"/>
+          </a:lnRef>
+          <a:fillRef idx="0">
+            <a:schemeClr val="dk1"/>
+          </a:fillRef>
+          <a:effectRef idx="2">
+            <a:schemeClr val="dk1"/>
+          </a:effectRef>
+          <a:fontRef idx="minor">
+            <a:schemeClr val="tx1"/>
+          </a:fontRef>
+        </p:style>
+      </p:cxnSp>
+      <p:cxnSp>
+        <p:nvCxnSpPr>
+          <p:cNvPr id="56" name="Connector: Elbow 55">
+            <a:extLst>
+              <a:ext uri="{FF2B5EF4-FFF2-40B4-BE49-F238E27FC236}">
+                <a16:creationId xmlns:a16="http://schemas.microsoft.com/office/drawing/2014/main" id="{1DC84594-F6C3-2196-D38F-3E5C12EFBD73}"/>
+              </a:ext>
+            </a:extLst>
+          </p:cNvPr>
+          <p:cNvCxnSpPr>
+            <a:cxnSpLocks/>
+            <a:stCxn id="10" idx="3"/>
+            <a:endCxn id="4" idx="2"/>
+          </p:cNvCxnSpPr>
+          <p:nvPr/>
+        </p:nvCxnSpPr>
+        <p:spPr>
+          <a:xfrm flipV="1">
+            <a:off x="2211340" y="3479587"/>
+            <a:ext cx="3505388" cy="1240981"/>
+          </a:xfrm>
+          <a:prstGeom prst="bentConnector2">
+            <a:avLst/>
+          </a:prstGeom>
+          <a:ln>
+            <a:tailEnd type="triangle"/>
+          </a:ln>
+        </p:spPr>
+        <p:style>
+          <a:lnRef idx="3">
+            <a:schemeClr val="dk1"/>
+          </a:lnRef>
+          <a:fillRef idx="0">
+            <a:schemeClr val="dk1"/>
+          </a:fillRef>
+          <a:effectRef idx="2">
+            <a:schemeClr val="dk1"/>
+          </a:effectRef>
+          <a:fontRef idx="minor">
+            <a:schemeClr val="tx1"/>
+          </a:fontRef>
+        </p:style>
+      </p:cxnSp>
+      <p:cxnSp>
+        <p:nvCxnSpPr>
+          <p:cNvPr id="60" name="Connector: Elbow 59">
+            <a:extLst>
+              <a:ext uri="{FF2B5EF4-FFF2-40B4-BE49-F238E27FC236}">
+                <a16:creationId xmlns:a16="http://schemas.microsoft.com/office/drawing/2014/main" id="{75669680-057E-2FD9-2036-DF6E577CEF3A}"/>
+              </a:ext>
+            </a:extLst>
+          </p:cNvPr>
+          <p:cNvCxnSpPr>
+            <a:cxnSpLocks/>
+            <a:stCxn id="10" idx="1"/>
+            <a:endCxn id="25" idx="1"/>
+          </p:cNvCxnSpPr>
+          <p:nvPr/>
+        </p:nvCxnSpPr>
+        <p:spPr>
+          <a:xfrm rot="10800000" flipH="1">
+            <a:off x="569658" y="3341614"/>
+            <a:ext cx="1152338" cy="1378954"/>
+          </a:xfrm>
+          <a:prstGeom prst="bentConnector3">
+            <a:avLst>
+              <a:gd name="adj1" fmla="val -19838"/>
+            </a:avLst>
+          </a:prstGeom>
+          <a:ln>
+            <a:tailEnd type="triangle"/>
+          </a:ln>
+        </p:spPr>
+        <p:style>
+          <a:lnRef idx="3">
+            <a:schemeClr val="dk1"/>
+          </a:lnRef>
+          <a:fillRef idx="0">
+            <a:schemeClr val="dk1"/>
+          </a:fillRef>
+          <a:effectRef idx="2">
+            <a:schemeClr val="dk1"/>
+          </a:effectRef>
+          <a:fontRef idx="minor">
+            <a:schemeClr val="tx1"/>
+          </a:fontRef>
+        </p:style>
+      </p:cxnSp>
+      <p:cxnSp>
+        <p:nvCxnSpPr>
+          <p:cNvPr id="89" name="Connector: Elbow 88">
+            <a:extLst>
+              <a:ext uri="{FF2B5EF4-FFF2-40B4-BE49-F238E27FC236}">
+                <a16:creationId xmlns:a16="http://schemas.microsoft.com/office/drawing/2014/main" id="{89A84B1F-2B08-CADA-2207-0AB72EE8DD80}"/>
+              </a:ext>
+            </a:extLst>
+          </p:cNvPr>
+          <p:cNvCxnSpPr>
+            <a:cxnSpLocks/>
+            <a:stCxn id="10" idx="0"/>
+            <a:endCxn id="44" idx="1"/>
+          </p:cNvCxnSpPr>
+          <p:nvPr/>
+        </p:nvCxnSpPr>
+        <p:spPr>
+          <a:xfrm rot="5400000" flipH="1" flipV="1">
+            <a:off x="354769" y="3097651"/>
+            <a:ext cx="2380786" cy="309327"/>
+          </a:xfrm>
+          <a:prstGeom prst="bentConnector2">
+            <a:avLst/>
+          </a:prstGeom>
+          <a:ln>
+            <a:tailEnd type="triangle"/>
+          </a:ln>
+        </p:spPr>
+        <p:style>
+          <a:lnRef idx="3">
+            <a:schemeClr val="dk1"/>
+          </a:lnRef>
+          <a:fillRef idx="0">
+            <a:schemeClr val="dk1"/>
+          </a:fillRef>
+          <a:effectRef idx="2">
+            <a:schemeClr val="dk1"/>
+          </a:effectRef>
+          <a:fontRef idx="minor">
+            <a:schemeClr val="tx1"/>
+          </a:fontRef>
+        </p:style>
+      </p:cxnSp>
+      <p:cxnSp>
+        <p:nvCxnSpPr>
+          <p:cNvPr id="100" name="Connector: Elbow 99">
+            <a:extLst>
+              <a:ext uri="{FF2B5EF4-FFF2-40B4-BE49-F238E27FC236}">
+                <a16:creationId xmlns:a16="http://schemas.microsoft.com/office/drawing/2014/main" id="{99CC6438-2972-E9D5-BBF0-A072117ED9AC}"/>
+              </a:ext>
+            </a:extLst>
+          </p:cNvPr>
+          <p:cNvCxnSpPr>
+            <a:cxnSpLocks/>
+            <a:stCxn id="10" idx="0"/>
+            <a:endCxn id="45" idx="1"/>
+          </p:cNvCxnSpPr>
+          <p:nvPr/>
+        </p:nvCxnSpPr>
+        <p:spPr>
+          <a:xfrm rot="5400000" flipH="1" flipV="1">
+            <a:off x="667320" y="3410202"/>
+            <a:ext cx="1755685" cy="309327"/>
+          </a:xfrm>
+          <a:prstGeom prst="bentConnector2">
+            <a:avLst/>
+          </a:prstGeom>
+          <a:ln>
+            <a:tailEnd type="triangle"/>
+          </a:ln>
+        </p:spPr>
+        <p:style>
+          <a:lnRef idx="3">
+            <a:schemeClr val="dk1"/>
+          </a:lnRef>
+          <a:fillRef idx="0">
+            <a:schemeClr val="dk1"/>
+          </a:fillRef>
+          <a:effectRef idx="2">
+            <a:schemeClr val="dk1"/>
+          </a:effectRef>
+          <a:fontRef idx="minor">
+            <a:schemeClr val="tx1"/>
+          </a:fontRef>
+        </p:style>
+      </p:cxnSp>
+      <p:cxnSp>
+        <p:nvCxnSpPr>
+          <p:cNvPr id="157" name="Connector: Elbow 156">
+            <a:extLst>
+              <a:ext uri="{FF2B5EF4-FFF2-40B4-BE49-F238E27FC236}">
+                <a16:creationId xmlns:a16="http://schemas.microsoft.com/office/drawing/2014/main" id="{3181538B-1377-4F58-EE0A-9394C3FFBE33}"/>
+              </a:ext>
+            </a:extLst>
+          </p:cNvPr>
+          <p:cNvCxnSpPr>
+            <a:cxnSpLocks/>
+            <a:stCxn id="27" idx="1"/>
+            <a:endCxn id="39" idx="3"/>
+          </p:cNvCxnSpPr>
+          <p:nvPr/>
+        </p:nvCxnSpPr>
+        <p:spPr>
+          <a:xfrm rot="10800000">
+            <a:off x="8209874" y="1612398"/>
+            <a:ext cx="1311803" cy="1716"/>
+          </a:xfrm>
+          <a:prstGeom prst="bentConnector3">
+            <a:avLst>
+              <a:gd name="adj1" fmla="val 50000"/>
+            </a:avLst>
+          </a:prstGeom>
+          <a:ln>
+            <a:tailEnd type="triangle"/>
+          </a:ln>
+        </p:spPr>
+        <p:style>
+          <a:lnRef idx="3">
+            <a:schemeClr val="dk1"/>
+          </a:lnRef>
+          <a:fillRef idx="0">
+            <a:schemeClr val="dk1"/>
+          </a:fillRef>
+          <a:effectRef idx="2">
+            <a:schemeClr val="dk1"/>
+          </a:effectRef>
+          <a:fontRef idx="minor">
+            <a:schemeClr val="tx1"/>
+          </a:fontRef>
+        </p:style>
+      </p:cxnSp>
+      <p:sp>
+        <p:nvSpPr>
+          <p:cNvPr id="9" name="Rectangle: Rounded Corners 30">
+            <a:extLst>
+              <a:ext uri="{FF2B5EF4-FFF2-40B4-BE49-F238E27FC236}">
+                <a16:creationId xmlns:a16="http://schemas.microsoft.com/office/drawing/2014/main" id="{B1E5850D-9F23-D0E7-5812-825001835834}"/>
+              </a:ext>
+            </a:extLst>
+          </p:cNvPr>
+          <p:cNvSpPr/>
+          <p:nvPr/>
+        </p:nvSpPr>
+        <p:spPr>
+          <a:xfrm>
+            <a:off x="7814353" y="3694460"/>
+            <a:ext cx="2508308" cy="379602"/>
+          </a:xfrm>
+          <a:prstGeom prst="roundRect">
+            <a:avLst/>
+          </a:prstGeom>
+          <a:solidFill>
+            <a:schemeClr val="accent3"/>
+          </a:solidFill>
+          <a:ln>
+            <a:solidFill>
+              <a:schemeClr val="bg1"/>
+            </a:solidFill>
+          </a:ln>
+        </p:spPr>
+        <p:style>
+          <a:lnRef idx="2">
+            <a:schemeClr val="accent2">
+              <a:shade val="50000"/>
+            </a:schemeClr>
+          </a:lnRef>
+          <a:fillRef idx="1">
+            <a:schemeClr val="accent2"/>
+          </a:fillRef>
+          <a:effectRef idx="0">
+            <a:schemeClr val="accent2"/>
+          </a:effectRef>
+          <a:fontRef idx="minor">
+            <a:schemeClr val="lt1"/>
+          </a:fontRef>
+        </p:style>
+        <p:txBody>
+          <a:bodyPr rtlCol="0" anchor="ctr"/>
+          <a:lstStyle/>
+          <a:p>
+            <a:pPr algn="ctr"/>
+            <a:r>
+              <a:rPr lang="en-GB" dirty="0">
+                <a:solidFill>
+                  <a:schemeClr val="bg1"/>
+                </a:solidFill>
+              </a:rPr>
+              <a:t>rjd3filters</a:t>
+            </a:r>
+          </a:p>
+        </p:txBody>
+      </p:sp>
+      <p:cxnSp>
+        <p:nvCxnSpPr>
+          <p:cNvPr id="11" name="Connector: Elbow 97">
+            <a:extLst>
+              <a:ext uri="{FF2B5EF4-FFF2-40B4-BE49-F238E27FC236}">
+                <a16:creationId xmlns:a16="http://schemas.microsoft.com/office/drawing/2014/main" id="{AF4F17CA-019B-C0EA-F8D1-B99129B54E1B}"/>
+              </a:ext>
+            </a:extLst>
+          </p:cNvPr>
+          <p:cNvCxnSpPr>
+            <a:cxnSpLocks/>
+            <a:stCxn id="9" idx="1"/>
+            <a:endCxn id="4" idx="2"/>
+          </p:cNvCxnSpPr>
+          <p:nvPr/>
+        </p:nvCxnSpPr>
+        <p:spPr>
+          <a:xfrm rot="10800000">
+            <a:off x="5716729" y="3479587"/>
+            <a:ext cx="2097625" cy="404674"/>
+          </a:xfrm>
+          <a:prstGeom prst="bentConnector2">
+            <a:avLst/>
+          </a:prstGeom>
+          <a:ln>
+            <a:tailEnd type="triangle"/>
+          </a:ln>
+        </p:spPr>
+        <p:style>
+          <a:lnRef idx="3">
+            <a:schemeClr val="dk1"/>
+          </a:lnRef>
+          <a:fillRef idx="0">
+            <a:schemeClr val="dk1"/>
+          </a:fillRef>
+          <a:effectRef idx="2">
+            <a:schemeClr val="dk1"/>
+          </a:effectRef>
+          <a:fontRef idx="minor">
+            <a:schemeClr val="tx1"/>
+          </a:fontRef>
+        </p:style>
+      </p:cxnSp>
+      <p:cxnSp>
+        <p:nvCxnSpPr>
+          <p:cNvPr id="41" name="Connector: Elbow 156">
+            <a:extLst>
+              <a:ext uri="{FF2B5EF4-FFF2-40B4-BE49-F238E27FC236}">
+                <a16:creationId xmlns:a16="http://schemas.microsoft.com/office/drawing/2014/main" id="{67CBEEA2-C58C-E136-621C-1E5F17802A68}"/>
+              </a:ext>
+            </a:extLst>
+          </p:cNvPr>
+          <p:cNvCxnSpPr>
+            <a:cxnSpLocks/>
+            <a:stCxn id="29" idx="1"/>
+            <a:endCxn id="4" idx="3"/>
+          </p:cNvCxnSpPr>
+          <p:nvPr/>
+        </p:nvCxnSpPr>
+        <p:spPr>
+          <a:xfrm rot="10800000">
+            <a:off x="6657515" y="2987705"/>
+            <a:ext cx="1635678" cy="355319"/>
+          </a:xfrm>
+          <a:prstGeom prst="bentConnector3">
+            <a:avLst>
+              <a:gd name="adj1" fmla="val 50000"/>
+            </a:avLst>
+          </a:prstGeom>
+          <a:ln>
+            <a:tailEnd type="triangle"/>
+          </a:ln>
+        </p:spPr>
+        <p:style>
+          <a:lnRef idx="3">
+            <a:schemeClr val="dk1"/>
+          </a:lnRef>
+          <a:fillRef idx="0">
+            <a:schemeClr val="dk1"/>
+          </a:fillRef>
+          <a:effectRef idx="2">
+            <a:schemeClr val="dk1"/>
+          </a:effectRef>
+          <a:fontRef idx="minor">
+            <a:schemeClr val="tx1"/>
+          </a:fontRef>
+        </p:style>
+      </p:cxnSp>
+      <p:sp>
+        <p:nvSpPr>
+          <p:cNvPr id="18" name="Rectangle: Rounded Corners 3">
+            <a:extLst>
+              <a:ext uri="{FF2B5EF4-FFF2-40B4-BE49-F238E27FC236}">
+                <a16:creationId xmlns:a16="http://schemas.microsoft.com/office/drawing/2014/main" id="{E1805B42-D758-BA67-C029-5917E452739F}"/>
+              </a:ext>
+            </a:extLst>
+          </p:cNvPr>
+          <p:cNvSpPr/>
+          <p:nvPr/>
+        </p:nvSpPr>
+        <p:spPr>
+          <a:xfrm>
+            <a:off x="5013005" y="1384096"/>
+            <a:ext cx="1412926" cy="472109"/>
+          </a:xfrm>
+          <a:prstGeom prst="roundRect">
+            <a:avLst/>
+          </a:prstGeom>
+          <a:solidFill>
+            <a:schemeClr val="accent3">
+              <a:lumMod val="60000"/>
+              <a:lumOff val="40000"/>
+            </a:schemeClr>
+          </a:solidFill>
+        </p:spPr>
+        <p:style>
+          <a:lnRef idx="2">
+            <a:schemeClr val="accent2">
+              <a:shade val="50000"/>
+            </a:schemeClr>
+          </a:lnRef>
+          <a:fillRef idx="1">
+            <a:schemeClr val="accent2"/>
+          </a:fillRef>
+          <a:effectRef idx="0">
+            <a:schemeClr val="accent2"/>
+          </a:effectRef>
+          <a:fontRef idx="minor">
+            <a:schemeClr val="lt1"/>
+          </a:fontRef>
+        </p:style>
+        <p:txBody>
+          <a:bodyPr rtlCol="0" anchor="ctr"/>
+          <a:lstStyle/>
+          <a:p>
+            <a:pPr algn="ctr"/>
+            <a:r>
+              <a:rPr lang="en-GB" sz="1600" b="1" dirty="0"/>
+              <a:t>rjd3jars</a:t>
+            </a:r>
+          </a:p>
+        </p:txBody>
+      </p:sp>
+      <p:sp>
+        <p:nvSpPr>
+          <p:cNvPr id="39" name="Rectangle: Rounded Corners 3">
+            <a:extLst>
+              <a:ext uri="{FF2B5EF4-FFF2-40B4-BE49-F238E27FC236}">
+                <a16:creationId xmlns:a16="http://schemas.microsoft.com/office/drawing/2014/main" id="{85F75A6E-71C9-42D8-2D1E-066DC9F21CF5}"/>
+              </a:ext>
+            </a:extLst>
+          </p:cNvPr>
+          <p:cNvSpPr/>
+          <p:nvPr/>
+        </p:nvSpPr>
+        <p:spPr>
+          <a:xfrm>
+            <a:off x="6796947" y="1376343"/>
+            <a:ext cx="1412926" cy="472109"/>
+          </a:xfrm>
+          <a:prstGeom prst="roundRect">
+            <a:avLst/>
+          </a:prstGeom>
+          <a:solidFill>
+            <a:schemeClr val="accent3">
+              <a:lumMod val="60000"/>
+              <a:lumOff val="40000"/>
+            </a:schemeClr>
+          </a:solidFill>
+        </p:spPr>
+        <p:style>
+          <a:lnRef idx="2">
+            <a:schemeClr val="accent2">
+              <a:shade val="50000"/>
+            </a:schemeClr>
+          </a:lnRef>
+          <a:fillRef idx="1">
+            <a:schemeClr val="accent2"/>
+          </a:fillRef>
+          <a:effectRef idx="0">
+            <a:schemeClr val="accent2"/>
+          </a:effectRef>
+          <a:fontRef idx="minor">
+            <a:schemeClr val="lt1"/>
+          </a:fontRef>
+        </p:style>
+        <p:txBody>
+          <a:bodyPr rtlCol="0" anchor="ctr"/>
+          <a:lstStyle/>
+          <a:p>
+            <a:pPr algn="ctr"/>
+            <a:r>
+              <a:rPr lang="en-GB" sz="1600" b="1" dirty="0" err="1"/>
+              <a:t>rjdxjars</a:t>
+            </a:r>
+            <a:endParaRPr lang="en-GB" sz="1600" b="1" dirty="0"/>
+          </a:p>
+        </p:txBody>
+      </p:sp>
+      <p:cxnSp>
+        <p:nvCxnSpPr>
+          <p:cNvPr id="65" name="Connector: Elbow 84">
+            <a:extLst>
+              <a:ext uri="{FF2B5EF4-FFF2-40B4-BE49-F238E27FC236}">
+                <a16:creationId xmlns:a16="http://schemas.microsoft.com/office/drawing/2014/main" id="{BA23DC6D-5CF2-731E-36B1-2B530D123EF0}"/>
+              </a:ext>
+            </a:extLst>
+          </p:cNvPr>
+          <p:cNvCxnSpPr>
+            <a:cxnSpLocks/>
+            <a:stCxn id="28" idx="1"/>
+            <a:endCxn id="39" idx="2"/>
+          </p:cNvCxnSpPr>
+          <p:nvPr/>
+        </p:nvCxnSpPr>
+        <p:spPr>
+          <a:xfrm rot="10800000">
+            <a:off x="7503411" y="1848452"/>
+            <a:ext cx="789783" cy="722242"/>
+          </a:xfrm>
+          <a:prstGeom prst="bentConnector2">
+            <a:avLst/>
+          </a:prstGeom>
+          <a:ln>
+            <a:tailEnd type="triangle"/>
+          </a:ln>
+        </p:spPr>
+        <p:style>
+          <a:lnRef idx="3">
+            <a:schemeClr val="dk1"/>
+          </a:lnRef>
+          <a:fillRef idx="0">
+            <a:schemeClr val="dk1"/>
+          </a:fillRef>
+          <a:effectRef idx="2">
+            <a:schemeClr val="dk1"/>
+          </a:effectRef>
+          <a:fontRef idx="minor">
+            <a:schemeClr val="tx1"/>
+          </a:fontRef>
+        </p:style>
+      </p:cxnSp>
+      <p:cxnSp>
+        <p:nvCxnSpPr>
+          <p:cNvPr id="75" name="Connector: Elbow 156">
+            <a:extLst>
+              <a:ext uri="{FF2B5EF4-FFF2-40B4-BE49-F238E27FC236}">
+                <a16:creationId xmlns:a16="http://schemas.microsoft.com/office/drawing/2014/main" id="{B898FCAF-A148-28E1-3F0E-E4EBACFDBE07}"/>
+              </a:ext>
+            </a:extLst>
+          </p:cNvPr>
+          <p:cNvCxnSpPr>
+            <a:cxnSpLocks/>
+            <a:stCxn id="39" idx="1"/>
+            <a:endCxn id="18" idx="3"/>
+          </p:cNvCxnSpPr>
+          <p:nvPr/>
+        </p:nvCxnSpPr>
+        <p:spPr>
+          <a:xfrm rot="10800000" flipV="1">
+            <a:off x="6425931" y="1612397"/>
+            <a:ext cx="371016" cy="7753"/>
+          </a:xfrm>
+          <a:prstGeom prst="bentConnector3">
+            <a:avLst>
+              <a:gd name="adj1" fmla="val 50000"/>
+            </a:avLst>
+          </a:prstGeom>
+          <a:ln>
+            <a:tailEnd type="triangle"/>
+          </a:ln>
+        </p:spPr>
+        <p:style>
+          <a:lnRef idx="3">
+            <a:schemeClr val="dk1"/>
+          </a:lnRef>
+          <a:fillRef idx="0">
+            <a:schemeClr val="dk1"/>
+          </a:fillRef>
+          <a:effectRef idx="2">
+            <a:schemeClr val="dk1"/>
+          </a:effectRef>
+          <a:fontRef idx="minor">
+            <a:schemeClr val="tx1"/>
+          </a:fontRef>
+        </p:style>
+      </p:cxnSp>
+      <p:cxnSp>
+        <p:nvCxnSpPr>
+          <p:cNvPr id="80" name="Connector: Elbow 156">
+            <a:extLst>
+              <a:ext uri="{FF2B5EF4-FFF2-40B4-BE49-F238E27FC236}">
+                <a16:creationId xmlns:a16="http://schemas.microsoft.com/office/drawing/2014/main" id="{DB937E52-40BE-4CD0-C911-B3B63CFEE502}"/>
+              </a:ext>
+            </a:extLst>
+          </p:cNvPr>
+          <p:cNvCxnSpPr>
+            <a:cxnSpLocks/>
+            <a:stCxn id="4" idx="0"/>
+            <a:endCxn id="18" idx="2"/>
+          </p:cNvCxnSpPr>
+          <p:nvPr/>
+        </p:nvCxnSpPr>
+        <p:spPr>
+          <a:xfrm rot="5400000" flipH="1" flipV="1">
+            <a:off x="5398291" y="2174643"/>
+            <a:ext cx="639615" cy="2740"/>
+          </a:xfrm>
+          <a:prstGeom prst="bentConnector3">
+            <a:avLst>
+              <a:gd name="adj1" fmla="val 50000"/>
+            </a:avLst>
+          </a:prstGeom>
+          <a:ln>
+            <a:tailEnd type="triangle"/>
+          </a:ln>
+        </p:spPr>
+        <p:style>
+          <a:lnRef idx="3">
+            <a:schemeClr val="dk1"/>
+          </a:lnRef>
+          <a:fillRef idx="0">
+            <a:schemeClr val="dk1"/>
+          </a:fillRef>
+          <a:effectRef idx="2">
+            <a:schemeClr val="dk1"/>
+          </a:effectRef>
+          <a:fontRef idx="minor">
+            <a:schemeClr val="tx1"/>
+          </a:fontRef>
+        </p:style>
+      </p:cxnSp>
+      <p:cxnSp>
+        <p:nvCxnSpPr>
+          <p:cNvPr id="118" name="Connector: Elbow 156">
+            <a:extLst>
+              <a:ext uri="{FF2B5EF4-FFF2-40B4-BE49-F238E27FC236}">
+                <a16:creationId xmlns:a16="http://schemas.microsoft.com/office/drawing/2014/main" id="{A55D41BB-8F54-38A3-CF5A-8EA5F39B789B}"/>
+              </a:ext>
+            </a:extLst>
+          </p:cNvPr>
+          <p:cNvCxnSpPr>
+            <a:cxnSpLocks/>
+            <a:stCxn id="29" idx="0"/>
+            <a:endCxn id="28" idx="2"/>
+          </p:cNvCxnSpPr>
+          <p:nvPr/>
+        </p:nvCxnSpPr>
+        <p:spPr>
+          <a:xfrm rot="5400000" flipH="1" flipV="1">
+            <a:off x="9350984" y="2956859"/>
+            <a:ext cx="392727" cy="12700"/>
+          </a:xfrm>
+          <a:prstGeom prst="bentConnector3">
+            <a:avLst>
+              <a:gd name="adj1" fmla="val 50000"/>
+            </a:avLst>
+          </a:prstGeom>
+          <a:ln>
+            <a:tailEnd type="triangle"/>
+          </a:ln>
+        </p:spPr>
+        <p:style>
+          <a:lnRef idx="3">
+            <a:schemeClr val="dk1"/>
+          </a:lnRef>
+          <a:fillRef idx="0">
+            <a:schemeClr val="dk1"/>
+          </a:fillRef>
+          <a:effectRef idx="2">
+            <a:schemeClr val="dk1"/>
+          </a:effectRef>
+          <a:fontRef idx="minor">
+            <a:schemeClr val="tx1"/>
+          </a:fontRef>
+        </p:style>
+      </p:cxnSp>
     </p:spTree>
     <p:extLst>
       <p:ext uri="{BB962C8B-B14F-4D97-AF65-F5344CB8AC3E}">
-        <p14:creationId xmlns:p14="http://schemas.microsoft.com/office/powerpoint/2010/main" val="3926171778"/>
+        <p14:creationId xmlns:p14="http://schemas.microsoft.com/office/powerpoint/2010/main" val="4021899098"/>
       </p:ext>
     </p:extLst>
   </p:cSld>
@@ -12495,235 +16317,389 @@
       </p:grpSpPr>
       <p:sp>
         <p:nvSpPr>
-          <p:cNvPr id="2" name="Title 1">
-            <a:extLst>
-              <a:ext uri="{FF2B5EF4-FFF2-40B4-BE49-F238E27FC236}">
-                <a16:creationId xmlns:a16="http://schemas.microsoft.com/office/drawing/2014/main" id="{E71655A1-78C9-352D-8AC1-F6987AE95425}"/>
-              </a:ext>
-            </a:extLst>
-          </p:cNvPr>
-          <p:cNvSpPr>
-            <a:spLocks noGrp="1"/>
-          </p:cNvSpPr>
-          <p:nvPr>
-            <p:ph type="title"/>
-          </p:nvPr>
+          <p:cNvPr id="4" name="Rectangle: Rounded Corners 3">
+            <a:extLst>
+              <a:ext uri="{FF2B5EF4-FFF2-40B4-BE49-F238E27FC236}">
+                <a16:creationId xmlns:a16="http://schemas.microsoft.com/office/drawing/2014/main" id="{DC95649A-2B15-4406-BC52-3E1D58692103}"/>
+              </a:ext>
+            </a:extLst>
+          </p:cNvPr>
+          <p:cNvSpPr/>
+          <p:nvPr/>
         </p:nvSpPr>
-        <p:spPr/>
+        <p:spPr>
+          <a:xfrm>
+            <a:off x="1122243" y="755780"/>
+            <a:ext cx="2508308" cy="652037"/>
+          </a:xfrm>
+          <a:prstGeom prst="roundRect">
+            <a:avLst/>
+          </a:prstGeom>
+        </p:spPr>
+        <p:style>
+          <a:lnRef idx="2">
+            <a:schemeClr val="accent2">
+              <a:shade val="50000"/>
+            </a:schemeClr>
+          </a:lnRef>
+          <a:fillRef idx="1">
+            <a:schemeClr val="accent2"/>
+          </a:fillRef>
+          <a:effectRef idx="0">
+            <a:schemeClr val="accent2"/>
+          </a:effectRef>
+          <a:fontRef idx="minor">
+            <a:schemeClr val="lt1"/>
+          </a:fontRef>
+        </p:style>
         <p:txBody>
-          <a:bodyPr/>
+          <a:bodyPr rtlCol="0" anchor="ctr"/>
           <a:lstStyle/>
           <a:p>
-            <a:r>
-              <a:rPr lang="fr-BE" dirty="0"/>
-              <a:t>6. </a:t>
-            </a:r>
-            <a:r>
-              <a:rPr lang="fr-BE" dirty="0" err="1"/>
-              <a:t>Installing</a:t>
-            </a:r>
-            <a:r>
-              <a:rPr lang="fr-BE" dirty="0"/>
-              <a:t> the packages</a:t>
+            <a:pPr algn="ctr"/>
+            <a:r>
+              <a:rPr lang="en-GB" dirty="0"/>
+              <a:t>rjd3tramoseats</a:t>
             </a:r>
           </a:p>
         </p:txBody>
       </p:sp>
       <p:sp>
         <p:nvSpPr>
-          <p:cNvPr id="3" name="Content Placeholder 2">
-            <a:extLst>
-              <a:ext uri="{FF2B5EF4-FFF2-40B4-BE49-F238E27FC236}">
-                <a16:creationId xmlns:a16="http://schemas.microsoft.com/office/drawing/2014/main" id="{927406D7-6535-6D75-9551-7A6E63F7CBB6}"/>
-              </a:ext>
-            </a:extLst>
-          </p:cNvPr>
-          <p:cNvSpPr>
-            <a:spLocks noGrp="1"/>
-          </p:cNvSpPr>
-          <p:nvPr>
-            <p:ph idx="1"/>
-          </p:nvPr>
+          <p:cNvPr id="5" name="Rectangle 4">
+            <a:extLst>
+              <a:ext uri="{FF2B5EF4-FFF2-40B4-BE49-F238E27FC236}">
+                <a16:creationId xmlns:a16="http://schemas.microsoft.com/office/drawing/2014/main" id="{10B85320-608E-4822-9C6E-543C4C82FC55}"/>
+              </a:ext>
+            </a:extLst>
+          </p:cNvPr>
+          <p:cNvSpPr/>
+          <p:nvPr/>
         </p:nvSpPr>
         <p:spPr>
           <a:xfrm>
-            <a:off x="838200" y="1690688"/>
-            <a:ext cx="10515600" cy="4351338"/>
-          </a:xfrm>
-        </p:spPr>
+            <a:off x="2957804" y="2070617"/>
+            <a:ext cx="2341984" cy="583163"/>
+          </a:xfrm>
+          <a:prstGeom prst="rect">
+            <a:avLst/>
+          </a:prstGeom>
+        </p:spPr>
+        <p:style>
+          <a:lnRef idx="2">
+            <a:schemeClr val="accent3">
+              <a:shade val="50000"/>
+            </a:schemeClr>
+          </a:lnRef>
+          <a:fillRef idx="1">
+            <a:schemeClr val="accent3"/>
+          </a:fillRef>
+          <a:effectRef idx="0">
+            <a:schemeClr val="accent3"/>
+          </a:effectRef>
+          <a:fontRef idx="minor">
+            <a:schemeClr val="lt1"/>
+          </a:fontRef>
+        </p:style>
         <p:txBody>
-          <a:bodyPr/>
+          <a:bodyPr rtlCol="0" anchor="ctr"/>
           <a:lstStyle/>
           <a:p>
-            <a:r>
-              <a:rPr lang="fr-BE" dirty="0"/>
-              <a:t>If </a:t>
-            </a:r>
-            <a:r>
-              <a:rPr lang="fr-BE" dirty="0" err="1"/>
-              <a:t>need</a:t>
-            </a:r>
-            <a:r>
-              <a:rPr lang="fr-BE" dirty="0"/>
-              <a:t> </a:t>
-            </a:r>
-            <a:r>
-              <a:rPr lang="fr-BE" dirty="0" err="1"/>
-              <a:t>be</a:t>
-            </a:r>
-            <a:r>
-              <a:rPr lang="fr-BE" dirty="0"/>
-              <a:t>, </a:t>
-            </a:r>
-            <a:r>
-              <a:rPr lang="fr-BE" dirty="0" err="1"/>
-              <a:t>referencing</a:t>
-            </a:r>
-            <a:r>
-              <a:rPr lang="fr-BE" dirty="0"/>
-              <a:t> the correct java runtime (&gt;= 21.0)</a:t>
-            </a:r>
-          </a:p>
-          <a:p>
-            <a:endParaRPr lang="fr-BE" dirty="0"/>
-          </a:p>
-          <a:p>
-            <a:endParaRPr lang="fr-BE" dirty="0"/>
-          </a:p>
-          <a:p>
-            <a:pPr lvl="1"/>
-            <a:r>
-              <a:rPr lang="fr-BE" dirty="0"/>
-              <a:t>Set </a:t>
-            </a:r>
-            <a:r>
-              <a:rPr lang="fr-BE" dirty="0" err="1"/>
-              <a:t>your</a:t>
-            </a:r>
-            <a:r>
-              <a:rPr lang="fr-BE" dirty="0"/>
-              <a:t> JAVA_HOME variable (tip: use the </a:t>
-            </a:r>
-            <a:r>
-              <a:rPr lang="fr-BE" dirty="0" err="1"/>
-              <a:t>jre</a:t>
-            </a:r>
-            <a:r>
-              <a:rPr lang="fr-BE" dirty="0"/>
-              <a:t> </a:t>
-            </a:r>
-            <a:r>
-              <a:rPr lang="fr-BE" dirty="0" err="1"/>
-              <a:t>provided</a:t>
-            </a:r>
-            <a:r>
-              <a:rPr lang="fr-BE" dirty="0"/>
-              <a:t> </a:t>
-            </a:r>
-            <a:r>
-              <a:rPr lang="fr-BE" dirty="0" err="1"/>
-              <a:t>with</a:t>
-            </a:r>
-            <a:r>
-              <a:rPr lang="fr-BE" dirty="0"/>
-              <a:t> JD+)</a:t>
-            </a:r>
-          </a:p>
-          <a:p>
-            <a:endParaRPr lang="fr-BE" dirty="0"/>
-          </a:p>
-          <a:p>
-            <a:pPr lvl="1"/>
-            <a:endParaRPr lang="fr-BE" dirty="0"/>
-          </a:p>
-          <a:p>
-            <a:r>
-              <a:rPr lang="fr-BE" dirty="0"/>
-              <a:t>Install the </a:t>
-            </a:r>
-            <a:r>
-              <a:rPr lang="fr-BE" dirty="0" err="1"/>
-              <a:t>various</a:t>
-            </a:r>
-            <a:r>
-              <a:rPr lang="fr-BE" dirty="0"/>
-              <a:t> packages (internet </a:t>
-            </a:r>
-            <a:r>
-              <a:rPr lang="fr-BE" dirty="0" err="1"/>
-              <a:t>access</a:t>
-            </a:r>
-            <a:r>
-              <a:rPr lang="fr-BE" dirty="0"/>
-              <a:t> </a:t>
-            </a:r>
-            <a:r>
-              <a:rPr lang="fr-BE" dirty="0" err="1"/>
-              <a:t>needed</a:t>
-            </a:r>
-            <a:r>
-              <a:rPr lang="fr-BE" dirty="0"/>
-              <a:t>)</a:t>
-            </a:r>
-          </a:p>
-          <a:p>
-            <a:pPr lvl="1"/>
-            <a:r>
-              <a:rPr lang="fr-BE" dirty="0"/>
-              <a:t># </a:t>
-            </a:r>
-            <a:r>
-              <a:rPr lang="fr-BE" dirty="0" err="1"/>
-              <a:t>install.packages</a:t>
-            </a:r>
-            <a:r>
-              <a:rPr lang="fr-BE" dirty="0"/>
-              <a:t>("</a:t>
-            </a:r>
-            <a:r>
-              <a:rPr lang="fr-BE" dirty="0" err="1"/>
-              <a:t>remotes</a:t>
-            </a:r>
-            <a:r>
-              <a:rPr lang="fr-BE" dirty="0"/>
-              <a:t>")</a:t>
-            </a:r>
-          </a:p>
-          <a:p>
-            <a:pPr lvl="1"/>
-            <a:r>
-              <a:rPr lang="fr-BE" dirty="0" err="1"/>
-              <a:t>remotes</a:t>
-            </a:r>
-            <a:r>
-              <a:rPr lang="fr-BE" dirty="0"/>
-              <a:t>::</a:t>
-            </a:r>
-            <a:r>
-              <a:rPr lang="fr-BE" dirty="0" err="1"/>
-              <a:t>install_github</a:t>
-            </a:r>
-            <a:r>
-              <a:rPr lang="fr-BE" dirty="0"/>
-              <a:t>("</a:t>
-            </a:r>
-            <a:r>
-              <a:rPr lang="fr-BE" dirty="0" err="1"/>
-              <a:t>rjdverse</a:t>
-            </a:r>
-            <a:r>
-              <a:rPr lang="fr-BE" dirty="0"/>
-              <a:t>/rjd3workspace@*release")</a:t>
+            <a:pPr algn="ctr"/>
+            <a:r>
+              <a:rPr lang="en-GB" dirty="0" err="1"/>
+              <a:t>inst</a:t>
+            </a:r>
+            <a:endParaRPr lang="en-GB" dirty="0"/>
+          </a:p>
+        </p:txBody>
+      </p:sp>
+      <p:sp>
+        <p:nvSpPr>
+          <p:cNvPr id="6" name="Rectangle 5">
+            <a:extLst>
+              <a:ext uri="{FF2B5EF4-FFF2-40B4-BE49-F238E27FC236}">
+                <a16:creationId xmlns:a16="http://schemas.microsoft.com/office/drawing/2014/main" id="{74E91856-49EC-4A97-86FA-E3693A09621C}"/>
+              </a:ext>
+            </a:extLst>
+          </p:cNvPr>
+          <p:cNvSpPr/>
+          <p:nvPr/>
+        </p:nvSpPr>
+        <p:spPr>
+          <a:xfrm>
+            <a:off x="6214188" y="1407816"/>
+            <a:ext cx="2341984" cy="583163"/>
+          </a:xfrm>
+          <a:prstGeom prst="rect">
+            <a:avLst/>
+          </a:prstGeom>
+        </p:spPr>
+        <p:style>
+          <a:lnRef idx="2">
+            <a:schemeClr val="accent3">
+              <a:shade val="50000"/>
+            </a:schemeClr>
+          </a:lnRef>
+          <a:fillRef idx="1">
+            <a:schemeClr val="accent3"/>
+          </a:fillRef>
+          <a:effectRef idx="0">
+            <a:schemeClr val="accent3"/>
+          </a:effectRef>
+          <a:fontRef idx="minor">
+            <a:schemeClr val="lt1"/>
+          </a:fontRef>
+        </p:style>
+        <p:txBody>
+          <a:bodyPr rtlCol="0" anchor="ctr"/>
+          <a:lstStyle/>
+          <a:p>
+            <a:pPr algn="ctr"/>
+            <a:r>
+              <a:rPr lang="en-GB" dirty="0"/>
+              <a:t>Proto files</a:t>
+            </a:r>
+          </a:p>
+        </p:txBody>
+      </p:sp>
+      <p:cxnSp>
+        <p:nvCxnSpPr>
+          <p:cNvPr id="8" name="Connector: Elbow 7">
+            <a:extLst>
+              <a:ext uri="{FF2B5EF4-FFF2-40B4-BE49-F238E27FC236}">
+                <a16:creationId xmlns:a16="http://schemas.microsoft.com/office/drawing/2014/main" id="{D8ACB735-E3A2-40CD-ABBF-66E7282ABAF1}"/>
+              </a:ext>
+            </a:extLst>
+          </p:cNvPr>
+          <p:cNvCxnSpPr>
+            <a:cxnSpLocks/>
+            <a:stCxn id="4" idx="2"/>
+            <a:endCxn id="5" idx="1"/>
+          </p:cNvCxnSpPr>
+          <p:nvPr/>
+        </p:nvCxnSpPr>
+        <p:spPr>
+          <a:xfrm rot="16200000" flipH="1">
+            <a:off x="2189909" y="1594304"/>
+            <a:ext cx="954382" cy="581407"/>
+          </a:xfrm>
+          <a:prstGeom prst="bentConnector2">
+            <a:avLst/>
+          </a:prstGeom>
+          <a:ln>
+            <a:tailEnd type="triangle"/>
+          </a:ln>
+        </p:spPr>
+        <p:style>
+          <a:lnRef idx="3">
+            <a:schemeClr val="accent1"/>
+          </a:lnRef>
+          <a:fillRef idx="0">
+            <a:schemeClr val="accent1"/>
+          </a:fillRef>
+          <a:effectRef idx="2">
+            <a:schemeClr val="accent1"/>
+          </a:effectRef>
+          <a:fontRef idx="minor">
+            <a:schemeClr val="tx1"/>
+          </a:fontRef>
+        </p:style>
+      </p:cxnSp>
+      <p:cxnSp>
+        <p:nvCxnSpPr>
+          <p:cNvPr id="12" name="Connector: Elbow 11">
+            <a:extLst>
+              <a:ext uri="{FF2B5EF4-FFF2-40B4-BE49-F238E27FC236}">
+                <a16:creationId xmlns:a16="http://schemas.microsoft.com/office/drawing/2014/main" id="{67945822-A91A-4A2D-B5F7-9E228E582ABF}"/>
+              </a:ext>
+            </a:extLst>
+          </p:cNvPr>
+          <p:cNvCxnSpPr>
+            <a:cxnSpLocks/>
+            <a:stCxn id="5" idx="3"/>
+            <a:endCxn id="6" idx="1"/>
+          </p:cNvCxnSpPr>
+          <p:nvPr/>
+        </p:nvCxnSpPr>
+        <p:spPr>
+          <a:xfrm flipV="1">
+            <a:off x="5299788" y="1699398"/>
+            <a:ext cx="914400" cy="662801"/>
+          </a:xfrm>
+          <a:prstGeom prst="bentConnector3">
+            <a:avLst>
+              <a:gd name="adj1" fmla="val 50000"/>
+            </a:avLst>
+          </a:prstGeom>
+          <a:ln>
+            <a:tailEnd type="triangle"/>
+          </a:ln>
+        </p:spPr>
+        <p:style>
+          <a:lnRef idx="3">
+            <a:schemeClr val="accent1"/>
+          </a:lnRef>
+          <a:fillRef idx="0">
+            <a:schemeClr val="accent1"/>
+          </a:fillRef>
+          <a:effectRef idx="2">
+            <a:schemeClr val="accent1"/>
+          </a:effectRef>
+          <a:fontRef idx="minor">
+            <a:schemeClr val="tx1"/>
+          </a:fontRef>
+        </p:style>
+      </p:cxnSp>
+      <p:cxnSp>
+        <p:nvCxnSpPr>
+          <p:cNvPr id="16" name="Connector: Elbow 15">
+            <a:extLst>
+              <a:ext uri="{FF2B5EF4-FFF2-40B4-BE49-F238E27FC236}">
+                <a16:creationId xmlns:a16="http://schemas.microsoft.com/office/drawing/2014/main" id="{C4A1081C-9E82-4F72-A469-B6BBFB7AB72D}"/>
+              </a:ext>
+            </a:extLst>
+          </p:cNvPr>
+          <p:cNvCxnSpPr>
+            <a:cxnSpLocks/>
+            <a:stCxn id="5" idx="3"/>
+            <a:endCxn id="19" idx="1"/>
+          </p:cNvCxnSpPr>
+          <p:nvPr/>
+        </p:nvCxnSpPr>
+        <p:spPr>
+          <a:xfrm>
+            <a:off x="5299788" y="2362199"/>
+            <a:ext cx="914400" cy="775220"/>
+          </a:xfrm>
+          <a:prstGeom prst="bentConnector3">
+            <a:avLst>
+              <a:gd name="adj1" fmla="val 50000"/>
+            </a:avLst>
+          </a:prstGeom>
+          <a:ln>
+            <a:tailEnd type="triangle"/>
+          </a:ln>
+        </p:spPr>
+        <p:style>
+          <a:lnRef idx="3">
+            <a:schemeClr val="accent1"/>
+          </a:lnRef>
+          <a:fillRef idx="0">
+            <a:schemeClr val="accent1"/>
+          </a:fillRef>
+          <a:effectRef idx="2">
+            <a:schemeClr val="accent1"/>
+          </a:effectRef>
+          <a:fontRef idx="minor">
+            <a:schemeClr val="tx1"/>
+          </a:fontRef>
+        </p:style>
+      </p:cxnSp>
+      <p:sp>
+        <p:nvSpPr>
+          <p:cNvPr id="19" name="Rectangle 18">
+            <a:extLst>
+              <a:ext uri="{FF2B5EF4-FFF2-40B4-BE49-F238E27FC236}">
+                <a16:creationId xmlns:a16="http://schemas.microsoft.com/office/drawing/2014/main" id="{403066ED-A2FD-4B45-8B77-D9F639107F55}"/>
+              </a:ext>
+            </a:extLst>
+          </p:cNvPr>
+          <p:cNvSpPr/>
+          <p:nvPr/>
+        </p:nvSpPr>
+        <p:spPr>
+          <a:xfrm>
+            <a:off x="6214188" y="2845837"/>
+            <a:ext cx="2341984" cy="583163"/>
+          </a:xfrm>
+          <a:prstGeom prst="rect">
+            <a:avLst/>
+          </a:prstGeom>
+        </p:spPr>
+        <p:style>
+          <a:lnRef idx="2">
+            <a:schemeClr val="accent3">
+              <a:shade val="50000"/>
+            </a:schemeClr>
+          </a:lnRef>
+          <a:fillRef idx="1">
+            <a:schemeClr val="accent3"/>
+          </a:fillRef>
+          <a:effectRef idx="0">
+            <a:schemeClr val="accent3"/>
+          </a:effectRef>
+          <a:fontRef idx="minor">
+            <a:schemeClr val="lt1"/>
+          </a:fontRef>
+        </p:style>
+        <p:txBody>
+          <a:bodyPr rtlCol="0" anchor="ctr"/>
+          <a:lstStyle/>
+          <a:p>
+            <a:pPr algn="ctr"/>
+            <a:r>
+              <a:rPr lang="en-GB" dirty="0"/>
+              <a:t>Java package</a:t>
+            </a:r>
+          </a:p>
+        </p:txBody>
+      </p:sp>
+      <p:sp>
+        <p:nvSpPr>
+          <p:cNvPr id="20" name="Rectangle 19">
+            <a:extLst>
+              <a:ext uri="{FF2B5EF4-FFF2-40B4-BE49-F238E27FC236}">
+                <a16:creationId xmlns:a16="http://schemas.microsoft.com/office/drawing/2014/main" id="{A5866F35-687B-4E43-AB32-BF21D6300EFE}"/>
+              </a:ext>
+            </a:extLst>
+          </p:cNvPr>
+          <p:cNvSpPr/>
+          <p:nvPr/>
+        </p:nvSpPr>
+        <p:spPr>
+          <a:xfrm>
+            <a:off x="2957804" y="3429000"/>
+            <a:ext cx="2341984" cy="583163"/>
+          </a:xfrm>
+          <a:prstGeom prst="rect">
+            <a:avLst/>
+          </a:prstGeom>
+        </p:spPr>
+        <p:style>
+          <a:lnRef idx="2">
+            <a:schemeClr val="accent3">
+              <a:shade val="50000"/>
+            </a:schemeClr>
+          </a:lnRef>
+          <a:fillRef idx="1">
+            <a:schemeClr val="accent3"/>
+          </a:fillRef>
+          <a:effectRef idx="0">
+            <a:schemeClr val="accent3"/>
+          </a:effectRef>
+          <a:fontRef idx="minor">
+            <a:schemeClr val="lt1"/>
+          </a:fontRef>
+        </p:style>
+        <p:txBody>
+          <a:bodyPr rtlCol="0" anchor="ctr"/>
+          <a:lstStyle/>
+          <a:p>
+            <a:pPr algn="ctr"/>
+            <a:r>
+              <a:rPr lang="en-GB" dirty="0"/>
+              <a:t>R files</a:t>
             </a:r>
           </a:p>
         </p:txBody>
       </p:sp>
       <p:pic>
         <p:nvPicPr>
-          <p:cNvPr id="13" name="Image 12">
-            <a:extLst>
-              <a:ext uri="{FF2B5EF4-FFF2-40B4-BE49-F238E27FC236}">
-                <a16:creationId xmlns:a16="http://schemas.microsoft.com/office/drawing/2014/main" id="{81DAD5C2-2D33-1185-4020-86A5C6F426A3}"/>
+          <p:cNvPr id="38" name="Picture 37">
+            <a:extLst>
+              <a:ext uri="{FF2B5EF4-FFF2-40B4-BE49-F238E27FC236}">
+                <a16:creationId xmlns:a16="http://schemas.microsoft.com/office/drawing/2014/main" id="{162CF78F-E0A9-489E-817D-338D0204297E}"/>
               </a:ext>
             </a:extLst>
           </p:cNvPr>
@@ -12740,20 +16716,70 @@
         </p:blipFill>
         <p:spPr>
           <a:xfrm>
-            <a:off x="2209800" y="2199402"/>
-            <a:ext cx="3970399" cy="719167"/>
+            <a:off x="8303574" y="2093564"/>
+            <a:ext cx="1714739" cy="381053"/>
           </a:xfrm>
           <a:prstGeom prst="rect">
             <a:avLst/>
           </a:prstGeom>
+          <a:ln>
+            <a:solidFill>
+              <a:schemeClr val="accent3">
+                <a:shade val="50000"/>
+              </a:schemeClr>
+            </a:solidFill>
+          </a:ln>
         </p:spPr>
       </p:pic>
+      <p:cxnSp>
+        <p:nvCxnSpPr>
+          <p:cNvPr id="40" name="Connector: Elbow 39">
+            <a:extLst>
+              <a:ext uri="{FF2B5EF4-FFF2-40B4-BE49-F238E27FC236}">
+                <a16:creationId xmlns:a16="http://schemas.microsoft.com/office/drawing/2014/main" id="{BD37A5AD-F8B6-42FF-B8D2-30BDB988E98A}"/>
+              </a:ext>
+            </a:extLst>
+          </p:cNvPr>
+          <p:cNvCxnSpPr>
+            <a:cxnSpLocks/>
+            <a:stCxn id="4" idx="2"/>
+            <a:endCxn id="20" idx="1"/>
+          </p:cNvCxnSpPr>
+          <p:nvPr/>
+        </p:nvCxnSpPr>
+        <p:spPr>
+          <a:xfrm rot="16200000" flipH="1">
+            <a:off x="1510718" y="2273495"/>
+            <a:ext cx="2312765" cy="581407"/>
+          </a:xfrm>
+          <a:prstGeom prst="bentConnector2">
+            <a:avLst/>
+          </a:prstGeom>
+          <a:ln>
+            <a:tailEnd type="triangle"/>
+          </a:ln>
+        </p:spPr>
+        <p:style>
+          <a:lnRef idx="3">
+            <a:schemeClr val="accent1"/>
+          </a:lnRef>
+          <a:fillRef idx="0">
+            <a:schemeClr val="accent1"/>
+          </a:fillRef>
+          <a:effectRef idx="2">
+            <a:schemeClr val="accent1"/>
+          </a:effectRef>
+          <a:fontRef idx="minor">
+            <a:schemeClr val="tx1"/>
+          </a:fontRef>
+        </p:style>
+      </p:cxnSp>
       <p:pic>
         <p:nvPicPr>
-          <p:cNvPr id="15" name="Image 14">
-            <a:extLst>
-              <a:ext uri="{FF2B5EF4-FFF2-40B4-BE49-F238E27FC236}">
-                <a16:creationId xmlns:a16="http://schemas.microsoft.com/office/drawing/2014/main" id="{E6873EC0-00B5-B604-BA85-4C57CB35062F}"/>
+          <p:cNvPr id="47" name="Picture 46">
+            <a:extLst>
+              <a:ext uri="{FF2B5EF4-FFF2-40B4-BE49-F238E27FC236}">
+                <a16:creationId xmlns:a16="http://schemas.microsoft.com/office/drawing/2014/main" id="{177068A2-13D4-4E4E-A805-79CA0F5C4454}"/>
               </a:ext>
             </a:extLst>
           </p:cNvPr>
@@ -12770,20 +16796,27 @@
         </p:blipFill>
         <p:spPr>
           <a:xfrm>
-            <a:off x="624773" y="3407841"/>
-            <a:ext cx="5397631" cy="915888"/>
+            <a:off x="3492028" y="4111235"/>
+            <a:ext cx="4277322" cy="971686"/>
           </a:xfrm>
           <a:prstGeom prst="rect">
             <a:avLst/>
           </a:prstGeom>
+          <a:ln>
+            <a:solidFill>
+              <a:schemeClr val="accent3">
+                <a:shade val="50000"/>
+              </a:schemeClr>
+            </a:solidFill>
+          </a:ln>
         </p:spPr>
       </p:pic>
       <p:pic>
         <p:nvPicPr>
-          <p:cNvPr id="17" name="Image 16">
-            <a:extLst>
-              <a:ext uri="{FF2B5EF4-FFF2-40B4-BE49-F238E27FC236}">
-                <a16:creationId xmlns:a16="http://schemas.microsoft.com/office/drawing/2014/main" id="{18639300-52E3-F85D-CA72-4F072E184057}"/>
+          <p:cNvPr id="11" name="Image 10">
+            <a:extLst>
+              <a:ext uri="{FF2B5EF4-FFF2-40B4-BE49-F238E27FC236}">
+                <a16:creationId xmlns:a16="http://schemas.microsoft.com/office/drawing/2014/main" id="{712675D2-846A-727F-6DDA-FBB241AF1E08}"/>
               </a:ext>
             </a:extLst>
           </p:cNvPr>
@@ -12800,20 +16833,25 @@
         </p:blipFill>
         <p:spPr>
           <a:xfrm>
-            <a:off x="7973789" y="3429000"/>
-            <a:ext cx="3168685" cy="739077"/>
+            <a:off x="8303574" y="3601355"/>
+            <a:ext cx="2619741" cy="1190791"/>
           </a:xfrm>
           <a:prstGeom prst="rect">
             <a:avLst/>
           </a:prstGeom>
+          <a:ln>
+            <a:solidFill>
+              <a:schemeClr val="tx1"/>
+            </a:solidFill>
+          </a:ln>
         </p:spPr>
       </p:pic>
       <p:sp>
         <p:nvSpPr>
-          <p:cNvPr id="9" name="Espace réservé du pied de page 8">
-            <a:extLst>
-              <a:ext uri="{FF2B5EF4-FFF2-40B4-BE49-F238E27FC236}">
-                <a16:creationId xmlns:a16="http://schemas.microsoft.com/office/drawing/2014/main" id="{5B2EE932-E4D9-A85A-101C-91873C326AE2}"/>
+          <p:cNvPr id="13" name="Espace réservé du pied de page 12">
+            <a:extLst>
+              <a:ext uri="{FF2B5EF4-FFF2-40B4-BE49-F238E27FC236}">
+                <a16:creationId xmlns:a16="http://schemas.microsoft.com/office/drawing/2014/main" id="{15699A33-F00A-E744-ACCA-0AD04CC33BD5}"/>
               </a:ext>
             </a:extLst>
           </p:cNvPr>
@@ -12839,7 +16877,7 @@
     </p:spTree>
     <p:extLst>
       <p:ext uri="{BB962C8B-B14F-4D97-AF65-F5344CB8AC3E}">
-        <p14:creationId xmlns:p14="http://schemas.microsoft.com/office/powerpoint/2010/main" val="933773129"/>
+        <p14:creationId xmlns:p14="http://schemas.microsoft.com/office/powerpoint/2010/main" val="519121428"/>
       </p:ext>
     </p:extLst>
   </p:cSld>
@@ -12868,10 +16906,10 @@
       </p:grpSpPr>
       <p:sp>
         <p:nvSpPr>
-          <p:cNvPr id="2" name="Titre 1">
-            <a:extLst>
-              <a:ext uri="{FF2B5EF4-FFF2-40B4-BE49-F238E27FC236}">
-                <a16:creationId xmlns:a16="http://schemas.microsoft.com/office/drawing/2014/main" id="{3255C743-A837-68FB-BEB2-A0B3CC81FA06}"/>
+          <p:cNvPr id="2" name="Title 1">
+            <a:extLst>
+              <a:ext uri="{FF2B5EF4-FFF2-40B4-BE49-F238E27FC236}">
+                <a16:creationId xmlns:a16="http://schemas.microsoft.com/office/drawing/2014/main" id="{C392E026-D238-4AF1-8F4A-C306A5A4B402}"/>
               </a:ext>
             </a:extLst>
           </p:cNvPr>
@@ -12889,34 +16927,17 @@
           <a:p>
             <a:r>
               <a:rPr lang="fr-BE" dirty="0"/>
-              <a:t>6. </a:t>
-            </a:r>
-            <a:r>
-              <a:rPr lang="fr-BE" dirty="0" err="1"/>
-              <a:t>Installing</a:t>
-            </a:r>
-            <a:r>
-              <a:rPr lang="fr-BE" dirty="0"/>
-              <a:t> the packages (</a:t>
-            </a:r>
-            <a:r>
-              <a:rPr lang="fr-BE" dirty="0" err="1"/>
-              <a:t>cont</a:t>
-            </a:r>
-            <a:r>
-              <a:rPr lang="fr-BE" dirty="0"/>
-              <a:t>)</a:t>
-            </a:r>
-            <a:endParaRPr lang="en-GB" dirty="0"/>
+              <a:t>5. Objectives of R packages</a:t>
+            </a:r>
           </a:p>
         </p:txBody>
       </p:sp>
       <p:sp>
         <p:nvSpPr>
-          <p:cNvPr id="3" name="Espace réservé du contenu 2">
-            <a:extLst>
-              <a:ext uri="{FF2B5EF4-FFF2-40B4-BE49-F238E27FC236}">
-                <a16:creationId xmlns:a16="http://schemas.microsoft.com/office/drawing/2014/main" id="{C0FEE72D-C9D0-21BD-05D9-74FFAC7C7934}"/>
+          <p:cNvPr id="3" name="Content Placeholder 2">
+            <a:extLst>
+              <a:ext uri="{FF2B5EF4-FFF2-40B4-BE49-F238E27FC236}">
+                <a16:creationId xmlns:a16="http://schemas.microsoft.com/office/drawing/2014/main" id="{82519A8F-D80B-4FDC-B623-698C487B820E}"/>
               </a:ext>
             </a:extLst>
           </p:cNvPr>
@@ -12924,153 +16945,7 @@
             <a:spLocks noGrp="1"/>
           </p:cNvSpPr>
           <p:nvPr>
-            <p:ph idx="1"/>
-          </p:nvPr>
-        </p:nvSpPr>
-        <p:spPr/>
-        <p:txBody>
-          <a:bodyPr>
-            <a:normAutofit/>
-          </a:bodyPr>
-          <a:lstStyle/>
-          <a:p>
-            <a:r>
-              <a:rPr lang="fr-BE" i="1" dirty="0" err="1"/>
-              <a:t>remotes</a:t>
-            </a:r>
-            <a:r>
-              <a:rPr lang="fr-BE" i="1" dirty="0"/>
-              <a:t>::</a:t>
-            </a:r>
-            <a:r>
-              <a:rPr lang="fr-BE" i="1" dirty="0" err="1"/>
-              <a:t>install_github</a:t>
-            </a:r>
-            <a:r>
-              <a:rPr lang="fr-BE" i="1" dirty="0"/>
-              <a:t>("</a:t>
-            </a:r>
-            <a:r>
-              <a:rPr lang="fr-BE" i="1" dirty="0" err="1"/>
-              <a:t>rjdverse</a:t>
-            </a:r>
-            <a:r>
-              <a:rPr lang="fr-BE" i="1" dirty="0"/>
-              <a:t>/rjd3filters@*release")</a:t>
-            </a:r>
-          </a:p>
-          <a:p>
-            <a:r>
-              <a:rPr lang="fr-BE" i="1" dirty="0" err="1"/>
-              <a:t>remotes</a:t>
-            </a:r>
-            <a:r>
-              <a:rPr lang="fr-BE" i="1" dirty="0"/>
-              <a:t>::</a:t>
-            </a:r>
-            <a:r>
-              <a:rPr lang="fr-BE" i="1" dirty="0" err="1"/>
-              <a:t>install_github</a:t>
-            </a:r>
-            <a:r>
-              <a:rPr lang="fr-BE" i="1" dirty="0"/>
-              <a:t>("</a:t>
-            </a:r>
-            <a:r>
-              <a:rPr lang="fr-BE" i="1" dirty="0" err="1"/>
-              <a:t>rjdverse</a:t>
-            </a:r>
-            <a:r>
-              <a:rPr lang="fr-BE" i="1" dirty="0"/>
-              <a:t>/rjd3sts@*release")</a:t>
-            </a:r>
-          </a:p>
-          <a:p>
-            <a:r>
-              <a:rPr lang="fr-BE" i="1" dirty="0" err="1"/>
-              <a:t>remotes</a:t>
-            </a:r>
-            <a:r>
-              <a:rPr lang="fr-BE" i="1" dirty="0"/>
-              <a:t>::</a:t>
-            </a:r>
-            <a:r>
-              <a:rPr lang="fr-BE" i="1" dirty="0" err="1"/>
-              <a:t>install_github</a:t>
-            </a:r>
-            <a:r>
-              <a:rPr lang="fr-BE" i="1" dirty="0"/>
-              <a:t>("</a:t>
-            </a:r>
-            <a:r>
-              <a:rPr lang="fr-BE" i="1" dirty="0" err="1"/>
-              <a:t>rjdverse</a:t>
-            </a:r>
-            <a:r>
-              <a:rPr lang="fr-BE" i="1" dirty="0"/>
-              <a:t>/rjd3highfreq@*release")</a:t>
-            </a:r>
-          </a:p>
-          <a:p>
-            <a:r>
-              <a:rPr lang="fr-BE" i="1" dirty="0" err="1"/>
-              <a:t>remotes</a:t>
-            </a:r>
-            <a:r>
-              <a:rPr lang="fr-BE" i="1" dirty="0"/>
-              <a:t>::</a:t>
-            </a:r>
-            <a:r>
-              <a:rPr lang="fr-BE" i="1" dirty="0" err="1"/>
-              <a:t>install_github</a:t>
-            </a:r>
-            <a:r>
-              <a:rPr lang="fr-BE" i="1" dirty="0"/>
-              <a:t>("</a:t>
-            </a:r>
-            <a:r>
-              <a:rPr lang="fr-BE" i="1" dirty="0" err="1"/>
-              <a:t>rjdverse</a:t>
-            </a:r>
-            <a:r>
-              <a:rPr lang="fr-BE" i="1" dirty="0"/>
-              <a:t>/rjd3x11plus@*release")</a:t>
-            </a:r>
-          </a:p>
-          <a:p>
-            <a:endParaRPr lang="fr-BE" dirty="0"/>
-          </a:p>
-          <a:p>
-            <a:endParaRPr lang="fr-BE" dirty="0"/>
-          </a:p>
-          <a:p>
-            <a:endParaRPr lang="fr-BE" dirty="0"/>
-          </a:p>
-          <a:p>
-            <a:endParaRPr lang="fr-BE" dirty="0"/>
-          </a:p>
-          <a:p>
-            <a:endParaRPr lang="fr-BE" dirty="0"/>
-          </a:p>
-          <a:p>
-            <a:endParaRPr lang="en-GB" dirty="0"/>
-          </a:p>
-        </p:txBody>
-      </p:sp>
-      <p:sp>
-        <p:nvSpPr>
-          <p:cNvPr id="9" name="Espace réservé du pied de page 8">
-            <a:extLst>
-              <a:ext uri="{FF2B5EF4-FFF2-40B4-BE49-F238E27FC236}">
-                <a16:creationId xmlns:a16="http://schemas.microsoft.com/office/drawing/2014/main" id="{715EEF82-C545-CA98-1A57-72D1A07D1971}"/>
-              </a:ext>
-            </a:extLst>
-          </p:cNvPr>
-          <p:cNvSpPr>
-            <a:spLocks noGrp="1"/>
-          </p:cNvSpPr>
-          <p:nvPr>
-            <p:ph type="ftr" sz="quarter" idx="11"/>
+            <p:ph sz="half" idx="2"/>
           </p:nvPr>
         </p:nvSpPr>
         <p:spPr/>
@@ -13079,6 +16954,150 @@
           <a:lstStyle/>
           <a:p>
             <a:r>
+              <a:rPr lang="fr-BE" sz="2800" dirty="0"/>
+              <a:t>High-</a:t>
+            </a:r>
+            <a:r>
+              <a:rPr lang="fr-BE" sz="2800" dirty="0" err="1"/>
+              <a:t>level</a:t>
+            </a:r>
+            <a:r>
+              <a:rPr lang="fr-BE" sz="2800" dirty="0"/>
+              <a:t> </a:t>
+            </a:r>
+            <a:r>
+              <a:rPr lang="fr-BE" sz="2800" dirty="0" err="1"/>
+              <a:t>functions</a:t>
+            </a:r>
+            <a:r>
+              <a:rPr lang="fr-BE" sz="2800" dirty="0"/>
+              <a:t> </a:t>
+            </a:r>
+            <a:r>
+              <a:rPr lang="fr-BE" sz="2800" dirty="0" err="1"/>
+              <a:t>with</a:t>
+            </a:r>
+            <a:r>
+              <a:rPr lang="fr-BE" sz="2800" dirty="0"/>
+              <a:t> </a:t>
+            </a:r>
+            <a:r>
+              <a:rPr lang="fr-BE" sz="2800" dirty="0" err="1"/>
+              <a:t>most</a:t>
+            </a:r>
+            <a:r>
+              <a:rPr lang="fr-BE" sz="2800" dirty="0"/>
+              <a:t> </a:t>
+            </a:r>
+            <a:r>
+              <a:rPr lang="fr-BE" sz="2800" dirty="0" err="1"/>
+              <a:t>common</a:t>
+            </a:r>
+            <a:r>
+              <a:rPr lang="fr-BE" sz="2800" dirty="0"/>
+              <a:t> </a:t>
+            </a:r>
+            <a:r>
+              <a:rPr lang="fr-BE" sz="2800" dirty="0" err="1"/>
+              <a:t>results</a:t>
+            </a:r>
+            <a:endParaRPr lang="fr-BE" sz="2800" dirty="0"/>
+          </a:p>
+          <a:p>
+            <a:r>
+              <a:rPr lang="fr-BE" sz="2800" dirty="0" err="1"/>
+              <a:t>Many</a:t>
+            </a:r>
+            <a:r>
+              <a:rPr lang="fr-BE" sz="2800" dirty="0"/>
+              <a:t> </a:t>
+            </a:r>
+            <a:r>
+              <a:rPr lang="fr-BE" sz="2800" dirty="0" err="1"/>
+              <a:t>low-level</a:t>
+            </a:r>
+            <a:r>
+              <a:rPr lang="fr-BE" sz="2800" dirty="0"/>
+              <a:t> </a:t>
+            </a:r>
+            <a:r>
+              <a:rPr lang="fr-BE" sz="2800" dirty="0" err="1"/>
+              <a:t>functions</a:t>
+            </a:r>
+            <a:endParaRPr lang="fr-BE" sz="2800" dirty="0"/>
+          </a:p>
+          <a:p>
+            <a:pPr lvl="1"/>
+            <a:r>
+              <a:rPr lang="fr-BE" sz="2400" dirty="0"/>
+              <a:t>Advanced </a:t>
+            </a:r>
+            <a:r>
+              <a:rPr lang="fr-BE" sz="2400" dirty="0" err="1"/>
+              <a:t>users</a:t>
+            </a:r>
+            <a:endParaRPr lang="fr-BE" sz="2400" dirty="0"/>
+          </a:p>
+          <a:p>
+            <a:pPr lvl="1"/>
+            <a:r>
+              <a:rPr lang="fr-BE" sz="2400" dirty="0" err="1"/>
+              <a:t>Research</a:t>
+            </a:r>
+            <a:endParaRPr lang="fr-BE" sz="2400" dirty="0"/>
+          </a:p>
+          <a:p>
+            <a:pPr lvl="1"/>
+            <a:r>
+              <a:rPr lang="fr-BE" sz="2400" dirty="0"/>
+              <a:t>Training</a:t>
+            </a:r>
+          </a:p>
+          <a:p>
+            <a:pPr lvl="1"/>
+            <a:r>
+              <a:rPr lang="fr-BE" sz="2400" dirty="0" err="1"/>
+              <a:t>Additional</a:t>
+            </a:r>
+            <a:r>
+              <a:rPr lang="fr-BE" sz="2400" dirty="0"/>
+              <a:t> </a:t>
+            </a:r>
+            <a:r>
+              <a:rPr lang="fr-BE" sz="2400" dirty="0" err="1"/>
+              <a:t>tools</a:t>
+            </a:r>
+            <a:endParaRPr lang="fr-BE" dirty="0"/>
+          </a:p>
+        </p:txBody>
+      </p:sp>
+      <p:sp>
+        <p:nvSpPr>
+          <p:cNvPr id="9" name="Espace réservé du pied de page 8">
+            <a:extLst>
+              <a:ext uri="{FF2B5EF4-FFF2-40B4-BE49-F238E27FC236}">
+                <a16:creationId xmlns:a16="http://schemas.microsoft.com/office/drawing/2014/main" id="{E11D6C85-A84B-E7AF-DB34-D16218EA28CC}"/>
+              </a:ext>
+            </a:extLst>
+          </p:cNvPr>
+          <p:cNvSpPr>
+            <a:spLocks noGrp="1"/>
+          </p:cNvSpPr>
+          <p:nvPr>
+            <p:ph type="ftr" sz="quarter" idx="4294967295"/>
+          </p:nvPr>
+        </p:nvSpPr>
+        <p:spPr>
+          <a:xfrm>
+            <a:off x="0" y="0"/>
+            <a:ext cx="0" cy="0"/>
+          </a:xfrm>
+        </p:spPr>
+        <p:txBody>
+          <a:bodyPr/>
+          <a:lstStyle/>
+          <a:p>
+            <a:r>
               <a:rPr lang="en-GB"/>
               <a:t>JD+ and R</a:t>
             </a:r>
@@ -13088,7 +17107,7 @@
     </p:spTree>
     <p:extLst>
       <p:ext uri="{BB962C8B-B14F-4D97-AF65-F5344CB8AC3E}">
-        <p14:creationId xmlns:p14="http://schemas.microsoft.com/office/powerpoint/2010/main" val="3368389567"/>
+        <p14:creationId xmlns:p14="http://schemas.microsoft.com/office/powerpoint/2010/main" val="3926171778"/>
       </p:ext>
     </p:extLst>
   </p:cSld>
@@ -13970,6 +17989,17 @@
 </file>
 
 <file path=customXml/item1.xml><?xml version="1.0" encoding="utf-8"?>
+<p:properties xmlns:p="http://schemas.microsoft.com/office/2006/metadata/properties" xmlns:xsi="http://www.w3.org/2001/XMLSchema-instance" xmlns:pc="http://schemas.microsoft.com/office/infopath/2007/PartnerControls">
+  <documentManagement>
+    <lcf76f155ced4ddcb4097134ff3c332f xmlns="0e422b70-e85d-4377-8ee0-b6227433d381">
+      <Terms xmlns="http://schemas.microsoft.com/office/infopath/2007/PartnerControls"/>
+    </lcf76f155ced4ddcb4097134ff3c332f>
+    <TaxCatchAll xmlns="199f642e-5af9-486c-ac06-f366742ef41a"/>
+  </documentManagement>
+</p:properties>
+</file>
+
+<file path=customXml/item2.xml><?xml version="1.0" encoding="utf-8"?>
 <ct:contentTypeSchema xmlns:ct="http://schemas.microsoft.com/office/2006/metadata/contentType" xmlns:ma="http://schemas.microsoft.com/office/2006/metadata/properties/metaAttributes" ct:_="" ma:_="" ma:contentTypeName="Document" ma:contentTypeID="0x010100E6AA5C57F8EADE4E9CD6BB064C0C3195" ma:contentTypeVersion="16" ma:contentTypeDescription="Create a new document." ma:contentTypeScope="" ma:versionID="bb51c19a58f458ddcddd050a07659236">
   <xsd:schema xmlns:xsd="http://www.w3.org/2001/XMLSchema" xmlns:xs="http://www.w3.org/2001/XMLSchema" xmlns:p="http://schemas.microsoft.com/office/2006/metadata/properties" xmlns:ns2="0e422b70-e85d-4377-8ee0-b6227433d381" xmlns:ns3="199f642e-5af9-486c-ac06-f366742ef41a" targetNamespace="http://schemas.microsoft.com/office/2006/metadata/properties" ma:root="true" ma:fieldsID="0ee7a3bac0352a48a43420936abd968a" ns2:_="" ns3:_="">
     <xsd:import namespace="0e422b70-e85d-4377-8ee0-b6227433d381"/>
@@ -14210,17 +18240,6 @@
 </ct:contentTypeSchema>
 </file>
 
-<file path=customXml/item2.xml><?xml version="1.0" encoding="utf-8"?>
-<p:properties xmlns:p="http://schemas.microsoft.com/office/2006/metadata/properties" xmlns:xsi="http://www.w3.org/2001/XMLSchema-instance" xmlns:pc="http://schemas.microsoft.com/office/infopath/2007/PartnerControls">
-  <documentManagement>
-    <lcf76f155ced4ddcb4097134ff3c332f xmlns="0e422b70-e85d-4377-8ee0-b6227433d381">
-      <Terms xmlns="http://schemas.microsoft.com/office/infopath/2007/PartnerControls"/>
-    </lcf76f155ced4ddcb4097134ff3c332f>
-    <TaxCatchAll xmlns="199f642e-5af9-486c-ac06-f366742ef41a"/>
-  </documentManagement>
-</p:properties>
-</file>
-
 <file path=customXml/item3.xml><?xml version="1.0" encoding="utf-8"?>
 <?mso-contentType ?>
 <FormTemplates xmlns="http://schemas.microsoft.com/sharepoint/v3/contenttype/forms">
@@ -14231,6 +18250,23 @@
 </file>
 
 <file path=customXml/itemProps1.xml><?xml version="1.0" encoding="utf-8"?>
+<ds:datastoreItem xmlns:ds="http://schemas.openxmlformats.org/officeDocument/2006/customXml" ds:itemID="{2D6C293B-B8B4-4284-A17E-9F9E4C32B25A}">
+  <ds:schemaRefs>
+    <ds:schemaRef ds:uri="http://schemas.microsoft.com/office/2006/documentManagement/types"/>
+    <ds:schemaRef ds:uri="http://purl.org/dc/elements/1.1/"/>
+    <ds:schemaRef ds:uri="http://purl.org/dc/terms/"/>
+    <ds:schemaRef ds:uri="http://purl.org/dc/dcmitype/"/>
+    <ds:schemaRef ds:uri="0e422b70-e85d-4377-8ee0-b6227433d381"/>
+    <ds:schemaRef ds:uri="http://schemas.microsoft.com/office/infopath/2007/PartnerControls"/>
+    <ds:schemaRef ds:uri="199f642e-5af9-486c-ac06-f366742ef41a"/>
+    <ds:schemaRef ds:uri="http://schemas.openxmlformats.org/package/2006/metadata/core-properties"/>
+    <ds:schemaRef ds:uri="http://schemas.microsoft.com/office/2006/metadata/properties"/>
+    <ds:schemaRef ds:uri="http://www.w3.org/XML/1998/namespace"/>
+  </ds:schemaRefs>
+</ds:datastoreItem>
+</file>
+
+<file path=customXml/itemProps2.xml><?xml version="1.0" encoding="utf-8"?>
 <ds:datastoreItem xmlns:ds="http://schemas.openxmlformats.org/officeDocument/2006/customXml" ds:itemID="{04B464EA-1576-49DD-9675-1E3399D4D196}">
   <ds:schemaRefs>
     <ds:schemaRef ds:uri="http://schemas.microsoft.com/office/2006/metadata/contentType"/>
@@ -14249,23 +18285,6 @@
 </ds:datastoreItem>
 </file>
 
-<file path=customXml/itemProps2.xml><?xml version="1.0" encoding="utf-8"?>
-<ds:datastoreItem xmlns:ds="http://schemas.openxmlformats.org/officeDocument/2006/customXml" ds:itemID="{2D6C293B-B8B4-4284-A17E-9F9E4C32B25A}">
-  <ds:schemaRefs>
-    <ds:schemaRef ds:uri="http://schemas.microsoft.com/office/2006/documentManagement/types"/>
-    <ds:schemaRef ds:uri="http://purl.org/dc/elements/1.1/"/>
-    <ds:schemaRef ds:uri="http://purl.org/dc/terms/"/>
-    <ds:schemaRef ds:uri="http://purl.org/dc/dcmitype/"/>
-    <ds:schemaRef ds:uri="0e422b70-e85d-4377-8ee0-b6227433d381"/>
-    <ds:schemaRef ds:uri="http://schemas.microsoft.com/office/infopath/2007/PartnerControls"/>
-    <ds:schemaRef ds:uri="199f642e-5af9-486c-ac06-f366742ef41a"/>
-    <ds:schemaRef ds:uri="http://schemas.openxmlformats.org/package/2006/metadata/core-properties"/>
-    <ds:schemaRef ds:uri="http://schemas.microsoft.com/office/2006/metadata/properties"/>
-    <ds:schemaRef ds:uri="http://www.w3.org/XML/1998/namespace"/>
-  </ds:schemaRefs>
-</ds:datastoreItem>
-</file>
-
 <file path=customXml/itemProps3.xml><?xml version="1.0" encoding="utf-8"?>
 <ds:datastoreItem xmlns:ds="http://schemas.openxmlformats.org/officeDocument/2006/customXml" ds:itemID="{67DD9E9F-9EEB-4105-B29B-819486C2855A}">
   <ds:schemaRefs>

--- a/1.3 JD+ and R.pptx
+++ b/1.3 JD+ and R.pptx
@@ -279,7 +279,7 @@
       <p15:notesGuideLst xmlns:p15="http://schemas.microsoft.com/office/powerpoint/2012/main"/>
     </p:ext>
     <p:ext uri="http://customooxmlschemas.google.com/">
-      <go:slidesCustomData xmlns:mc="http://schemas.openxmlformats.org/markup-compatibility/2006" xmlns:mv="urn:schemas-microsoft-com:mac:vml" xmlns:c="http://schemas.openxmlformats.org/drawingml/2006/chart" xmlns:dgm="http://schemas.openxmlformats.org/drawingml/2006/diagram" xmlns:o="urn:schemas-microsoft-com:office:office" xmlns:v="urn:schemas-microsoft-com:vml" xmlns:pvml="urn:schemas-microsoft-com:office:powerpoint" xmlns:com="http://schemas.openxmlformats.org/drawingml/2006/compatibility" xmlns:p14="http://schemas.microsoft.com/office/powerpoint/2010/main" xmlns:p15="http://schemas.microsoft.com/office/powerpoint/2012/main" xmlns:ahyp="http://schemas.microsoft.com/office/drawing/2018/hyperlinkcolor" xmlns:go="http://customooxmlschemas.google.com/" xmlns="" r:id="rId59" roundtripDataSignature="AMtx7mh3YP3xexYcFoahXa2ehi0H5V4Zaw=="/>
+      <go:slidesCustomData xmlns="" xmlns:go="http://customooxmlschemas.google.com/" xmlns:ahyp="http://schemas.microsoft.com/office/drawing/2018/hyperlinkcolor" xmlns:p15="http://schemas.microsoft.com/office/powerpoint/2012/main" xmlns:p14="http://schemas.microsoft.com/office/powerpoint/2010/main" xmlns:com="http://schemas.openxmlformats.org/drawingml/2006/compatibility" xmlns:pvml="urn:schemas-microsoft-com:office:powerpoint" xmlns:v="urn:schemas-microsoft-com:vml" xmlns:o="urn:schemas-microsoft-com:office:office" xmlns:dgm="http://schemas.openxmlformats.org/drawingml/2006/diagram" xmlns:c="http://schemas.openxmlformats.org/drawingml/2006/chart" xmlns:mv="urn:schemas-microsoft-com:mac:vml" xmlns:mc="http://schemas.openxmlformats.org/markup-compatibility/2006" r:id="rId59" roundtripDataSignature="AMtx7mh3YP3xexYcFoahXa2ehi0H5V4Zaw=="/>
     </p:ext>
   </p:extLst>
 </p:presentation>
@@ -387,7 +387,7 @@
           <a:p>
             <a:fld id="{0CBFB8CE-488C-4A7E-87F2-3AF6127C51C1}" type="datetimeFigureOut">
               <a:rPr lang="en-IE" smtClean="0"/>
-              <a:t>28/09/2026</a:t>
+              <a:t>01/10/2026</a:t>
             </a:fld>
             <a:endParaRPr lang="en-IE"/>
           </a:p>
@@ -4977,7 +4977,7 @@
           <a:p>
             <a:r>
               <a:rPr lang="en-GB"/>
-              <a:t>JD+ and R</a:t>
+              <a:t>RJD+</a:t>
             </a:r>
           </a:p>
         </p:txBody>
@@ -5476,7 +5476,7 @@
     <p:sldLayoutId id="2147483723" r:id="rId5"/>
     <p:sldLayoutId id="2147483728" r:id="rId6"/>
   </p:sldLayoutIdLst>
-  <p:hf sldNum="0" hdr="0" dt="0"/>
+  <p:hf hdr="0" dt="0"/>
   <p:txStyles>
     <p:titleStyle>
       <a:defPPr marR="0" lvl="0" algn="l" rtl="0">
@@ -6208,13 +6208,13 @@
           <a:lstStyle/>
           <a:p>
             <a:r>
-              <a:rPr lang="en-IE" dirty="0"/>
+              <a:rPr lang="en-GB" noProof="0" dirty="0"/>
               <a:t>ESTP Training</a:t>
             </a:r>
           </a:p>
           <a:p>
             <a:r>
-              <a:rPr lang="en-IE"/>
+              <a:rPr lang="en-GB" noProof="0" dirty="0"/>
               <a:t>05-07 October 2026</a:t>
             </a:r>
           </a:p>
@@ -6242,8 +6242,8 @@
           <a:lstStyle/>
           <a:p>
             <a:r>
-              <a:rPr lang="en-IE" dirty="0"/>
-              <a:t>JD+ and R</a:t>
+              <a:rPr lang="en-GB" noProof="0" dirty="0"/>
+              <a:t>1.3 JD+ and R</a:t>
             </a:r>
           </a:p>
         </p:txBody>
@@ -6269,7 +6269,7 @@
           <a:bodyPr/>
           <a:lstStyle/>
           <a:p>
-            <a:endParaRPr lang="en-IE"/>
+            <a:endParaRPr lang="en-GB" noProof="0" dirty="0"/>
           </a:p>
         </p:txBody>
       </p:sp>
@@ -6325,16 +6325,8 @@
           <a:lstStyle/>
           <a:p>
             <a:r>
-              <a:rPr lang="fr-BE" dirty="0"/>
-              <a:t>6. </a:t>
-            </a:r>
-            <a:r>
-              <a:rPr lang="fr-BE" dirty="0" err="1"/>
-              <a:t>Installing</a:t>
-            </a:r>
-            <a:r>
-              <a:rPr lang="fr-BE" dirty="0"/>
-              <a:t> the packages</a:t>
+              <a:rPr lang="en-GB" noProof="0" dirty="0"/>
+              <a:t>6. Installing the packages</a:t>
             </a:r>
           </a:p>
         </p:txBody>
@@ -6361,181 +6353,89 @@
           <a:lstStyle/>
           <a:p>
             <a:r>
-              <a:rPr lang="fr-BE" sz="2400" dirty="0"/>
-              <a:t>If </a:t>
-            </a:r>
-            <a:r>
-              <a:rPr lang="fr-BE" sz="2400" dirty="0" err="1"/>
-              <a:t>need</a:t>
-            </a:r>
-            <a:r>
-              <a:rPr lang="fr-BE" sz="2400" dirty="0"/>
-              <a:t> </a:t>
-            </a:r>
-            <a:r>
-              <a:rPr lang="fr-BE" sz="2400" dirty="0" err="1"/>
-              <a:t>be</a:t>
-            </a:r>
-            <a:r>
-              <a:rPr lang="fr-BE" sz="2400" dirty="0"/>
-              <a:t>, </a:t>
-            </a:r>
-            <a:r>
-              <a:rPr lang="fr-BE" sz="2400" dirty="0" err="1"/>
-              <a:t>referencing</a:t>
-            </a:r>
-            <a:r>
-              <a:rPr lang="fr-BE" sz="2400" dirty="0"/>
-              <a:t> the correct java runtime (&gt;= 21.0)</a:t>
-            </a:r>
-          </a:p>
-          <a:p>
-            <a:endParaRPr lang="fr-BE" sz="2400" dirty="0"/>
-          </a:p>
-          <a:p>
-            <a:endParaRPr lang="fr-BE" sz="2400" dirty="0"/>
+              <a:rPr lang="en-GB" sz="2400" noProof="0" dirty="0"/>
+              <a:t>If need be, referencing the correct java runtime (&gt;= 21.0)</a:t>
+            </a:r>
+          </a:p>
+          <a:p>
+            <a:endParaRPr lang="en-GB" sz="2400" noProof="0" dirty="0"/>
+          </a:p>
+          <a:p>
+            <a:endParaRPr lang="en-GB" sz="2400" noProof="0" dirty="0"/>
           </a:p>
           <a:p>
             <a:pPr lvl="1"/>
             <a:r>
-              <a:rPr lang="fr-BE" sz="2000" dirty="0"/>
-              <a:t>Set </a:t>
-            </a:r>
-            <a:r>
-              <a:rPr lang="fr-BE" sz="2000" dirty="0" err="1"/>
-              <a:t>your</a:t>
-            </a:r>
-            <a:r>
-              <a:rPr lang="fr-BE" sz="2000" dirty="0"/>
-              <a:t> JAVA_HOME variable (tip: use the </a:t>
-            </a:r>
-            <a:r>
-              <a:rPr lang="fr-BE" sz="2000" dirty="0" err="1"/>
+              <a:rPr lang="en-GB" sz="2000" noProof="0" dirty="0"/>
+              <a:t>Set your JAVA_HOME variable (tip: use the </a:t>
+            </a:r>
+            <a:r>
+              <a:rPr lang="en-GB" sz="2000" noProof="0" dirty="0" err="1"/>
               <a:t>jre</a:t>
             </a:r>
             <a:r>
-              <a:rPr lang="fr-BE" sz="2000" dirty="0"/>
-              <a:t> </a:t>
-            </a:r>
-            <a:r>
-              <a:rPr lang="fr-BE" sz="2000" dirty="0" err="1"/>
-              <a:t>provided</a:t>
-            </a:r>
-            <a:r>
-              <a:rPr lang="fr-BE" sz="2000" dirty="0"/>
-              <a:t> </a:t>
-            </a:r>
-            <a:r>
-              <a:rPr lang="fr-BE" sz="2000" dirty="0" err="1"/>
-              <a:t>with</a:t>
-            </a:r>
-            <a:r>
-              <a:rPr lang="fr-BE" sz="2000" dirty="0"/>
-              <a:t> JD+)</a:t>
-            </a:r>
-          </a:p>
-          <a:p>
-            <a:endParaRPr lang="fr-BE" sz="2400" dirty="0"/>
+              <a:rPr lang="en-GB" sz="2000" noProof="0" dirty="0"/>
+              <a:t> provided with JD+)</a:t>
+            </a:r>
+          </a:p>
+          <a:p>
+            <a:endParaRPr lang="en-GB" sz="2400" noProof="0" dirty="0"/>
           </a:p>
           <a:p>
             <a:pPr lvl="1"/>
-            <a:endParaRPr lang="fr-BE" sz="2000" dirty="0"/>
-          </a:p>
-          <a:p>
-            <a:endParaRPr lang="fr-BE" sz="2400" dirty="0"/>
-          </a:p>
-          <a:p>
-            <a:r>
-              <a:rPr lang="fr-BE" sz="2400" dirty="0"/>
-              <a:t>Install the </a:t>
-            </a:r>
-            <a:r>
-              <a:rPr lang="fr-BE" sz="2400" dirty="0" err="1"/>
-              <a:t>various</a:t>
-            </a:r>
-            <a:r>
-              <a:rPr lang="fr-BE" sz="2400" dirty="0"/>
-              <a:t> packages (internet </a:t>
-            </a:r>
-            <a:r>
-              <a:rPr lang="fr-BE" sz="2400" dirty="0" err="1"/>
-              <a:t>access</a:t>
-            </a:r>
-            <a:r>
-              <a:rPr lang="fr-BE" sz="2400" dirty="0"/>
-              <a:t> </a:t>
-            </a:r>
-            <a:r>
-              <a:rPr lang="fr-BE" sz="2400" dirty="0" err="1"/>
-              <a:t>needed</a:t>
-            </a:r>
-            <a:r>
-              <a:rPr lang="fr-BE" sz="2400" dirty="0"/>
-              <a:t>)</a:t>
+            <a:endParaRPr lang="en-GB" sz="2000" noProof="0" dirty="0"/>
+          </a:p>
+          <a:p>
+            <a:endParaRPr lang="en-GB" sz="2400" noProof="0" dirty="0"/>
+          </a:p>
+          <a:p>
+            <a:r>
+              <a:rPr lang="en-GB" sz="2400" noProof="0" dirty="0"/>
+              <a:t>Install the various packages (internet access needed)</a:t>
             </a:r>
           </a:p>
           <a:p>
             <a:pPr lvl="1"/>
             <a:r>
-              <a:rPr lang="fr-BE" sz="2000" dirty="0"/>
-              <a:t>Install </a:t>
-            </a:r>
-            <a:r>
-              <a:rPr lang="fr-BE" sz="2000" dirty="0" err="1"/>
-              <a:t>from</a:t>
-            </a:r>
-            <a:r>
-              <a:rPr lang="fr-BE" sz="2000" dirty="0"/>
-              <a:t> CRAN for the main packages</a:t>
+              <a:rPr lang="en-GB" sz="2000" noProof="0" dirty="0"/>
+              <a:t>Install from CRAN for the main packages</a:t>
             </a:r>
           </a:p>
           <a:p>
             <a:pPr lvl="1"/>
             <a:r>
-              <a:rPr lang="fr-BE" sz="2000" dirty="0"/>
+              <a:rPr lang="en-GB" sz="2000" noProof="0" dirty="0"/>
               <a:t># </a:t>
             </a:r>
             <a:r>
-              <a:rPr lang="fr-BE" sz="2000" dirty="0" err="1"/>
+              <a:rPr lang="en-GB" sz="2000" noProof="0" dirty="0" err="1"/>
               <a:t>install.packages</a:t>
             </a:r>
             <a:r>
-              <a:rPr lang="fr-BE" sz="2000" dirty="0"/>
+              <a:rPr lang="en-GB" sz="2000" noProof="0" dirty="0"/>
+              <a:t>("remotes")</a:t>
+            </a:r>
+          </a:p>
+          <a:p>
+            <a:pPr lvl="1"/>
+            <a:r>
+              <a:rPr lang="en-GB" sz="2000" noProof="0" dirty="0"/>
+              <a:t>remotes::</a:t>
+            </a:r>
+            <a:r>
+              <a:rPr lang="en-GB" sz="2000" noProof="0" dirty="0" err="1"/>
+              <a:t>install_github</a:t>
+            </a:r>
+            <a:r>
+              <a:rPr lang="en-GB" sz="2000" noProof="0" dirty="0"/>
               <a:t>("</a:t>
             </a:r>
             <a:r>
-              <a:rPr lang="fr-BE" sz="2000" dirty="0" err="1"/>
-              <a:t>remotes</a:t>
-            </a:r>
-            <a:r>
-              <a:rPr lang="fr-BE" sz="2000" dirty="0"/>
-              <a:t>")</a:t>
-            </a:r>
-          </a:p>
-          <a:p>
-            <a:pPr lvl="1"/>
-            <a:r>
-              <a:rPr lang="fr-BE" sz="2000" dirty="0" err="1"/>
-              <a:t>remotes</a:t>
-            </a:r>
-            <a:r>
-              <a:rPr lang="fr-BE" sz="2000" dirty="0"/>
-              <a:t>::</a:t>
-            </a:r>
-            <a:r>
-              <a:rPr lang="fr-BE" sz="2000" dirty="0" err="1"/>
-              <a:t>install_github</a:t>
-            </a:r>
-            <a:r>
-              <a:rPr lang="fr-BE" sz="2000" dirty="0"/>
-              <a:t>("</a:t>
-            </a:r>
-            <a:r>
-              <a:rPr lang="fr-BE" sz="2000" dirty="0" err="1"/>
+              <a:rPr lang="en-GB" sz="2000" noProof="0" dirty="0" err="1"/>
               <a:t>rjdverse</a:t>
             </a:r>
             <a:r>
-              <a:rPr lang="fr-BE" sz="2000" dirty="0"/>
+              <a:rPr lang="en-GB" sz="2000" noProof="0" dirty="0"/>
               <a:t>/rjd3workspace@*release") </a:t>
             </a:r>
           </a:p>
@@ -6568,8 +6468,8 @@
           <a:lstStyle/>
           <a:p>
             <a:r>
-              <a:rPr lang="en-GB"/>
-              <a:t>JD+ and R</a:t>
+              <a:rPr lang="en-GB" noProof="0" dirty="0"/>
+              <a:t>RJD+</a:t>
             </a:r>
           </a:p>
         </p:txBody>
@@ -6664,6 +6564,36 @@
           </a:prstGeom>
         </p:spPr>
       </p:pic>
+      <p:sp>
+        <p:nvSpPr>
+          <p:cNvPr id="4" name="Espace réservé du numéro de diapositive 3">
+            <a:extLst>
+              <a:ext uri="{FF2B5EF4-FFF2-40B4-BE49-F238E27FC236}">
+                <a16:creationId xmlns:a16="http://schemas.microsoft.com/office/drawing/2014/main" id="{4397343B-F279-39E6-B005-B0657968EF4B}"/>
+              </a:ext>
+            </a:extLst>
+          </p:cNvPr>
+          <p:cNvSpPr>
+            <a:spLocks noGrp="1"/>
+          </p:cNvSpPr>
+          <p:nvPr>
+            <p:ph type="sldNum" idx="12"/>
+          </p:nvPr>
+        </p:nvSpPr>
+        <p:spPr/>
+        <p:txBody>
+          <a:bodyPr/>
+          <a:lstStyle/>
+          <a:p>
+            <a:fld id="{00000000-1234-1234-1234-123412341234}" type="slidenum">
+              <a:rPr lang="en-GB" noProof="0" smtClean="0"/>
+              <a:pPr/>
+              <a:t>10</a:t>
+            </a:fld>
+            <a:endParaRPr lang="en-GB" noProof="0" dirty="0"/>
+          </a:p>
+        </p:txBody>
+      </p:sp>
     </p:spTree>
     <p:extLst>
       <p:ext uri="{BB962C8B-B14F-4D97-AF65-F5344CB8AC3E}">
@@ -6716,26 +6646,17 @@
           <a:lstStyle/>
           <a:p>
             <a:r>
-              <a:rPr lang="fr-BE" dirty="0"/>
-              <a:t>6. </a:t>
-            </a:r>
-            <a:r>
-              <a:rPr lang="fr-BE" dirty="0" err="1"/>
-              <a:t>Installing</a:t>
-            </a:r>
-            <a:r>
-              <a:rPr lang="fr-BE" dirty="0"/>
-              <a:t> the packages (</a:t>
-            </a:r>
-            <a:r>
-              <a:rPr lang="fr-BE" dirty="0" err="1"/>
+              <a:rPr lang="en-GB" noProof="0" dirty="0"/>
+              <a:t>6. Installing the packages (</a:t>
+            </a:r>
+            <a:r>
+              <a:rPr lang="en-GB" noProof="0" dirty="0" err="1"/>
               <a:t>cont</a:t>
             </a:r>
             <a:r>
-              <a:rPr lang="fr-BE" dirty="0"/>
+              <a:rPr lang="en-GB" noProof="0" dirty="0"/>
               <a:t>)</a:t>
             </a:r>
-            <a:endParaRPr lang="en-GB" dirty="0"/>
           </a:p>
         </p:txBody>
       </p:sp>
@@ -6763,125 +6684,109 @@
           <a:lstStyle/>
           <a:p>
             <a:r>
-              <a:rPr lang="fr-BE" sz="2800" i="1" dirty="0" err="1"/>
-              <a:t>remotes</a:t>
-            </a:r>
-            <a:r>
-              <a:rPr lang="fr-BE" sz="2800" i="1" dirty="0"/>
-              <a:t>::</a:t>
-            </a:r>
-            <a:r>
-              <a:rPr lang="fr-BE" sz="2800" i="1" dirty="0" err="1"/>
+              <a:rPr lang="en-GB" sz="2800" i="1" noProof="0" dirty="0"/>
+              <a:t>remotes::</a:t>
+            </a:r>
+            <a:r>
+              <a:rPr lang="en-GB" sz="2800" i="1" noProof="0" dirty="0" err="1"/>
               <a:t>install_github</a:t>
             </a:r>
             <a:r>
-              <a:rPr lang="fr-BE" sz="2800" i="1" dirty="0"/>
+              <a:rPr lang="en-GB" sz="2800" i="1" noProof="0" dirty="0"/>
               <a:t>("</a:t>
             </a:r>
             <a:r>
-              <a:rPr lang="fr-BE" sz="2800" i="1" dirty="0" err="1"/>
+              <a:rPr lang="en-GB" sz="2800" i="1" noProof="0" dirty="0" err="1"/>
               <a:t>rjdverse</a:t>
             </a:r>
             <a:r>
-              <a:rPr lang="fr-BE" sz="2800" i="1" dirty="0"/>
+              <a:rPr lang="en-GB" sz="2800" i="1" noProof="0" dirty="0"/>
               <a:t>/rjd3filters@*release")</a:t>
             </a:r>
           </a:p>
           <a:p>
             <a:r>
-              <a:rPr lang="fr-BE" sz="2800" i="1" dirty="0" err="1"/>
-              <a:t>remotes</a:t>
-            </a:r>
-            <a:r>
-              <a:rPr lang="fr-BE" sz="2800" i="1" dirty="0"/>
-              <a:t>::</a:t>
-            </a:r>
-            <a:r>
-              <a:rPr lang="fr-BE" sz="2800" i="1" dirty="0" err="1"/>
+              <a:rPr lang="en-GB" sz="2800" i="1" noProof="0" dirty="0"/>
+              <a:t>remotes::</a:t>
+            </a:r>
+            <a:r>
+              <a:rPr lang="en-GB" sz="2800" i="1" noProof="0" dirty="0" err="1"/>
               <a:t>install_github</a:t>
             </a:r>
             <a:r>
-              <a:rPr lang="fr-BE" sz="2800" i="1" dirty="0"/>
+              <a:rPr lang="en-GB" sz="2800" i="1" noProof="0" dirty="0"/>
               <a:t>("</a:t>
             </a:r>
             <a:r>
-              <a:rPr lang="fr-BE" sz="2800" i="1" dirty="0" err="1"/>
+              <a:rPr lang="en-GB" sz="2800" i="1" noProof="0" dirty="0" err="1"/>
               <a:t>rjdverse</a:t>
             </a:r>
             <a:r>
-              <a:rPr lang="fr-BE" sz="2800" i="1" dirty="0"/>
+              <a:rPr lang="en-GB" sz="2800" i="1" noProof="0" dirty="0"/>
               <a:t>/rjd3sts@*release")</a:t>
             </a:r>
           </a:p>
           <a:p>
             <a:r>
-              <a:rPr lang="fr-BE" sz="2800" i="1" dirty="0" err="1"/>
-              <a:t>remotes</a:t>
-            </a:r>
-            <a:r>
-              <a:rPr lang="fr-BE" sz="2800" i="1" dirty="0"/>
-              <a:t>::</a:t>
-            </a:r>
-            <a:r>
-              <a:rPr lang="fr-BE" sz="2800" i="1" dirty="0" err="1"/>
+              <a:rPr lang="en-GB" sz="2800" i="1" noProof="0" dirty="0"/>
+              <a:t>remotes::</a:t>
+            </a:r>
+            <a:r>
+              <a:rPr lang="en-GB" sz="2800" i="1" noProof="0" dirty="0" err="1"/>
               <a:t>install_github</a:t>
             </a:r>
             <a:r>
-              <a:rPr lang="fr-BE" sz="2800" i="1" dirty="0"/>
+              <a:rPr lang="en-GB" sz="2800" i="1" noProof="0" dirty="0"/>
               <a:t>("</a:t>
             </a:r>
             <a:r>
-              <a:rPr lang="fr-BE" sz="2800" i="1" dirty="0" err="1"/>
+              <a:rPr lang="en-GB" sz="2800" i="1" noProof="0" dirty="0" err="1"/>
               <a:t>rjdverse</a:t>
             </a:r>
             <a:r>
-              <a:rPr lang="fr-BE" sz="2800" i="1" dirty="0"/>
+              <a:rPr lang="en-GB" sz="2800" i="1" noProof="0" dirty="0"/>
               <a:t>/rjd3highfreq@*release")</a:t>
             </a:r>
           </a:p>
           <a:p>
             <a:r>
-              <a:rPr lang="fr-BE" sz="2800" i="1" dirty="0" err="1"/>
-              <a:t>remotes</a:t>
-            </a:r>
-            <a:r>
-              <a:rPr lang="fr-BE" sz="2800" i="1" dirty="0"/>
-              <a:t>::</a:t>
-            </a:r>
-            <a:r>
-              <a:rPr lang="fr-BE" sz="2800" i="1" dirty="0" err="1"/>
+              <a:rPr lang="en-GB" sz="2800" i="1" noProof="0" dirty="0"/>
+              <a:t>remotes::</a:t>
+            </a:r>
+            <a:r>
+              <a:rPr lang="en-GB" sz="2800" i="1" noProof="0" dirty="0" err="1"/>
               <a:t>install_github</a:t>
             </a:r>
             <a:r>
-              <a:rPr lang="fr-BE" sz="2800" i="1" dirty="0"/>
+              <a:rPr lang="en-GB" sz="2800" i="1" noProof="0" dirty="0"/>
               <a:t>("</a:t>
             </a:r>
             <a:r>
-              <a:rPr lang="fr-BE" sz="2800" i="1" dirty="0" err="1"/>
+              <a:rPr lang="en-GB" sz="2800" i="1" noProof="0" dirty="0" err="1"/>
               <a:t>rjdverse</a:t>
             </a:r>
             <a:r>
-              <a:rPr lang="fr-BE" sz="2800" i="1" dirty="0"/>
+              <a:rPr lang="en-GB" sz="2800" i="1" noProof="0" dirty="0"/>
               <a:t>/rjd3x11plus@*release")</a:t>
             </a:r>
           </a:p>
           <a:p>
-            <a:endParaRPr lang="fr-BE" sz="2800" dirty="0"/>
-          </a:p>
-          <a:p>
-            <a:endParaRPr lang="fr-BE" dirty="0"/>
-          </a:p>
-          <a:p>
-            <a:endParaRPr lang="fr-BE" dirty="0"/>
-          </a:p>
-          <a:p>
-            <a:endParaRPr lang="fr-BE" dirty="0"/>
-          </a:p>
-          <a:p>
-            <a:endParaRPr lang="fr-BE" dirty="0"/>
-          </a:p>
-          <a:p>
-            <a:endParaRPr lang="en-GB" dirty="0"/>
+            <a:endParaRPr lang="en-GB" sz="2800" noProof="0" dirty="0"/>
+          </a:p>
+          <a:p>
+            <a:endParaRPr lang="en-GB" noProof="0" dirty="0"/>
+          </a:p>
+          <a:p>
+            <a:endParaRPr lang="en-GB" noProof="0" dirty="0"/>
+          </a:p>
+          <a:p>
+            <a:endParaRPr lang="en-GB" noProof="0" dirty="0"/>
+          </a:p>
+          <a:p>
+            <a:endParaRPr lang="en-GB" noProof="0" dirty="0"/>
+          </a:p>
+          <a:p>
+            <a:endParaRPr lang="en-GB" noProof="0" dirty="0"/>
           </a:p>
         </p:txBody>
       </p:sp>
@@ -6912,9 +6817,39 @@
           <a:lstStyle/>
           <a:p>
             <a:r>
-              <a:rPr lang="en-GB"/>
-              <a:t>JD+ and R</a:t>
-            </a:r>
+              <a:rPr lang="en-GB" noProof="0" dirty="0"/>
+              <a:t>RJD+</a:t>
+            </a:r>
+          </a:p>
+        </p:txBody>
+      </p:sp>
+      <p:sp>
+        <p:nvSpPr>
+          <p:cNvPr id="4" name="Espace réservé du numéro de diapositive 3">
+            <a:extLst>
+              <a:ext uri="{FF2B5EF4-FFF2-40B4-BE49-F238E27FC236}">
+                <a16:creationId xmlns:a16="http://schemas.microsoft.com/office/drawing/2014/main" id="{EC46455E-968B-2384-8BD1-8B940965468F}"/>
+              </a:ext>
+            </a:extLst>
+          </p:cNvPr>
+          <p:cNvSpPr>
+            <a:spLocks noGrp="1"/>
+          </p:cNvSpPr>
+          <p:nvPr>
+            <p:ph type="sldNum" idx="12"/>
+          </p:nvPr>
+        </p:nvSpPr>
+        <p:spPr/>
+        <p:txBody>
+          <a:bodyPr/>
+          <a:lstStyle/>
+          <a:p>
+            <a:fld id="{00000000-1234-1234-1234-123412341234}" type="slidenum">
+              <a:rPr lang="en-GB" noProof="0" smtClean="0"/>
+              <a:pPr/>
+              <a:t>11</a:t>
+            </a:fld>
+            <a:endParaRPr lang="en-GB" noProof="0" dirty="0"/>
           </a:p>
         </p:txBody>
       </p:sp>
@@ -6970,14 +6905,9 @@
           <a:lstStyle/>
           <a:p>
             <a:r>
-              <a:rPr lang="fr-BE" dirty="0"/>
-              <a:t>7. </a:t>
-            </a:r>
-            <a:r>
-              <a:rPr lang="fr-BE" dirty="0" err="1"/>
-              <a:t>Examples</a:t>
-            </a:r>
-            <a:endParaRPr lang="fr-BE" dirty="0"/>
+              <a:rPr lang="en-GB" noProof="0" dirty="0"/>
+              <a:t>7. Examples</a:t>
+            </a:r>
           </a:p>
         </p:txBody>
       </p:sp>
@@ -7003,52 +6933,30 @@
           <a:lstStyle/>
           <a:p>
             <a:r>
-              <a:rPr lang="fr-BE" sz="2400" dirty="0"/>
-              <a:t>Reading Excel files (JD+-like) and </a:t>
-            </a:r>
-            <a:r>
-              <a:rPr lang="fr-BE" sz="2400" dirty="0" err="1"/>
-              <a:t>detecting</a:t>
-            </a:r>
-            <a:r>
-              <a:rPr lang="fr-BE" sz="2400" dirty="0"/>
-              <a:t> </a:t>
-            </a:r>
-            <a:r>
-              <a:rPr lang="fr-BE" sz="2400" dirty="0" err="1"/>
-              <a:t>errors</a:t>
-            </a:r>
-            <a:endParaRPr lang="fr-BE" sz="2400" dirty="0"/>
-          </a:p>
-          <a:p>
-            <a:endParaRPr lang="fr-BE" sz="2400" dirty="0"/>
-          </a:p>
-          <a:p>
-            <a:endParaRPr lang="fr-BE" dirty="0"/>
-          </a:p>
-          <a:p>
-            <a:endParaRPr lang="fr-BE" dirty="0"/>
-          </a:p>
-          <a:p>
-            <a:endParaRPr lang="fr-BE" sz="2400" dirty="0"/>
-          </a:p>
-          <a:p>
-            <a:r>
-              <a:rPr lang="fr-BE" sz="2400" dirty="0" err="1"/>
-              <a:t>Refreshing</a:t>
-            </a:r>
-            <a:r>
-              <a:rPr lang="fr-BE" sz="2400" dirty="0"/>
-              <a:t> a </a:t>
-            </a:r>
-            <a:r>
-              <a:rPr lang="fr-BE" sz="2400" dirty="0" err="1"/>
-              <a:t>workspace</a:t>
-            </a:r>
-            <a:endParaRPr lang="fr-BE" sz="2400" dirty="0"/>
-          </a:p>
-          <a:p>
-            <a:endParaRPr lang="fr-BE" dirty="0"/>
+              <a:rPr lang="en-GB" sz="2400" noProof="0" dirty="0"/>
+              <a:t>Reading Excel files (JD+-like) and detecting errors</a:t>
+            </a:r>
+          </a:p>
+          <a:p>
+            <a:endParaRPr lang="en-GB" sz="2400" noProof="0" dirty="0"/>
+          </a:p>
+          <a:p>
+            <a:endParaRPr lang="en-GB" noProof="0" dirty="0"/>
+          </a:p>
+          <a:p>
+            <a:endParaRPr lang="en-GB" noProof="0" dirty="0"/>
+          </a:p>
+          <a:p>
+            <a:endParaRPr lang="en-GB" sz="2400" noProof="0" dirty="0"/>
+          </a:p>
+          <a:p>
+            <a:r>
+              <a:rPr lang="en-GB" sz="2400" noProof="0" dirty="0"/>
+              <a:t>Refreshing a workspace</a:t>
+            </a:r>
+          </a:p>
+          <a:p>
+            <a:endParaRPr lang="en-GB" noProof="0" dirty="0"/>
           </a:p>
         </p:txBody>
       </p:sp>
@@ -7079,8 +6987,8 @@
           <a:lstStyle/>
           <a:p>
             <a:r>
-              <a:rPr lang="en-GB"/>
-              <a:t>JD+ and R</a:t>
+              <a:rPr lang="en-GB" noProof="0" dirty="0"/>
+              <a:t>RJD+</a:t>
             </a:r>
           </a:p>
         </p:txBody>
@@ -7155,6 +7063,36 @@
           </a:ln>
         </p:spPr>
       </p:pic>
+      <p:sp>
+        <p:nvSpPr>
+          <p:cNvPr id="4" name="Espace réservé du numéro de diapositive 3">
+            <a:extLst>
+              <a:ext uri="{FF2B5EF4-FFF2-40B4-BE49-F238E27FC236}">
+                <a16:creationId xmlns:a16="http://schemas.microsoft.com/office/drawing/2014/main" id="{FEF49FD5-F005-544F-31D9-570040FD341F}"/>
+              </a:ext>
+            </a:extLst>
+          </p:cNvPr>
+          <p:cNvSpPr>
+            <a:spLocks noGrp="1"/>
+          </p:cNvSpPr>
+          <p:nvPr>
+            <p:ph type="sldNum" idx="12"/>
+          </p:nvPr>
+        </p:nvSpPr>
+        <p:spPr/>
+        <p:txBody>
+          <a:bodyPr/>
+          <a:lstStyle/>
+          <a:p>
+            <a:fld id="{00000000-1234-1234-1234-123412341234}" type="slidenum">
+              <a:rPr lang="en-GB" noProof="0" smtClean="0"/>
+              <a:pPr/>
+              <a:t>12</a:t>
+            </a:fld>
+            <a:endParaRPr lang="en-GB" noProof="0" dirty="0"/>
+          </a:p>
+        </p:txBody>
+      </p:sp>
     </p:spTree>
     <p:extLst>
       <p:ext uri="{BB962C8B-B14F-4D97-AF65-F5344CB8AC3E}">
@@ -7207,23 +7145,18 @@
           <a:lstStyle/>
           <a:p>
             <a:r>
-              <a:rPr lang="fr-BE" dirty="0"/>
-              <a:t>8. Final </a:t>
-            </a:r>
-            <a:r>
-              <a:rPr lang="fr-BE" dirty="0" err="1"/>
-              <a:t>remarks</a:t>
-            </a:r>
-            <a:endParaRPr lang="fr-BE" dirty="0"/>
+              <a:rPr lang="en-GB" noProof="0" dirty="0"/>
+              <a:t>8. Final remarks</a:t>
+            </a:r>
           </a:p>
         </p:txBody>
       </p:sp>
       <p:sp>
         <p:nvSpPr>
-          <p:cNvPr id="3" name="Content Placeholder 2">
-            <a:extLst>
-              <a:ext uri="{FF2B5EF4-FFF2-40B4-BE49-F238E27FC236}">
-                <a16:creationId xmlns:a16="http://schemas.microsoft.com/office/drawing/2014/main" id="{F38DE8C5-FE9D-F4B0-826C-E1C01E979E83}"/>
+          <p:cNvPr id="4" name="Espace réservé du numéro de diapositive 3">
+            <a:extLst>
+              <a:ext uri="{FF2B5EF4-FFF2-40B4-BE49-F238E27FC236}">
+                <a16:creationId xmlns:a16="http://schemas.microsoft.com/office/drawing/2014/main" id="{1429CED5-DA02-0CE0-826D-32FB277D1DC8}"/>
               </a:ext>
             </a:extLst>
           </p:cNvPr>
@@ -7231,7 +7164,7 @@
             <a:spLocks noGrp="1"/>
           </p:cNvSpPr>
           <p:nvPr>
-            <p:ph idx="1"/>
+            <p:ph type="sldNum" idx="12"/>
           </p:nvPr>
         </p:nvSpPr>
         <p:spPr/>
@@ -7239,147 +7172,20 @@
           <a:bodyPr/>
           <a:lstStyle/>
           <a:p>
-            <a:r>
-              <a:rPr lang="fr-BE" dirty="0"/>
-              <a:t>Most </a:t>
-            </a:r>
-            <a:r>
-              <a:rPr lang="fr-BE" dirty="0" err="1"/>
-              <a:t>features</a:t>
-            </a:r>
-            <a:r>
-              <a:rPr lang="fr-BE" dirty="0"/>
-              <a:t> </a:t>
-            </a:r>
-            <a:r>
-              <a:rPr lang="fr-BE" dirty="0" err="1"/>
-              <a:t>provided</a:t>
-            </a:r>
-            <a:r>
-              <a:rPr lang="fr-BE" dirty="0"/>
-              <a:t> in the Java </a:t>
-            </a:r>
-            <a:r>
-              <a:rPr lang="fr-BE" dirty="0" err="1"/>
-              <a:t>libraries</a:t>
-            </a:r>
-            <a:r>
-              <a:rPr lang="fr-BE" dirty="0"/>
-              <a:t> can </a:t>
-            </a:r>
-            <a:r>
-              <a:rPr lang="fr-BE" dirty="0" err="1"/>
-              <a:t>be</a:t>
-            </a:r>
-            <a:r>
-              <a:rPr lang="fr-BE" dirty="0"/>
-              <a:t> </a:t>
-            </a:r>
-            <a:r>
-              <a:rPr lang="fr-BE" dirty="0" err="1"/>
-              <a:t>called</a:t>
-            </a:r>
-            <a:r>
-              <a:rPr lang="fr-BE" dirty="0"/>
-              <a:t> </a:t>
-            </a:r>
-            <a:r>
-              <a:rPr lang="fr-BE" dirty="0" err="1"/>
-              <a:t>from</a:t>
-            </a:r>
-            <a:r>
-              <a:rPr lang="fr-BE" dirty="0"/>
-              <a:t> R</a:t>
-            </a:r>
-          </a:p>
-          <a:p>
-            <a:endParaRPr lang="fr-BE" dirty="0"/>
-          </a:p>
-          <a:p>
-            <a:r>
-              <a:rPr lang="fr-BE" dirty="0"/>
-              <a:t>Most </a:t>
-            </a:r>
-            <a:r>
-              <a:rPr lang="fr-BE" dirty="0" err="1"/>
-              <a:t>tasks</a:t>
-            </a:r>
-            <a:r>
-              <a:rPr lang="fr-BE" dirty="0"/>
-              <a:t> can </a:t>
-            </a:r>
-            <a:r>
-              <a:rPr lang="fr-BE" dirty="0" err="1"/>
-              <a:t>be</a:t>
-            </a:r>
-            <a:r>
-              <a:rPr lang="fr-BE" dirty="0"/>
-              <a:t> </a:t>
-            </a:r>
-            <a:r>
-              <a:rPr lang="fr-BE" dirty="0" err="1"/>
-              <a:t>automated</a:t>
-            </a:r>
-            <a:endParaRPr lang="fr-BE" dirty="0"/>
-          </a:p>
-          <a:p>
-            <a:r>
-              <a:rPr lang="fr-BE" dirty="0" err="1"/>
-              <a:t>Many</a:t>
-            </a:r>
-            <a:r>
-              <a:rPr lang="fr-BE" dirty="0"/>
-              <a:t> </a:t>
-            </a:r>
-            <a:r>
-              <a:rPr lang="fr-BE" dirty="0" err="1"/>
-              <a:t>additional</a:t>
-            </a:r>
-            <a:r>
-              <a:rPr lang="fr-BE" dirty="0"/>
-              <a:t> </a:t>
-            </a:r>
-            <a:r>
-              <a:rPr lang="fr-BE" dirty="0" err="1"/>
-              <a:t>tools</a:t>
-            </a:r>
-            <a:r>
-              <a:rPr lang="fr-BE" dirty="0"/>
-              <a:t> </a:t>
-            </a:r>
-            <a:r>
-              <a:rPr lang="fr-BE" dirty="0" err="1"/>
-              <a:t>could</a:t>
-            </a:r>
-            <a:r>
-              <a:rPr lang="fr-BE" dirty="0"/>
-              <a:t> </a:t>
-            </a:r>
-            <a:r>
-              <a:rPr lang="fr-BE" dirty="0" err="1"/>
-              <a:t>be</a:t>
-            </a:r>
-            <a:r>
-              <a:rPr lang="fr-BE" dirty="0"/>
-              <a:t> </a:t>
-            </a:r>
-            <a:r>
-              <a:rPr lang="fr-BE" dirty="0" err="1"/>
-              <a:t>developed</a:t>
-            </a:r>
-            <a:r>
-              <a:rPr lang="fr-BE" dirty="0"/>
-              <a:t> in R </a:t>
-            </a:r>
+            <a:fld id="{FD8FE792-0364-4011-8053-26F035783A3A}" type="slidenum">
+              <a:rPr lang="en-GB" noProof="0" smtClean="0"/>
+              <a:t>13</a:t>
+            </a:fld>
+            <a:endParaRPr lang="en-GB" noProof="0" dirty="0"/>
           </a:p>
         </p:txBody>
       </p:sp>
       <p:sp>
         <p:nvSpPr>
-          <p:cNvPr id="9" name="Espace réservé du pied de page 8">
-            <a:extLst>
-              <a:ext uri="{FF2B5EF4-FFF2-40B4-BE49-F238E27FC236}">
-                <a16:creationId xmlns:a16="http://schemas.microsoft.com/office/drawing/2014/main" id="{AF4A3B4D-A573-4898-5AF0-72125FFCB46F}"/>
+          <p:cNvPr id="3" name="Content Placeholder 2">
+            <a:extLst>
+              <a:ext uri="{FF2B5EF4-FFF2-40B4-BE49-F238E27FC236}">
+                <a16:creationId xmlns:a16="http://schemas.microsoft.com/office/drawing/2014/main" id="{F38DE8C5-FE9D-F4B0-826C-E1C01E979E83}"/>
               </a:ext>
             </a:extLst>
           </p:cNvPr>
@@ -7387,7 +7193,7 @@
             <a:spLocks noGrp="1"/>
           </p:cNvSpPr>
           <p:nvPr>
-            <p:ph type="ftr" sz="quarter" idx="11"/>
+            <p:ph sz="half" idx="2"/>
           </p:nvPr>
         </p:nvSpPr>
         <p:spPr/>
@@ -7396,8 +7202,56 @@
           <a:lstStyle/>
           <a:p>
             <a:r>
-              <a:rPr lang="en-GB"/>
-              <a:t>JD+ and R</a:t>
+              <a:rPr lang="en-GB" sz="2800" noProof="0" dirty="0"/>
+              <a:t>Many features provided in the Java libraries can be called from R</a:t>
+            </a:r>
+          </a:p>
+          <a:p>
+            <a:endParaRPr lang="en-GB" sz="2800" noProof="0" dirty="0"/>
+          </a:p>
+          <a:p>
+            <a:r>
+              <a:rPr lang="en-GB" sz="2800" noProof="0" dirty="0"/>
+              <a:t>Most tasks can be automated</a:t>
+            </a:r>
+          </a:p>
+          <a:p>
+            <a:r>
+              <a:rPr lang="en-GB" sz="2800" noProof="0" dirty="0"/>
+              <a:t>Many additional tools could be developed in R </a:t>
+            </a:r>
+          </a:p>
+        </p:txBody>
+      </p:sp>
+      <p:sp>
+        <p:nvSpPr>
+          <p:cNvPr id="9" name="Espace réservé du pied de page 8">
+            <a:extLst>
+              <a:ext uri="{FF2B5EF4-FFF2-40B4-BE49-F238E27FC236}">
+                <a16:creationId xmlns:a16="http://schemas.microsoft.com/office/drawing/2014/main" id="{AF4A3B4D-A573-4898-5AF0-72125FFCB46F}"/>
+              </a:ext>
+            </a:extLst>
+          </p:cNvPr>
+          <p:cNvSpPr>
+            <a:spLocks noGrp="1"/>
+          </p:cNvSpPr>
+          <p:nvPr>
+            <p:ph type="ftr" sz="quarter" idx="4294967295"/>
+          </p:nvPr>
+        </p:nvSpPr>
+        <p:spPr>
+          <a:xfrm>
+            <a:off x="0" y="0"/>
+            <a:ext cx="0" cy="0"/>
+          </a:xfrm>
+        </p:spPr>
+        <p:txBody>
+          <a:bodyPr/>
+          <a:lstStyle/>
+          <a:p>
+            <a:r>
+              <a:rPr lang="en-GB" noProof="0" dirty="0"/>
+              <a:t>RJD+</a:t>
             </a:r>
           </a:p>
         </p:txBody>
@@ -7453,7 +7307,7 @@
           <a:bodyPr/>
           <a:lstStyle/>
           <a:p>
-            <a:endParaRPr lang="en-IE"/>
+            <a:endParaRPr lang="en-GB" noProof="0" dirty="0"/>
           </a:p>
         </p:txBody>
       </p:sp>
@@ -7478,7 +7332,37 @@
           <a:bodyPr/>
           <a:lstStyle/>
           <a:p>
-            <a:endParaRPr lang="en-IE"/>
+            <a:endParaRPr lang="en-GB" noProof="0" dirty="0"/>
+          </a:p>
+        </p:txBody>
+      </p:sp>
+      <p:sp>
+        <p:nvSpPr>
+          <p:cNvPr id="4" name="Espace réservé du numéro de diapositive 3">
+            <a:extLst>
+              <a:ext uri="{FF2B5EF4-FFF2-40B4-BE49-F238E27FC236}">
+                <a16:creationId xmlns:a16="http://schemas.microsoft.com/office/drawing/2014/main" id="{11E084FC-5A6D-B3C7-3A17-9C4CA048055A}"/>
+              </a:ext>
+            </a:extLst>
+          </p:cNvPr>
+          <p:cNvSpPr>
+            <a:spLocks noGrp="1"/>
+          </p:cNvSpPr>
+          <p:nvPr>
+            <p:ph type="sldNum" idx="12"/>
+          </p:nvPr>
+        </p:nvSpPr>
+        <p:spPr/>
+        <p:txBody>
+          <a:bodyPr/>
+          <a:lstStyle/>
+          <a:p>
+            <a:fld id="{00000000-1234-1234-1234-123412341234}" type="slidenum">
+              <a:rPr lang="en-GB" noProof="0" smtClean="0"/>
+              <a:pPr/>
+              <a:t>14</a:t>
+            </a:fld>
+            <a:endParaRPr lang="en-GB" noProof="0" dirty="0"/>
           </a:p>
         </p:txBody>
       </p:sp>
@@ -7534,7 +7418,7 @@
           <a:lstStyle/>
           <a:p>
             <a:r>
-              <a:rPr lang="en-GB" dirty="0"/>
+              <a:rPr lang="en-GB" noProof="0" dirty="0"/>
               <a:t>1. Main requirements</a:t>
             </a:r>
           </a:p>
@@ -7567,87 +7451,92 @@
           <a:lstStyle/>
           <a:p>
             <a:r>
-              <a:rPr lang="en-GB" dirty="0" err="1"/>
+              <a:rPr lang="en-GB" noProof="0" dirty="0" err="1"/>
               <a:t>RJDemetra</a:t>
             </a:r>
-            <a:endParaRPr lang="en-GB" dirty="0"/>
+            <a:endParaRPr lang="en-GB" noProof="0" dirty="0"/>
           </a:p>
           <a:p>
             <a:pPr lvl="1"/>
             <a:r>
-              <a:rPr lang="en-GB" b="1" dirty="0"/>
+              <a:rPr lang="en-GB" b="1" noProof="0" dirty="0"/>
               <a:t>Java runtime (&gt;=11)</a:t>
             </a:r>
           </a:p>
           <a:p>
             <a:pPr lvl="1"/>
             <a:r>
-              <a:rPr lang="pt-BR" dirty="0"/>
+              <a:rPr lang="en-GB" noProof="0" dirty="0"/>
               <a:t>R (&gt;= 3.1.1)</a:t>
             </a:r>
           </a:p>
           <a:p>
             <a:pPr lvl="1"/>
             <a:r>
-              <a:rPr lang="pt-BR" dirty="0"/>
-              <a:t>rJava (&gt;= 0.9-8)</a:t>
-            </a:r>
-          </a:p>
-          <a:p>
-            <a:endParaRPr lang="pt-BR" dirty="0"/>
-          </a:p>
-          <a:p>
-            <a:r>
-              <a:rPr lang="pt-BR" dirty="0"/>
+              <a:rPr lang="en-GB" noProof="0" dirty="0" err="1"/>
+              <a:t>rJava</a:t>
+            </a:r>
+            <a:r>
+              <a:rPr lang="en-GB" noProof="0" dirty="0"/>
+              <a:t> (&gt;= 0.9-8)</a:t>
+            </a:r>
+          </a:p>
+          <a:p>
+            <a:endParaRPr lang="en-GB" noProof="0" dirty="0"/>
+          </a:p>
+          <a:p>
+            <a:r>
+              <a:rPr lang="en-GB" noProof="0" dirty="0" err="1"/>
               <a:t>rjdverse</a:t>
             </a:r>
+            <a:endParaRPr lang="en-GB" noProof="0" dirty="0"/>
           </a:p>
           <a:p>
             <a:pPr lvl="1"/>
             <a:r>
-              <a:rPr lang="en-GB" b="1" dirty="0"/>
+              <a:rPr lang="en-GB" b="1" noProof="0" dirty="0"/>
               <a:t>Java runtime (&gt;=17.0)</a:t>
             </a:r>
           </a:p>
           <a:p>
             <a:pPr lvl="1"/>
             <a:r>
-              <a:rPr lang="en-GB" dirty="0"/>
+              <a:rPr lang="en-GB" noProof="0" dirty="0"/>
               <a:t> R (&gt;= 3.6.0)</a:t>
             </a:r>
           </a:p>
           <a:p>
             <a:pPr lvl="1"/>
             <a:r>
-              <a:rPr lang="en-GB" dirty="0"/>
+              <a:rPr lang="en-GB" noProof="0" dirty="0"/>
               <a:t> </a:t>
             </a:r>
             <a:r>
-              <a:rPr lang="en-GB" dirty="0" err="1"/>
+              <a:rPr lang="en-GB" noProof="0" dirty="0" err="1"/>
               <a:t>rJava</a:t>
             </a:r>
             <a:r>
-              <a:rPr lang="en-GB" dirty="0"/>
+              <a:rPr lang="en-GB" noProof="0" dirty="0"/>
               <a:t> (&gt;= 1.0-6),</a:t>
             </a:r>
           </a:p>
           <a:p>
             <a:pPr lvl="1"/>
             <a:r>
-              <a:rPr lang="en-GB" dirty="0"/>
+              <a:rPr lang="en-GB" noProof="0" dirty="0"/>
               <a:t> </a:t>
             </a:r>
             <a:r>
-              <a:rPr lang="en-GB" dirty="0" err="1"/>
+              <a:rPr lang="en-GB" noProof="0" dirty="0" err="1"/>
               <a:t>RProtoBuf</a:t>
             </a:r>
             <a:r>
-              <a:rPr lang="en-GB" dirty="0"/>
+              <a:rPr lang="en-GB" noProof="0" dirty="0"/>
               <a:t> (&gt;= 0.4.17)</a:t>
             </a:r>
           </a:p>
           <a:p>
-            <a:endParaRPr lang="en-GB" dirty="0"/>
+            <a:endParaRPr lang="en-GB" noProof="0" dirty="0"/>
           </a:p>
         </p:txBody>
       </p:sp>
@@ -7678,9 +7567,39 @@
           <a:lstStyle/>
           <a:p>
             <a:r>
-              <a:rPr lang="en-GB"/>
-              <a:t>JD+ and R</a:t>
-            </a:r>
+              <a:rPr lang="en-GB" noProof="0" dirty="0"/>
+              <a:t>RJD+</a:t>
+            </a:r>
+          </a:p>
+        </p:txBody>
+      </p:sp>
+      <p:sp>
+        <p:nvSpPr>
+          <p:cNvPr id="4" name="Espace réservé du numéro de diapositive 3">
+            <a:extLst>
+              <a:ext uri="{FF2B5EF4-FFF2-40B4-BE49-F238E27FC236}">
+                <a16:creationId xmlns:a16="http://schemas.microsoft.com/office/drawing/2014/main" id="{46ECF6F5-1A10-AFA0-4D46-EC8A57810182}"/>
+              </a:ext>
+            </a:extLst>
+          </p:cNvPr>
+          <p:cNvSpPr>
+            <a:spLocks noGrp="1"/>
+          </p:cNvSpPr>
+          <p:nvPr>
+            <p:ph type="sldNum" idx="12"/>
+          </p:nvPr>
+        </p:nvSpPr>
+        <p:spPr/>
+        <p:txBody>
+          <a:bodyPr/>
+          <a:lstStyle/>
+          <a:p>
+            <a:fld id="{00000000-1234-1234-1234-123412341234}" type="slidenum">
+              <a:rPr lang="en-GB" noProof="0" smtClean="0"/>
+              <a:pPr/>
+              <a:t>2</a:t>
+            </a:fld>
+            <a:endParaRPr lang="en-GB" noProof="0" dirty="0"/>
           </a:p>
         </p:txBody>
       </p:sp>
@@ -7730,18 +7649,17 @@
           <a:lstStyle/>
           <a:p>
             <a:r>
-              <a:rPr lang="en-GB" dirty="0"/>
+              <a:rPr lang="en-GB" noProof="0" dirty="0"/>
               <a:t>2. Technical design of </a:t>
             </a:r>
             <a:r>
-              <a:rPr lang="en-GB" dirty="0" err="1"/>
+              <a:rPr lang="en-GB" noProof="0" dirty="0" err="1"/>
               <a:t>Rjdemetra</a:t>
             </a:r>
             <a:r>
-              <a:rPr lang="en-GB" dirty="0"/>
+              <a:rPr lang="en-GB" noProof="0" dirty="0"/>
               <a:t> (v2)</a:t>
             </a:r>
-            <a:endParaRPr lang="fr-BE" dirty="0"/>
           </a:p>
         </p:txBody>
       </p:sp>
@@ -7766,7 +7684,7 @@
           <a:bodyPr/>
           <a:lstStyle/>
           <a:p>
-            <a:endParaRPr lang="en-GB" dirty="0"/>
+            <a:endParaRPr lang="en-GB" noProof="0" dirty="0"/>
           </a:p>
         </p:txBody>
       </p:sp>
@@ -7797,8 +7715,8 @@
           <a:lstStyle/>
           <a:p>
             <a:r>
-              <a:rPr lang="en-GB"/>
-              <a:t>JD+ and R</a:t>
+              <a:rPr lang="en-GB" noProof="0" dirty="0"/>
+              <a:t>RJD+</a:t>
             </a:r>
           </a:p>
         </p:txBody>
@@ -7838,7 +7756,7 @@
           <a:p>
             <a:pPr algn="ctr"/>
             <a:r>
-              <a:rPr lang="fr-BE" dirty="0">
+              <a:rPr lang="en-GB" noProof="0" dirty="0">
                 <a:solidFill>
                   <a:schemeClr val="bg1"/>
                 </a:solidFill>
@@ -7884,7 +7802,7 @@
           <a:p>
             <a:pPr algn="ctr"/>
             <a:r>
-              <a:rPr lang="fr-BE" dirty="0">
+              <a:rPr lang="en-GB" noProof="0" dirty="0">
                 <a:solidFill>
                   <a:schemeClr val="tx1"/>
                 </a:solidFill>
@@ -7930,14 +7848,14 @@
           <a:p>
             <a:pPr algn="ctr"/>
             <a:r>
-              <a:rPr lang="fr-BE" dirty="0" err="1">
+              <a:rPr lang="en-GB" noProof="0" dirty="0" err="1">
                 <a:solidFill>
                   <a:schemeClr val="tx1"/>
                 </a:solidFill>
               </a:rPr>
               <a:t>SACruncher</a:t>
             </a:r>
-            <a:endParaRPr lang="fr-BE" dirty="0">
+            <a:endParaRPr lang="en-GB" noProof="0" dirty="0">
               <a:solidFill>
                 <a:schemeClr val="tx1"/>
               </a:solidFill>
@@ -8089,7 +8007,7 @@
           <a:p>
             <a:pPr algn="ctr"/>
             <a:r>
-              <a:rPr lang="fr-BE" dirty="0">
+              <a:rPr lang="en-GB" noProof="0" dirty="0">
                 <a:solidFill>
                   <a:schemeClr val="bg1"/>
                 </a:solidFill>
@@ -8134,10 +8052,10 @@
           <a:p>
             <a:pPr algn="ctr"/>
             <a:r>
-              <a:rPr lang="fr-BE" dirty="0" err="1"/>
+              <a:rPr lang="en-GB" noProof="0" dirty="0" err="1"/>
               <a:t>rJava</a:t>
             </a:r>
-            <a:endParaRPr lang="fr-BE" dirty="0"/>
+            <a:endParaRPr lang="en-GB" noProof="0" dirty="0"/>
           </a:p>
         </p:txBody>
       </p:sp>
@@ -8178,7 +8096,7 @@
           <a:p>
             <a:pPr algn="ctr"/>
             <a:r>
-              <a:rPr lang="fr-BE" b="1" dirty="0" err="1">
+              <a:rPr lang="en-GB" b="1" noProof="0" dirty="0" err="1">
                 <a:solidFill>
                   <a:schemeClr val="bg1"/>
                 </a:solidFill>
@@ -8186,7 +8104,7 @@
               <a:t>RJDemetra</a:t>
             </a:r>
             <a:r>
-              <a:rPr lang="fr-BE" b="1" dirty="0">
+              <a:rPr lang="en-GB" b="1" noProof="0" dirty="0">
                 <a:solidFill>
                   <a:schemeClr val="bg1"/>
                 </a:solidFill>
@@ -8231,21 +8149,21 @@
           <a:p>
             <a:pPr algn="ctr"/>
             <a:r>
-              <a:rPr lang="fr-BE" dirty="0"/>
+              <a:rPr lang="en-GB" noProof="0" dirty="0"/>
               <a:t>R</a:t>
             </a:r>
           </a:p>
           <a:p>
             <a:pPr algn="ctr"/>
             <a:r>
-              <a:rPr lang="fr-BE" dirty="0"/>
+              <a:rPr lang="en-GB" noProof="0" dirty="0"/>
               <a:t>R-Studio</a:t>
             </a:r>
           </a:p>
           <a:p>
             <a:pPr algn="ctr"/>
             <a:r>
-              <a:rPr lang="fr-BE" dirty="0"/>
+              <a:rPr lang="en-GB" noProof="0" dirty="0"/>
               <a:t>…</a:t>
             </a:r>
           </a:p>
@@ -8389,7 +8307,7 @@
           <a:p>
             <a:pPr algn="ctr"/>
             <a:r>
-              <a:rPr lang="en-US" sz="2000" dirty="0">
+              <a:rPr lang="en-GB" sz="2000" noProof="0" dirty="0">
                 <a:ln w="0"/>
                 <a:solidFill>
                   <a:schemeClr val="accent1"/>
@@ -8404,7 +8322,7 @@
               </a:rPr>
               <a:t>Java</a:t>
             </a:r>
-            <a:endParaRPr lang="en-US" sz="2000" b="1" dirty="0">
+            <a:endParaRPr lang="en-GB" sz="2000" b="1" noProof="0" dirty="0">
               <a:ln w="18000">
                 <a:solidFill>
                   <a:schemeClr val="accent2">
@@ -8456,7 +8374,7 @@
           <a:p>
             <a:pPr algn="ctr"/>
             <a:r>
-              <a:rPr lang="en-US" sz="2000" dirty="0">
+              <a:rPr lang="en-GB" sz="2000" noProof="0" dirty="0">
                 <a:ln w="0"/>
                 <a:solidFill>
                   <a:schemeClr val="accent1"/>
@@ -8471,7 +8389,7 @@
               </a:rPr>
               <a:t>Java</a:t>
             </a:r>
-            <a:endParaRPr lang="en-US" sz="2000" b="1" dirty="0">
+            <a:endParaRPr lang="en-GB" sz="2000" b="1" noProof="0" dirty="0">
               <a:ln w="18000">
                 <a:solidFill>
                   <a:schemeClr val="accent2">
@@ -8523,7 +8441,7 @@
           <a:p>
             <a:pPr algn="ctr"/>
             <a:r>
-              <a:rPr lang="en-US" sz="2000" dirty="0">
+              <a:rPr lang="en-GB" sz="2000" noProof="0" dirty="0">
                 <a:ln w="0"/>
                 <a:solidFill>
                   <a:schemeClr val="accent1"/>
@@ -8538,7 +8456,7 @@
               </a:rPr>
               <a:t>Java</a:t>
             </a:r>
-            <a:endParaRPr lang="en-US" sz="2000" b="1" dirty="0">
+            <a:endParaRPr lang="en-GB" sz="2000" b="1" noProof="0" dirty="0">
               <a:ln w="18000">
                 <a:solidFill>
                   <a:schemeClr val="accent2">
@@ -8590,7 +8508,7 @@
           <a:p>
             <a:pPr algn="ctr"/>
             <a:r>
-              <a:rPr lang="en-US" sz="2000" dirty="0">
+              <a:rPr lang="en-GB" sz="2000" noProof="0" dirty="0">
                 <a:ln w="0"/>
                 <a:solidFill>
                   <a:schemeClr val="accent1"/>
@@ -8605,7 +8523,7 @@
               </a:rPr>
               <a:t>Java</a:t>
             </a:r>
-            <a:endParaRPr lang="en-US" sz="2000" b="1" dirty="0">
+            <a:endParaRPr lang="en-GB" sz="2000" b="1" noProof="0" dirty="0">
               <a:ln w="18000">
                 <a:solidFill>
                   <a:schemeClr val="accent2">
@@ -8657,7 +8575,7 @@
           <a:p>
             <a:pPr algn="ctr"/>
             <a:r>
-              <a:rPr lang="en-US" sz="2000" dirty="0">
+              <a:rPr lang="en-GB" sz="2000" noProof="0" dirty="0">
                 <a:ln w="0"/>
                 <a:effectLst>
                   <a:outerShdw blurRad="38100" dist="19050" dir="2700000" algn="tl" rotWithShape="0">
@@ -8702,7 +8620,7 @@
           <a:p>
             <a:pPr algn="ctr"/>
             <a:r>
-              <a:rPr lang="en-US" sz="2000" dirty="0">
+              <a:rPr lang="en-GB" sz="2000" noProof="0" dirty="0">
                 <a:ln w="0"/>
                 <a:effectLst>
                   <a:outerShdw blurRad="38100" dist="19050" dir="2700000" algn="tl" rotWithShape="0">
@@ -8714,6 +8632,36 @@
               </a:rPr>
               <a:t>R, native</a:t>
             </a:r>
+          </a:p>
+        </p:txBody>
+      </p:sp>
+      <p:sp>
+        <p:nvSpPr>
+          <p:cNvPr id="7" name="Espace réservé du numéro de diapositive 6">
+            <a:extLst>
+              <a:ext uri="{FF2B5EF4-FFF2-40B4-BE49-F238E27FC236}">
+                <a16:creationId xmlns:a16="http://schemas.microsoft.com/office/drawing/2014/main" id="{86375170-7893-0615-F32A-DAFCE39A3EF2}"/>
+              </a:ext>
+            </a:extLst>
+          </p:cNvPr>
+          <p:cNvSpPr>
+            <a:spLocks noGrp="1"/>
+          </p:cNvSpPr>
+          <p:nvPr>
+            <p:ph type="sldNum" idx="12"/>
+          </p:nvPr>
+        </p:nvSpPr>
+        <p:spPr/>
+        <p:txBody>
+          <a:bodyPr/>
+          <a:lstStyle/>
+          <a:p>
+            <a:fld id="{00000000-1234-1234-1234-123412341234}" type="slidenum">
+              <a:rPr lang="en-GB" noProof="0" smtClean="0"/>
+              <a:pPr/>
+              <a:t>3</a:t>
+            </a:fld>
+            <a:endParaRPr lang="en-GB" noProof="0" dirty="0"/>
           </a:p>
         </p:txBody>
       </p:sp>
@@ -9429,18 +9377,17 @@
           <a:lstStyle/>
           <a:p>
             <a:r>
-              <a:rPr lang="en-GB" dirty="0"/>
+              <a:rPr lang="en-GB" noProof="0" dirty="0"/>
               <a:t>3. Technical design of </a:t>
             </a:r>
             <a:r>
-              <a:rPr lang="en-GB" dirty="0" err="1"/>
+              <a:rPr lang="en-GB" noProof="0" dirty="0" err="1"/>
               <a:t>rjdverse</a:t>
             </a:r>
             <a:r>
-              <a:rPr lang="en-GB" dirty="0"/>
+              <a:rPr lang="en-GB" noProof="0" dirty="0"/>
               <a:t> (v3)</a:t>
             </a:r>
-            <a:endParaRPr lang="fr-BE" dirty="0"/>
           </a:p>
         </p:txBody>
       </p:sp>
@@ -9465,7 +9412,7 @@
           <a:bodyPr/>
           <a:lstStyle/>
           <a:p>
-            <a:endParaRPr lang="en-GB"/>
+            <a:endParaRPr lang="en-GB" noProof="0" dirty="0"/>
           </a:p>
         </p:txBody>
       </p:sp>
@@ -9496,8 +9443,8 @@
           <a:lstStyle/>
           <a:p>
             <a:r>
-              <a:rPr lang="en-GB"/>
-              <a:t>JD+ and R</a:t>
+              <a:rPr lang="en-GB" noProof="0" dirty="0"/>
+              <a:t>RJD+</a:t>
             </a:r>
           </a:p>
         </p:txBody>
@@ -9537,7 +9484,7 @@
           <a:p>
             <a:pPr algn="ctr"/>
             <a:r>
-              <a:rPr lang="fr-BE" dirty="0">
+              <a:rPr lang="en-GB" noProof="0" dirty="0">
                 <a:solidFill>
                   <a:schemeClr val="bg1"/>
                 </a:solidFill>
@@ -9583,7 +9530,7 @@
           <a:p>
             <a:pPr algn="ctr"/>
             <a:r>
-              <a:rPr lang="fr-BE" dirty="0">
+              <a:rPr lang="en-GB" noProof="0" dirty="0">
                 <a:solidFill>
                   <a:schemeClr val="tx1"/>
                 </a:solidFill>
@@ -9702,7 +9649,7 @@
           <a:p>
             <a:pPr algn="ctr"/>
             <a:r>
-              <a:rPr lang="fr-BE" dirty="0">
+              <a:rPr lang="en-GB" noProof="0" dirty="0">
                 <a:solidFill>
                   <a:schemeClr val="bg1"/>
                 </a:solidFill>
@@ -9747,7 +9694,7 @@
           <a:p>
             <a:pPr algn="ctr"/>
             <a:r>
-              <a:rPr lang="fr-BE" dirty="0" err="1">
+              <a:rPr lang="en-GB" noProof="0" dirty="0" err="1">
                 <a:solidFill>
                   <a:schemeClr val="bg1">
                     <a:lumMod val="65000"/>
@@ -9757,7 +9704,7 @@
               <a:t>rJava</a:t>
             </a:r>
             <a:r>
-              <a:rPr lang="fr-BE" dirty="0">
+              <a:rPr lang="en-GB" noProof="0" dirty="0">
                 <a:solidFill>
                   <a:schemeClr val="bg1">
                     <a:lumMod val="65000"/>
@@ -9770,10 +9717,10 @@
           <a:p>
             <a:pPr algn="ctr"/>
             <a:r>
-              <a:rPr lang="fr-BE" dirty="0" err="1"/>
+              <a:rPr lang="en-GB" noProof="0" dirty="0" err="1"/>
               <a:t>RProtobuf</a:t>
             </a:r>
-            <a:endParaRPr lang="fr-BE" dirty="0"/>
+            <a:endParaRPr lang="en-GB" noProof="0" dirty="0"/>
           </a:p>
         </p:txBody>
       </p:sp>
@@ -9814,7 +9761,7 @@
           <a:p>
             <a:pPr algn="ctr"/>
             <a:r>
-              <a:rPr lang="fr-BE" b="1" dirty="0">
+              <a:rPr lang="en-GB" b="1" noProof="0" dirty="0">
                 <a:solidFill>
                   <a:schemeClr val="bg1"/>
                 </a:solidFill>
@@ -9859,21 +9806,21 @@
           <a:p>
             <a:pPr algn="ctr"/>
             <a:r>
-              <a:rPr lang="fr-BE" dirty="0"/>
+              <a:rPr lang="en-GB" noProof="0" dirty="0"/>
               <a:t>R</a:t>
             </a:r>
           </a:p>
           <a:p>
             <a:pPr algn="ctr"/>
             <a:r>
-              <a:rPr lang="fr-BE" dirty="0"/>
+              <a:rPr lang="en-GB" noProof="0" dirty="0"/>
               <a:t>R-Studio</a:t>
             </a:r>
           </a:p>
           <a:p>
             <a:pPr algn="ctr"/>
             <a:r>
-              <a:rPr lang="fr-BE" dirty="0"/>
+              <a:rPr lang="en-GB" noProof="0" dirty="0"/>
               <a:t>…</a:t>
             </a:r>
           </a:p>
@@ -10019,7 +9966,7 @@
           <a:p>
             <a:pPr algn="ctr"/>
             <a:r>
-              <a:rPr lang="en-US" sz="2000" dirty="0">
+              <a:rPr lang="en-GB" sz="2000" noProof="0" dirty="0">
                 <a:ln w="0"/>
                 <a:solidFill>
                   <a:schemeClr val="accent1"/>
@@ -10034,7 +9981,7 @@
               </a:rPr>
               <a:t>Java</a:t>
             </a:r>
-            <a:endParaRPr lang="en-US" sz="2000" b="1" dirty="0">
+            <a:endParaRPr lang="en-GB" sz="2000" b="1" noProof="0" dirty="0">
               <a:ln w="18000">
                 <a:solidFill>
                   <a:schemeClr val="accent2">
@@ -10086,7 +10033,7 @@
           <a:p>
             <a:pPr algn="ctr"/>
             <a:r>
-              <a:rPr lang="en-US" sz="2000" dirty="0">
+              <a:rPr lang="en-GB" sz="2000" noProof="0" dirty="0">
                 <a:ln w="0"/>
                 <a:solidFill>
                   <a:schemeClr val="accent1"/>
@@ -10101,7 +10048,7 @@
               </a:rPr>
               <a:t>Java</a:t>
             </a:r>
-            <a:endParaRPr lang="en-US" sz="2000" b="1" dirty="0">
+            <a:endParaRPr lang="en-GB" sz="2000" b="1" noProof="0" dirty="0">
               <a:ln w="18000">
                 <a:solidFill>
                   <a:schemeClr val="accent2">
@@ -10153,7 +10100,7 @@
           <a:p>
             <a:pPr algn="ctr"/>
             <a:r>
-              <a:rPr lang="en-US" sz="2000" dirty="0">
+              <a:rPr lang="en-GB" sz="2000" noProof="0" dirty="0">
                 <a:ln w="0"/>
                 <a:solidFill>
                   <a:schemeClr val="accent1"/>
@@ -10168,7 +10115,7 @@
               </a:rPr>
               <a:t>Java</a:t>
             </a:r>
-            <a:endParaRPr lang="en-US" sz="2000" b="1" dirty="0">
+            <a:endParaRPr lang="en-GB" sz="2000" b="1" noProof="0" dirty="0">
               <a:ln w="18000">
                 <a:solidFill>
                   <a:schemeClr val="accent2">
@@ -10220,7 +10167,7 @@
           <a:p>
             <a:pPr algn="ctr"/>
             <a:r>
-              <a:rPr lang="en-US" sz="2000" dirty="0">
+              <a:rPr lang="en-GB" sz="2000" noProof="0" dirty="0">
                 <a:ln w="0"/>
                 <a:effectLst>
                   <a:outerShdw blurRad="38100" dist="19050" dir="2700000" algn="tl" rotWithShape="0">
@@ -10265,7 +10212,7 @@
           <a:p>
             <a:pPr algn="ctr"/>
             <a:r>
-              <a:rPr lang="en-US" sz="2000" dirty="0">
+              <a:rPr lang="en-GB" sz="2000" noProof="0" dirty="0">
                 <a:ln w="0"/>
                 <a:effectLst>
                   <a:outerShdw blurRad="38100" dist="19050" dir="2700000" algn="tl" rotWithShape="0">
@@ -10277,6 +10224,36 @@
               </a:rPr>
               <a:t>R, native</a:t>
             </a:r>
+          </a:p>
+        </p:txBody>
+      </p:sp>
+      <p:sp>
+        <p:nvSpPr>
+          <p:cNvPr id="6" name="Espace réservé du numéro de diapositive 5">
+            <a:extLst>
+              <a:ext uri="{FF2B5EF4-FFF2-40B4-BE49-F238E27FC236}">
+                <a16:creationId xmlns:a16="http://schemas.microsoft.com/office/drawing/2014/main" id="{3E80EC9F-2315-C444-8D6F-B1FEBD63E7D1}"/>
+              </a:ext>
+            </a:extLst>
+          </p:cNvPr>
+          <p:cNvSpPr>
+            <a:spLocks noGrp="1"/>
+          </p:cNvSpPr>
+          <p:nvPr>
+            <p:ph type="sldNum" idx="12"/>
+          </p:nvPr>
+        </p:nvSpPr>
+        <p:spPr/>
+        <p:txBody>
+          <a:bodyPr/>
+          <a:lstStyle/>
+          <a:p>
+            <a:fld id="{00000000-1234-1234-1234-123412341234}" type="slidenum">
+              <a:rPr lang="en-GB" noProof="0" smtClean="0"/>
+              <a:pPr/>
+              <a:t>4</a:t>
+            </a:fld>
+            <a:endParaRPr lang="en-GB" noProof="0" dirty="0"/>
           </a:p>
         </p:txBody>
       </p:sp>
@@ -10915,32 +10892,32 @@
           <a:lstStyle/>
           <a:p>
             <a:r>
-              <a:rPr lang="en-GB" dirty="0"/>
+              <a:rPr lang="en-GB" noProof="0" dirty="0"/>
               <a:t>4. </a:t>
             </a:r>
             <a:r>
-              <a:rPr lang="en-GB" dirty="0" err="1"/>
+              <a:rPr lang="en-GB" noProof="0" dirty="0" err="1"/>
               <a:t>rjdverse</a:t>
             </a:r>
             <a:r>
-              <a:rPr lang="en-GB" dirty="0"/>
+              <a:rPr lang="en-GB" noProof="0" dirty="0"/>
               <a:t>: Overview </a:t>
             </a:r>
             <a:r>
-              <a:rPr lang="en-GB" sz="3200" dirty="0"/>
+              <a:rPr lang="en-GB" sz="3200" noProof="0" dirty="0"/>
               <a:t>(</a:t>
             </a:r>
             <a:r>
-              <a:rPr lang="en-GB" sz="3200" dirty="0">
+              <a:rPr lang="en-GB" sz="3200" noProof="0" dirty="0">
                 <a:hlinkClick r:id="rId2"/>
               </a:rPr>
               <a:t>https://github.com/rjdverse</a:t>
             </a:r>
             <a:r>
-              <a:rPr lang="en-GB" sz="3200" dirty="0"/>
+              <a:rPr lang="en-GB" sz="3200" noProof="0" dirty="0"/>
               <a:t>)</a:t>
             </a:r>
-            <a:endParaRPr lang="en-GB" dirty="0"/>
+            <a:endParaRPr lang="en-GB" noProof="0" dirty="0"/>
           </a:p>
         </p:txBody>
       </p:sp>
@@ -10971,8 +10948,8 @@
           <a:lstStyle/>
           <a:p>
             <a:r>
-              <a:rPr lang="en-GB"/>
-              <a:t>JD+ and R</a:t>
+              <a:rPr lang="en-GB" noProof="0" dirty="0"/>
+              <a:t>RJD+</a:t>
             </a:r>
           </a:p>
         </p:txBody>
@@ -11020,7 +10997,7 @@
           <a:p>
             <a:pPr algn="ctr"/>
             <a:r>
-              <a:rPr lang="en-GB" sz="2400" b="1" dirty="0"/>
+              <a:rPr lang="en-GB" sz="2400" b="1" noProof="0" dirty="0"/>
               <a:t>rjd3toolkit</a:t>
             </a:r>
           </a:p>
@@ -11074,7 +11051,7 @@
           <a:p>
             <a:pPr algn="ctr"/>
             <a:r>
-              <a:rPr lang="en-GB" dirty="0"/>
+              <a:rPr lang="en-GB" noProof="0" dirty="0"/>
               <a:t>rjd3workspace</a:t>
             </a:r>
           </a:p>
@@ -11133,7 +11110,7 @@
           <a:p>
             <a:pPr algn="ctr"/>
             <a:r>
-              <a:rPr lang="en-GB" dirty="0">
+              <a:rPr lang="en-GB" noProof="0" dirty="0">
                 <a:solidFill>
                   <a:schemeClr val="bg1"/>
                 </a:solidFill>
@@ -11189,7 +11166,7 @@
           <a:p>
             <a:pPr algn="ctr"/>
             <a:r>
-              <a:rPr lang="en-GB" dirty="0"/>
+              <a:rPr lang="en-GB" noProof="0" dirty="0"/>
               <a:t>rjd3tramoseats</a:t>
             </a:r>
           </a:p>
@@ -11241,7 +11218,7 @@
           <a:p>
             <a:pPr algn="ctr"/>
             <a:r>
-              <a:rPr lang="en-GB" dirty="0"/>
+              <a:rPr lang="en-GB" noProof="0" dirty="0"/>
               <a:t>rjd3x13</a:t>
             </a:r>
           </a:p>
@@ -11341,7 +11318,7 @@
           <a:p>
             <a:pPr algn="ctr"/>
             <a:r>
-              <a:rPr lang="en-GB" dirty="0">
+              <a:rPr lang="en-GB" noProof="0" dirty="0">
                 <a:solidFill>
                   <a:schemeClr val="tx1"/>
                 </a:solidFill>
@@ -11402,7 +11379,7 @@
           <a:p>
             <a:pPr algn="ctr"/>
             <a:r>
-              <a:rPr lang="en-GB" dirty="0">
+              <a:rPr lang="en-GB" noProof="0" dirty="0">
                 <a:solidFill>
                   <a:schemeClr val="tx1"/>
                 </a:solidFill>
@@ -11463,7 +11440,7 @@
           <a:p>
             <a:pPr algn="ctr"/>
             <a:r>
-              <a:rPr lang="en-GB" dirty="0">
+              <a:rPr lang="en-GB" noProof="0" dirty="0">
                 <a:solidFill>
                   <a:schemeClr val="tx1"/>
                 </a:solidFill>
@@ -11524,7 +11501,7 @@
           <a:p>
             <a:pPr algn="ctr"/>
             <a:r>
-              <a:rPr lang="en-GB" dirty="0">
+              <a:rPr lang="en-GB" noProof="0" dirty="0">
                 <a:solidFill>
                   <a:schemeClr val="tx1"/>
                 </a:solidFill>
@@ -11585,7 +11562,7 @@
           <a:p>
             <a:pPr algn="ctr"/>
             <a:r>
-              <a:rPr lang="en-GB" dirty="0">
+              <a:rPr lang="en-GB" noProof="0" dirty="0">
                 <a:solidFill>
                   <a:schemeClr val="bg1"/>
                 </a:solidFill>
@@ -11646,7 +11623,7 @@
           <a:p>
             <a:pPr algn="ctr"/>
             <a:r>
-              <a:rPr lang="en-GB" dirty="0">
+              <a:rPr lang="en-GB" noProof="0" dirty="0">
                 <a:solidFill>
                   <a:schemeClr val="tx1"/>
                 </a:solidFill>
@@ -11785,7 +11762,7 @@
           </a:bodyPr>
           <a:lstStyle/>
           <a:p>
-            <a:endParaRPr lang="en-GB" dirty="0"/>
+            <a:endParaRPr lang="en-GB" noProof="0" dirty="0"/>
           </a:p>
         </p:txBody>
       </p:sp>
@@ -11818,7 +11795,7 @@
           <a:lstStyle/>
           <a:p>
             <a:r>
-              <a:rPr lang="en-GB" dirty="0"/>
+              <a:rPr lang="en-GB" noProof="0" dirty="0"/>
               <a:t>Design similar to the Java libraries !</a:t>
             </a:r>
           </a:p>
@@ -11875,7 +11852,7 @@
           <a:p>
             <a:pPr algn="ctr"/>
             <a:r>
-              <a:rPr lang="en-GB" dirty="0"/>
+              <a:rPr lang="en-GB" noProof="0" dirty="0"/>
               <a:t>rjd3providers</a:t>
             </a:r>
           </a:p>
@@ -12286,7 +12263,7 @@
           <a:p>
             <a:pPr algn="ctr"/>
             <a:r>
-              <a:rPr lang="en-GB" dirty="0">
+              <a:rPr lang="en-GB" noProof="0" dirty="0">
                 <a:solidFill>
                   <a:schemeClr val="bg1"/>
                 </a:solidFill>
@@ -12433,7 +12410,7 @@
           <a:p>
             <a:pPr algn="ctr"/>
             <a:r>
-              <a:rPr lang="en-GB" sz="1600" b="1" dirty="0"/>
+              <a:rPr lang="en-GB" sz="1600" b="1" noProof="0" dirty="0"/>
               <a:t>rjd3jars</a:t>
             </a:r>
           </a:p>
@@ -12488,10 +12465,10 @@
           <a:p>
             <a:pPr algn="ctr"/>
             <a:r>
-              <a:rPr lang="en-GB" sz="1600" b="1" dirty="0" err="1"/>
+              <a:rPr lang="en-GB" sz="1600" b="1" noProof="0" dirty="0" err="1"/>
               <a:t>rjdxjars</a:t>
             </a:r>
-            <a:endParaRPr lang="en-GB" sz="1600" b="1" dirty="0"/>
+            <a:endParaRPr lang="en-GB" sz="1600" b="1" noProof="0" dirty="0"/>
           </a:p>
         </p:txBody>
       </p:sp>
@@ -12673,6 +12650,36 @@
           </a:fontRef>
         </p:style>
       </p:cxnSp>
+      <p:sp>
+        <p:nvSpPr>
+          <p:cNvPr id="5" name="Espace réservé du numéro de diapositive 4">
+            <a:extLst>
+              <a:ext uri="{FF2B5EF4-FFF2-40B4-BE49-F238E27FC236}">
+                <a16:creationId xmlns:a16="http://schemas.microsoft.com/office/drawing/2014/main" id="{7CF4771E-07CC-2689-FF39-A6261DB5E297}"/>
+              </a:ext>
+            </a:extLst>
+          </p:cNvPr>
+          <p:cNvSpPr>
+            <a:spLocks noGrp="1"/>
+          </p:cNvSpPr>
+          <p:nvPr>
+            <p:ph type="sldNum" idx="12"/>
+          </p:nvPr>
+        </p:nvSpPr>
+        <p:spPr/>
+        <p:txBody>
+          <a:bodyPr/>
+          <a:lstStyle/>
+          <a:p>
+            <a:fld id="{00000000-1234-1234-1234-123412341234}" type="slidenum">
+              <a:rPr lang="en-GB" noProof="0" smtClean="0"/>
+              <a:pPr/>
+              <a:t>5</a:t>
+            </a:fld>
+            <a:endParaRPr lang="en-GB" noProof="0" dirty="0"/>
+          </a:p>
+        </p:txBody>
+      </p:sp>
     </p:spTree>
     <p:extLst>
       <p:ext uri="{BB962C8B-B14F-4D97-AF65-F5344CB8AC3E}">
@@ -12750,7 +12757,7 @@
           <a:lstStyle/>
           <a:p>
             <a:pPr algn="ctr"/>
-            <a:endParaRPr lang="en-GB"/>
+            <a:endParaRPr lang="en-GB" noProof="0" dirty="0"/>
           </a:p>
         </p:txBody>
       </p:sp>
@@ -12776,22 +12783,22 @@
           <a:lstStyle/>
           <a:p>
             <a:r>
-              <a:rPr lang="en-GB" dirty="0"/>
+              <a:rPr lang="en-GB" noProof="0" dirty="0"/>
               <a:t>4. </a:t>
             </a:r>
             <a:r>
-              <a:rPr lang="en-GB" dirty="0" err="1"/>
+              <a:rPr lang="en-GB" noProof="0" dirty="0" err="1"/>
               <a:t>rjdverse</a:t>
             </a:r>
             <a:r>
-              <a:rPr lang="en-GB" dirty="0"/>
+              <a:rPr lang="en-GB" noProof="0" dirty="0"/>
               <a:t>: Overview </a:t>
             </a:r>
             <a:r>
-              <a:rPr lang="en-GB" sz="3200" dirty="0"/>
+              <a:rPr lang="en-GB" sz="3200" noProof="0" dirty="0"/>
               <a:t>(Java libraries)</a:t>
             </a:r>
-            <a:endParaRPr lang="en-GB" dirty="0"/>
+            <a:endParaRPr lang="en-GB" noProof="0" dirty="0"/>
           </a:p>
         </p:txBody>
       </p:sp>
@@ -12822,8 +12829,8 @@
           <a:lstStyle/>
           <a:p>
             <a:r>
-              <a:rPr lang="en-GB"/>
-              <a:t>JD+ and R</a:t>
+              <a:rPr lang="en-GB" noProof="0" dirty="0"/>
+              <a:t>RJD+</a:t>
             </a:r>
           </a:p>
         </p:txBody>
@@ -12871,7 +12878,7 @@
           <a:p>
             <a:pPr algn="ctr"/>
             <a:r>
-              <a:rPr lang="en-GB" sz="2400" b="1" dirty="0"/>
+              <a:rPr lang="en-GB" sz="2400" b="1" noProof="0" dirty="0"/>
               <a:t>rjd3toolkit</a:t>
             </a:r>
           </a:p>
@@ -12925,7 +12932,7 @@
           <a:p>
             <a:pPr algn="ctr"/>
             <a:r>
-              <a:rPr lang="en-GB" dirty="0"/>
+              <a:rPr lang="en-GB" noProof="0" dirty="0"/>
               <a:t>rjd3workspace</a:t>
             </a:r>
           </a:p>
@@ -12984,7 +12991,7 @@
           <a:p>
             <a:pPr algn="ctr"/>
             <a:r>
-              <a:rPr lang="en-GB" dirty="0">
+              <a:rPr lang="en-GB" noProof="0" dirty="0">
                 <a:solidFill>
                   <a:schemeClr val="bg1"/>
                 </a:solidFill>
@@ -13040,7 +13047,7 @@
           <a:p>
             <a:pPr algn="ctr"/>
             <a:r>
-              <a:rPr lang="en-GB" dirty="0"/>
+              <a:rPr lang="en-GB" noProof="0" dirty="0"/>
               <a:t>rjd3tramoseats</a:t>
             </a:r>
           </a:p>
@@ -13092,7 +13099,7 @@
           <a:p>
             <a:pPr algn="ctr"/>
             <a:r>
-              <a:rPr lang="en-GB" dirty="0"/>
+              <a:rPr lang="en-GB" noProof="0" dirty="0"/>
               <a:t>rjd3x13</a:t>
             </a:r>
           </a:p>
@@ -13192,7 +13199,7 @@
           <a:p>
             <a:pPr algn="ctr"/>
             <a:r>
-              <a:rPr lang="en-GB" dirty="0">
+              <a:rPr lang="en-GB" noProof="0" dirty="0">
                 <a:solidFill>
                   <a:schemeClr val="tx1"/>
                 </a:solidFill>
@@ -13253,7 +13260,7 @@
           <a:p>
             <a:pPr algn="ctr"/>
             <a:r>
-              <a:rPr lang="en-GB" dirty="0">
+              <a:rPr lang="en-GB" noProof="0" dirty="0">
                 <a:solidFill>
                   <a:schemeClr val="tx1"/>
                 </a:solidFill>
@@ -13314,7 +13321,7 @@
           <a:p>
             <a:pPr algn="ctr"/>
             <a:r>
-              <a:rPr lang="en-GB" dirty="0">
+              <a:rPr lang="en-GB" noProof="0" dirty="0">
                 <a:solidFill>
                   <a:schemeClr val="tx1"/>
                 </a:solidFill>
@@ -13375,7 +13382,7 @@
           <a:p>
             <a:pPr algn="ctr"/>
             <a:r>
-              <a:rPr lang="en-GB" dirty="0">
+              <a:rPr lang="en-GB" noProof="0" dirty="0">
                 <a:solidFill>
                   <a:schemeClr val="tx1"/>
                 </a:solidFill>
@@ -13436,7 +13443,7 @@
           <a:p>
             <a:pPr algn="ctr"/>
             <a:r>
-              <a:rPr lang="en-GB" dirty="0">
+              <a:rPr lang="en-GB" noProof="0" dirty="0">
                 <a:solidFill>
                   <a:schemeClr val="bg1"/>
                 </a:solidFill>
@@ -13497,7 +13504,7 @@
           <a:p>
             <a:pPr algn="ctr"/>
             <a:r>
-              <a:rPr lang="en-GB" dirty="0">
+              <a:rPr lang="en-GB" noProof="0" dirty="0">
                 <a:solidFill>
                   <a:schemeClr val="tx1"/>
                 </a:solidFill>
@@ -13624,7 +13631,7 @@
           <a:lstStyle/>
           <a:p>
             <a:r>
-              <a:rPr lang="en-GB" dirty="0"/>
+              <a:rPr lang="en-GB" noProof="0" dirty="0"/>
               <a:t>Design similar to the Java libraries !</a:t>
             </a:r>
           </a:p>
@@ -13681,7 +13688,7 @@
           <a:p>
             <a:pPr algn="ctr"/>
             <a:r>
-              <a:rPr lang="en-GB" dirty="0"/>
+              <a:rPr lang="en-GB" noProof="0" dirty="0"/>
               <a:t>rjd3providers</a:t>
             </a:r>
           </a:p>
@@ -14092,7 +14099,7 @@
           <a:p>
             <a:pPr algn="ctr"/>
             <a:r>
-              <a:rPr lang="en-GB" dirty="0">
+              <a:rPr lang="en-GB" noProof="0" dirty="0">
                 <a:solidFill>
                   <a:schemeClr val="bg1"/>
                 </a:solidFill>
@@ -14239,7 +14246,7 @@
           <a:p>
             <a:pPr algn="ctr"/>
             <a:r>
-              <a:rPr lang="en-GB" sz="1600" b="1" dirty="0"/>
+              <a:rPr lang="en-GB" sz="1600" b="1" noProof="0" dirty="0"/>
               <a:t>rjd3jars</a:t>
             </a:r>
           </a:p>
@@ -14294,10 +14301,10 @@
           <a:p>
             <a:pPr algn="ctr"/>
             <a:r>
-              <a:rPr lang="en-GB" sz="1600" b="1" dirty="0" err="1"/>
+              <a:rPr lang="en-GB" sz="1600" b="1" noProof="0" dirty="0" err="1"/>
               <a:t>rjdxjars</a:t>
             </a:r>
-            <a:endParaRPr lang="en-GB" sz="1600" b="1" dirty="0"/>
+            <a:endParaRPr lang="en-GB" sz="1600" b="1" noProof="0" dirty="0"/>
           </a:p>
         </p:txBody>
       </p:sp>
@@ -14479,6 +14486,36 @@
           </a:fontRef>
         </p:style>
       </p:cxnSp>
+      <p:sp>
+        <p:nvSpPr>
+          <p:cNvPr id="3" name="Espace réservé du numéro de diapositive 2">
+            <a:extLst>
+              <a:ext uri="{FF2B5EF4-FFF2-40B4-BE49-F238E27FC236}">
+                <a16:creationId xmlns:a16="http://schemas.microsoft.com/office/drawing/2014/main" id="{6AA25279-2264-DA6A-C51D-201FE5CED96A}"/>
+              </a:ext>
+            </a:extLst>
+          </p:cNvPr>
+          <p:cNvSpPr>
+            <a:spLocks noGrp="1"/>
+          </p:cNvSpPr>
+          <p:nvPr>
+            <p:ph type="sldNum" idx="12"/>
+          </p:nvPr>
+        </p:nvSpPr>
+        <p:spPr/>
+        <p:txBody>
+          <a:bodyPr/>
+          <a:lstStyle/>
+          <a:p>
+            <a:fld id="{00000000-1234-1234-1234-123412341234}" type="slidenum">
+              <a:rPr lang="en-GB" noProof="0" smtClean="0"/>
+              <a:pPr/>
+              <a:t>6</a:t>
+            </a:fld>
+            <a:endParaRPr lang="en-GB" noProof="0" dirty="0"/>
+          </a:p>
+        </p:txBody>
+      </p:sp>
     </p:spTree>
     <p:extLst>
       <p:ext uri="{BB962C8B-B14F-4D97-AF65-F5344CB8AC3E}">
@@ -14556,7 +14593,7 @@
           <a:lstStyle/>
           <a:p>
             <a:pPr algn="ctr"/>
-            <a:endParaRPr lang="en-GB"/>
+            <a:endParaRPr lang="en-GB" noProof="0" dirty="0"/>
           </a:p>
         </p:txBody>
       </p:sp>
@@ -14582,22 +14619,22 @@
           <a:lstStyle/>
           <a:p>
             <a:r>
-              <a:rPr lang="en-GB" dirty="0"/>
+              <a:rPr lang="en-GB" noProof="0" dirty="0"/>
               <a:t>4. </a:t>
             </a:r>
             <a:r>
-              <a:rPr lang="en-GB" dirty="0" err="1"/>
+              <a:rPr lang="en-GB" noProof="0" dirty="0" err="1"/>
               <a:t>rjdverse</a:t>
             </a:r>
             <a:r>
-              <a:rPr lang="en-GB" dirty="0"/>
+              <a:rPr lang="en-GB" noProof="0" dirty="0"/>
               <a:t>: Overview </a:t>
             </a:r>
             <a:r>
-              <a:rPr lang="en-GB" sz="3200" dirty="0"/>
+              <a:rPr lang="en-GB" sz="3200" noProof="0" dirty="0"/>
               <a:t>(main packages for SA)</a:t>
             </a:r>
-            <a:endParaRPr lang="en-GB" dirty="0"/>
+            <a:endParaRPr lang="en-GB" noProof="0" dirty="0"/>
           </a:p>
         </p:txBody>
       </p:sp>
@@ -14628,8 +14665,8 @@
           <a:lstStyle/>
           <a:p>
             <a:r>
-              <a:rPr lang="en-GB"/>
-              <a:t>JD+ and R</a:t>
+              <a:rPr lang="en-GB" noProof="0" dirty="0"/>
+              <a:t>RJD+</a:t>
             </a:r>
           </a:p>
         </p:txBody>
@@ -14677,7 +14714,7 @@
           <a:p>
             <a:pPr algn="ctr"/>
             <a:r>
-              <a:rPr lang="en-GB" sz="2400" b="1" dirty="0"/>
+              <a:rPr lang="en-GB" sz="2400" b="1" noProof="0" dirty="0"/>
               <a:t>rjd3toolkit</a:t>
             </a:r>
           </a:p>
@@ -14731,7 +14768,7 @@
           <a:p>
             <a:pPr algn="ctr"/>
             <a:r>
-              <a:rPr lang="en-GB" dirty="0"/>
+              <a:rPr lang="en-GB" noProof="0" dirty="0"/>
               <a:t>rjd3workspace</a:t>
             </a:r>
           </a:p>
@@ -14790,7 +14827,7 @@
           <a:p>
             <a:pPr algn="ctr"/>
             <a:r>
-              <a:rPr lang="en-GB" dirty="0">
+              <a:rPr lang="en-GB" noProof="0" dirty="0">
                 <a:solidFill>
                   <a:schemeClr val="bg1"/>
                 </a:solidFill>
@@ -14846,7 +14883,7 @@
           <a:p>
             <a:pPr algn="ctr"/>
             <a:r>
-              <a:rPr lang="en-GB" dirty="0"/>
+              <a:rPr lang="en-GB" noProof="0" dirty="0"/>
               <a:t>rjd3tramoseats</a:t>
             </a:r>
           </a:p>
@@ -14898,7 +14935,7 @@
           <a:p>
             <a:pPr algn="ctr"/>
             <a:r>
-              <a:rPr lang="en-GB" dirty="0"/>
+              <a:rPr lang="en-GB" noProof="0" dirty="0"/>
               <a:t>rjd3x13</a:t>
             </a:r>
           </a:p>
@@ -14998,7 +15035,7 @@
           <a:p>
             <a:pPr algn="ctr"/>
             <a:r>
-              <a:rPr lang="en-GB" dirty="0">
+              <a:rPr lang="en-GB" noProof="0" dirty="0">
                 <a:solidFill>
                   <a:schemeClr val="tx1"/>
                 </a:solidFill>
@@ -15059,7 +15096,7 @@
           <a:p>
             <a:pPr algn="ctr"/>
             <a:r>
-              <a:rPr lang="en-GB" dirty="0">
+              <a:rPr lang="en-GB" noProof="0" dirty="0">
                 <a:solidFill>
                   <a:schemeClr val="tx1"/>
                 </a:solidFill>
@@ -15120,7 +15157,7 @@
           <a:p>
             <a:pPr algn="ctr"/>
             <a:r>
-              <a:rPr lang="en-GB" dirty="0">
+              <a:rPr lang="en-GB" noProof="0" dirty="0">
                 <a:solidFill>
                   <a:schemeClr val="tx1"/>
                 </a:solidFill>
@@ -15181,7 +15218,7 @@
           <a:p>
             <a:pPr algn="ctr"/>
             <a:r>
-              <a:rPr lang="en-GB" dirty="0">
+              <a:rPr lang="en-GB" noProof="0" dirty="0">
                 <a:solidFill>
                   <a:schemeClr val="tx1"/>
                 </a:solidFill>
@@ -15242,7 +15279,7 @@
           <a:p>
             <a:pPr algn="ctr"/>
             <a:r>
-              <a:rPr lang="en-GB" dirty="0">
+              <a:rPr lang="en-GB" noProof="0" dirty="0">
                 <a:solidFill>
                   <a:schemeClr val="bg1"/>
                 </a:solidFill>
@@ -15303,7 +15340,7 @@
           <a:p>
             <a:pPr algn="ctr"/>
             <a:r>
-              <a:rPr lang="en-GB" dirty="0">
+              <a:rPr lang="en-GB" noProof="0" dirty="0">
                 <a:solidFill>
                   <a:schemeClr val="tx1"/>
                 </a:solidFill>
@@ -15430,7 +15467,7 @@
           <a:lstStyle/>
           <a:p>
             <a:r>
-              <a:rPr lang="en-GB" dirty="0"/>
+              <a:rPr lang="en-GB" noProof="0" dirty="0"/>
               <a:t>Design similar to the Java libraries !</a:t>
             </a:r>
           </a:p>
@@ -15487,7 +15524,7 @@
           <a:p>
             <a:pPr algn="ctr"/>
             <a:r>
-              <a:rPr lang="en-GB" dirty="0"/>
+              <a:rPr lang="en-GB" noProof="0" dirty="0"/>
               <a:t>rjd3providers</a:t>
             </a:r>
           </a:p>
@@ -15898,7 +15935,7 @@
           <a:p>
             <a:pPr algn="ctr"/>
             <a:r>
-              <a:rPr lang="en-GB" dirty="0">
+              <a:rPr lang="en-GB" noProof="0" dirty="0">
                 <a:solidFill>
                   <a:schemeClr val="bg1"/>
                 </a:solidFill>
@@ -16045,7 +16082,7 @@
           <a:p>
             <a:pPr algn="ctr"/>
             <a:r>
-              <a:rPr lang="en-GB" sz="1600" b="1" dirty="0"/>
+              <a:rPr lang="en-GB" sz="1600" b="1" noProof="0" dirty="0"/>
               <a:t>rjd3jars</a:t>
             </a:r>
           </a:p>
@@ -16100,10 +16137,10 @@
           <a:p>
             <a:pPr algn="ctr"/>
             <a:r>
-              <a:rPr lang="en-GB" sz="1600" b="1" dirty="0" err="1"/>
+              <a:rPr lang="en-GB" sz="1600" b="1" noProof="0" dirty="0" err="1"/>
               <a:t>rjdxjars</a:t>
             </a:r>
-            <a:endParaRPr lang="en-GB" sz="1600" b="1" dirty="0"/>
+            <a:endParaRPr lang="en-GB" sz="1600" b="1" noProof="0" dirty="0"/>
           </a:p>
         </p:txBody>
       </p:sp>
@@ -16285,6 +16322,36 @@
           </a:fontRef>
         </p:style>
       </p:cxnSp>
+      <p:sp>
+        <p:nvSpPr>
+          <p:cNvPr id="3" name="Espace réservé du numéro de diapositive 2">
+            <a:extLst>
+              <a:ext uri="{FF2B5EF4-FFF2-40B4-BE49-F238E27FC236}">
+                <a16:creationId xmlns:a16="http://schemas.microsoft.com/office/drawing/2014/main" id="{19384299-0673-6D11-E4DA-7D97FBCAB859}"/>
+              </a:ext>
+            </a:extLst>
+          </p:cNvPr>
+          <p:cNvSpPr>
+            <a:spLocks noGrp="1"/>
+          </p:cNvSpPr>
+          <p:nvPr>
+            <p:ph type="sldNum" idx="12"/>
+          </p:nvPr>
+        </p:nvSpPr>
+        <p:spPr/>
+        <p:txBody>
+          <a:bodyPr/>
+          <a:lstStyle/>
+          <a:p>
+            <a:fld id="{00000000-1234-1234-1234-123412341234}" type="slidenum">
+              <a:rPr lang="en-GB" noProof="0" smtClean="0"/>
+              <a:pPr/>
+              <a:t>7</a:t>
+            </a:fld>
+            <a:endParaRPr lang="en-GB" noProof="0" dirty="0"/>
+          </a:p>
+        </p:txBody>
+      </p:sp>
     </p:spTree>
     <p:extLst>
       <p:ext uri="{BB962C8B-B14F-4D97-AF65-F5344CB8AC3E}">
@@ -16358,7 +16425,7 @@
           <a:p>
             <a:pPr algn="ctr"/>
             <a:r>
-              <a:rPr lang="en-GB" dirty="0"/>
+              <a:rPr lang="en-GB" noProof="0" dirty="0"/>
               <a:t>rjd3tramoseats</a:t>
             </a:r>
           </a:p>
@@ -16407,10 +16474,10 @@
           <a:p>
             <a:pPr algn="ctr"/>
             <a:r>
-              <a:rPr lang="en-GB" dirty="0" err="1"/>
+              <a:rPr lang="en-GB" noProof="0" dirty="0" err="1"/>
               <a:t>inst</a:t>
             </a:r>
-            <a:endParaRPr lang="en-GB" dirty="0"/>
+            <a:endParaRPr lang="en-GB" noProof="0" dirty="0"/>
           </a:p>
         </p:txBody>
       </p:sp>
@@ -16457,7 +16524,7 @@
           <a:p>
             <a:pPr algn="ctr"/>
             <a:r>
-              <a:rPr lang="en-GB" dirty="0"/>
+              <a:rPr lang="en-GB" noProof="0" dirty="0"/>
               <a:t>Proto files</a:t>
             </a:r>
           </a:p>
@@ -16639,7 +16706,7 @@
           <a:p>
             <a:pPr algn="ctr"/>
             <a:r>
-              <a:rPr lang="en-GB" dirty="0"/>
+              <a:rPr lang="en-GB" noProof="0" dirty="0"/>
               <a:t>Java package</a:t>
             </a:r>
           </a:p>
@@ -16688,7 +16755,7 @@
           <a:p>
             <a:pPr algn="ctr"/>
             <a:r>
-              <a:rPr lang="en-GB" dirty="0"/>
+              <a:rPr lang="en-GB" noProof="0" dirty="0"/>
               <a:t>R files</a:t>
             </a:r>
           </a:p>
@@ -16868,9 +16935,38 @@
           <a:lstStyle/>
           <a:p>
             <a:r>
-              <a:rPr lang="en-GB"/>
-              <a:t>JD+ and R</a:t>
-            </a:r>
+              <a:rPr lang="en-GB" noProof="0" dirty="0"/>
+              <a:t>RJD+</a:t>
+            </a:r>
+          </a:p>
+        </p:txBody>
+      </p:sp>
+      <p:sp>
+        <p:nvSpPr>
+          <p:cNvPr id="2" name="Espace réservé du numéro de diapositive 1">
+            <a:extLst>
+              <a:ext uri="{FF2B5EF4-FFF2-40B4-BE49-F238E27FC236}">
+                <a16:creationId xmlns:a16="http://schemas.microsoft.com/office/drawing/2014/main" id="{7C13CFE5-03ED-4A7B-23E1-222842E07723}"/>
+              </a:ext>
+            </a:extLst>
+          </p:cNvPr>
+          <p:cNvSpPr>
+            <a:spLocks noGrp="1"/>
+          </p:cNvSpPr>
+          <p:nvPr>
+            <p:ph type="sldNum" sz="quarter" idx="12"/>
+          </p:nvPr>
+        </p:nvSpPr>
+        <p:spPr/>
+        <p:txBody>
+          <a:bodyPr/>
+          <a:lstStyle/>
+          <a:p>
+            <a:fld id="{FD8FE792-0364-4011-8053-26F035783A3A}" type="slidenum">
+              <a:rPr lang="en-GB" noProof="0" smtClean="0"/>
+              <a:t>8</a:t>
+            </a:fld>
+            <a:endParaRPr lang="en-GB" noProof="0" dirty="0"/>
           </a:p>
         </p:txBody>
       </p:sp>
@@ -16926,7 +17022,7 @@
           <a:lstStyle/>
           <a:p>
             <a:r>
-              <a:rPr lang="fr-BE" dirty="0"/>
+              <a:rPr lang="en-GB" noProof="0" dirty="0"/>
               <a:t>5. Objectives of R packages</a:t>
             </a:r>
           </a:p>
@@ -16954,120 +17050,44 @@
           <a:lstStyle/>
           <a:p>
             <a:r>
-              <a:rPr lang="fr-BE" sz="2800" dirty="0"/>
-              <a:t>High-</a:t>
-            </a:r>
-            <a:r>
-              <a:rPr lang="fr-BE" sz="2800" dirty="0" err="1"/>
-              <a:t>level</a:t>
-            </a:r>
-            <a:r>
-              <a:rPr lang="fr-BE" sz="2800" dirty="0"/>
-              <a:t> </a:t>
-            </a:r>
-            <a:r>
-              <a:rPr lang="fr-BE" sz="2800" dirty="0" err="1"/>
-              <a:t>functions</a:t>
-            </a:r>
-            <a:r>
-              <a:rPr lang="fr-BE" sz="2800" dirty="0"/>
-              <a:t> </a:t>
-            </a:r>
-            <a:r>
-              <a:rPr lang="fr-BE" sz="2800" dirty="0" err="1"/>
-              <a:t>with</a:t>
-            </a:r>
-            <a:r>
-              <a:rPr lang="fr-BE" sz="2800" dirty="0"/>
-              <a:t> </a:t>
-            </a:r>
-            <a:r>
-              <a:rPr lang="fr-BE" sz="2800" dirty="0" err="1"/>
-              <a:t>most</a:t>
-            </a:r>
-            <a:r>
-              <a:rPr lang="fr-BE" sz="2800" dirty="0"/>
-              <a:t> </a:t>
-            </a:r>
-            <a:r>
-              <a:rPr lang="fr-BE" sz="2800" dirty="0" err="1"/>
-              <a:t>common</a:t>
-            </a:r>
-            <a:r>
-              <a:rPr lang="fr-BE" sz="2800" dirty="0"/>
-              <a:t> </a:t>
-            </a:r>
-            <a:r>
-              <a:rPr lang="fr-BE" sz="2800" dirty="0" err="1"/>
-              <a:t>results</a:t>
-            </a:r>
-            <a:endParaRPr lang="fr-BE" sz="2800" dirty="0"/>
-          </a:p>
-          <a:p>
-            <a:r>
-              <a:rPr lang="fr-BE" sz="2800" dirty="0" err="1"/>
-              <a:t>Many</a:t>
-            </a:r>
-            <a:r>
-              <a:rPr lang="fr-BE" sz="2800" dirty="0"/>
-              <a:t> </a:t>
-            </a:r>
-            <a:r>
-              <a:rPr lang="fr-BE" sz="2800" dirty="0" err="1"/>
-              <a:t>low-level</a:t>
-            </a:r>
-            <a:r>
-              <a:rPr lang="fr-BE" sz="2800" dirty="0"/>
-              <a:t> </a:t>
-            </a:r>
-            <a:r>
-              <a:rPr lang="fr-BE" sz="2800" dirty="0" err="1"/>
-              <a:t>functions</a:t>
-            </a:r>
-            <a:endParaRPr lang="fr-BE" sz="2800" dirty="0"/>
+              <a:rPr lang="en-GB" sz="2800" noProof="0" dirty="0"/>
+              <a:t>High-level functions with most common results</a:t>
+            </a:r>
+          </a:p>
+          <a:p>
+            <a:r>
+              <a:rPr lang="en-GB" sz="2800" noProof="0" dirty="0"/>
+              <a:t>Many low-level functions</a:t>
+            </a:r>
           </a:p>
           <a:p>
             <a:pPr lvl="1"/>
             <a:r>
-              <a:rPr lang="fr-BE" sz="2400" dirty="0"/>
-              <a:t>Advanced </a:t>
-            </a:r>
-            <a:r>
-              <a:rPr lang="fr-BE" sz="2400" dirty="0" err="1"/>
-              <a:t>users</a:t>
-            </a:r>
-            <a:endParaRPr lang="fr-BE" sz="2400" dirty="0"/>
+              <a:rPr lang="en-GB" sz="2400" noProof="0" dirty="0"/>
+              <a:t>Advanced users</a:t>
+            </a:r>
           </a:p>
           <a:p>
             <a:pPr lvl="1"/>
             <a:r>
-              <a:rPr lang="fr-BE" sz="2400" dirty="0" err="1"/>
+              <a:rPr lang="en-GB" sz="2400" noProof="0" dirty="0"/>
               <a:t>Research</a:t>
             </a:r>
-            <a:endParaRPr lang="fr-BE" sz="2400" dirty="0"/>
           </a:p>
           <a:p>
             <a:pPr lvl="1"/>
             <a:r>
-              <a:rPr lang="fr-BE" sz="2400" dirty="0"/>
+              <a:rPr lang="en-GB" sz="2400" noProof="0" dirty="0"/>
               <a:t>Training</a:t>
             </a:r>
           </a:p>
           <a:p>
             <a:pPr lvl="1"/>
             <a:r>
-              <a:rPr lang="fr-BE" sz="2400" dirty="0" err="1"/>
-              <a:t>Additional</a:t>
-            </a:r>
-            <a:r>
-              <a:rPr lang="fr-BE" sz="2400" dirty="0"/>
-              <a:t> </a:t>
-            </a:r>
-            <a:r>
-              <a:rPr lang="fr-BE" sz="2400" dirty="0" err="1"/>
-              <a:t>tools</a:t>
-            </a:r>
-            <a:endParaRPr lang="fr-BE" dirty="0"/>
+              <a:rPr lang="en-GB" sz="2400" noProof="0" dirty="0"/>
+              <a:t>Additional tools</a:t>
+            </a:r>
+            <a:endParaRPr lang="en-GB" noProof="0" dirty="0"/>
           </a:p>
         </p:txBody>
       </p:sp>
@@ -17098,9 +17118,39 @@
           <a:lstStyle/>
           <a:p>
             <a:r>
-              <a:rPr lang="en-GB"/>
-              <a:t>JD+ and R</a:t>
-            </a:r>
+              <a:rPr lang="en-GB" noProof="0" dirty="0"/>
+              <a:t>RJD+</a:t>
+            </a:r>
+          </a:p>
+        </p:txBody>
+      </p:sp>
+      <p:sp>
+        <p:nvSpPr>
+          <p:cNvPr id="4" name="Espace réservé du numéro de diapositive 3">
+            <a:extLst>
+              <a:ext uri="{FF2B5EF4-FFF2-40B4-BE49-F238E27FC236}">
+                <a16:creationId xmlns:a16="http://schemas.microsoft.com/office/drawing/2014/main" id="{BFAB4255-399D-87BE-1AF4-3E8CCEAC0F53}"/>
+              </a:ext>
+            </a:extLst>
+          </p:cNvPr>
+          <p:cNvSpPr>
+            <a:spLocks noGrp="1"/>
+          </p:cNvSpPr>
+          <p:nvPr>
+            <p:ph type="sldNum" idx="12"/>
+          </p:nvPr>
+        </p:nvSpPr>
+        <p:spPr/>
+        <p:txBody>
+          <a:bodyPr/>
+          <a:lstStyle/>
+          <a:p>
+            <a:fld id="{00000000-1234-1234-1234-123412341234}" type="slidenum">
+              <a:rPr lang="en-GB" noProof="0" smtClean="0"/>
+              <a:pPr/>
+              <a:t>9</a:t>
+            </a:fld>
+            <a:endParaRPr lang="en-GB" noProof="0" dirty="0"/>
           </a:p>
         </p:txBody>
       </p:sp>
@@ -17989,17 +18039,6 @@
 </file>
 
 <file path=customXml/item1.xml><?xml version="1.0" encoding="utf-8"?>
-<p:properties xmlns:p="http://schemas.microsoft.com/office/2006/metadata/properties" xmlns:xsi="http://www.w3.org/2001/XMLSchema-instance" xmlns:pc="http://schemas.microsoft.com/office/infopath/2007/PartnerControls">
-  <documentManagement>
-    <lcf76f155ced4ddcb4097134ff3c332f xmlns="0e422b70-e85d-4377-8ee0-b6227433d381">
-      <Terms xmlns="http://schemas.microsoft.com/office/infopath/2007/PartnerControls"/>
-    </lcf76f155ced4ddcb4097134ff3c332f>
-    <TaxCatchAll xmlns="199f642e-5af9-486c-ac06-f366742ef41a"/>
-  </documentManagement>
-</p:properties>
-</file>
-
-<file path=customXml/item2.xml><?xml version="1.0" encoding="utf-8"?>
 <ct:contentTypeSchema xmlns:ct="http://schemas.microsoft.com/office/2006/metadata/contentType" xmlns:ma="http://schemas.microsoft.com/office/2006/metadata/properties/metaAttributes" ct:_="" ma:_="" ma:contentTypeName="Document" ma:contentTypeID="0x010100E6AA5C57F8EADE4E9CD6BB064C0C3195" ma:contentTypeVersion="16" ma:contentTypeDescription="Create a new document." ma:contentTypeScope="" ma:versionID="bb51c19a58f458ddcddd050a07659236">
   <xsd:schema xmlns:xsd="http://www.w3.org/2001/XMLSchema" xmlns:xs="http://www.w3.org/2001/XMLSchema" xmlns:p="http://schemas.microsoft.com/office/2006/metadata/properties" xmlns:ns2="0e422b70-e85d-4377-8ee0-b6227433d381" xmlns:ns3="199f642e-5af9-486c-ac06-f366742ef41a" targetNamespace="http://schemas.microsoft.com/office/2006/metadata/properties" ma:root="true" ma:fieldsID="0ee7a3bac0352a48a43420936abd968a" ns2:_="" ns3:_="">
     <xsd:import namespace="0e422b70-e85d-4377-8ee0-b6227433d381"/>
@@ -18240,6 +18279,17 @@
 </ct:contentTypeSchema>
 </file>
 
+<file path=customXml/item2.xml><?xml version="1.0" encoding="utf-8"?>
+<p:properties xmlns:p="http://schemas.microsoft.com/office/2006/metadata/properties" xmlns:xsi="http://www.w3.org/2001/XMLSchema-instance" xmlns:pc="http://schemas.microsoft.com/office/infopath/2007/PartnerControls">
+  <documentManagement>
+    <lcf76f155ced4ddcb4097134ff3c332f xmlns="0e422b70-e85d-4377-8ee0-b6227433d381">
+      <Terms xmlns="http://schemas.microsoft.com/office/infopath/2007/PartnerControls"/>
+    </lcf76f155ced4ddcb4097134ff3c332f>
+    <TaxCatchAll xmlns="199f642e-5af9-486c-ac06-f366742ef41a"/>
+  </documentManagement>
+</p:properties>
+</file>
+
 <file path=customXml/item3.xml><?xml version="1.0" encoding="utf-8"?>
 <?mso-contentType ?>
 <FormTemplates xmlns="http://schemas.microsoft.com/sharepoint/v3/contenttype/forms">
@@ -18250,23 +18300,6 @@
 </file>
 
 <file path=customXml/itemProps1.xml><?xml version="1.0" encoding="utf-8"?>
-<ds:datastoreItem xmlns:ds="http://schemas.openxmlformats.org/officeDocument/2006/customXml" ds:itemID="{2D6C293B-B8B4-4284-A17E-9F9E4C32B25A}">
-  <ds:schemaRefs>
-    <ds:schemaRef ds:uri="http://schemas.microsoft.com/office/2006/documentManagement/types"/>
-    <ds:schemaRef ds:uri="http://purl.org/dc/elements/1.1/"/>
-    <ds:schemaRef ds:uri="http://purl.org/dc/terms/"/>
-    <ds:schemaRef ds:uri="http://purl.org/dc/dcmitype/"/>
-    <ds:schemaRef ds:uri="0e422b70-e85d-4377-8ee0-b6227433d381"/>
-    <ds:schemaRef ds:uri="http://schemas.microsoft.com/office/infopath/2007/PartnerControls"/>
-    <ds:schemaRef ds:uri="199f642e-5af9-486c-ac06-f366742ef41a"/>
-    <ds:schemaRef ds:uri="http://schemas.openxmlformats.org/package/2006/metadata/core-properties"/>
-    <ds:schemaRef ds:uri="http://schemas.microsoft.com/office/2006/metadata/properties"/>
-    <ds:schemaRef ds:uri="http://www.w3.org/XML/1998/namespace"/>
-  </ds:schemaRefs>
-</ds:datastoreItem>
-</file>
-
-<file path=customXml/itemProps2.xml><?xml version="1.0" encoding="utf-8"?>
 <ds:datastoreItem xmlns:ds="http://schemas.openxmlformats.org/officeDocument/2006/customXml" ds:itemID="{04B464EA-1576-49DD-9675-1E3399D4D196}">
   <ds:schemaRefs>
     <ds:schemaRef ds:uri="http://schemas.microsoft.com/office/2006/metadata/contentType"/>
@@ -18285,6 +18318,23 @@
 </ds:datastoreItem>
 </file>
 
+<file path=customXml/itemProps2.xml><?xml version="1.0" encoding="utf-8"?>
+<ds:datastoreItem xmlns:ds="http://schemas.openxmlformats.org/officeDocument/2006/customXml" ds:itemID="{2D6C293B-B8B4-4284-A17E-9F9E4C32B25A}">
+  <ds:schemaRefs>
+    <ds:schemaRef ds:uri="http://schemas.microsoft.com/office/2006/documentManagement/types"/>
+    <ds:schemaRef ds:uri="http://purl.org/dc/elements/1.1/"/>
+    <ds:schemaRef ds:uri="http://purl.org/dc/terms/"/>
+    <ds:schemaRef ds:uri="http://purl.org/dc/dcmitype/"/>
+    <ds:schemaRef ds:uri="0e422b70-e85d-4377-8ee0-b6227433d381"/>
+    <ds:schemaRef ds:uri="http://schemas.microsoft.com/office/infopath/2007/PartnerControls"/>
+    <ds:schemaRef ds:uri="199f642e-5af9-486c-ac06-f366742ef41a"/>
+    <ds:schemaRef ds:uri="http://schemas.openxmlformats.org/package/2006/metadata/core-properties"/>
+    <ds:schemaRef ds:uri="http://schemas.microsoft.com/office/2006/metadata/properties"/>
+    <ds:schemaRef ds:uri="http://www.w3.org/XML/1998/namespace"/>
+  </ds:schemaRefs>
+</ds:datastoreItem>
+</file>
+
 <file path=customXml/itemProps3.xml><?xml version="1.0" encoding="utf-8"?>
 <ds:datastoreItem xmlns:ds="http://schemas.openxmlformats.org/officeDocument/2006/customXml" ds:itemID="{67DD9E9F-9EEB-4105-B29B-819486C2855A}">
   <ds:schemaRefs>
